--- a/docs/slides/dsquasar_guide.pptx
+++ b/docs/slides/dsquasar_guide.pptx
@@ -3638,7 +3638,7 @@
                 <a:ea typeface="Courier New" pitchFamily="34" charset="-122"/>
                 <a:cs typeface="Courier New" pitchFamily="34" charset="-120"/>
               </a:rPr>
-              <a:t>Tars &amp; uploads through  dsarch -AQ  •  scheduled by the  dscheck  daemon</a:t>
+              <a:t>Tars through  dsarch AQ  •  uploads through  dsglobus  •  scheduled by  dscheck</a:t>
             </a:r>
             <a:endParaRPr lang="en-US" sz="1200" dirty="0"/>
           </a:p>
@@ -8354,7 +8354,7 @@
                 <a:ea typeface="Poppins" pitchFamily="34" charset="-122"/>
                 <a:cs typeface="Poppins" pitchFamily="34" charset="-120"/>
               </a:rPr>
-              <a:t>Transfer the batch with one Globus request — Drdata first when the flag is 'D', then Backup</a:t>
+              <a:t>Hand the whole list to dsglobus as one transfer — Drdata first when the flag is 'D', then Backup</a:t>
             </a:r>
             <a:endParaRPr lang="en-US" sz="1350" dirty="0"/>
           </a:p>
@@ -8988,7 +8988,7 @@
                 <a:ea typeface="Poppins" pitchFamily="34" charset="-122"/>
                 <a:cs typeface="Poppins" pitchFamily="34" charset="-120"/>
               </a:rPr>
-              <a:t>18 tar files × 5 GB  =  one 90 GB Globus transfer</a:t>
+              <a:t>18 tar files × 5 GB  =  one 90 GB dsglobus transfer</a:t>
             </a:r>
             <a:endParaRPr lang="en-US" sz="1300" dirty="0"/>
           </a:p>
@@ -9003,7 +9003,7 @@
         <p:spPr>
           <a:xfrm>
             <a:off x="6446520" y="3520440"/>
-            <a:ext cx="5029200" cy="411480"/>
+            <a:ext cx="5029200" cy="548640"/>
           </a:xfrm>
           <a:prstGeom prst="rect">
             <a:avLst/>
@@ -9017,12 +9017,12 @@
           <a:p>
             <a:pPr indent="0" marL="0">
               <a:lnSpc>
-                <a:spcPct val="105000"/>
+                <a:spcPct val="103000"/>
               </a:lnSpc>
               <a:buNone/>
             </a:pPr>
             <a:r>
-              <a:rPr lang="en-US" sz="1150" dirty="0">
+              <a:rPr lang="en-US" sz="1100" dirty="0">
                 <a:solidFill>
                   <a:srgbClr val="53565A"/>
                 </a:solidFill>
@@ -9030,9 +9030,9 @@
                 <a:ea typeface="Poppins" pitchFamily="34" charset="-122"/>
                 <a:cs typeface="Poppins" pitchFamily="34" charset="-120"/>
               </a:rPr>
-              <a:t>One request per batch instead of per tar keeps Globus queueing and per-transfer overhead down; each batch is also the unit of parallelism, so one child process handles one batch.</a:t>
-            </a:r>
-            <a:endParaRPr lang="en-US" sz="1150" dirty="0"/>
+              <a:t>dsarch AQ can upload a tar as it builds it, but only one at a time. dsquasar instead calls dsglobus directly with the whole list, so a batch costs one transfer request rather than eighteen. Each batch is also the unit of parallelism — one child process per batch.</a:t>
+            </a:r>
+            <a:endParaRPr lang="en-US" sz="1100" dirty="0"/>
           </a:p>
         </p:txBody>
       </p:sp>
@@ -17511,7 +17511,7 @@
                 <a:ea typeface="Poppins" pitchFamily="34" charset="-122"/>
                 <a:cs typeface="Poppins" pitchFamily="34" charset="-120"/>
               </a:rPr>
-              <a:t>. It finds Web and Saved files that have never been backed up, groups them into large tar files, and ships those to the NCAR Quasar Globus end points through </a:t>
+              <a:t>. It finds Web and Saved files that have never been backed up, groups them into large tar files built by </a:t>
             </a:r>
             <a:pPr indent="0" marL="0">
               <a:lnSpc>
@@ -17528,7 +17528,41 @@
                 <a:ea typeface="Courier New" pitchFamily="34" charset="-122"/>
                 <a:cs typeface="Courier New" pitchFamily="34" charset="-120"/>
               </a:rPr>
-              <a:t>dsarch -AQ</a:t>
+              <a:t>dsarch AQ</a:t>
+            </a:r>
+            <a:pPr indent="0" marL="0">
+              <a:lnSpc>
+                <a:spcPct val="115000"/>
+              </a:lnSpc>
+              <a:buNone/>
+            </a:pPr>
+            <a:r>
+              <a:rPr lang="en-US" sz="1600" dirty="0">
+                <a:solidFill>
+                  <a:srgbClr val="00357A"/>
+                </a:solidFill>
+                <a:latin typeface="Poppins" pitchFamily="34" charset="0"/>
+                <a:ea typeface="Poppins" pitchFamily="34" charset="-122"/>
+                <a:cs typeface="Poppins" pitchFamily="34" charset="-120"/>
+              </a:rPr>
+              <a:t>, then uploads many of those tars at once to the NCAR Quasar Globus end points with </a:t>
+            </a:r>
+            <a:pPr indent="0" marL="0">
+              <a:lnSpc>
+                <a:spcPct val="115000"/>
+              </a:lnSpc>
+              <a:buNone/>
+            </a:pPr>
+            <a:r>
+              <a:rPr lang="en-US" sz="1600" b="1" dirty="0">
+                <a:solidFill>
+                  <a:srgbClr val="0057C2"/>
+                </a:solidFill>
+                <a:latin typeface="Courier New" pitchFamily="34" charset="0"/>
+                <a:ea typeface="Courier New" pitchFamily="34" charset="-122"/>
+                <a:cs typeface="Courier New" pitchFamily="34" charset="-120"/>
+              </a:rPr>
+              <a:t>dsglobus</a:t>
             </a:r>
             <a:pPr indent="0" marL="0">
               <a:lnSpc>
@@ -18569,7 +18603,7 @@
                 <a:ea typeface="Poppins" pitchFamily="34" charset="-122"/>
                 <a:cs typeface="Poppins" pitchFamily="34" charset="-120"/>
               </a:rPr>
-              <a:t>Globus batches to gdex-quasar (+drdata)</a:t>
+              <a:t>dsglobus batches to gdex-quasar (+drdata)</a:t>
             </a:r>
             <a:endParaRPr lang="en-US" sz="1200" dirty="0"/>
           </a:p>
@@ -32166,7 +32200,7 @@
                 <a:ea typeface="Poppins" pitchFamily="34" charset="-122"/>
                 <a:cs typeface="Poppins" pitchFamily="34" charset="-120"/>
               </a:rPr>
-              <a:t>built on gdex-glade by dsarch -AQ -TO, status 'T'</a:t>
+              <a:t>built on gdex-glade by dsarch AQ -TO, status 'T'</a:t>
             </a:r>
             <a:endParaRPr lang="en-US" sz="1150" dirty="0"/>
           </a:p>
@@ -32372,7 +32406,7 @@
                 <a:ea typeface="Poppins" pitchFamily="34" charset="-122"/>
                 <a:cs typeface="Poppins" pitchFamily="34" charset="-120"/>
               </a:rPr>
-              <a:t>Globus transfer to gdex-quasar (+drdata), status 'A'</a:t>
+              <a:t>dsglobus transfer to gdex-quasar (+drdata), status 'A'</a:t>
             </a:r>
             <a:endParaRPr lang="en-US" sz="1150" dirty="0"/>
           </a:p>
@@ -35989,7 +36023,7 @@
                 <a:ea typeface="Poppins" pitchFamily="34" charset="-122"/>
                 <a:cs typeface="Poppins" pitchFamily="34" charset="-120"/>
               </a:rPr>
-              <a:t>Batches built tars into &gt;=90 GB Globus transfers.</a:t>
+              <a:t>Batches built tars into &gt;=90 GB dsglobus transfers.</a:t>
             </a:r>
             <a:endParaRPr lang="en-US" sz="1150" dirty="0"/>
           </a:p>
@@ -39305,7 +39339,7 @@
                 <a:ea typeface="Poppins" pitchFamily="34" charset="-122"/>
                 <a:cs typeface="Poppins" pitchFamily="34" charset="-120"/>
               </a:rPr>
-              <a:t>Globus batches of 'T' tars to Quasar → 'A'</a:t>
+              <a:t>dsglobus batches of 'T' tars to Quasar → 'A'</a:t>
             </a:r>
             <a:endParaRPr lang="en-US" sz="1050" dirty="0"/>
           </a:p>

--- a/docs/slides/dsquasar_guide.pptx
+++ b/docs/slides/dsquasar_guide.pptx
@@ -4341,8 +4341,8 @@
         </p:nvSpPr>
         <p:spPr>
           <a:xfrm>
-            <a:off x="2286000" y="3337560"/>
-            <a:ext cx="7772400" cy="320040"/>
+            <a:off x="3429000" y="3337560"/>
+            <a:ext cx="1828800" cy="320040"/>
           </a:xfrm>
           <a:prstGeom prst="rect">
             <a:avLst/>
@@ -4368,32 +4368,43 @@
               </a:rPr>
               <a:t>-A 2 / -A 3</a:t>
             </a:r>
+            <a:endParaRPr lang="en-US" sz="1300" dirty="0"/>
+          </a:p>
+        </p:txBody>
+      </p:sp>
+      <p:sp>
+        <p:nvSpPr>
+          <p:cNvPr id="22" name="Text 20"/>
+          <p:cNvSpPr/>
+          <p:nvPr/>
+        </p:nvSpPr>
+        <p:spPr>
+          <a:xfrm>
+            <a:off x="6812280" y="3337560"/>
+            <a:ext cx="1828800" cy="320040"/>
+          </a:xfrm>
+          <a:prstGeom prst="rect">
+            <a:avLst/>
+          </a:prstGeom>
+          <a:noFill/>
+          <a:ln/>
+        </p:spPr>
+        <p:txBody>
+          <a:bodyPr wrap="square" lIns="0" tIns="0" rIns="0" bIns="0" rtlCol="0" anchor="ctr"/>
+          <a:lstStyle/>
+          <a:p>
             <a:pPr algn="ctr" indent="0" marL="0">
               <a:buNone/>
             </a:pPr>
             <a:r>
-              <a:rPr lang="en-US" sz="1300" dirty="0">
-                <a:solidFill>
-                  <a:srgbClr val="000000"/>
+              <a:rPr lang="en-US" sz="1300" b="1" dirty="0">
+                <a:solidFill>
+                  <a:srgbClr val="C25E00"/>
                 </a:solidFill>
                 <a:latin typeface="Courier New" pitchFamily="34" charset="0"/>
                 <a:ea typeface="Courier New" pitchFamily="34" charset="-122"/>
                 <a:cs typeface="Courier New" pitchFamily="34" charset="-120"/>
               </a:rPr>
-              <a:t>                                </a:t>
-            </a:r>
-            <a:pPr algn="ctr" indent="0" marL="0">
-              <a:buNone/>
-            </a:pPr>
-            <a:r>
-              <a:rPr lang="en-US" sz="1300" b="1" dirty="0">
-                <a:solidFill>
-                  <a:srgbClr val="C25E00"/>
-                </a:solidFill>
-                <a:latin typeface="Courier New" pitchFamily="34" charset="0"/>
-                <a:ea typeface="Courier New" pitchFamily="34" charset="-122"/>
-                <a:cs typeface="Courier New" pitchFamily="34" charset="-120"/>
-              </a:rPr>
               <a:t>-A 4</a:t>
             </a:r>
             <a:endParaRPr lang="en-US" sz="1300" dirty="0"/>
@@ -4402,7 +4413,7 @@
       </p:sp>
       <p:sp>
         <p:nvSpPr>
-          <p:cNvPr id="22" name="Text 20"/>
+          <p:cNvPr id="23" name="Text 21"/>
           <p:cNvSpPr/>
           <p:nvPr/>
         </p:nvSpPr>
@@ -4441,7 +4452,7 @@
       </p:sp>
       <p:sp>
         <p:nvSpPr>
-          <p:cNvPr id="23" name="Shape 21"/>
+          <p:cNvPr id="24" name="Shape 22"/>
           <p:cNvSpPr/>
           <p:nvPr/>
         </p:nvSpPr>
@@ -4468,7 +4479,7 @@
       </p:sp>
       <p:sp>
         <p:nvSpPr>
-          <p:cNvPr id="24" name="Text 22"/>
+          <p:cNvPr id="25" name="Text 23"/>
           <p:cNvSpPr/>
           <p:nvPr/>
         </p:nvSpPr>
@@ -4507,7 +4518,7 @@
       </p:sp>
       <p:sp>
         <p:nvSpPr>
-          <p:cNvPr id="25" name="Text 23"/>
+          <p:cNvPr id="26" name="Text 24"/>
           <p:cNvSpPr/>
           <p:nvPr/>
         </p:nvSpPr>
@@ -4546,7 +4557,7 @@
       </p:sp>
       <p:sp>
         <p:nvSpPr>
-          <p:cNvPr id="26" name="Shape 24"/>
+          <p:cNvPr id="27" name="Shape 25"/>
           <p:cNvSpPr/>
           <p:nvPr/>
         </p:nvSpPr>
@@ -4573,7 +4584,7 @@
       </p:sp>
       <p:sp>
         <p:nvSpPr>
-          <p:cNvPr id="27" name="Text 25"/>
+          <p:cNvPr id="28" name="Text 26"/>
           <p:cNvSpPr/>
           <p:nvPr/>
         </p:nvSpPr>
@@ -4612,7 +4623,7 @@
       </p:sp>
       <p:sp>
         <p:nvSpPr>
-          <p:cNvPr id="28" name="Text 26"/>
+          <p:cNvPr id="29" name="Text 27"/>
           <p:cNvSpPr/>
           <p:nvPr/>
         </p:nvSpPr>
@@ -4651,7 +4662,7 @@
       </p:sp>
       <p:sp>
         <p:nvSpPr>
-          <p:cNvPr id="29" name="Shape 27"/>
+          <p:cNvPr id="30" name="Shape 28"/>
           <p:cNvSpPr/>
           <p:nvPr/>
         </p:nvSpPr>
@@ -4678,7 +4689,7 @@
       </p:sp>
       <p:sp>
         <p:nvSpPr>
-          <p:cNvPr id="30" name="Text 28"/>
+          <p:cNvPr id="31" name="Text 29"/>
           <p:cNvSpPr/>
           <p:nvPr/>
         </p:nvSpPr>
@@ -4717,7 +4728,7 @@
       </p:sp>
       <p:sp>
         <p:nvSpPr>
-          <p:cNvPr id="31" name="Text 29"/>
+          <p:cNvPr id="32" name="Text 30"/>
           <p:cNvSpPr/>
           <p:nvPr/>
         </p:nvSpPr>
@@ -4756,7 +4767,7 @@
       </p:sp>
       <p:sp>
         <p:nvSpPr>
-          <p:cNvPr id="32" name="Text 30"/>
+          <p:cNvPr id="33" name="Text 31"/>
           <p:cNvSpPr/>
           <p:nvPr/>
         </p:nvSpPr>
@@ -4851,7 +4862,7 @@
       </p:sp>
       <p:pic>
         <p:nvPicPr>
-          <p:cNvPr id="33" name="Image 0" descr="nsf_ncar_logo_color.png">    </p:cNvPr>
+          <p:cNvPr id="34" name="Image 0" descr="nsf_ncar_logo_color.png">    </p:cNvPr>
           <p:cNvPicPr>
             <a:picLocks noChangeAspect="1"/>
           </p:cNvPicPr>
@@ -4875,7 +4886,7 @@
       </p:pic>
       <p:sp>
         <p:nvSpPr>
-          <p:cNvPr id="34" name="Text 31"/>
+          <p:cNvPr id="35" name="Text 32"/>
           <p:cNvSpPr/>
           <p:nvPr/>
         </p:nvSpPr>
@@ -4914,7 +4925,7 @@
       </p:sp>
       <p:sp>
         <p:nvSpPr>
-          <p:cNvPr id="35" name="Text 32"/>
+          <p:cNvPr id="36" name="Text 33"/>
           <p:cNvSpPr/>
           <p:nvPr/>
         </p:nvSpPr>
@@ -32420,8 +32431,8 @@
         </p:nvSpPr>
         <p:spPr>
           <a:xfrm>
-            <a:off x="1828800" y="4343400"/>
-            <a:ext cx="8686800" cy="320040"/>
+            <a:off x="2724912" y="4343400"/>
+            <a:ext cx="1097280" cy="320040"/>
           </a:xfrm>
           <a:prstGeom prst="rect">
             <a:avLst/>
@@ -32447,60 +32458,82 @@
               </a:rPr>
               <a:t>-A 1</a:t>
             </a:r>
+            <a:endParaRPr lang="en-US" sz="1400" dirty="0"/>
+          </a:p>
+        </p:txBody>
+      </p:sp>
+      <p:sp>
+        <p:nvSpPr>
+          <p:cNvPr id="28" name="Text 26"/>
+          <p:cNvSpPr/>
+          <p:nvPr/>
+        </p:nvSpPr>
+        <p:spPr>
+          <a:xfrm>
+            <a:off x="5623560" y="4343400"/>
+            <a:ext cx="1097280" cy="320040"/>
+          </a:xfrm>
+          <a:prstGeom prst="rect">
+            <a:avLst/>
+          </a:prstGeom>
+          <a:noFill/>
+          <a:ln/>
+        </p:spPr>
+        <p:txBody>
+          <a:bodyPr wrap="square" lIns="0" tIns="0" rIns="0" bIns="0" rtlCol="0" anchor="ctr"/>
+          <a:lstStyle/>
+          <a:p>
             <a:pPr algn="ctr" indent="0" marL="0">
               <a:buNone/>
             </a:pPr>
             <a:r>
-              <a:rPr lang="en-US" sz="1400" dirty="0">
-                <a:solidFill>
-                  <a:srgbClr val="000000"/>
+              <a:rPr lang="en-US" sz="1400" b="1" dirty="0">
+                <a:solidFill>
+                  <a:srgbClr val="0097A7"/>
                 </a:solidFill>
                 <a:latin typeface="Courier New" pitchFamily="34" charset="0"/>
                 <a:ea typeface="Courier New" pitchFamily="34" charset="-122"/>
                 <a:cs typeface="Courier New" pitchFamily="34" charset="-120"/>
               </a:rPr>
-              <a:t>                                   </a:t>
-            </a:r>
+              <a:t>-A 2</a:t>
+            </a:r>
+            <a:endParaRPr lang="en-US" sz="1400" dirty="0"/>
+          </a:p>
+        </p:txBody>
+      </p:sp>
+      <p:sp>
+        <p:nvSpPr>
+          <p:cNvPr id="29" name="Text 27"/>
+          <p:cNvSpPr/>
+          <p:nvPr/>
+        </p:nvSpPr>
+        <p:spPr>
+          <a:xfrm>
+            <a:off x="8522208" y="4343400"/>
+            <a:ext cx="1097280" cy="320040"/>
+          </a:xfrm>
+          <a:prstGeom prst="rect">
+            <a:avLst/>
+          </a:prstGeom>
+          <a:noFill/>
+          <a:ln/>
+        </p:spPr>
+        <p:txBody>
+          <a:bodyPr wrap="square" lIns="0" tIns="0" rIns="0" bIns="0" rtlCol="0" anchor="ctr"/>
+          <a:lstStyle/>
+          <a:p>
             <a:pPr algn="ctr" indent="0" marL="0">
               <a:buNone/>
             </a:pPr>
             <a:r>
               <a:rPr lang="en-US" sz="1400" b="1" dirty="0">
                 <a:solidFill>
-                  <a:srgbClr val="0097A7"/>
+                  <a:srgbClr val="C25E00"/>
                 </a:solidFill>
                 <a:latin typeface="Courier New" pitchFamily="34" charset="0"/>
                 <a:ea typeface="Courier New" pitchFamily="34" charset="-122"/>
                 <a:cs typeface="Courier New" pitchFamily="34" charset="-120"/>
               </a:rPr>
-              <a:t>-A 2</a:t>
-            </a:r>
-            <a:pPr algn="ctr" indent="0" marL="0">
-              <a:buNone/>
-            </a:pPr>
-            <a:r>
-              <a:rPr lang="en-US" sz="1400" dirty="0">
-                <a:solidFill>
-                  <a:srgbClr val="000000"/>
-                </a:solidFill>
-                <a:latin typeface="Courier New" pitchFamily="34" charset="0"/>
-                <a:ea typeface="Courier New" pitchFamily="34" charset="-122"/>
-                <a:cs typeface="Courier New" pitchFamily="34" charset="-120"/>
-              </a:rPr>
-              <a:t>                                   </a:t>
-            </a:r>
-            <a:pPr algn="ctr" indent="0" marL="0">
-              <a:buNone/>
-            </a:pPr>
-            <a:r>
-              <a:rPr lang="en-US" sz="1400" b="1" dirty="0">
-                <a:solidFill>
-                  <a:srgbClr val="C25E00"/>
-                </a:solidFill>
-                <a:latin typeface="Courier New" pitchFamily="34" charset="0"/>
-                <a:ea typeface="Courier New" pitchFamily="34" charset="-122"/>
-                <a:cs typeface="Courier New" pitchFamily="34" charset="-120"/>
-              </a:rPr>
               <a:t>-A 4</a:t>
             </a:r>
             <a:endParaRPr lang="en-US" sz="1400" dirty="0"/>
@@ -32509,7 +32542,7 @@
       </p:sp>
       <p:sp>
         <p:nvSpPr>
-          <p:cNvPr id="28" name="Shape 26"/>
+          <p:cNvPr id="30" name="Shape 28"/>
           <p:cNvSpPr/>
           <p:nvPr/>
         </p:nvSpPr>
@@ -32536,7 +32569,7 @@
       </p:sp>
       <p:sp>
         <p:nvSpPr>
-          <p:cNvPr id="29" name="Shape 27"/>
+          <p:cNvPr id="31" name="Shape 29"/>
           <p:cNvSpPr/>
           <p:nvPr/>
         </p:nvSpPr>
@@ -32556,7 +32589,7 @@
       </p:sp>
       <p:sp>
         <p:nvSpPr>
-          <p:cNvPr id="30" name="Text 28"/>
+          <p:cNvPr id="32" name="Text 30"/>
           <p:cNvSpPr/>
           <p:nvPr/>
         </p:nvSpPr>
@@ -32595,7 +32628,7 @@
       </p:sp>
       <p:sp>
         <p:nvSpPr>
-          <p:cNvPr id="31" name="Text 29"/>
+          <p:cNvPr id="33" name="Text 31"/>
           <p:cNvSpPr/>
           <p:nvPr/>
         </p:nvSpPr>
@@ -32756,7 +32789,7 @@
       </p:sp>
       <p:pic>
         <p:nvPicPr>
-          <p:cNvPr id="32" name="Image 0" descr="nsf_ncar_logo_color.png">    </p:cNvPr>
+          <p:cNvPr id="34" name="Image 0" descr="nsf_ncar_logo_color.png">    </p:cNvPr>
           <p:cNvPicPr>
             <a:picLocks noChangeAspect="1"/>
           </p:cNvPicPr>
@@ -32780,7 +32813,7 @@
       </p:pic>
       <p:sp>
         <p:nvSpPr>
-          <p:cNvPr id="33" name="Text 30"/>
+          <p:cNvPr id="35" name="Text 32"/>
           <p:cNvSpPr/>
           <p:nvPr/>
         </p:nvSpPr>
@@ -32819,7 +32852,7 @@
       </p:sp>
       <p:sp>
         <p:nvSpPr>
-          <p:cNvPr id="34" name="Text 31"/>
+          <p:cNvPr id="36" name="Text 33"/>
           <p:cNvSpPr/>
           <p:nvPr/>
         </p:nvSpPr>

--- a/docs/slides/dsquasar_guide.pptx
+++ b/docs/slides/dsquasar_guide.pptx
@@ -17698,7 +17698,7 @@
                 <a:ea typeface="Poppins" pitchFamily="34" charset="-122"/>
                 <a:cs typeface="Poppins" pitchFamily="34" charset="-120"/>
               </a:rPr>
-              <a:t>Nothing is configured per run: </a:t>
+              <a:t>Nothing is configured per run: a dataset joins the backup when </a:t>
             </a:r>
             <a:pPr indent="0" marL="0">
               <a:lnSpc>
@@ -17732,7 +17732,7 @@
                 <a:ea typeface="Poppins" pitchFamily="34" charset="-122"/>
                 <a:cs typeface="Poppins" pitchFamily="34" charset="-120"/>
               </a:rPr>
-              <a:t> and </a:t>
+              <a:t> is set, and </a:t>
             </a:r>
             <a:pPr indent="0" marL="0">
               <a:lnSpc>
@@ -17766,7 +17766,7 @@
                 <a:ea typeface="Poppins" pitchFamily="34" charset="-122"/>
                 <a:cs typeface="Poppins" pitchFamily="34" charset="-120"/>
               </a:rPr>
-              <a:t> say what to back up.</a:t>
+              <a:t> refines it per group.</a:t>
             </a:r>
             <a:pPr indent="0" marL="0">
               <a:lnSpc>
@@ -28895,7 +28895,7 @@
                 <a:ea typeface="Poppins" pitchFamily="34" charset="-122"/>
                 <a:cs typeface="Poppins" pitchFamily="34" charset="-120"/>
               </a:rPr>
-              <a:t>Flags decide, not you</a:t>
+              <a:t>dataset.backflag enrolls</a:t>
             </a:r>
             <a:endParaRPr lang="en-US" sz="1350" dirty="0"/>
           </a:p>
@@ -28937,7 +28937,7 @@
                 <a:ea typeface="Poppins" pitchFamily="34" charset="-122"/>
                 <a:cs typeface="Poppins" pitchFamily="34" charset="-120"/>
               </a:rPr>
-              <a:t>Backup flags on the dataset and group records choose what is gathered. -t narrows the run; it does not override a flag.</a:t>
+              <a:t>Setting that one field puts a dataset under backup; dsgroup.backflag refines it. -t narrows a run, it does not override a flag.</a:t>
             </a:r>
             <a:endParaRPr lang="en-US" sz="1100" dirty="0"/>
           </a:p>
@@ -37133,6 +37133,82 @@
           </a:p>
         </p:txBody>
       </p:sp>
+      <p:sp>
+        <p:nvSpPr>
+          <p:cNvPr id="4" name="Text 2"/>
+          <p:cNvSpPr/>
+          <p:nvPr/>
+        </p:nvSpPr>
+        <p:spPr>
+          <a:xfrm>
+            <a:off x="457200" y="1481328"/>
+            <a:ext cx="5532120" cy="658368"/>
+          </a:xfrm>
+          <a:prstGeom prst="rect">
+            <a:avLst/>
+          </a:prstGeom>
+          <a:noFill/>
+          <a:ln/>
+        </p:spPr>
+        <p:txBody>
+          <a:bodyPr wrap="square" lIns="0" tIns="0" rIns="0" bIns="0" rtlCol="0" anchor="t"/>
+          <a:lstStyle/>
+          <a:p>
+            <a:pPr indent="0" marL="0">
+              <a:lnSpc>
+                <a:spcPct val="108000"/>
+              </a:lnSpc>
+              <a:buNone/>
+            </a:pPr>
+            <a:r>
+              <a:rPr lang="en-US" sz="1300" dirty="0">
+                <a:solidFill>
+                  <a:srgbClr val="00357A"/>
+                </a:solidFill>
+                <a:latin typeface="Poppins" pitchFamily="34" charset="0"/>
+                <a:ea typeface="Poppins" pitchFamily="34" charset="-122"/>
+                <a:cs typeface="Poppins" pitchFamily="34" charset="-120"/>
+              </a:rPr>
+              <a:t>A dataset is put under Quasar backup by setting </a:t>
+            </a:r>
+            <a:pPr indent="0" marL="0">
+              <a:lnSpc>
+                <a:spcPct val="108000"/>
+              </a:lnSpc>
+              <a:buNone/>
+            </a:pPr>
+            <a:r>
+              <a:rPr lang="en-US" sz="1300" b="1" dirty="0">
+                <a:solidFill>
+                  <a:srgbClr val="0057C2"/>
+                </a:solidFill>
+                <a:latin typeface="Courier New" pitchFamily="34" charset="0"/>
+                <a:ea typeface="Courier New" pitchFamily="34" charset="-122"/>
+                <a:cs typeface="Courier New" pitchFamily="34" charset="-120"/>
+              </a:rPr>
+              <a:t>dataset.backflag</a:t>
+            </a:r>
+            <a:pPr indent="0" marL="0">
+              <a:lnSpc>
+                <a:spcPct val="108000"/>
+              </a:lnSpc>
+              <a:buNone/>
+            </a:pPr>
+            <a:r>
+              <a:rPr lang="en-US" sz="1300" dirty="0">
+                <a:solidFill>
+                  <a:srgbClr val="00357A"/>
+                </a:solidFill>
+                <a:latin typeface="Poppins" pitchFamily="34" charset="0"/>
+                <a:ea typeface="Poppins" pitchFamily="34" charset="-122"/>
+                <a:cs typeface="Poppins" pitchFamily="34" charset="-120"/>
+              </a:rPr>
+              <a:t>. That one field is the switch — dsquasar reads it for every dataset it visits, and nothing else enrolls a dataset.</a:t>
+            </a:r>
+            <a:endParaRPr lang="en-US" sz="1300" dirty="0"/>
+          </a:p>
+        </p:txBody>
+      </p:sp>
       <p:graphicFrame>
         <p:nvGraphicFramePr>
           <p:cNvPr id="9" name="Table 0"/>
@@ -37148,7 +37224,7 @@
           </p:nvPr>
         </p:nvGraphicFramePr>
         <p:xfrm>
-          <a:off x="457200" y="1554480"/>
+          <a:off x="457200" y="2194560"/>
           <a:ext cx="5532120" cy="914400"/>
         </p:xfrm>
         <a:graphic>
@@ -37245,7 +37321,7 @@
                           <a:ea typeface="Poppins" pitchFamily="34" charset="-122"/>
                           <a:cs typeface="Poppins" pitchFamily="34" charset="-120"/>
                         </a:rPr>
-                        <a:t>Meaning in dataset.backflag / dsgroup.backflag</a:t>
+                        <a:t>Value in dataset.backflag / dsgroup.backflag</a:t>
                       </a:r>
                       <a:endParaRPr lang="en-US" sz="1200" dirty="0">
                         <a:latin typeface="Poppins" charset="0"/>
@@ -37855,14 +37931,14 @@
       </p:graphicFrame>
       <p:sp>
         <p:nvSpPr>
-          <p:cNvPr id="5" name="Text 2"/>
-          <p:cNvSpPr/>
-          <p:nvPr/>
-        </p:nvSpPr>
-        <p:spPr>
-          <a:xfrm>
-            <a:off x="457200" y="3703320"/>
-            <a:ext cx="5532120" cy="1234440"/>
+          <p:cNvPr id="6" name="Text 3"/>
+          <p:cNvSpPr/>
+          <p:nvPr/>
+        </p:nvSpPr>
+        <p:spPr>
+          <a:xfrm>
+            <a:off x="457200" y="3840480"/>
+            <a:ext cx="5532120" cy="1143000"/>
           </a:xfrm>
           <a:prstGeom prst="rect">
             <a:avLst/>
@@ -37876,12 +37952,12 @@
           <a:p>
             <a:pPr indent="0" marL="0">
               <a:lnSpc>
-                <a:spcPct val="110000"/>
+                <a:spcPct val="108000"/>
               </a:lnSpc>
               <a:buNone/>
             </a:pPr>
             <a:r>
-              <a:rPr lang="en-US" sz="1300" b="1" dirty="0">
+              <a:rPr lang="en-US" sz="1250" b="1" dirty="0">
                 <a:solidFill>
                   <a:srgbClr val="0057C2"/>
                 </a:solidFill>
@@ -37889,16 +37965,16 @@
                 <a:ea typeface="Poppins" pitchFamily="34" charset="-122"/>
                 <a:cs typeface="Poppins" pitchFamily="34" charset="-120"/>
               </a:rPr>
-              <a:t>Group flags win.  </a:t>
+              <a:t>Group flags refine, they do not enroll.  </a:t>
             </a:r>
             <a:pPr indent="0" marL="0">
               <a:lnSpc>
-                <a:spcPct val="110000"/>
+                <a:spcPct val="108000"/>
               </a:lnSpc>
               <a:buNone/>
             </a:pPr>
             <a:r>
-              <a:rPr lang="en-US" sz="1300" dirty="0">
+              <a:rPr lang="en-US" sz="1250" dirty="0">
                 <a:solidFill>
                   <a:srgbClr val="00357A"/>
                 </a:solidFill>
@@ -37906,16 +37982,16 @@
                 <a:ea typeface="Poppins" pitchFamily="34" charset="-122"/>
                 <a:cs typeface="Poppins" pitchFamily="34" charset="-120"/>
               </a:rPr>
-              <a:t>If any top-level </a:t>
+              <a:t>Once the dataset flag is set, any top-level </a:t>
             </a:r>
             <a:pPr indent="0" marL="0">
               <a:lnSpc>
-                <a:spcPct val="110000"/>
+                <a:spcPct val="108000"/>
               </a:lnSpc>
               <a:buNone/>
             </a:pPr>
             <a:r>
-              <a:rPr lang="en-US" sz="1300" b="1" dirty="0">
+              <a:rPr lang="en-US" sz="1250" b="1" dirty="0">
                 <a:solidFill>
                   <a:srgbClr val="00357A"/>
                 </a:solidFill>
@@ -37927,12 +38003,12 @@
             </a:r>
             <a:pPr indent="0" marL="0">
               <a:lnSpc>
-                <a:spcPct val="110000"/>
+                <a:spcPct val="108000"/>
               </a:lnSpc>
               <a:buNone/>
             </a:pPr>
             <a:r>
-              <a:rPr lang="en-US" sz="1300" dirty="0">
+              <a:rPr lang="en-US" sz="1250" dirty="0">
                 <a:solidFill>
                   <a:srgbClr val="00357A"/>
                 </a:solidFill>
@@ -37940,16 +38016,16 @@
                 <a:ea typeface="Poppins" pitchFamily="34" charset="-122"/>
                 <a:cs typeface="Poppins" pitchFamily="34" charset="-120"/>
               </a:rPr>
-              <a:t> carries its own flag, dsquasar walks the dataset group by group and applies each group's flag; groups flagged </a:t>
+              <a:t> carrying its own flag is applied group by group — </a:t>
             </a:r>
             <a:pPr indent="0" marL="0">
               <a:lnSpc>
-                <a:spcPct val="110000"/>
+                <a:spcPct val="108000"/>
               </a:lnSpc>
               <a:buNone/>
             </a:pPr>
             <a:r>
-              <a:rPr lang="en-US" sz="1300" b="1" dirty="0">
+              <a:rPr lang="en-US" sz="1250" b="1" dirty="0">
                 <a:solidFill>
                   <a:srgbClr val="00357A"/>
                 </a:solidFill>
@@ -37957,16 +38033,50 @@
                 <a:ea typeface="Courier New" pitchFamily="34" charset="-122"/>
                 <a:cs typeface="Courier New" pitchFamily="34" charset="-120"/>
               </a:rPr>
+              <a:t>'P'</a:t>
+            </a:r>
+            <a:pPr indent="0" marL="0">
+              <a:lnSpc>
+                <a:spcPct val="108000"/>
+              </a:lnSpc>
+              <a:buNone/>
+            </a:pPr>
+            <a:r>
+              <a:rPr lang="en-US" sz="1250" dirty="0">
+                <a:solidFill>
+                  <a:srgbClr val="00357A"/>
+                </a:solidFill>
+                <a:latin typeface="Poppins" pitchFamily="34" charset="0"/>
+                <a:ea typeface="Poppins" pitchFamily="34" charset="-122"/>
+                <a:cs typeface="Poppins" pitchFamily="34" charset="-120"/>
+              </a:rPr>
+              <a:t> inherits the dataset flag, </a:t>
+            </a:r>
+            <a:pPr indent="0" marL="0">
+              <a:lnSpc>
+                <a:spcPct val="108000"/>
+              </a:lnSpc>
+              <a:buNone/>
+            </a:pPr>
+            <a:r>
+              <a:rPr lang="en-US" sz="1250" b="1" dirty="0">
+                <a:solidFill>
+                  <a:srgbClr val="00357A"/>
+                </a:solidFill>
+                <a:latin typeface="Courier New" pitchFamily="34" charset="0"/>
+                <a:ea typeface="Courier New" pitchFamily="34" charset="-122"/>
+                <a:cs typeface="Courier New" pitchFamily="34" charset="-120"/>
+              </a:rPr>
               <a:t>'N'</a:t>
             </a:r>
             <a:pPr indent="0" marL="0">
               <a:lnSpc>
-                <a:spcPct val="110000"/>
+                <a:spcPct val="108000"/>
               </a:lnSpc>
               <a:buNone/>
             </a:pPr>
             <a:r>
-              <a:rPr lang="en-US" sz="1300" dirty="0">
+              <a:rPr lang="en-US" sz="1250" dirty="0">
                 <a:solidFill>
                   <a:srgbClr val="00357A"/>
                 </a:solidFill>
@@ -37974,15 +38084,15 @@
                 <a:ea typeface="Poppins" pitchFamily="34" charset="-122"/>
                 <a:cs typeface="Poppins" pitchFamily="34" charset="-120"/>
               </a:rPr>
-              <a:t> are skipped. A dataset with no group flags is treated as one unit.</a:t>
-            </a:r>
-            <a:endParaRPr lang="en-US" sz="1300" dirty="0"/>
-          </a:p>
-        </p:txBody>
-      </p:sp>
-      <p:sp>
-        <p:nvSpPr>
-          <p:cNvPr id="6" name="Shape 3"/>
+              <a:t> excludes the group. A dataset with no group flags is one unit.</a:t>
+            </a:r>
+            <a:endParaRPr lang="en-US" sz="1250" dirty="0"/>
+          </a:p>
+        </p:txBody>
+      </p:sp>
+      <p:sp>
+        <p:nvSpPr>
+          <p:cNvPr id="7" name="Shape 4"/>
           <p:cNvSpPr/>
           <p:nvPr/>
         </p:nvSpPr>
@@ -38009,7 +38119,7 @@
       </p:sp>
       <p:sp>
         <p:nvSpPr>
-          <p:cNvPr id="7" name="Text 4"/>
+          <p:cNvPr id="8" name="Text 5"/>
           <p:cNvSpPr/>
           <p:nvPr/>
         </p:nvSpPr>
@@ -38119,7 +38229,7 @@
       </p:sp>
       <p:sp>
         <p:nvSpPr>
-          <p:cNvPr id="8" name="Shape 5"/>
+          <p:cNvPr id="9" name="Shape 6"/>
           <p:cNvSpPr/>
           <p:nvPr/>
         </p:nvSpPr>
@@ -38146,7 +38256,7 @@
       </p:sp>
       <p:sp>
         <p:nvSpPr>
-          <p:cNvPr id="9" name="Text 6"/>
+          <p:cNvPr id="10" name="Text 7"/>
           <p:cNvSpPr/>
           <p:nvPr/>
         </p:nvSpPr>
@@ -38185,7 +38295,7 @@
       </p:sp>
       <p:sp>
         <p:nvSpPr>
-          <p:cNvPr id="10" name="Shape 7"/>
+          <p:cNvPr id="11" name="Shape 8"/>
           <p:cNvSpPr/>
           <p:nvPr/>
         </p:nvSpPr>
@@ -38207,7 +38317,7 @@
       </p:sp>
       <p:sp>
         <p:nvSpPr>
-          <p:cNvPr id="11" name="Text 8"/>
+          <p:cNvPr id="12" name="Text 9"/>
           <p:cNvSpPr/>
           <p:nvPr/>
         </p:nvSpPr>
@@ -38261,7 +38371,7 @@
       </p:sp>
       <p:sp>
         <p:nvSpPr>
-          <p:cNvPr id="12" name="Text 9"/>
+          <p:cNvPr id="13" name="Text 10"/>
           <p:cNvSpPr/>
           <p:nvPr/>
         </p:nvSpPr>
@@ -38300,7 +38410,7 @@
       </p:sp>
       <p:sp>
         <p:nvSpPr>
-          <p:cNvPr id="13" name="Shape 10"/>
+          <p:cNvPr id="14" name="Shape 11"/>
           <p:cNvSpPr/>
           <p:nvPr/>
         </p:nvSpPr>
@@ -38327,7 +38437,7 @@
       </p:sp>
       <p:sp>
         <p:nvSpPr>
-          <p:cNvPr id="14" name="Text 11"/>
+          <p:cNvPr id="15" name="Text 12"/>
           <p:cNvSpPr/>
           <p:nvPr/>
         </p:nvSpPr>
@@ -38366,7 +38476,7 @@
       </p:sp>
       <p:sp>
         <p:nvSpPr>
-          <p:cNvPr id="15" name="Text 12"/>
+          <p:cNvPr id="16" name="Text 13"/>
           <p:cNvSpPr/>
           <p:nvPr/>
         </p:nvSpPr>
@@ -38405,7 +38515,7 @@
       </p:sp>
       <p:sp>
         <p:nvSpPr>
-          <p:cNvPr id="16" name="Shape 13"/>
+          <p:cNvPr id="17" name="Shape 14"/>
           <p:cNvSpPr/>
           <p:nvPr/>
         </p:nvSpPr>
@@ -38432,7 +38542,7 @@
       </p:sp>
       <p:sp>
         <p:nvSpPr>
-          <p:cNvPr id="17" name="Text 14"/>
+          <p:cNvPr id="18" name="Text 15"/>
           <p:cNvSpPr/>
           <p:nvPr/>
         </p:nvSpPr>
@@ -38471,7 +38581,7 @@
       </p:sp>
       <p:sp>
         <p:nvSpPr>
-          <p:cNvPr id="18" name="Text 15"/>
+          <p:cNvPr id="19" name="Text 16"/>
           <p:cNvSpPr/>
           <p:nvPr/>
         </p:nvSpPr>
@@ -38510,7 +38620,7 @@
       </p:sp>
       <p:sp>
         <p:nvSpPr>
-          <p:cNvPr id="19" name="Text 16"/>
+          <p:cNvPr id="20" name="Text 17"/>
           <p:cNvSpPr/>
           <p:nvPr/>
         </p:nvSpPr>
@@ -38552,7 +38662,7 @@
       </p:sp>
       <p:pic>
         <p:nvPicPr>
-          <p:cNvPr id="20" name="Image 0" descr="nsf_ncar_logo_color.png">    </p:cNvPr>
+          <p:cNvPr id="21" name="Image 0" descr="nsf_ncar_logo_color.png">    </p:cNvPr>
           <p:cNvPicPr>
             <a:picLocks noChangeAspect="1"/>
           </p:cNvPicPr>
@@ -38576,7 +38686,7 @@
       </p:pic>
       <p:sp>
         <p:nvSpPr>
-          <p:cNvPr id="21" name="Text 17"/>
+          <p:cNvPr id="22" name="Text 18"/>
           <p:cNvSpPr/>
           <p:nvPr/>
         </p:nvSpPr>
@@ -38615,7 +38725,7 @@
       </p:sp>
       <p:sp>
         <p:nvSpPr>
-          <p:cNvPr id="22" name="Text 18"/>
+          <p:cNvPr id="23" name="Text 19"/>
           <p:cNvSpPr/>
           <p:nvPr/>
         </p:nvSpPr>

--- a/docs/slides/dsquasar_guide.pptx
+++ b/docs/slides/dsquasar_guide.pptx
@@ -26340,7 +26340,42 @@
                 <a:ea typeface="Poppins" pitchFamily="34" charset="-122"/>
                 <a:cs typeface="Poppins" pitchFamily="34" charset="-120"/>
               </a:rPr>
-              <a:t>All three are installed by the rda_python_dsquasar package and share the rda_python_common configuration.</a:t>
+              <a:t>All three are installed by the rda_python_dsquasar package and share the rda_python_common configuration.   Backup flags are edited at </a:t>
+            </a:r>
+            <a:pPr indent="0" marL="0">
+              <a:buNone/>
+            </a:pPr>
+            <a:r>
+              <a:rPr lang="en-US" sz="1100" b="1" u="sng" dirty="0">
+                <a:solidFill>
+                  <a:srgbClr val="0057C2"/>
+                </a:solidFill>
+                <a:latin typeface="Courier New" pitchFamily="34" charset="0"/>
+                <a:ea typeface="Courier New" pitchFamily="34" charset="-122"/>
+                <a:cs typeface="Courier New" pitchFamily="34" charset="-120"/>
+                <a:hlinkClick r:id="rId1" invalidUrl="" action="" tgtFrame="" tooltip="" history="1" highlightClick="0" endSnd="0">
+                  <a:extLst>
+                    <a:ext uri="{A12FA001-AC4F-418D-AE19-62706E023703}">
+                      <ahyp:hlinkClr xmlns:ahyp="http://schemas.microsoft.com/office/drawing/2018/hyperlinkcolor" val="tx"/>
+                    </a:ext>
+                  </a:extLst>
+                </a:hlinkClick>
+              </a:rPr>
+              <a:t>gdex.ucar.edu/rda_pg_config/</a:t>
+            </a:r>
+            <a:pPr indent="0" marL="0">
+              <a:buNone/>
+            </a:pPr>
+            <a:r>
+              <a:rPr lang="en-US" sz="1100" i="1" dirty="0">
+                <a:solidFill>
+                  <a:srgbClr val="53565A"/>
+                </a:solidFill>
+                <a:latin typeface="Poppins" pitchFamily="34" charset="0"/>
+                <a:ea typeface="Poppins" pitchFamily="34" charset="-122"/>
+                <a:cs typeface="Poppins" pitchFamily="34" charset="-120"/>
+              </a:rPr>
+              <a:t>  (DSARCH → Dataset Information).</a:t>
             </a:r>
             <a:endParaRPr lang="en-US" sz="1100" dirty="0"/>
           </a:p>
@@ -26355,7 +26390,7 @@
           <p:nvPr/>
         </p:nvPicPr>
         <p:blipFill>
-          <a:blip r:embed="rId1"/>
+          <a:blip r:embed="rId2"/>
           <a:stretch>
             <a:fillRect/>
           </a:stretch>
@@ -37141,8 +37176,8 @@
         </p:nvSpPr>
         <p:spPr>
           <a:xfrm>
-            <a:off x="457200" y="1481328"/>
-            <a:ext cx="5532120" cy="658368"/>
+            <a:off x="457200" y="1463040"/>
+            <a:ext cx="5532120" cy="621792"/>
           </a:xfrm>
           <a:prstGeom prst="rect">
             <a:avLst/>
@@ -37224,7 +37259,7 @@
           </p:nvPr>
         </p:nvGraphicFramePr>
         <p:xfrm>
-          <a:off x="457200" y="2194560"/>
+          <a:off x="457200" y="2121408"/>
           <a:ext cx="5532120" cy="914400"/>
         </p:xfrm>
         <a:graphic>
@@ -37937,8 +37972,8 @@
         </p:nvSpPr>
         <p:spPr>
           <a:xfrm>
-            <a:off x="457200" y="3840480"/>
-            <a:ext cx="5532120" cy="1143000"/>
+            <a:off x="457200" y="4023360"/>
+            <a:ext cx="5532120" cy="777240"/>
           </a:xfrm>
           <a:prstGeom prst="rect">
             <a:avLst/>
@@ -37952,12 +37987,12 @@
           <a:p>
             <a:pPr indent="0" marL="0">
               <a:lnSpc>
-                <a:spcPct val="108000"/>
+                <a:spcPct val="106000"/>
               </a:lnSpc>
               <a:buNone/>
             </a:pPr>
             <a:r>
-              <a:rPr lang="en-US" sz="1250" b="1" dirty="0">
+              <a:rPr lang="en-US" sz="1200" b="1" dirty="0">
                 <a:solidFill>
                   <a:srgbClr val="0057C2"/>
                 </a:solidFill>
@@ -37969,12 +38004,12 @@
             </a:r>
             <a:pPr indent="0" marL="0">
               <a:lnSpc>
-                <a:spcPct val="108000"/>
+                <a:spcPct val="106000"/>
               </a:lnSpc>
               <a:buNone/>
             </a:pPr>
             <a:r>
-              <a:rPr lang="en-US" sz="1250" dirty="0">
+              <a:rPr lang="en-US" sz="1200" dirty="0">
                 <a:solidFill>
                   <a:srgbClr val="00357A"/>
                 </a:solidFill>
@@ -37982,16 +38017,16 @@
                 <a:ea typeface="Poppins" pitchFamily="34" charset="-122"/>
                 <a:cs typeface="Poppins" pitchFamily="34" charset="-120"/>
               </a:rPr>
-              <a:t>Once the dataset flag is set, any top-level </a:t>
+              <a:t>Once the dataset flag is set, a top-level </a:t>
             </a:r>
             <a:pPr indent="0" marL="0">
               <a:lnSpc>
-                <a:spcPct val="108000"/>
+                <a:spcPct val="106000"/>
               </a:lnSpc>
               <a:buNone/>
             </a:pPr>
             <a:r>
-              <a:rPr lang="en-US" sz="1250" b="1" dirty="0">
+              <a:rPr lang="en-US" sz="1200" b="1" dirty="0">
                 <a:solidFill>
                   <a:srgbClr val="00357A"/>
                 </a:solidFill>
@@ -38003,12 +38038,12 @@
             </a:r>
             <a:pPr indent="0" marL="0">
               <a:lnSpc>
-                <a:spcPct val="108000"/>
+                <a:spcPct val="106000"/>
               </a:lnSpc>
               <a:buNone/>
             </a:pPr>
             <a:r>
-              <a:rPr lang="en-US" sz="1250" dirty="0">
+              <a:rPr lang="en-US" sz="1200" dirty="0">
                 <a:solidFill>
                   <a:srgbClr val="00357A"/>
                 </a:solidFill>
@@ -38016,16 +38051,16 @@
                 <a:ea typeface="Poppins" pitchFamily="34" charset="-122"/>
                 <a:cs typeface="Poppins" pitchFamily="34" charset="-120"/>
               </a:rPr>
-              <a:t> carrying its own flag is applied group by group — </a:t>
+              <a:t> with its own flag is applied group by group — </a:t>
             </a:r>
             <a:pPr indent="0" marL="0">
               <a:lnSpc>
-                <a:spcPct val="108000"/>
+                <a:spcPct val="106000"/>
               </a:lnSpc>
               <a:buNone/>
             </a:pPr>
             <a:r>
-              <a:rPr lang="en-US" sz="1250" b="1" dirty="0">
+              <a:rPr lang="en-US" sz="1200" b="1" dirty="0">
                 <a:solidFill>
                   <a:srgbClr val="00357A"/>
                 </a:solidFill>
@@ -38037,12 +38072,12 @@
             </a:r>
             <a:pPr indent="0" marL="0">
               <a:lnSpc>
-                <a:spcPct val="108000"/>
+                <a:spcPct val="106000"/>
               </a:lnSpc>
               <a:buNone/>
             </a:pPr>
             <a:r>
-              <a:rPr lang="en-US" sz="1250" dirty="0">
+              <a:rPr lang="en-US" sz="1200" dirty="0">
                 <a:solidFill>
                   <a:srgbClr val="00357A"/>
                 </a:solidFill>
@@ -38050,16 +38085,16 @@
                 <a:ea typeface="Poppins" pitchFamily="34" charset="-122"/>
                 <a:cs typeface="Poppins" pitchFamily="34" charset="-120"/>
               </a:rPr>
-              <a:t> inherits the dataset flag, </a:t>
+              <a:t> inherits, </a:t>
             </a:r>
             <a:pPr indent="0" marL="0">
               <a:lnSpc>
-                <a:spcPct val="108000"/>
+                <a:spcPct val="106000"/>
               </a:lnSpc>
               <a:buNone/>
             </a:pPr>
             <a:r>
-              <a:rPr lang="en-US" sz="1250" b="1" dirty="0">
+              <a:rPr lang="en-US" sz="1200" b="1" dirty="0">
                 <a:solidFill>
                   <a:srgbClr val="00357A"/>
                 </a:solidFill>
@@ -38071,12 +38106,12 @@
             </a:r>
             <a:pPr indent="0" marL="0">
               <a:lnSpc>
-                <a:spcPct val="108000"/>
+                <a:spcPct val="106000"/>
               </a:lnSpc>
               <a:buNone/>
             </a:pPr>
             <a:r>
-              <a:rPr lang="en-US" sz="1250" dirty="0">
+              <a:rPr lang="en-US" sz="1200" dirty="0">
                 <a:solidFill>
                   <a:srgbClr val="00357A"/>
                 </a:solidFill>
@@ -38084,9 +38119,9 @@
                 <a:ea typeface="Poppins" pitchFamily="34" charset="-122"/>
                 <a:cs typeface="Poppins" pitchFamily="34" charset="-120"/>
               </a:rPr>
-              <a:t> excludes the group. A dataset with no group flags is one unit.</a:t>
-            </a:r>
-            <a:endParaRPr lang="en-US" sz="1250" dirty="0"/>
+              <a:t> excludes.</a:t>
+            </a:r>
+            <a:endParaRPr lang="en-US" sz="1200" dirty="0"/>
           </a:p>
         </p:txBody>
       </p:sp>
@@ -38098,12 +38133,12 @@
         </p:nvSpPr>
         <p:spPr>
           <a:xfrm>
-            <a:off x="457200" y="5029200"/>
-            <a:ext cx="5532120" cy="1051560"/>
+            <a:off x="457200" y="4846320"/>
+            <a:ext cx="5532120" cy="713232"/>
           </a:xfrm>
           <a:prstGeom prst="roundRect">
             <a:avLst>
-              <a:gd name="adj" fmla="val 8696"/>
+              <a:gd name="adj" fmla="val 11538"/>
             </a:avLst>
           </a:prstGeom>
           <a:solidFill>
@@ -38125,8 +38160,8 @@
         </p:nvSpPr>
         <p:spPr>
           <a:xfrm>
-            <a:off x="685800" y="5074920"/>
-            <a:ext cx="5120640" cy="960120"/>
+            <a:off x="658368" y="4846320"/>
+            <a:ext cx="5120640" cy="713232"/>
           </a:xfrm>
           <a:prstGeom prst="rect">
             <a:avLst/>
@@ -38140,12 +38175,12 @@
           <a:p>
             <a:pPr indent="0" marL="0">
               <a:lnSpc>
-                <a:spcPct val="108000"/>
+                <a:spcPct val="105000"/>
               </a:lnSpc>
               <a:buNone/>
             </a:pPr>
             <a:r>
-              <a:rPr lang="en-US" sz="1250" b="1" dirty="0">
+              <a:rPr lang="en-US" sz="1100" b="1" dirty="0">
                 <a:solidFill>
                   <a:srgbClr val="0057C2"/>
                 </a:solidFill>
@@ -38153,33 +38188,49 @@
                 <a:ea typeface="Poppins" pitchFamily="34" charset="-122"/>
                 <a:cs typeface="Poppins" pitchFamily="34" charset="-120"/>
               </a:rPr>
-              <a:t>Command-line override:  </a:t>
+              <a:t>Set it in the web config tool:  </a:t>
             </a:r>
             <a:pPr indent="0" marL="0">
               <a:lnSpc>
-                <a:spcPct val="108000"/>
+                <a:spcPct val="105000"/>
               </a:lnSpc>
               <a:buNone/>
             </a:pPr>
             <a:r>
-              <a:rPr lang="en-US" sz="1250" b="1" dirty="0">
-                <a:solidFill>
-                  <a:srgbClr val="00357A"/>
+              <a:rPr lang="en-US" sz="1100" b="1" u="sng" dirty="0">
+                <a:solidFill>
+                  <a:srgbClr val="0057C2"/>
                 </a:solidFill>
                 <a:latin typeface="Courier New" pitchFamily="34" charset="0"/>
                 <a:ea typeface="Courier New" pitchFamily="34" charset="-122"/>
                 <a:cs typeface="Courier New" pitchFamily="34" charset="-120"/>
-              </a:rPr>
-              <a:t>-B</a:t>
+                <a:hlinkClick r:id="rId1" invalidUrl="" action="" tgtFrame="" tooltip="" history="1" highlightClick="0" endSnd="0">
+                  <a:extLst>
+                    <a:ext uri="{A12FA001-AC4F-418D-AE19-62706E023703}">
+                      <ahyp:hlinkClr xmlns:ahyp="http://schemas.microsoft.com/office/drawing/2018/hyperlinkcolor" val="tx"/>
+                    </a:ext>
+                  </a:extLst>
+                </a:hlinkClick>
+              </a:rPr>
+              <a:t>gdex.ucar.edu/rda_pg_config/</a:t>
             </a:r>
             <a:pPr indent="0" marL="0">
               <a:lnSpc>
-                <a:spcPct val="108000"/>
+                <a:spcPct val="105000"/>
               </a:lnSpc>
               <a:buNone/>
             </a:pPr>
-            <a:r>
-              <a:rPr lang="en-US" sz="1250" dirty="0">
+            <a:endParaRPr lang="en-US" sz="1100" dirty="0"/>
+          </a:p>
+          <a:p>
+            <a:pPr indent="0" marL="0">
+              <a:lnSpc>
+                <a:spcPct val="105000"/>
+              </a:lnSpc>
+              <a:buNone/>
+            </a:pPr>
+            <a:r>
+              <a:rPr lang="en-US" sz="1100" dirty="0">
                 <a:solidFill>
                   <a:srgbClr val="00357A"/>
                 </a:solidFill>
@@ -38187,16 +38238,116 @@
                 <a:ea typeface="Poppins" pitchFamily="34" charset="-122"/>
                 <a:cs typeface="Poppins" pitchFamily="34" charset="-120"/>
               </a:rPr>
-              <a:t> or </a:t>
-            </a:r>
+              <a:t>under </a:t>
+            </a:r>
+            <a:endParaRPr lang="en-US" sz="1100" dirty="0"/>
+          </a:p>
+          <a:p>
             <a:pPr indent="0" marL="0">
               <a:lnSpc>
-                <a:spcPct val="108000"/>
+                <a:spcPct val="105000"/>
               </a:lnSpc>
               <a:buNone/>
             </a:pPr>
             <a:r>
-              <a:rPr lang="en-US" sz="1250" b="1" dirty="0">
+              <a:rPr lang="en-US" sz="1100" b="1" dirty="0">
+                <a:solidFill>
+                  <a:srgbClr val="00357A"/>
+                </a:solidFill>
+                <a:latin typeface="Poppins" pitchFamily="34" charset="0"/>
+                <a:ea typeface="Poppins" pitchFamily="34" charset="-122"/>
+                <a:cs typeface="Poppins" pitchFamily="34" charset="-120"/>
+              </a:rPr>
+              <a:t>DSARCH → Dataset Information</a:t>
+            </a:r>
+            <a:pPr indent="0" marL="0">
+              <a:lnSpc>
+                <a:spcPct val="105000"/>
+              </a:lnSpc>
+              <a:buNone/>
+            </a:pPr>
+            <a:r>
+              <a:rPr lang="en-US" sz="1100" dirty="0">
+                <a:solidFill>
+                  <a:srgbClr val="00357A"/>
+                </a:solidFill>
+                <a:latin typeface="Poppins" pitchFamily="34" charset="0"/>
+                <a:ea typeface="Poppins" pitchFamily="34" charset="-122"/>
+                <a:cs typeface="Poppins" pitchFamily="34" charset="-120"/>
+              </a:rPr>
+              <a:t>, where backflag is set or changed per dataset.</a:t>
+            </a:r>
+            <a:endParaRPr lang="en-US" sz="1100" dirty="0"/>
+          </a:p>
+        </p:txBody>
+      </p:sp>
+      <p:sp>
+        <p:nvSpPr>
+          <p:cNvPr id="9" name="Shape 6"/>
+          <p:cNvSpPr/>
+          <p:nvPr/>
+        </p:nvSpPr>
+        <p:spPr>
+          <a:xfrm>
+            <a:off x="457200" y="5614416"/>
+            <a:ext cx="5532120" cy="457200"/>
+          </a:xfrm>
+          <a:prstGeom prst="roundRect">
+            <a:avLst>
+              <a:gd name="adj" fmla="val 16000"/>
+            </a:avLst>
+          </a:prstGeom>
+          <a:solidFill>
+            <a:srgbClr val="C7E4F5"/>
+          </a:solidFill>
+          <a:ln w="12700">
+            <a:solidFill>
+              <a:srgbClr val="A9D6F2"/>
+            </a:solidFill>
+            <a:prstDash val="solid"/>
+          </a:ln>
+        </p:spPr>
+      </p:sp>
+      <p:sp>
+        <p:nvSpPr>
+          <p:cNvPr id="10" name="Text 7"/>
+          <p:cNvSpPr/>
+          <p:nvPr/>
+        </p:nvSpPr>
+        <p:spPr>
+          <a:xfrm>
+            <a:off x="658368" y="5614416"/>
+            <a:ext cx="5120640" cy="457200"/>
+          </a:xfrm>
+          <a:prstGeom prst="rect">
+            <a:avLst/>
+          </a:prstGeom>
+          <a:noFill/>
+          <a:ln/>
+        </p:spPr>
+        <p:txBody>
+          <a:bodyPr wrap="square" lIns="0" tIns="0" rIns="0" bIns="0" rtlCol="0" anchor="ctr"/>
+          <a:lstStyle/>
+          <a:p>
+            <a:pPr indent="0" marL="0">
+              <a:buNone/>
+            </a:pPr>
+            <a:r>
+              <a:rPr lang="en-US" sz="1050" b="1" dirty="0">
+                <a:solidFill>
+                  <a:srgbClr val="0057C2"/>
+                </a:solidFill>
+                <a:latin typeface="Poppins" pitchFamily="34" charset="0"/>
+                <a:ea typeface="Poppins" pitchFamily="34" charset="-122"/>
+                <a:cs typeface="Poppins" pitchFamily="34" charset="-120"/>
+              </a:rPr>
+              <a:t>Per-run override:  </a:t>
+            </a:r>
+            <a:pPr indent="0" marL="0">
+              <a:buNone/>
+            </a:pPr>
+            <a:r>
+              <a:rPr lang="en-US" sz="1050" b="1" dirty="0">
                 <a:solidFill>
                   <a:srgbClr val="00357A"/>
                 </a:solidFill>
@@ -38204,16 +38355,41 @@
                 <a:ea typeface="Courier New" pitchFamily="34" charset="-122"/>
                 <a:cs typeface="Courier New" pitchFamily="34" charset="-120"/>
               </a:rPr>
+              <a:t>-B</a:t>
+            </a:r>
+            <a:pPr indent="0" marL="0">
+              <a:buNone/>
+            </a:pPr>
+            <a:r>
+              <a:rPr lang="en-US" sz="1050" dirty="0">
+                <a:solidFill>
+                  <a:srgbClr val="00357A"/>
+                </a:solidFill>
+                <a:latin typeface="Poppins" pitchFamily="34" charset="0"/>
+                <a:ea typeface="Poppins" pitchFamily="34" charset="-122"/>
+                <a:cs typeface="Poppins" pitchFamily="34" charset="-120"/>
+              </a:rPr>
+              <a:t> or </a:t>
+            </a:r>
+            <a:pPr indent="0" marL="0">
+              <a:buNone/>
+            </a:pPr>
+            <a:r>
+              <a:rPr lang="en-US" sz="1050" b="1" dirty="0">
+                <a:solidFill>
+                  <a:srgbClr val="00357A"/>
+                </a:solidFill>
+                <a:latin typeface="Courier New" pitchFamily="34" charset="0"/>
+                <a:ea typeface="Courier New" pitchFamily="34" charset="-122"/>
+                <a:cs typeface="Courier New" pitchFamily="34" charset="-120"/>
+              </a:rPr>
               <a:t>-D</a:t>
             </a:r>
             <a:pPr indent="0" marL="0">
-              <a:lnSpc>
-                <a:spcPct val="108000"/>
-              </a:lnSpc>
-              <a:buNone/>
-            </a:pPr>
-            <a:r>
-              <a:rPr lang="en-US" sz="1250" dirty="0">
+              <a:buNone/>
+            </a:pPr>
+            <a:r>
+              <a:rPr lang="en-US" sz="1050" dirty="0">
                 <a:solidFill>
                   <a:srgbClr val="00357A"/>
                 </a:solidFill>
@@ -38221,15 +38397,15 @@
                 <a:ea typeface="Poppins" pitchFamily="34" charset="-122"/>
                 <a:cs typeface="Poppins" pitchFamily="34" charset="-120"/>
               </a:rPr>
-              <a:t> narrows a run to just that copy — they are mutually exclusive, and giving neither works on both.</a:t>
-            </a:r>
-            <a:endParaRPr lang="en-US" sz="1250" dirty="0"/>
-          </a:p>
-        </p:txBody>
-      </p:sp>
-      <p:sp>
-        <p:nvSpPr>
-          <p:cNvPr id="9" name="Shape 6"/>
+              <a:t> narrows a run to one copy — mutually exclusive; neither means both.</a:t>
+            </a:r>
+            <a:endParaRPr lang="en-US" sz="1050" dirty="0"/>
+          </a:p>
+        </p:txBody>
+      </p:sp>
+      <p:sp>
+        <p:nvSpPr>
+          <p:cNvPr id="11" name="Shape 8"/>
           <p:cNvSpPr/>
           <p:nvPr/>
         </p:nvSpPr>
@@ -38256,7 +38432,7 @@
       </p:sp>
       <p:sp>
         <p:nvSpPr>
-          <p:cNvPr id="10" name="Text 7"/>
+          <p:cNvPr id="12" name="Text 9"/>
           <p:cNvSpPr/>
           <p:nvPr/>
         </p:nvSpPr>
@@ -38295,7 +38471,7 @@
       </p:sp>
       <p:sp>
         <p:nvSpPr>
-          <p:cNvPr id="11" name="Shape 8"/>
+          <p:cNvPr id="13" name="Shape 10"/>
           <p:cNvSpPr/>
           <p:nvPr/>
         </p:nvSpPr>
@@ -38317,7 +38493,7 @@
       </p:sp>
       <p:sp>
         <p:nvSpPr>
-          <p:cNvPr id="12" name="Text 9"/>
+          <p:cNvPr id="14" name="Text 11"/>
           <p:cNvSpPr/>
           <p:nvPr/>
         </p:nvSpPr>
@@ -38371,7 +38547,7 @@
       </p:sp>
       <p:sp>
         <p:nvSpPr>
-          <p:cNvPr id="13" name="Text 10"/>
+          <p:cNvPr id="15" name="Text 12"/>
           <p:cNvSpPr/>
           <p:nvPr/>
         </p:nvSpPr>
@@ -38410,7 +38586,7 @@
       </p:sp>
       <p:sp>
         <p:nvSpPr>
-          <p:cNvPr id="14" name="Shape 11"/>
+          <p:cNvPr id="16" name="Shape 13"/>
           <p:cNvSpPr/>
           <p:nvPr/>
         </p:nvSpPr>
@@ -38437,7 +38613,7 @@
       </p:sp>
       <p:sp>
         <p:nvSpPr>
-          <p:cNvPr id="15" name="Text 12"/>
+          <p:cNvPr id="17" name="Text 14"/>
           <p:cNvSpPr/>
           <p:nvPr/>
         </p:nvSpPr>
@@ -38476,7 +38652,7 @@
       </p:sp>
       <p:sp>
         <p:nvSpPr>
-          <p:cNvPr id="16" name="Text 13"/>
+          <p:cNvPr id="18" name="Text 15"/>
           <p:cNvSpPr/>
           <p:nvPr/>
         </p:nvSpPr>
@@ -38515,7 +38691,7 @@
       </p:sp>
       <p:sp>
         <p:nvSpPr>
-          <p:cNvPr id="17" name="Shape 14"/>
+          <p:cNvPr id="19" name="Shape 16"/>
           <p:cNvSpPr/>
           <p:nvPr/>
         </p:nvSpPr>
@@ -38542,7 +38718,7 @@
       </p:sp>
       <p:sp>
         <p:nvSpPr>
-          <p:cNvPr id="18" name="Text 15"/>
+          <p:cNvPr id="20" name="Text 17"/>
           <p:cNvSpPr/>
           <p:nvPr/>
         </p:nvSpPr>
@@ -38581,7 +38757,7 @@
       </p:sp>
       <p:sp>
         <p:nvSpPr>
-          <p:cNvPr id="19" name="Text 16"/>
+          <p:cNvPr id="21" name="Text 18"/>
           <p:cNvSpPr/>
           <p:nvPr/>
         </p:nvSpPr>
@@ -38620,7 +38796,7 @@
       </p:sp>
       <p:sp>
         <p:nvSpPr>
-          <p:cNvPr id="20" name="Text 17"/>
+          <p:cNvPr id="22" name="Text 19"/>
           <p:cNvSpPr/>
           <p:nvPr/>
         </p:nvSpPr>
@@ -38662,14 +38838,14 @@
       </p:sp>
       <p:pic>
         <p:nvPicPr>
-          <p:cNvPr id="21" name="Image 0" descr="nsf_ncar_logo_color.png">    </p:cNvPr>
+          <p:cNvPr id="23" name="Image 0" descr="nsf_ncar_logo_color.png">    </p:cNvPr>
           <p:cNvPicPr>
             <a:picLocks noChangeAspect="1"/>
           </p:cNvPicPr>
           <p:nvPr/>
         </p:nvPicPr>
         <p:blipFill>
-          <a:blip r:embed="rId1"/>
+          <a:blip r:embed="rId2"/>
           <a:stretch>
             <a:fillRect/>
           </a:stretch>
@@ -38686,7 +38862,7 @@
       </p:pic>
       <p:sp>
         <p:nvSpPr>
-          <p:cNvPr id="22" name="Text 18"/>
+          <p:cNvPr id="24" name="Text 20"/>
           <p:cNvSpPr/>
           <p:nvPr/>
         </p:nvSpPr>
@@ -38725,7 +38901,7 @@
       </p:sp>
       <p:sp>
         <p:nvSpPr>
-          <p:cNvPr id="23" name="Text 19"/>
+          <p:cNvPr id="25" name="Text 21"/>
           <p:cNvSpPr/>
           <p:nvPr/>
         </p:nvSpPr>

--- a/docs/slides/dsquasar_guide.pptx
+++ b/docs/slides/dsquasar_guide.pptx
@@ -4458,12 +4458,12 @@
         </p:nvSpPr>
         <p:spPr>
           <a:xfrm>
-            <a:off x="457200" y="4206240"/>
-            <a:ext cx="11247120" cy="603504"/>
+            <a:off x="457200" y="4187952"/>
+            <a:ext cx="11247120" cy="548640"/>
           </a:xfrm>
           <a:prstGeom prst="roundRect">
             <a:avLst>
-              <a:gd name="adj" fmla="val 12121"/>
+              <a:gd name="adj" fmla="val 13333"/>
             </a:avLst>
           </a:prstGeom>
           <a:solidFill>
@@ -4485,8 +4485,8 @@
         </p:nvSpPr>
         <p:spPr>
           <a:xfrm>
-            <a:off x="685800" y="4206240"/>
-            <a:ext cx="2377440" cy="603504"/>
+            <a:off x="685800" y="4187952"/>
+            <a:ext cx="2377440" cy="548640"/>
           </a:xfrm>
           <a:prstGeom prst="rect">
             <a:avLst/>
@@ -4524,8 +4524,8 @@
         </p:nvSpPr>
         <p:spPr>
           <a:xfrm>
-            <a:off x="3108960" y="4206240"/>
-            <a:ext cx="8412480" cy="603504"/>
+            <a:off x="3108960" y="4187952"/>
+            <a:ext cx="8412480" cy="548640"/>
           </a:xfrm>
           <a:prstGeom prst="rect">
             <a:avLst/>
@@ -4563,12 +4563,12 @@
         </p:nvSpPr>
         <p:spPr>
           <a:xfrm>
-            <a:off x="457200" y="4919472"/>
-            <a:ext cx="11247120" cy="603504"/>
+            <a:off x="457200" y="4809744"/>
+            <a:ext cx="11247120" cy="548640"/>
           </a:xfrm>
           <a:prstGeom prst="roundRect">
             <a:avLst>
-              <a:gd name="adj" fmla="val 12121"/>
+              <a:gd name="adj" fmla="val 13333"/>
             </a:avLst>
           </a:prstGeom>
           <a:solidFill>
@@ -4590,8 +4590,8 @@
         </p:nvSpPr>
         <p:spPr>
           <a:xfrm>
-            <a:off x="685800" y="4919472"/>
-            <a:ext cx="2377440" cy="603504"/>
+            <a:off x="685800" y="4809744"/>
+            <a:ext cx="2377440" cy="548640"/>
           </a:xfrm>
           <a:prstGeom prst="rect">
             <a:avLst/>
@@ -4629,8 +4629,8 @@
         </p:nvSpPr>
         <p:spPr>
           <a:xfrm>
-            <a:off x="3108960" y="4919472"/>
-            <a:ext cx="8412480" cy="603504"/>
+            <a:off x="3108960" y="4809744"/>
+            <a:ext cx="8412480" cy="548640"/>
           </a:xfrm>
           <a:prstGeom prst="rect">
             <a:avLst/>
@@ -4668,12 +4668,12 @@
         </p:nvSpPr>
         <p:spPr>
           <a:xfrm>
-            <a:off x="457200" y="5632704"/>
-            <a:ext cx="11247120" cy="603504"/>
+            <a:off x="457200" y="5431536"/>
+            <a:ext cx="11247120" cy="548640"/>
           </a:xfrm>
           <a:prstGeom prst="roundRect">
             <a:avLst>
-              <a:gd name="adj" fmla="val 12121"/>
+              <a:gd name="adj" fmla="val 13333"/>
             </a:avLst>
           </a:prstGeom>
           <a:solidFill>
@@ -4695,8 +4695,8 @@
         </p:nvSpPr>
         <p:spPr>
           <a:xfrm>
-            <a:off x="685800" y="5632704"/>
-            <a:ext cx="2377440" cy="603504"/>
+            <a:off x="685800" y="5431536"/>
+            <a:ext cx="2377440" cy="548640"/>
           </a:xfrm>
           <a:prstGeom prst="rect">
             <a:avLst/>
@@ -4734,8 +4734,8 @@
         </p:nvSpPr>
         <p:spPr>
           <a:xfrm>
-            <a:off x="3108960" y="5632704"/>
-            <a:ext cx="8412480" cy="603504"/>
+            <a:off x="3108960" y="5431536"/>
+            <a:ext cx="8412480" cy="548640"/>
           </a:xfrm>
           <a:prstGeom prst="rect">
             <a:avLst/>
@@ -4773,8 +4773,8 @@
         </p:nvSpPr>
         <p:spPr>
           <a:xfrm>
-            <a:off x="457200" y="6309360"/>
-            <a:ext cx="11274552" cy="320040"/>
+            <a:off x="457200" y="6035040"/>
+            <a:ext cx="11274552" cy="292608"/>
           </a:xfrm>
           <a:prstGeom prst="rect">
             <a:avLst/>
@@ -4790,7 +4790,7 @@
               <a:buNone/>
             </a:pPr>
             <a:r>
-              <a:rPr lang="en-US" sz="1250" dirty="0">
+              <a:rPr lang="en-US" sz="1200" dirty="0">
                 <a:solidFill>
                   <a:srgbClr val="53565A"/>
                 </a:solidFill>
@@ -4804,7 +4804,7 @@
               <a:buNone/>
             </a:pPr>
             <a:r>
-              <a:rPr lang="en-US" sz="1250" b="1" dirty="0">
+              <a:rPr lang="en-US" sz="1200" b="1" dirty="0">
                 <a:solidFill>
                   <a:srgbClr val="53565A"/>
                 </a:solidFill>
@@ -4818,7 +4818,7 @@
               <a:buNone/>
             </a:pPr>
             <a:r>
-              <a:rPr lang="en-US" sz="1250" dirty="0">
+              <a:rPr lang="en-US" sz="1200" dirty="0">
                 <a:solidFill>
                   <a:srgbClr val="53565A"/>
                 </a:solidFill>
@@ -4832,7 +4832,7 @@
               <a:buNone/>
             </a:pPr>
             <a:r>
-              <a:rPr lang="en-US" sz="1250" b="1" dirty="0">
+              <a:rPr lang="en-US" sz="1200" b="1" dirty="0">
                 <a:solidFill>
                   <a:srgbClr val="53565A"/>
                 </a:solidFill>
@@ -4846,7 +4846,7 @@
               <a:buNone/>
             </a:pPr>
             <a:r>
-              <a:rPr lang="en-US" sz="1250" dirty="0">
+              <a:rPr lang="en-US" sz="1200" dirty="0">
                 <a:solidFill>
                   <a:srgbClr val="53565A"/>
                 </a:solidFill>
@@ -4856,7 +4856,7 @@
               </a:rPr>
               <a:t> is simply picked up by the next run.</a:t>
             </a:r>
-            <a:endParaRPr lang="en-US" sz="1250" dirty="0"/>
+            <a:endParaRPr lang="en-US" sz="1200" dirty="0"/>
           </a:p>
         </p:txBody>
       </p:sp>
@@ -5147,7 +5147,7 @@
         <p:spPr>
           <a:xfrm>
             <a:off x="822960" y="2194560"/>
-            <a:ext cx="4937760" cy="2377440"/>
+            <a:ext cx="4937760" cy="2286000"/>
           </a:xfrm>
           <a:prstGeom prst="rect">
             <a:avLst/>
@@ -5161,7 +5161,7 @@
           <a:p>
             <a:pPr marL="254000" indent="-254000">
               <a:lnSpc>
-                <a:spcPct val="110000"/>
+                <a:spcPct val="108000"/>
               </a:lnSpc>
               <a:spcAft>
                 <a:spcPts val="900"/>
@@ -5171,7 +5171,7 @@
               <a:buAutoNum type="arabicPeriod" startAt="1"/>
             </a:pPr>
             <a:r>
-              <a:rPr lang="en-US" sz="1350" dirty="0">
+              <a:rPr lang="en-US" sz="1250" dirty="0">
                 <a:solidFill>
                   <a:srgbClr val="00357A"/>
                 </a:solidFill>
@@ -5181,12 +5181,12 @@
               </a:rPr>
               <a:t>Lock the dataset, then re-gather its files under the lock</a:t>
             </a:r>
-            <a:endParaRPr lang="en-US" sz="1350" dirty="0"/>
+            <a:endParaRPr lang="en-US" sz="1250" dirty="0"/>
           </a:p>
           <a:p>
             <a:pPr marL="254000" indent="-254000">
               <a:lnSpc>
-                <a:spcPct val="110000"/>
+                <a:spcPct val="108000"/>
               </a:lnSpc>
               <a:spcAft>
                 <a:spcPts val="900"/>
@@ -5196,7 +5196,7 @@
               <a:buAutoNum type="arabicPeriod" startAt="1"/>
             </a:pPr>
             <a:r>
-              <a:rPr lang="en-US" sz="1350" dirty="0">
+              <a:rPr lang="en-US" sz="1250" dirty="0">
                 <a:solidFill>
                   <a:srgbClr val="00357A"/>
                 </a:solidFill>
@@ -5206,12 +5206,12 @@
               </a:rPr>
               <a:t>Skip files already listed in an open 'N' record</a:t>
             </a:r>
-            <a:endParaRPr lang="en-US" sz="1350" dirty="0"/>
+            <a:endParaRPr lang="en-US" sz="1250" dirty="0"/>
           </a:p>
           <a:p>
             <a:pPr marL="254000" indent="-254000">
               <a:lnSpc>
-                <a:spcPct val="110000"/>
+                <a:spcPct val="108000"/>
               </a:lnSpc>
               <a:spcAft>
                 <a:spcPts val="900"/>
@@ -5221,7 +5221,7 @@
               <a:buAutoNum type="arabicPeriod" startAt="1"/>
             </a:pPr>
             <a:r>
-              <a:rPr lang="en-US" sz="1350" dirty="0">
+              <a:rPr lang="en-US" sz="1250" dirty="0">
                 <a:solidFill>
                   <a:srgbClr val="00357A"/>
                 </a:solidFill>
@@ -5229,14 +5229,14 @@
                 <a:ea typeface="Poppins" pitchFamily="34" charset="-122"/>
                 <a:cs typeface="Poppins" pitchFamily="34" charset="-120"/>
               </a:rPr>
-              <a:t>Re-check each file on disk or object storage; fix size, checksum and timestamp in GDEXDB if they drifted</a:t>
-            </a:r>
-            <a:endParaRPr lang="en-US" sz="1350" dirty="0"/>
+              <a:t>Re-check each file on disk or object storage; fix size, checksum and timestamp in GDEXDB</a:t>
+            </a:r>
+            <a:endParaRPr lang="en-US" sz="1250" dirty="0"/>
           </a:p>
           <a:p>
             <a:pPr marL="254000" indent="-254000">
               <a:lnSpc>
-                <a:spcPct val="110000"/>
+                <a:spcPct val="108000"/>
               </a:lnSpc>
               <a:spcAft>
                 <a:spcPts val="900"/>
@@ -5246,7 +5246,7 @@
               <a:buAutoNum type="arabicPeriod" startAt="1"/>
             </a:pPr>
             <a:r>
-              <a:rPr lang="en-US" sz="1350" dirty="0">
+              <a:rPr lang="en-US" sz="1250" dirty="0">
                 <a:solidFill>
                   <a:srgbClr val="00357A"/>
                 </a:solidFill>
@@ -5254,21 +5254,21 @@
                 <a:ea typeface="Poppins" pitchFamily="34" charset="-122"/>
                 <a:cs typeface="Poppins" pitchFamily="34" charset="-120"/>
               </a:rPr>
-              <a:t>Append a line per file to a dsarch input file, one per dataset and file type</a:t>
-            </a:r>
-            <a:endParaRPr lang="en-US" sz="1350" dirty="0"/>
+              <a:t>Append a line per file to a dsarch input file, per type</a:t>
+            </a:r>
+            <a:endParaRPr lang="en-US" sz="1250" dirty="0"/>
           </a:p>
           <a:p>
             <a:pPr marL="254000" indent="-254000">
               <a:lnSpc>
-                <a:spcPct val="110000"/>
+                <a:spcPct val="108000"/>
               </a:lnSpc>
               <a:buSzPct val="100000"/>
               <a:buFont typeface="+mj-lt"/>
               <a:buAutoNum type="arabicPeriod" startAt="1"/>
             </a:pPr>
             <a:r>
-              <a:rPr lang="en-US" sz="1350" dirty="0">
+              <a:rPr lang="en-US" sz="1250" dirty="0">
                 <a:solidFill>
                   <a:srgbClr val="00357A"/>
                 </a:solidFill>
@@ -5276,9 +5276,9 @@
                 <a:ea typeface="Poppins" pitchFamily="34" charset="-122"/>
                 <a:cs typeface="Poppins" pitchFamily="34" charset="-120"/>
               </a:rPr>
-              <a:t>Close the group once it is big enough and add the bfile placeholder record</a:t>
-            </a:r>
-            <a:endParaRPr lang="en-US" sz="1350" dirty="0"/>
+              <a:t>Close the group when big enough; add the bfile record</a:t>
+            </a:r>
+            <a:endParaRPr lang="en-US" sz="1250" dirty="0"/>
           </a:p>
         </p:txBody>
       </p:sp>
@@ -8283,7 +8283,7 @@
         <p:spPr>
           <a:xfrm>
             <a:off x="822960" y="2194560"/>
-            <a:ext cx="4937760" cy="2651760"/>
+            <a:ext cx="4937760" cy="2560320"/>
           </a:xfrm>
           <a:prstGeom prst="rect">
             <a:avLst/>
@@ -8297,7 +8297,7 @@
           <a:p>
             <a:pPr marL="254000" indent="-254000">
               <a:lnSpc>
-                <a:spcPct val="110000"/>
+                <a:spcPct val="108000"/>
               </a:lnSpc>
               <a:spcAft>
                 <a:spcPts val="900"/>
@@ -8307,7 +8307,7 @@
               <a:buAutoNum type="arabicPeriod" startAt="1"/>
             </a:pPr>
             <a:r>
-              <a:rPr lang="en-US" sz="1350" dirty="0">
+              <a:rPr lang="en-US" sz="1250" dirty="0">
                 <a:solidFill>
                   <a:srgbClr val="00357A"/>
                 </a:solidFill>
@@ -8315,14 +8315,14 @@
                 <a:ea typeface="Poppins" pitchFamily="34" charset="-122"/>
                 <a:cs typeface="Poppins" pitchFamily="34" charset="-120"/>
               </a:rPr>
-              <a:t>Walk the status 'T' records and accumulate tars until the batch reaches 90 GB</a:t>
-            </a:r>
-            <a:endParaRPr lang="en-US" sz="1350" dirty="0"/>
+              <a:t>Walk the 'T' records, accumulating tars until the batch hits 90 GB</a:t>
+            </a:r>
+            <a:endParaRPr lang="en-US" sz="1250" dirty="0"/>
           </a:p>
           <a:p>
             <a:pPr marL="254000" indent="-254000">
               <a:lnSpc>
-                <a:spcPct val="110000"/>
+                <a:spcPct val="108000"/>
               </a:lnSpc>
               <a:spcAft>
                 <a:spcPts val="900"/>
@@ -8332,7 +8332,7 @@
               <a:buAutoNum type="arabicPeriod" startAt="1"/>
             </a:pPr>
             <a:r>
-              <a:rPr lang="en-US" sz="1350" dirty="0">
+              <a:rPr lang="en-US" sz="1250" dirty="0">
                 <a:solidFill>
                   <a:srgbClr val="00357A"/>
                 </a:solidFill>
@@ -8340,14 +8340,14 @@
                 <a:ea typeface="Poppins" pitchFamily="34" charset="-122"/>
                 <a:cs typeface="Poppins" pitchFamily="34" charset="-120"/>
               </a:rPr>
-              <a:t>Confirm each tar still exists on gdex-glade; if not, reset that record to 'N' to be rebuilt</a:t>
-            </a:r>
-            <a:endParaRPr lang="en-US" sz="1350" dirty="0"/>
+              <a:t>Confirm each tar still exists on gdex-glade; if not, reset it to 'N'</a:t>
+            </a:r>
+            <a:endParaRPr lang="en-US" sz="1250" dirty="0"/>
           </a:p>
           <a:p>
             <a:pPr marL="254000" indent="-254000">
               <a:lnSpc>
-                <a:spcPct val="110000"/>
+                <a:spcPct val="108000"/>
               </a:lnSpc>
               <a:spcAft>
                 <a:spcPts val="900"/>
@@ -8357,7 +8357,7 @@
               <a:buAutoNum type="arabicPeriod" startAt="1"/>
             </a:pPr>
             <a:r>
-              <a:rPr lang="en-US" sz="1350" dirty="0">
+              <a:rPr lang="en-US" sz="1250" dirty="0">
                 <a:solidFill>
                   <a:srgbClr val="00357A"/>
                 </a:solidFill>
@@ -8365,14 +8365,14 @@
                 <a:ea typeface="Poppins" pitchFamily="34" charset="-122"/>
                 <a:cs typeface="Poppins" pitchFamily="34" charset="-120"/>
               </a:rPr>
-              <a:t>Hand the whole list to dsglobus as one transfer — Drdata first when the flag is 'D', then Backup</a:t>
-            </a:r>
-            <a:endParaRPr lang="en-US" sz="1350" dirty="0"/>
+              <a:t>Hand the whole list to dsglobus as one transfer — Drdata first, then Backup</a:t>
+            </a:r>
+            <a:endParaRPr lang="en-US" sz="1250" dirty="0"/>
           </a:p>
           <a:p>
             <a:pPr marL="254000" indent="-254000">
               <a:lnSpc>
-                <a:spcPct val="110000"/>
+                <a:spcPct val="108000"/>
               </a:lnSpc>
               <a:spcAft>
                 <a:spcPts val="900"/>
@@ -8382,7 +8382,7 @@
               <a:buAutoNum type="arabicPeriod" startAt="1"/>
             </a:pPr>
             <a:r>
-              <a:rPr lang="en-US" sz="1350" dirty="0">
+              <a:rPr lang="en-US" sz="1250" dirty="0">
                 <a:solidFill>
                   <a:srgbClr val="00357A"/>
                 </a:solidFill>
@@ -8392,19 +8392,19 @@
               </a:rPr>
               <a:t>Wait for both transfers to report finished</a:t>
             </a:r>
-            <a:endParaRPr lang="en-US" sz="1350" dirty="0"/>
+            <a:endParaRPr lang="en-US" sz="1250" dirty="0"/>
           </a:p>
           <a:p>
             <a:pPr marL="254000" indent="-254000">
               <a:lnSpc>
-                <a:spcPct val="110000"/>
+                <a:spcPct val="108000"/>
               </a:lnSpc>
               <a:buSzPct val="100000"/>
               <a:buFont typeface="+mj-lt"/>
               <a:buAutoNum type="arabicPeriod" startAt="1"/>
             </a:pPr>
             <a:r>
-              <a:rPr lang="en-US" sz="1350" dirty="0">
+              <a:rPr lang="en-US" sz="1250" dirty="0">
                 <a:solidFill>
                   <a:srgbClr val="00357A"/>
                 </a:solidFill>
@@ -8412,9 +8412,9 @@
                 <a:ea typeface="Poppins" pitchFamily="34" charset="-122"/>
                 <a:cs typeface="Poppins" pitchFamily="34" charset="-120"/>
               </a:rPr>
-              <a:t>Delete the local tars and set every record in the batch to status 'A'</a:t>
-            </a:r>
-            <a:endParaRPr lang="en-US" sz="1350" dirty="0"/>
+              <a:t>Delete the local tars and set every record to status 'A'</a:t>
+            </a:r>
+            <a:endParaRPr lang="en-US" sz="1250" dirty="0"/>
           </a:p>
         </p:txBody>
       </p:sp>
@@ -8551,12 +8551,12 @@
         </p:nvSpPr>
         <p:spPr>
           <a:xfrm>
-            <a:off x="6199632" y="1965960"/>
-            <a:ext cx="5532120" cy="2011680"/>
+            <a:off x="6199632" y="1938528"/>
+            <a:ext cx="5532120" cy="1600200"/>
           </a:xfrm>
           <a:prstGeom prst="roundRect">
             <a:avLst>
-              <a:gd name="adj" fmla="val 4545"/>
+              <a:gd name="adj" fmla="val 5714"/>
             </a:avLst>
           </a:prstGeom>
           <a:solidFill>
@@ -8578,7 +8578,7 @@
         </p:nvSpPr>
         <p:spPr>
           <a:xfrm>
-            <a:off x="6446520" y="2240280"/>
+            <a:off x="6446520" y="2148840"/>
             <a:ext cx="457200" cy="347472"/>
           </a:xfrm>
           <a:prstGeom prst="roundRect">
@@ -8600,7 +8600,7 @@
         </p:nvSpPr>
         <p:spPr>
           <a:xfrm>
-            <a:off x="6995160" y="2240280"/>
+            <a:off x="6995160" y="2148840"/>
             <a:ext cx="457200" cy="347472"/>
           </a:xfrm>
           <a:prstGeom prst="roundRect">
@@ -8622,7 +8622,7 @@
         </p:nvSpPr>
         <p:spPr>
           <a:xfrm>
-            <a:off x="7543800" y="2240280"/>
+            <a:off x="7543800" y="2148840"/>
             <a:ext cx="457200" cy="347472"/>
           </a:xfrm>
           <a:prstGeom prst="roundRect">
@@ -8644,7 +8644,7 @@
         </p:nvSpPr>
         <p:spPr>
           <a:xfrm>
-            <a:off x="8092440" y="2240280"/>
+            <a:off x="8092440" y="2148840"/>
             <a:ext cx="457200" cy="347472"/>
           </a:xfrm>
           <a:prstGeom prst="roundRect">
@@ -8666,7 +8666,7 @@
         </p:nvSpPr>
         <p:spPr>
           <a:xfrm>
-            <a:off x="8641080" y="2240280"/>
+            <a:off x="8641080" y="2148840"/>
             <a:ext cx="457200" cy="347472"/>
           </a:xfrm>
           <a:prstGeom prst="roundRect">
@@ -8688,7 +8688,7 @@
         </p:nvSpPr>
         <p:spPr>
           <a:xfrm>
-            <a:off x="9189720" y="2240280"/>
+            <a:off x="9189720" y="2148840"/>
             <a:ext cx="457200" cy="347472"/>
           </a:xfrm>
           <a:prstGeom prst="roundRect">
@@ -8710,7 +8710,7 @@
         </p:nvSpPr>
         <p:spPr>
           <a:xfrm>
-            <a:off x="9738360" y="2240280"/>
+            <a:off x="9738360" y="2148840"/>
             <a:ext cx="457200" cy="347472"/>
           </a:xfrm>
           <a:prstGeom prst="roundRect">
@@ -8732,7 +8732,7 @@
         </p:nvSpPr>
         <p:spPr>
           <a:xfrm>
-            <a:off x="10287000" y="2240280"/>
+            <a:off x="10287000" y="2148840"/>
             <a:ext cx="457200" cy="347472"/>
           </a:xfrm>
           <a:prstGeom prst="roundRect">
@@ -8754,7 +8754,7 @@
         </p:nvSpPr>
         <p:spPr>
           <a:xfrm>
-            <a:off x="10835640" y="2240280"/>
+            <a:off x="10835640" y="2148840"/>
             <a:ext cx="457200" cy="347472"/>
           </a:xfrm>
           <a:prstGeom prst="roundRect">
@@ -8776,7 +8776,7 @@
         </p:nvSpPr>
         <p:spPr>
           <a:xfrm>
-            <a:off x="6446520" y="2697480"/>
+            <a:off x="6446520" y="2606040"/>
             <a:ext cx="457200" cy="347472"/>
           </a:xfrm>
           <a:prstGeom prst="roundRect">
@@ -8798,7 +8798,7 @@
         </p:nvSpPr>
         <p:spPr>
           <a:xfrm>
-            <a:off x="6995160" y="2697480"/>
+            <a:off x="6995160" y="2606040"/>
             <a:ext cx="457200" cy="347472"/>
           </a:xfrm>
           <a:prstGeom prst="roundRect">
@@ -8820,7 +8820,7 @@
         </p:nvSpPr>
         <p:spPr>
           <a:xfrm>
-            <a:off x="7543800" y="2697480"/>
+            <a:off x="7543800" y="2606040"/>
             <a:ext cx="457200" cy="347472"/>
           </a:xfrm>
           <a:prstGeom prst="roundRect">
@@ -8842,7 +8842,7 @@
         </p:nvSpPr>
         <p:spPr>
           <a:xfrm>
-            <a:off x="8092440" y="2697480"/>
+            <a:off x="8092440" y="2606040"/>
             <a:ext cx="457200" cy="347472"/>
           </a:xfrm>
           <a:prstGeom prst="roundRect">
@@ -8864,7 +8864,7 @@
         </p:nvSpPr>
         <p:spPr>
           <a:xfrm>
-            <a:off x="8641080" y="2697480"/>
+            <a:off x="8641080" y="2606040"/>
             <a:ext cx="457200" cy="347472"/>
           </a:xfrm>
           <a:prstGeom prst="roundRect">
@@ -8886,7 +8886,7 @@
         </p:nvSpPr>
         <p:spPr>
           <a:xfrm>
-            <a:off x="9189720" y="2697480"/>
+            <a:off x="9189720" y="2606040"/>
             <a:ext cx="457200" cy="347472"/>
           </a:xfrm>
           <a:prstGeom prst="roundRect">
@@ -8908,7 +8908,7 @@
         </p:nvSpPr>
         <p:spPr>
           <a:xfrm>
-            <a:off x="9738360" y="2697480"/>
+            <a:off x="9738360" y="2606040"/>
             <a:ext cx="457200" cy="347472"/>
           </a:xfrm>
           <a:prstGeom prst="roundRect">
@@ -8930,7 +8930,7 @@
         </p:nvSpPr>
         <p:spPr>
           <a:xfrm>
-            <a:off x="10287000" y="2697480"/>
+            <a:off x="10287000" y="2606040"/>
             <a:ext cx="457200" cy="347472"/>
           </a:xfrm>
           <a:prstGeom prst="roundRect">
@@ -8952,7 +8952,7 @@
         </p:nvSpPr>
         <p:spPr>
           <a:xfrm>
-            <a:off x="10835640" y="2697480"/>
+            <a:off x="10835640" y="2606040"/>
             <a:ext cx="457200" cy="347472"/>
           </a:xfrm>
           <a:prstGeom prst="roundRect">
@@ -8974,7 +8974,7 @@
         </p:nvSpPr>
         <p:spPr>
           <a:xfrm>
-            <a:off x="6446520" y="3200400"/>
+            <a:off x="6446520" y="3108960"/>
             <a:ext cx="5029200" cy="320040"/>
           </a:xfrm>
           <a:prstGeom prst="rect">
@@ -9013,8 +9013,8 @@
         </p:nvSpPr>
         <p:spPr>
           <a:xfrm>
-            <a:off x="6446520" y="3520440"/>
-            <a:ext cx="5029200" cy="548640"/>
+            <a:off x="6199632" y="3611880"/>
+            <a:ext cx="5532120" cy="457200"/>
           </a:xfrm>
           <a:prstGeom prst="rect">
             <a:avLst/>
@@ -9041,7 +9041,7 @@
                 <a:ea typeface="Poppins" pitchFamily="34" charset="-122"/>
                 <a:cs typeface="Poppins" pitchFamily="34" charset="-120"/>
               </a:rPr>
-              <a:t>dsarch AQ can upload a tar as it builds it, but only one at a time. dsquasar instead calls dsglobus directly with the whole list, so a batch costs one transfer request rather than eighteen. Each batch is also the unit of parallelism — one child process per batch.</a:t>
+              <a:t>dsarch AQ can upload a tar as it builds it, but only one at a time. dsquasar calls dsglobus with the whole list, so a batch costs one request, not eighteen.</a:t>
             </a:r>
             <a:endParaRPr lang="en-US" sz="1100" dirty="0"/>
           </a:p>
@@ -9055,7 +9055,7 @@
         </p:nvSpPr>
         <p:spPr>
           <a:xfrm>
-            <a:off x="6199632" y="4114800"/>
+            <a:off x="6199632" y="4133088"/>
             <a:ext cx="5532120" cy="320040"/>
           </a:xfrm>
           <a:prstGeom prst="rect">
@@ -9437,7 +9437,7 @@
                 <a:ea typeface="Poppins" pitchFamily="34" charset="-122"/>
                 <a:cs typeface="Poppins" pitchFamily="34" charset="-120"/>
               </a:rPr>
-              <a:t>CHANGED FILES</a:t>
+              <a:t>-C CHANGEDAYS</a:t>
             </a:r>
             <a:endParaRPr lang="en-US" sz="1200" dirty="0"/>
           </a:p>
@@ -9476,7 +9476,7 @@
                 <a:ea typeface="Poppins" pitchFamily="34" charset="-122"/>
                 <a:cs typeface="Poppins" pitchFamily="34" charset="-120"/>
               </a:rPr>
-              <a:t>-c ChangeDays  —  Re-Backing Up What Moved</a:t>
+              <a:t>Re-Backing Up Files That Changed</a:t>
             </a:r>
             <a:endParaRPr lang="en-US" sz="3200" dirty="0"/>
           </a:p>
@@ -9510,7 +9510,7 @@
               <a:buNone/>
             </a:pPr>
             <a:r>
-              <a:rPr lang="en-US" sz="1450" dirty="0">
+              <a:rPr lang="en-US" sz="1350" dirty="0">
                 <a:solidFill>
                   <a:srgbClr val="00357A"/>
                 </a:solidFill>
@@ -9518,9 +9518,9 @@
                 <a:ea typeface="Poppins" pitchFamily="34" charset="-122"/>
                 <a:cs typeface="Poppins" pitchFamily="34" charset="-120"/>
               </a:rPr>
-              <a:t>A file already on tape can be replaced on disk: a corrected version, a re-generated grid, a re-processed year. The tape copy is then stale. -c tells dsquasar to look past the “never backed up” test and pick up files whose GDEXDB record changed recently.</a:t>
-            </a:r>
-            <a:endParaRPr lang="en-US" sz="1450" dirty="0"/>
+              <a:t>A file already on tape can be replaced on disk: a corrected version, a re-processed year. The tape copy is then stale. -c looks past the “never backed up” test and picks up files whose GDEXDB record changed recently.</a:t>
+            </a:r>
+            <a:endParaRPr lang="en-US" sz="1350" dirty="0"/>
           </a:p>
         </p:txBody>
       </p:sp>
@@ -11969,7 +11969,7 @@
           </p:nvPr>
         </p:nvGraphicFramePr>
         <p:xfrm>
-          <a:off x="6537960" y="3611880"/>
+          <a:off x="6537960" y="3547872"/>
           <a:ext cx="5029200" cy="914400"/>
         </p:xfrm>
         <a:graphic>
@@ -12204,7 +12204,7 @@
                           <a:ea typeface="Poppins" pitchFamily="34" charset="-122"/>
                           <a:cs typeface="Poppins" pitchFamily="34" charset="-120"/>
                         </a:rPr>
-                        <a:t>file count and total size already on Quasar</a:t>
+                        <a:t>count and size already on Quasar</a:t>
                       </a:r>
                       <a:endParaRPr lang="en-US" sz="1200" dirty="0">
                         <a:latin typeface="Poppins" charset="0"/>
@@ -12342,7 +12342,7 @@
                           <a:ea typeface="Poppins" pitchFamily="34" charset="-122"/>
                           <a:cs typeface="Poppins" pitchFamily="34" charset="-120"/>
                         </a:rPr>
-                        <a:t>count and size of files waiting to be backed up</a:t>
+                        <a:t>count and size still waiting</a:t>
                       </a:r>
                       <a:endParaRPr lang="en-US" sz="1200" dirty="0">
                         <a:latin typeface="Poppins" charset="0"/>
@@ -12618,7 +12618,7 @@
                           <a:ea typeface="Poppins" pitchFamily="34" charset="-122"/>
                           <a:cs typeface="Poppins" pitchFamily="34" charset="-120"/>
                         </a:rPr>
-                        <a:t>one line each, with a summary row at the end</a:t>
+                        <a:t>one line each, plus a summary row</a:t>
                       </a:r>
                       <a:endParaRPr lang="en-US" sz="1200" dirty="0">
                         <a:latin typeface="Poppins" charset="0"/>
@@ -12682,12 +12682,12 @@
         </p:nvSpPr>
         <p:spPr>
           <a:xfrm>
-            <a:off x="6537960" y="5230368"/>
-            <a:ext cx="5029200" cy="566928"/>
+            <a:off x="6537960" y="5440680"/>
+            <a:ext cx="5029200" cy="502920"/>
           </a:xfrm>
           <a:prstGeom prst="roundRect">
             <a:avLst>
-              <a:gd name="adj" fmla="val 12903"/>
+              <a:gd name="adj" fmla="val 14545"/>
             </a:avLst>
           </a:prstGeom>
           <a:solidFill>
@@ -12709,8 +12709,8 @@
         </p:nvSpPr>
         <p:spPr>
           <a:xfrm>
-            <a:off x="6720840" y="5230368"/>
-            <a:ext cx="4663440" cy="566928"/>
+            <a:off x="6720840" y="5440680"/>
+            <a:ext cx="4663440" cy="502920"/>
           </a:xfrm>
           <a:prstGeom prst="rect">
             <a:avLst/>
@@ -15249,8 +15249,8 @@
         </p:nvSpPr>
         <p:spPr>
           <a:xfrm>
-            <a:off x="0" y="2971800"/>
-            <a:ext cx="1645920" cy="274320"/>
+            <a:off x="8705850" y="2185416"/>
+            <a:ext cx="2194560" cy="274320"/>
           </a:xfrm>
           <a:prstGeom prst="rect">
             <a:avLst/>
@@ -15262,19 +15262,19 @@
           <a:bodyPr wrap="square" lIns="0" tIns="0" rIns="0" bIns="0" rtlCol="0" anchor="ctr"/>
           <a:lstStyle/>
           <a:p>
-            <a:pPr algn="ctr" indent="0" marL="0">
+            <a:pPr algn="r" indent="0" marL="0">
               <a:buNone/>
             </a:pPr>
             <a:r>
               <a:rPr lang="en-US" sz="1000" dirty="0">
                 <a:solidFill>
-                  <a:srgbClr val="97999B"/>
+                  <a:srgbClr val="42C0FF"/>
                 </a:solidFill>
                 <a:latin typeface="Courier New" pitchFamily="34" charset="0"/>
                 <a:ea typeface="Courier New" pitchFamily="34" charset="-122"/>
                 <a:cs typeface="Courier New" pitchFamily="34" charset="-120"/>
               </a:rPr>
-              <a:t>0 h</a:t>
+              <a:t>MAXRUNTIME  23 h</a:t>
             </a:r>
             <a:endParaRPr lang="en-US" sz="1000" dirty="0"/>
           </a:p>
@@ -15288,7 +15288,7 @@
         </p:nvSpPr>
         <p:spPr>
           <a:xfrm>
-            <a:off x="10077450" y="2971800"/>
+            <a:off x="822960" y="2971800"/>
             <a:ext cx="1645920" cy="274320"/>
           </a:xfrm>
           <a:prstGeom prst="rect">
@@ -15301,7 +15301,7 @@
           <a:bodyPr wrap="square" lIns="0" tIns="0" rIns="0" bIns="0" rtlCol="0" anchor="ctr"/>
           <a:lstStyle/>
           <a:p>
-            <a:pPr algn="ctr" indent="0" marL="0">
+            <a:pPr algn="l" indent="0" marL="0">
               <a:buNone/>
             </a:pPr>
             <a:r>
@@ -15313,7 +15313,7 @@
                 <a:ea typeface="Courier New" pitchFamily="34" charset="-122"/>
                 <a:cs typeface="Courier New" pitchFamily="34" charset="-120"/>
               </a:rPr>
-              <a:t>23 h  MAXRUNTIME</a:t>
+              <a:t>0 h</a:t>
             </a:r>
             <a:endParaRPr lang="en-US" sz="1000" dirty="0"/>
           </a:p>
@@ -15327,8 +15327,8 @@
         </p:nvSpPr>
         <p:spPr>
           <a:xfrm>
-            <a:off x="10515600" y="2971800"/>
-            <a:ext cx="1645920" cy="274320"/>
+            <a:off x="9144000" y="2971800"/>
+            <a:ext cx="2194560" cy="274320"/>
           </a:xfrm>
           <a:prstGeom prst="rect">
             <a:avLst/>
@@ -15340,7 +15340,7 @@
           <a:bodyPr wrap="square" lIns="0" tIns="0" rIns="0" bIns="0" rtlCol="0" anchor="ctr"/>
           <a:lstStyle/>
           <a:p>
-            <a:pPr algn="ctr" indent="0" marL="0">
+            <a:pPr algn="r" indent="0" marL="0">
               <a:buNone/>
             </a:pPr>
             <a:r>
@@ -15352,7 +15352,7 @@
                 <a:ea typeface="Courier New" pitchFamily="34" charset="-122"/>
                 <a:cs typeface="Courier New" pitchFamily="34" charset="-120"/>
               </a:rPr>
-              <a:t>24 h  walltime</a:t>
+              <a:t>24 h  PBS walltime</a:t>
             </a:r>
             <a:endParaRPr lang="en-US" sz="1000" dirty="0"/>
           </a:p>
@@ -17443,7 +17443,7 @@
         </p:nvSpPr>
         <p:spPr>
           <a:xfrm>
-            <a:off x="457200" y="1508760"/>
+            <a:off x="457200" y="1481328"/>
             <a:ext cx="4846320" cy="1737360"/>
           </a:xfrm>
           <a:prstGeom prst="rect">
@@ -17458,12 +17458,12 @@
           <a:p>
             <a:pPr indent="0" marL="0">
               <a:lnSpc>
-                <a:spcPct val="115000"/>
+                <a:spcPct val="112000"/>
               </a:lnSpc>
               <a:buNone/>
             </a:pPr>
             <a:r>
-              <a:rPr lang="en-US" sz="1600" b="1" dirty="0">
+              <a:rPr lang="en-US" sz="1500" b="1" dirty="0">
                 <a:solidFill>
                   <a:srgbClr val="0057C2"/>
                 </a:solidFill>
@@ -17475,12 +17475,12 @@
             </a:r>
             <a:pPr indent="0" marL="0">
               <a:lnSpc>
-                <a:spcPct val="115000"/>
+                <a:spcPct val="112000"/>
               </a:lnSpc>
               <a:buNone/>
             </a:pPr>
             <a:r>
-              <a:rPr lang="en-US" sz="1600" dirty="0">
+              <a:rPr lang="en-US" sz="1500" dirty="0">
                 <a:solidFill>
                   <a:srgbClr val="00357A"/>
                 </a:solidFill>
@@ -17492,12 +17492,12 @@
             </a:r>
             <a:pPr indent="0" marL="0">
               <a:lnSpc>
-                <a:spcPct val="115000"/>
+                <a:spcPct val="112000"/>
               </a:lnSpc>
               <a:buNone/>
             </a:pPr>
             <a:r>
-              <a:rPr lang="en-US" sz="1600" b="1" dirty="0">
+              <a:rPr lang="en-US" sz="1500" b="1" dirty="0">
                 <a:solidFill>
                   <a:srgbClr val="00357A"/>
                 </a:solidFill>
@@ -17509,12 +17509,12 @@
             </a:r>
             <a:pPr indent="0" marL="0">
               <a:lnSpc>
-                <a:spcPct val="115000"/>
+                <a:spcPct val="112000"/>
               </a:lnSpc>
               <a:buNone/>
             </a:pPr>
             <a:r>
-              <a:rPr lang="en-US" sz="1600" dirty="0">
+              <a:rPr lang="en-US" sz="1500" dirty="0">
                 <a:solidFill>
                   <a:srgbClr val="00357A"/>
                 </a:solidFill>
@@ -17522,16 +17522,16 @@
                 <a:ea typeface="Poppins" pitchFamily="34" charset="-122"/>
                 <a:cs typeface="Poppins" pitchFamily="34" charset="-120"/>
               </a:rPr>
-              <a:t>. It finds Web and Saved files that have never been backed up, groups them into large tar files built by </a:t>
+              <a:t>. It finds files never backed up, bundles them into large tar files with </a:t>
             </a:r>
             <a:pPr indent="0" marL="0">
               <a:lnSpc>
-                <a:spcPct val="115000"/>
+                <a:spcPct val="112000"/>
               </a:lnSpc>
               <a:buNone/>
             </a:pPr>
             <a:r>
-              <a:rPr lang="en-US" sz="1600" b="1" dirty="0">
+              <a:rPr lang="en-US" sz="1500" b="1" dirty="0">
                 <a:solidFill>
                   <a:srgbClr val="0057C2"/>
                 </a:solidFill>
@@ -17543,12 +17543,12 @@
             </a:r>
             <a:pPr indent="0" marL="0">
               <a:lnSpc>
-                <a:spcPct val="115000"/>
+                <a:spcPct val="112000"/>
               </a:lnSpc>
               <a:buNone/>
             </a:pPr>
             <a:r>
-              <a:rPr lang="en-US" sz="1600" dirty="0">
+              <a:rPr lang="en-US" sz="1500" dirty="0">
                 <a:solidFill>
                   <a:srgbClr val="00357A"/>
                 </a:solidFill>
@@ -17556,16 +17556,16 @@
                 <a:ea typeface="Poppins" pitchFamily="34" charset="-122"/>
                 <a:cs typeface="Poppins" pitchFamily="34" charset="-120"/>
               </a:rPr>
-              <a:t>, then uploads many of those tars at once to the NCAR Quasar Globus end points with </a:t>
+              <a:t>, then uploads many tars at once to the Quasar end points with </a:t>
             </a:r>
             <a:pPr indent="0" marL="0">
               <a:lnSpc>
-                <a:spcPct val="115000"/>
+                <a:spcPct val="112000"/>
               </a:lnSpc>
               <a:buNone/>
             </a:pPr>
             <a:r>
-              <a:rPr lang="en-US" sz="1600" b="1" dirty="0">
+              <a:rPr lang="en-US" sz="1500" b="1" dirty="0">
                 <a:solidFill>
                   <a:srgbClr val="0057C2"/>
                 </a:solidFill>
@@ -17577,12 +17577,12 @@
             </a:r>
             <a:pPr indent="0" marL="0">
               <a:lnSpc>
-                <a:spcPct val="115000"/>
+                <a:spcPct val="112000"/>
               </a:lnSpc>
               <a:buNone/>
             </a:pPr>
             <a:r>
-              <a:rPr lang="en-US" sz="1600" dirty="0">
+              <a:rPr lang="en-US" sz="1500" dirty="0">
                 <a:solidFill>
                   <a:srgbClr val="00357A"/>
                 </a:solidFill>
@@ -17592,7 +17592,7 @@
               </a:rPr>
               <a:t>.</a:t>
             </a:r>
-            <a:endParaRPr lang="en-US" sz="1600" dirty="0"/>
+            <a:endParaRPr lang="en-US" sz="1500" dirty="0"/>
           </a:p>
         </p:txBody>
       </p:sp>
@@ -17670,7 +17670,7 @@
         </p:nvSpPr>
         <p:spPr>
           <a:xfrm>
-            <a:off x="685800" y="3931920"/>
+            <a:off x="685800" y="3913632"/>
             <a:ext cx="4434840" cy="2011680"/>
           </a:xfrm>
           <a:prstGeom prst="rect">
@@ -17685,12 +17685,12 @@
           <a:p>
             <a:pPr indent="0" marL="0">
               <a:lnSpc>
-                <a:spcPct val="112000"/>
+                <a:spcPct val="110000"/>
               </a:lnSpc>
               <a:buNone/>
             </a:pPr>
             <a:r>
-              <a:rPr lang="en-US" sz="1300" dirty="0">
+              <a:rPr lang="en-US" sz="1200" dirty="0">
                 <a:solidFill>
                   <a:srgbClr val="00357A"/>
                 </a:solidFill>
@@ -17702,12 +17702,12 @@
             </a:r>
             <a:pPr indent="0" marL="0">
               <a:lnSpc>
-                <a:spcPct val="112000"/>
+                <a:spcPct val="110000"/>
               </a:lnSpc>
               <a:buNone/>
             </a:pPr>
             <a:r>
-              <a:rPr lang="en-US" sz="1300" b="1" dirty="0">
+              <a:rPr lang="en-US" sz="1200" b="1" dirty="0">
                 <a:solidFill>
                   <a:srgbClr val="0057C2"/>
                 </a:solidFill>
@@ -17719,12 +17719,12 @@
             </a:r>
             <a:pPr indent="0" marL="0">
               <a:lnSpc>
-                <a:spcPct val="112000"/>
+                <a:spcPct val="110000"/>
               </a:lnSpc>
               <a:buNone/>
             </a:pPr>
             <a:r>
-              <a:rPr lang="en-US" sz="1300" dirty="0">
+              <a:rPr lang="en-US" sz="1200" dirty="0">
                 <a:solidFill>
                   <a:srgbClr val="00357A"/>
                 </a:solidFill>
@@ -17736,12 +17736,12 @@
             </a:r>
             <a:pPr indent="0" marL="0">
               <a:lnSpc>
-                <a:spcPct val="112000"/>
+                <a:spcPct val="110000"/>
               </a:lnSpc>
               <a:buNone/>
             </a:pPr>
             <a:r>
-              <a:rPr lang="en-US" sz="1300" b="1" dirty="0">
+              <a:rPr lang="en-US" sz="1200" b="1" dirty="0">
                 <a:solidFill>
                   <a:srgbClr val="0057C2"/>
                 </a:solidFill>
@@ -17753,12 +17753,12 @@
             </a:r>
             <a:pPr indent="0" marL="0">
               <a:lnSpc>
-                <a:spcPct val="112000"/>
+                <a:spcPct val="110000"/>
               </a:lnSpc>
               <a:buNone/>
             </a:pPr>
             <a:r>
-              <a:rPr lang="en-US" sz="1300" dirty="0">
+              <a:rPr lang="en-US" sz="1200" dirty="0">
                 <a:solidFill>
                   <a:srgbClr val="00357A"/>
                 </a:solidFill>
@@ -17770,21 +17770,21 @@
             </a:r>
             <a:pPr indent="0" marL="0">
               <a:lnSpc>
-                <a:spcPct val="112000"/>
+                <a:spcPct val="110000"/>
               </a:lnSpc>
               <a:buNone/>
             </a:pPr>
-            <a:endParaRPr lang="en-US" sz="1300" dirty="0"/>
+            <a:endParaRPr lang="en-US" sz="1200" dirty="0"/>
           </a:p>
           <a:p>
             <a:pPr indent="0" marL="0">
               <a:lnSpc>
-                <a:spcPct val="112000"/>
+                <a:spcPct val="110000"/>
               </a:lnSpc>
               <a:buNone/>
             </a:pPr>
             <a:r>
-              <a:rPr lang="en-US" sz="1300" dirty="0">
+              <a:rPr lang="en-US" sz="1200" dirty="0">
                 <a:solidFill>
                   <a:srgbClr val="00357A"/>
                 </a:solidFill>
@@ -17794,17 +17794,17 @@
               </a:rPr>
               <a:t>Any file with </a:t>
             </a:r>
-            <a:endParaRPr lang="en-US" sz="1300" dirty="0"/>
+            <a:endParaRPr lang="en-US" sz="1200" dirty="0"/>
           </a:p>
           <a:p>
             <a:pPr indent="0" marL="0">
               <a:lnSpc>
-                <a:spcPct val="112000"/>
+                <a:spcPct val="110000"/>
               </a:lnSpc>
               <a:buNone/>
             </a:pPr>
             <a:r>
-              <a:rPr lang="en-US" sz="1300" b="1" dirty="0">
+              <a:rPr lang="en-US" sz="1200" b="1" dirty="0">
                 <a:solidFill>
                   <a:srgbClr val="0057C2"/>
                 </a:solidFill>
@@ -17816,12 +17816,12 @@
             </a:r>
             <a:pPr indent="0" marL="0">
               <a:lnSpc>
-                <a:spcPct val="112000"/>
+                <a:spcPct val="110000"/>
               </a:lnSpc>
               <a:buNone/>
             </a:pPr>
             <a:r>
-              <a:rPr lang="en-US" sz="1300" dirty="0">
+              <a:rPr lang="en-US" sz="1200" dirty="0">
                 <a:solidFill>
                   <a:srgbClr val="00357A"/>
                 </a:solidFill>
@@ -17829,25 +17829,25 @@
                 <a:ea typeface="Poppins" pitchFamily="34" charset="-122"/>
                 <a:cs typeface="Poppins" pitchFamily="34" charset="-120"/>
               </a:rPr>
-              <a:t> is not backed up yet and is picked up automatically.</a:t>
+              <a:t> is not backed up yet, and is picked up automatically.</a:t>
             </a:r>
             <a:pPr indent="0" marL="0">
               <a:lnSpc>
-                <a:spcPct val="112000"/>
+                <a:spcPct val="110000"/>
               </a:lnSpc>
               <a:buNone/>
             </a:pPr>
-            <a:endParaRPr lang="en-US" sz="1300" dirty="0"/>
+            <a:endParaRPr lang="en-US" sz="1200" dirty="0"/>
           </a:p>
           <a:p>
             <a:pPr indent="0" marL="0">
               <a:lnSpc>
-                <a:spcPct val="112000"/>
+                <a:spcPct val="110000"/>
               </a:lnSpc>
               <a:buNone/>
             </a:pPr>
             <a:r>
-              <a:rPr lang="en-US" sz="1300" dirty="0">
+              <a:rPr lang="en-US" sz="1200" dirty="0">
                 <a:solidFill>
                   <a:srgbClr val="00357A"/>
                 </a:solidFill>
@@ -17855,19 +17855,19 @@
                 <a:ea typeface="Poppins" pitchFamily="34" charset="-122"/>
                 <a:cs typeface="Poppins" pitchFamily="34" charset="-120"/>
               </a:rPr>
-              <a:t>Every tar file gets a </a:t>
-            </a:r>
-            <a:endParaRPr lang="en-US" sz="1300" dirty="0"/>
+              <a:t>Every tar gets a </a:t>
+            </a:r>
+            <a:endParaRPr lang="en-US" sz="1200" dirty="0"/>
           </a:p>
           <a:p>
             <a:pPr indent="0" marL="0">
               <a:lnSpc>
-                <a:spcPct val="112000"/>
+                <a:spcPct val="110000"/>
               </a:lnSpc>
               <a:buNone/>
             </a:pPr>
             <a:r>
-              <a:rPr lang="en-US" sz="1300" b="1" dirty="0">
+              <a:rPr lang="en-US" sz="1200" b="1" dirty="0">
                 <a:solidFill>
                   <a:srgbClr val="0057C2"/>
                 </a:solidFill>
@@ -17879,12 +17879,12 @@
             </a:r>
             <a:pPr indent="0" marL="0">
               <a:lnSpc>
-                <a:spcPct val="112000"/>
+                <a:spcPct val="110000"/>
               </a:lnSpc>
               <a:buNone/>
             </a:pPr>
             <a:r>
-              <a:rPr lang="en-US" sz="1300" dirty="0">
+              <a:rPr lang="en-US" sz="1200" dirty="0">
                 <a:solidFill>
                   <a:srgbClr val="00357A"/>
                 </a:solidFill>
@@ -17896,21 +17896,21 @@
             </a:r>
             <a:pPr indent="0" marL="0">
               <a:lnSpc>
-                <a:spcPct val="112000"/>
+                <a:spcPct val="110000"/>
               </a:lnSpc>
               <a:buNone/>
             </a:pPr>
-            <a:endParaRPr lang="en-US" sz="1300" dirty="0"/>
+            <a:endParaRPr lang="en-US" sz="1200" dirty="0"/>
           </a:p>
           <a:p>
             <a:pPr indent="0" marL="0">
               <a:lnSpc>
-                <a:spcPct val="112000"/>
+                <a:spcPct val="110000"/>
               </a:lnSpc>
               <a:buNone/>
             </a:pPr>
             <a:r>
-              <a:rPr lang="en-US" sz="1300" dirty="0">
+              <a:rPr lang="en-US" sz="1200" dirty="0">
                 <a:solidFill>
                   <a:srgbClr val="00357A"/>
                 </a:solidFill>
@@ -17918,9 +17918,9 @@
                 <a:ea typeface="Poppins" pitchFamily="34" charset="-122"/>
                 <a:cs typeface="Poppins" pitchFamily="34" charset="-120"/>
               </a:rPr>
-              <a:t>Work is resumable: a run that stops leaves the pending records for the next run.</a:t>
-            </a:r>
-            <a:endParaRPr lang="en-US" sz="1300" dirty="0"/>
+              <a:t>Work is resumable: a run that stops leaves its pending records behind.</a:t>
+            </a:r>
+            <a:endParaRPr lang="en-US" sz="1200" dirty="0"/>
           </a:p>
         </p:txBody>
       </p:sp>
@@ -19318,8 +19318,8 @@
         </p:nvSpPr>
         <p:spPr>
           <a:xfrm>
-            <a:off x="640080" y="2926080"/>
-            <a:ext cx="2377440" cy="1371600"/>
+            <a:off x="640080" y="2907792"/>
+            <a:ext cx="2377440" cy="1417320"/>
           </a:xfrm>
           <a:prstGeom prst="rect">
             <a:avLst/>
@@ -19333,12 +19333,12 @@
           <a:p>
             <a:pPr indent="0" marL="0">
               <a:lnSpc>
-                <a:spcPct val="108000"/>
+                <a:spcPct val="105000"/>
               </a:lnSpc>
               <a:buNone/>
             </a:pPr>
             <a:r>
-              <a:rPr lang="en-US" sz="1100" dirty="0">
+              <a:rPr lang="en-US" sz="1050" dirty="0">
                 <a:solidFill>
                   <a:srgbClr val="53565A"/>
                 </a:solidFill>
@@ -19348,7 +19348,7 @@
               </a:rPr>
               <a:t>The dataset is locked before its files are gathered or its tars are built, and unlocked as soon as that dataset is finished.</a:t>
             </a:r>
-            <a:endParaRPr lang="en-US" sz="1100" dirty="0"/>
+            <a:endParaRPr lang="en-US" sz="1050" dirty="0"/>
           </a:p>
         </p:txBody>
       </p:sp>
@@ -19448,8 +19448,8 @@
         </p:nvSpPr>
         <p:spPr>
           <a:xfrm>
-            <a:off x="3483864" y="2926080"/>
-            <a:ext cx="2377440" cy="1371600"/>
+            <a:off x="3483864" y="2907792"/>
+            <a:ext cx="2377440" cy="1417320"/>
           </a:xfrm>
           <a:prstGeom prst="rect">
             <a:avLst/>
@@ -19463,12 +19463,12 @@
           <a:p>
             <a:pPr indent="0" marL="0">
               <a:lnSpc>
-                <a:spcPct val="108000"/>
+                <a:spcPct val="105000"/>
               </a:lnSpc>
               <a:buNone/>
             </a:pPr>
             <a:r>
-              <a:rPr lang="en-US" sz="1100" dirty="0">
+              <a:rPr lang="en-US" sz="1050" dirty="0">
                 <a:solidFill>
                   <a:srgbClr val="53565A"/>
                 </a:solidFill>
@@ -19478,7 +19478,7 @@
               </a:rPr>
               <a:t>Work is listed before the lock is held, so the list can be hours old. Each candidate is re-read under the lock — still status 'N'? — before a tar is spent on it.</a:t>
             </a:r>
-            <a:endParaRPr lang="en-US" sz="1100" dirty="0"/>
+            <a:endParaRPr lang="en-US" sz="1050" dirty="0"/>
           </a:p>
         </p:txBody>
       </p:sp>
@@ -19578,8 +19578,8 @@
         </p:nvSpPr>
         <p:spPr>
           <a:xfrm>
-            <a:off x="6327648" y="2926080"/>
-            <a:ext cx="2377440" cy="1371600"/>
+            <a:off x="6327648" y="2907792"/>
+            <a:ext cx="2377440" cy="1417320"/>
           </a:xfrm>
           <a:prstGeom prst="rect">
             <a:avLst/>
@@ -19593,12 +19593,12 @@
           <a:p>
             <a:pPr indent="0" marL="0">
               <a:lnSpc>
-                <a:spcPct val="108000"/>
+                <a:spcPct val="105000"/>
               </a:lnSpc>
               <a:buNone/>
             </a:pPr>
             <a:r>
-              <a:rPr lang="en-US" sz="1100" dirty="0">
+              <a:rPr lang="en-US" sz="1050" dirty="0">
                 <a:solidFill>
                   <a:srgbClr val="53565A"/>
                 </a:solidFill>
@@ -19606,9 +19606,9 @@
                 <a:ea typeface="Poppins" pitchFamily="34" charset="-122"/>
                 <a:cs typeface="Poppins" pitchFamily="34" charset="-120"/>
               </a:rPr>
-              <a:t>One tar file may hold files from many datasets. All of them are locked before tarring and released once the tar is dispatched; if any is held elsewhere, the tar waits for a later run.</a:t>
-            </a:r>
-            <a:endParaRPr lang="en-US" sz="1100" dirty="0"/>
+              <a:t>One tar may hold files from many datasets. All are locked before tarring and released once it is dispatched; if any is held elsewhere, the tar waits.</a:t>
+            </a:r>
+            <a:endParaRPr lang="en-US" sz="1050" dirty="0"/>
           </a:p>
         </p:txBody>
       </p:sp>
@@ -19708,8 +19708,8 @@
         </p:nvSpPr>
         <p:spPr>
           <a:xfrm>
-            <a:off x="9171432" y="2926080"/>
-            <a:ext cx="2377440" cy="1371600"/>
+            <a:off x="9171432" y="2907792"/>
+            <a:ext cx="2377440" cy="1417320"/>
           </a:xfrm>
           <a:prstGeom prst="rect">
             <a:avLst/>
@@ -19723,12 +19723,12 @@
           <a:p>
             <a:pPr indent="0" marL="0">
               <a:lnSpc>
-                <a:spcPct val="108000"/>
+                <a:spcPct val="105000"/>
               </a:lnSpc>
               <a:buNone/>
             </a:pPr>
             <a:r>
-              <a:rPr lang="en-US" sz="1100" dirty="0">
+              <a:rPr lang="en-US" sz="1050" dirty="0">
                 <a:solidFill>
                   <a:srgbClr val="53565A"/>
                 </a:solidFill>
@@ -19736,9 +19736,9 @@
                 <a:ea typeface="Poppins" pitchFamily="34" charset="-122"/>
                 <a:cs typeface="Poppins" pitchFamily="34" charset="-120"/>
               </a:rPr>
-              <a:t>The predicted bid is only a guess. The insert uses AUTOID and the tar is renamed if the database hands back a different id.</a:t>
-            </a:r>
-            <a:endParaRPr lang="en-US" sz="1100" dirty="0"/>
+              <a:t>The predicted bid is only a guess. The insert uses AUTOID and the tar is renamed if the database returns a different id.</a:t>
+            </a:r>
+            <a:endParaRPr lang="en-US" sz="1050" dirty="0"/>
           </a:p>
         </p:txBody>
       </p:sp>
@@ -26315,8 +26315,8 @@
         </p:nvSpPr>
         <p:spPr>
           <a:xfrm>
-            <a:off x="457200" y="6016752"/>
-            <a:ext cx="11292840" cy="274320"/>
+            <a:off x="457200" y="5961888"/>
+            <a:ext cx="11292840" cy="292608"/>
           </a:xfrm>
           <a:prstGeom prst="rect">
             <a:avLst/>
@@ -26340,7 +26340,7 @@
                 <a:ea typeface="Poppins" pitchFamily="34" charset="-122"/>
                 <a:cs typeface="Poppins" pitchFamily="34" charset="-120"/>
               </a:rPr>
-              <a:t>All three are installed by the rda_python_dsquasar package and share the rda_python_common configuration.   Backup flags are edited at </a:t>
+              <a:t>All three ship with rda_python_dsquasar.   Backup flags are edited at </a:t>
             </a:r>
             <a:pPr indent="0" marL="0">
               <a:buNone/>
@@ -26712,7 +26712,7 @@
                 <a:ea typeface="Poppins" pitchFamily="34" charset="-122"/>
                 <a:cs typeface="Poppins" pitchFamily="34" charset="-120"/>
               </a:rPr>
-              <a:t>The dataset or group backflag is not set, or the group flag is 'N'. Confirm with  dsquasar -t &lt;dsid&gt; -n  before digging further.</a:t>
+              <a:t>The dataset or group backflag is not set. Check with  dsquasar -t &lt;dsid&gt; -n  first.</a:t>
             </a:r>
             <a:endParaRPr lang="en-US" sz="1100" dirty="0"/>
           </a:p>
@@ -26837,7 +26837,7 @@
                 <a:ea typeface="Poppins" pitchFamily="34" charset="-122"/>
                 <a:cs typeface="Poppins" pitchFamily="34" charset="-120"/>
               </a:rPr>
-              <a:t>That is the duplicate check working — an identical command is already queued or running. Check the dscheck record before forcing anything.</a:t>
+              <a:t>The duplicate check working: an identical command is already queued or running.</a:t>
             </a:r>
             <a:endParaRPr lang="en-US" sz="1100" dirty="0"/>
           </a:p>
@@ -26962,7 +26962,7 @@
                 <a:ea typeface="Poppins" pitchFamily="34" charset="-122"/>
                 <a:cs typeface="Poppins" pitchFamily="34" charset="-120"/>
               </a:rPr>
-              <a:t>Tarring never reached them: the run hit the 23-hour guard, or the dataset was locked by another worker. Both resolve on the next run.</a:t>
+              <a:t>Tarring never reached them — the 23-hour guard, or the dataset was locked. Resolves next run.</a:t>
             </a:r>
             <a:endParaRPr lang="en-US" sz="1100" dirty="0"/>
           </a:p>
@@ -27087,7 +27087,7 @@
                 <a:ea typeface="Poppins" pitchFamily="34" charset="-122"/>
                 <a:cs typeface="Poppins" pitchFamily="34" charset="-120"/>
               </a:rPr>
-              <a:t>The tar was built but not transferred. Run  -A 4  for that dataset. If the local tar is gone, the record is reset to 'N' and rebuilt.</a:t>
+              <a:t>Built but not transferred. Run  -A 4 . If the local tar is gone the record resets to 'N'.</a:t>
             </a:r>
             <a:endParaRPr lang="en-US" sz="1100" dirty="0"/>
           </a:p>
@@ -27212,7 +27212,7 @@
                 <a:ea typeface="Poppins" pitchFamily="34" charset="-122"/>
                 <a:cs typeface="Poppins" pitchFamily="34" charset="-120"/>
               </a:rPr>
-              <a:t>Run  -A 8  — mismatched records are reset to 'N' and redone from the archive on the next gather.</a:t>
+              <a:t>Run  -A 8  — mismatched records reset to 'N' and are redone from the archive.</a:t>
             </a:r>
             <a:endParaRPr lang="en-US" sz="1100" dirty="0"/>
           </a:p>
@@ -27337,7 +27337,7 @@
                 <a:ea typeface="Poppins" pitchFamily="34" charset="-122"/>
                 <a:cs typeface="Poppins" pitchFamily="34" charset="-120"/>
               </a:rPr>
-              <a:t>Locks held by a dead process are taken over automatically. To clear them now:  dsquasar -t &lt;dsid&gt; -u</a:t>
+              <a:t>Dead-process locks are taken over automatically. To clear now:  dsquasar -t &lt;dsid&gt; -u</a:t>
             </a:r>
             <a:endParaRPr lang="en-US" sz="1100" dirty="0"/>
           </a:p>
@@ -27961,7 +27961,7 @@
         <p:spPr>
           <a:xfrm>
             <a:off x="6537960" y="2542032"/>
-            <a:ext cx="5029200" cy="548640"/>
+            <a:ext cx="5029200" cy="502920"/>
           </a:xfrm>
           <a:prstGeom prst="rect">
             <a:avLst/>
@@ -27980,7 +27980,7 @@
               <a:buNone/>
             </a:pPr>
             <a:r>
-              <a:rPr lang="en-US" sz="1150" dirty="0">
+              <a:rPr lang="en-US" sz="1100" dirty="0">
                 <a:solidFill>
                   <a:srgbClr val="53565A"/>
                 </a:solidFill>
@@ -27988,9 +27988,9 @@
                 <a:ea typeface="Poppins" pitchFamily="34" charset="-122"/>
                 <a:cs typeface="Poppins" pitchFamily="34" charset="-120"/>
               </a:rPr>
-              <a:t>Every tar goes to both end points by default. Drdata is written first, so a run interrupted midway still leaves the disaster-recovery copy complete.</a:t>
-            </a:r>
-            <a:endParaRPr lang="en-US" sz="1150" dirty="0"/>
+              <a:t>Every tar goes to both end points by default. Drdata is written first, so an interrupted run still leaves the DR copy complete.</a:t>
+            </a:r>
+            <a:endParaRPr lang="en-US" sz="1100" dirty="0"/>
           </a:p>
         </p:txBody>
       </p:sp>
@@ -28009,7 +28009,7 @@
           </p:nvPr>
         </p:nvGraphicFramePr>
         <p:xfrm>
-          <a:off x="6537960" y="3154680"/>
+          <a:off x="6537960" y="3127248"/>
           <a:ext cx="5029200" cy="914400"/>
         </p:xfrm>
         <a:graphic>
@@ -30098,7 +30098,7 @@
               <a:buNone/>
             </a:pPr>
             <a:r>
-              <a:rPr lang="en-US" sz="1400" dirty="0">
+              <a:rPr lang="en-US" sz="1400" b="1" dirty="0">
                 <a:solidFill>
                   <a:srgbClr val="42C0FF"/>
                 </a:solidFill>
@@ -30106,7 +30106,21 @@
                 <a:ea typeface="Courier New" pitchFamily="34" charset="-122"/>
                 <a:cs typeface="Courier New" pitchFamily="34" charset="-120"/>
               </a:rPr>
-              <a:t>dsquasar -h        for the full help document</a:t>
+              <a:t>dsquasar -h</a:t>
+            </a:r>
+            <a:pPr indent="0" marL="0">
+              <a:buNone/>
+            </a:pPr>
+            <a:r>
+              <a:rPr lang="en-US" sz="1400" dirty="0">
+                <a:solidFill>
+                  <a:srgbClr val="42C0FF"/>
+                </a:solidFill>
+                <a:latin typeface="Poppins" pitchFamily="34" charset="0"/>
+                <a:ea typeface="Poppins" pitchFamily="34" charset="-122"/>
+                <a:cs typeface="Poppins" pitchFamily="34" charset="-120"/>
+              </a:rPr>
+              <a:t>   •   for the full help document</a:t>
             </a:r>
             <a:endParaRPr lang="en-US" sz="1400" dirty="0"/>
           </a:p>
@@ -35456,11 +35470,11 @@
         <p:spPr>
           <a:xfrm>
             <a:off x="457200" y="1554480"/>
-            <a:ext cx="5532120" cy="1463040"/>
+            <a:ext cx="5532120" cy="1371600"/>
           </a:xfrm>
           <a:prstGeom prst="roundRect">
             <a:avLst>
-              <a:gd name="adj" fmla="val 5000"/>
+              <a:gd name="adj" fmla="val 5333"/>
             </a:avLst>
           </a:prstGeom>
           <a:solidFill>
@@ -35629,7 +35643,7 @@
         </p:nvSpPr>
         <p:spPr>
           <a:xfrm>
-            <a:off x="658368" y="2487168"/>
+            <a:off x="658368" y="2395728"/>
             <a:ext cx="5129784" cy="420624"/>
           </a:xfrm>
           <a:prstGeom prst="roundRect">
@@ -35651,7 +35665,7 @@
         </p:nvSpPr>
         <p:spPr>
           <a:xfrm>
-            <a:off x="786384" y="2487168"/>
+            <a:off x="786384" y="2395728"/>
             <a:ext cx="4873752" cy="420624"/>
           </a:xfrm>
           <a:prstGeom prst="rect">
@@ -35694,11 +35708,11 @@
         <p:spPr>
           <a:xfrm>
             <a:off x="6199632" y="1554480"/>
-            <a:ext cx="5532120" cy="1463040"/>
+            <a:ext cx="5532120" cy="1371600"/>
           </a:xfrm>
           <a:prstGeom prst="roundRect">
             <a:avLst>
-              <a:gd name="adj" fmla="val 5000"/>
+              <a:gd name="adj" fmla="val 5333"/>
             </a:avLst>
           </a:prstGeom>
           <a:solidFill>
@@ -35867,7 +35881,7 @@
         </p:nvSpPr>
         <p:spPr>
           <a:xfrm>
-            <a:off x="6400800" y="2487168"/>
+            <a:off x="6400800" y="2395728"/>
             <a:ext cx="5129784" cy="420624"/>
           </a:xfrm>
           <a:prstGeom prst="roundRect">
@@ -35889,7 +35903,7 @@
         </p:nvSpPr>
         <p:spPr>
           <a:xfrm>
-            <a:off x="6528816" y="2487168"/>
+            <a:off x="6528816" y="2395728"/>
             <a:ext cx="4873752" cy="420624"/>
           </a:xfrm>
           <a:prstGeom prst="rect">
@@ -35931,12 +35945,12 @@
         </p:nvSpPr>
         <p:spPr>
           <a:xfrm>
-            <a:off x="457200" y="3145536"/>
-            <a:ext cx="5532120" cy="1463040"/>
+            <a:off x="457200" y="3035808"/>
+            <a:ext cx="5532120" cy="1371600"/>
           </a:xfrm>
           <a:prstGeom prst="roundRect">
             <a:avLst>
-              <a:gd name="adj" fmla="val 5000"/>
+              <a:gd name="adj" fmla="val 5333"/>
             </a:avLst>
           </a:prstGeom>
           <a:solidFill>
@@ -35965,7 +35979,7 @@
         </p:nvSpPr>
         <p:spPr>
           <a:xfrm>
-            <a:off x="658368" y="3328416"/>
+            <a:off x="658368" y="3218688"/>
             <a:ext cx="457200" cy="457200"/>
           </a:xfrm>
           <a:prstGeom prst="ellipse">
@@ -35985,7 +35999,7 @@
         </p:nvSpPr>
         <p:spPr>
           <a:xfrm>
-            <a:off x="658368" y="3328416"/>
+            <a:off x="658368" y="3218688"/>
             <a:ext cx="457200" cy="457200"/>
           </a:xfrm>
           <a:prstGeom prst="rect">
@@ -36024,7 +36038,7 @@
         </p:nvSpPr>
         <p:spPr>
           <a:xfrm>
-            <a:off x="1234440" y="3291840"/>
+            <a:off x="1234440" y="3182112"/>
             <a:ext cx="4572000" cy="365760"/>
           </a:xfrm>
           <a:prstGeom prst="rect">
@@ -36063,7 +36077,7 @@
         </p:nvSpPr>
         <p:spPr>
           <a:xfrm>
-            <a:off x="1234440" y="3648456"/>
+            <a:off x="1234440" y="3538728"/>
             <a:ext cx="4572000" cy="365760"/>
           </a:xfrm>
           <a:prstGeom prst="rect">
@@ -36105,7 +36119,7 @@
         </p:nvSpPr>
         <p:spPr>
           <a:xfrm>
-            <a:off x="658368" y="4078224"/>
+            <a:off x="658368" y="3877056"/>
             <a:ext cx="5129784" cy="420624"/>
           </a:xfrm>
           <a:prstGeom prst="roundRect">
@@ -36127,7 +36141,7 @@
         </p:nvSpPr>
         <p:spPr>
           <a:xfrm>
-            <a:off x="786384" y="4078224"/>
+            <a:off x="786384" y="3877056"/>
             <a:ext cx="4873752" cy="420624"/>
           </a:xfrm>
           <a:prstGeom prst="rect">
@@ -36169,12 +36183,12 @@
         </p:nvSpPr>
         <p:spPr>
           <a:xfrm>
-            <a:off x="6199632" y="3145536"/>
-            <a:ext cx="5532120" cy="1463040"/>
+            <a:off x="6199632" y="3035808"/>
+            <a:ext cx="5532120" cy="1371600"/>
           </a:xfrm>
           <a:prstGeom prst="roundRect">
             <a:avLst>
-              <a:gd name="adj" fmla="val 5000"/>
+              <a:gd name="adj" fmla="val 5333"/>
             </a:avLst>
           </a:prstGeom>
           <a:solidFill>
@@ -36203,7 +36217,7 @@
         </p:nvSpPr>
         <p:spPr>
           <a:xfrm>
-            <a:off x="6400800" y="3328416"/>
+            <a:off x="6400800" y="3218688"/>
             <a:ext cx="457200" cy="457200"/>
           </a:xfrm>
           <a:prstGeom prst="ellipse">
@@ -36223,7 +36237,7 @@
         </p:nvSpPr>
         <p:spPr>
           <a:xfrm>
-            <a:off x="6400800" y="3328416"/>
+            <a:off x="6400800" y="3218688"/>
             <a:ext cx="457200" cy="457200"/>
           </a:xfrm>
           <a:prstGeom prst="rect">
@@ -36262,7 +36276,7 @@
         </p:nvSpPr>
         <p:spPr>
           <a:xfrm>
-            <a:off x="6976872" y="3291840"/>
+            <a:off x="6976872" y="3182112"/>
             <a:ext cx="4572000" cy="365760"/>
           </a:xfrm>
           <a:prstGeom prst="rect">
@@ -36301,7 +36315,7 @@
         </p:nvSpPr>
         <p:spPr>
           <a:xfrm>
-            <a:off x="6976872" y="3648456"/>
+            <a:off x="6976872" y="3538728"/>
             <a:ext cx="4572000" cy="365760"/>
           </a:xfrm>
           <a:prstGeom prst="rect">
@@ -36329,7 +36343,7 @@
                 <a:ea typeface="Poppins" pitchFamily="34" charset="-122"/>
                 <a:cs typeface="Poppins" pitchFamily="34" charset="-120"/>
               </a:rPr>
-              <a:t>All flagged datasets, in the background, as a PBS batch job with email.</a:t>
+              <a:t>All flagged datasets, as a PBS batch job with email.</a:t>
             </a:r>
             <a:endParaRPr lang="en-US" sz="1150" dirty="0"/>
           </a:p>
@@ -36343,7 +36357,7 @@
         </p:nvSpPr>
         <p:spPr>
           <a:xfrm>
-            <a:off x="6400800" y="4078224"/>
+            <a:off x="6400800" y="3877056"/>
             <a:ext cx="5129784" cy="420624"/>
           </a:xfrm>
           <a:prstGeom prst="roundRect">
@@ -36365,7 +36379,7 @@
         </p:nvSpPr>
         <p:spPr>
           <a:xfrm>
-            <a:off x="6528816" y="4078224"/>
+            <a:off x="6528816" y="3877056"/>
             <a:ext cx="4873752" cy="420624"/>
           </a:xfrm>
           <a:prstGeom prst="rect">
@@ -36407,12 +36421,12 @@
         </p:nvSpPr>
         <p:spPr>
           <a:xfrm>
-            <a:off x="457200" y="4736592"/>
-            <a:ext cx="5532120" cy="1463040"/>
+            <a:off x="457200" y="4517136"/>
+            <a:ext cx="5532120" cy="1371600"/>
           </a:xfrm>
           <a:prstGeom prst="roundRect">
             <a:avLst>
-              <a:gd name="adj" fmla="val 5000"/>
+              <a:gd name="adj" fmla="val 5333"/>
             </a:avLst>
           </a:prstGeom>
           <a:solidFill>
@@ -36441,7 +36455,7 @@
         </p:nvSpPr>
         <p:spPr>
           <a:xfrm>
-            <a:off x="658368" y="4919472"/>
+            <a:off x="658368" y="4700016"/>
             <a:ext cx="457200" cy="457200"/>
           </a:xfrm>
           <a:prstGeom prst="ellipse">
@@ -36461,7 +36475,7 @@
         </p:nvSpPr>
         <p:spPr>
           <a:xfrm>
-            <a:off x="658368" y="4919472"/>
+            <a:off x="658368" y="4700016"/>
             <a:ext cx="457200" cy="457200"/>
           </a:xfrm>
           <a:prstGeom prst="rect">
@@ -36500,7 +36514,7 @@
         </p:nvSpPr>
         <p:spPr>
           <a:xfrm>
-            <a:off x="1234440" y="4882896"/>
+            <a:off x="1234440" y="4663440"/>
             <a:ext cx="4572000" cy="365760"/>
           </a:xfrm>
           <a:prstGeom prst="rect">
@@ -36539,7 +36553,7 @@
         </p:nvSpPr>
         <p:spPr>
           <a:xfrm>
-            <a:off x="1234440" y="5239512"/>
+            <a:off x="1234440" y="5020056"/>
             <a:ext cx="4572000" cy="365760"/>
           </a:xfrm>
           <a:prstGeom prst="rect">
@@ -36581,7 +36595,7 @@
         </p:nvSpPr>
         <p:spPr>
           <a:xfrm>
-            <a:off x="658368" y="5669280"/>
+            <a:off x="658368" y="5358384"/>
             <a:ext cx="5129784" cy="420624"/>
           </a:xfrm>
           <a:prstGeom prst="roundRect">
@@ -36603,7 +36617,7 @@
         </p:nvSpPr>
         <p:spPr>
           <a:xfrm>
-            <a:off x="786384" y="5669280"/>
+            <a:off x="786384" y="5358384"/>
             <a:ext cx="4873752" cy="420624"/>
           </a:xfrm>
           <a:prstGeom prst="rect">
@@ -36645,12 +36659,12 @@
         </p:nvSpPr>
         <p:spPr>
           <a:xfrm>
-            <a:off x="6199632" y="4736592"/>
-            <a:ext cx="5532120" cy="1463040"/>
+            <a:off x="6199632" y="4517136"/>
+            <a:ext cx="5532120" cy="1371600"/>
           </a:xfrm>
           <a:prstGeom prst="roundRect">
             <a:avLst>
-              <a:gd name="adj" fmla="val 5000"/>
+              <a:gd name="adj" fmla="val 5333"/>
             </a:avLst>
           </a:prstGeom>
           <a:solidFill>
@@ -36679,7 +36693,7 @@
         </p:nvSpPr>
         <p:spPr>
           <a:xfrm>
-            <a:off x="6400800" y="4919472"/>
+            <a:off x="6400800" y="4700016"/>
             <a:ext cx="457200" cy="457200"/>
           </a:xfrm>
           <a:prstGeom prst="ellipse">
@@ -36699,7 +36713,7 @@
         </p:nvSpPr>
         <p:spPr>
           <a:xfrm>
-            <a:off x="6400800" y="4919472"/>
+            <a:off x="6400800" y="4700016"/>
             <a:ext cx="457200" cy="457200"/>
           </a:xfrm>
           <a:prstGeom prst="rect">
@@ -36738,7 +36752,7 @@
         </p:nvSpPr>
         <p:spPr>
           <a:xfrm>
-            <a:off x="6976872" y="4882896"/>
+            <a:off x="6976872" y="4663440"/>
             <a:ext cx="4572000" cy="365760"/>
           </a:xfrm>
           <a:prstGeom prst="rect">
@@ -36777,7 +36791,7 @@
         </p:nvSpPr>
         <p:spPr>
           <a:xfrm>
-            <a:off x="6976872" y="5239512"/>
+            <a:off x="6976872" y="5020056"/>
             <a:ext cx="4572000" cy="365760"/>
           </a:xfrm>
           <a:prstGeom prst="rect">
@@ -36819,7 +36833,7 @@
         </p:nvSpPr>
         <p:spPr>
           <a:xfrm>
-            <a:off x="6400800" y="5669280"/>
+            <a:off x="6400800" y="5358384"/>
             <a:ext cx="5129784" cy="420624"/>
           </a:xfrm>
           <a:prstGeom prst="roundRect">
@@ -36841,7 +36855,7 @@
         </p:nvSpPr>
         <p:spPr>
           <a:xfrm>
-            <a:off x="6528816" y="5669280"/>
+            <a:off x="6528816" y="5358384"/>
             <a:ext cx="4873752" cy="420624"/>
           </a:xfrm>
           <a:prstGeom prst="rect">
@@ -36883,8 +36897,8 @@
         </p:nvSpPr>
         <p:spPr>
           <a:xfrm>
-            <a:off x="457200" y="6053328"/>
-            <a:ext cx="11274552" cy="365760"/>
+            <a:off x="457200" y="5989320"/>
+            <a:ext cx="11274552" cy="320040"/>
           </a:xfrm>
           <a:prstGeom prst="rect">
             <a:avLst/>
@@ -36950,7 +36964,7 @@
                 <a:ea typeface="Poppins" pitchFamily="34" charset="-122"/>
                 <a:cs typeface="Poppins" pitchFamily="34" charset="-120"/>
               </a:rPr>
-              <a:t>, so re-running a command never re-backs up work that already succeeded.</a:t>
+              <a:t>, so re-running never redoes finished work.</a:t>
             </a:r>
             <a:endParaRPr lang="en-US" sz="1300" dirty="0"/>
           </a:p>
@@ -37176,8 +37190,8 @@
         </p:nvSpPr>
         <p:spPr>
           <a:xfrm>
-            <a:off x="457200" y="1463040"/>
-            <a:ext cx="5532120" cy="621792"/>
+            <a:off x="457200" y="1444752"/>
+            <a:ext cx="5532120" cy="548640"/>
           </a:xfrm>
           <a:prstGeom prst="rect">
             <a:avLst/>
@@ -37191,12 +37205,12 @@
           <a:p>
             <a:pPr indent="0" marL="0">
               <a:lnSpc>
-                <a:spcPct val="108000"/>
+                <a:spcPct val="106000"/>
               </a:lnSpc>
               <a:buNone/>
             </a:pPr>
             <a:r>
-              <a:rPr lang="en-US" sz="1300" dirty="0">
+              <a:rPr lang="en-US" sz="1250" dirty="0">
                 <a:solidFill>
                   <a:srgbClr val="00357A"/>
                 </a:solidFill>
@@ -37208,12 +37222,12 @@
             </a:r>
             <a:pPr indent="0" marL="0">
               <a:lnSpc>
-                <a:spcPct val="108000"/>
+                <a:spcPct val="106000"/>
               </a:lnSpc>
               <a:buNone/>
             </a:pPr>
             <a:r>
-              <a:rPr lang="en-US" sz="1300" b="1" dirty="0">
+              <a:rPr lang="en-US" sz="1250" b="1" dirty="0">
                 <a:solidFill>
                   <a:srgbClr val="0057C2"/>
                 </a:solidFill>
@@ -37225,12 +37239,12 @@
             </a:r>
             <a:pPr indent="0" marL="0">
               <a:lnSpc>
-                <a:spcPct val="108000"/>
+                <a:spcPct val="106000"/>
               </a:lnSpc>
               <a:buNone/>
             </a:pPr>
             <a:r>
-              <a:rPr lang="en-US" sz="1300" dirty="0">
+              <a:rPr lang="en-US" sz="1250" dirty="0">
                 <a:solidFill>
                   <a:srgbClr val="00357A"/>
                 </a:solidFill>
@@ -37238,9 +37252,9 @@
                 <a:ea typeface="Poppins" pitchFamily="34" charset="-122"/>
                 <a:cs typeface="Poppins" pitchFamily="34" charset="-120"/>
               </a:rPr>
-              <a:t>. That one field is the switch — dsquasar reads it for every dataset it visits, and nothing else enrolls a dataset.</a:t>
-            </a:r>
-            <a:endParaRPr lang="en-US" sz="1300" dirty="0"/>
+              <a:t> — that one field is the switch, nothing else enrolls a dataset.</a:t>
+            </a:r>
+            <a:endParaRPr lang="en-US" sz="1250" dirty="0"/>
           </a:p>
         </p:txBody>
       </p:sp>
@@ -37259,7 +37273,7 @@
           </p:nvPr>
         </p:nvGraphicFramePr>
         <p:xfrm>
-          <a:off x="457200" y="2121408"/>
+          <a:off x="457200" y="2057400"/>
           <a:ext cx="5532120" cy="914400"/>
         </p:xfrm>
         <a:graphic>
@@ -37972,8 +37986,8 @@
         </p:nvSpPr>
         <p:spPr>
           <a:xfrm>
-            <a:off x="457200" y="4023360"/>
-            <a:ext cx="5532120" cy="777240"/>
+            <a:off x="457200" y="3950208"/>
+            <a:ext cx="5532120" cy="731520"/>
           </a:xfrm>
           <a:prstGeom prst="rect">
             <a:avLst/>
@@ -38133,12 +38147,12 @@
         </p:nvSpPr>
         <p:spPr>
           <a:xfrm>
-            <a:off x="457200" y="4846320"/>
-            <a:ext cx="5532120" cy="713232"/>
+            <a:off x="457200" y="4754880"/>
+            <a:ext cx="5532120" cy="1298448"/>
           </a:xfrm>
           <a:prstGeom prst="roundRect">
             <a:avLst>
-              <a:gd name="adj" fmla="val 11538"/>
+              <a:gd name="adj" fmla="val 6338"/>
             </a:avLst>
           </a:prstGeom>
           <a:solidFill>
@@ -38160,8 +38174,8 @@
         </p:nvSpPr>
         <p:spPr>
           <a:xfrm>
-            <a:off x="658368" y="4846320"/>
-            <a:ext cx="5120640" cy="713232"/>
+            <a:off x="658368" y="4754880"/>
+            <a:ext cx="5120640" cy="1298448"/>
           </a:xfrm>
           <a:prstGeom prst="rect">
             <a:avLst/>
@@ -38175,7 +38189,7 @@
           <a:p>
             <a:pPr indent="0" marL="0">
               <a:lnSpc>
-                <a:spcPct val="105000"/>
+                <a:spcPct val="115000"/>
               </a:lnSpc>
               <a:buNone/>
             </a:pPr>
@@ -38188,11 +38202,29 @@
                 <a:ea typeface="Poppins" pitchFamily="34" charset="-122"/>
                 <a:cs typeface="Poppins" pitchFamily="34" charset="-120"/>
               </a:rPr>
-              <a:t>Set it in the web config tool:  </a:t>
+              <a:t>Set the flag in the web config tool</a:t>
             </a:r>
             <a:pPr indent="0" marL="0">
               <a:lnSpc>
-                <a:spcPct val="105000"/>
+                <a:spcPct val="115000"/>
+              </a:lnSpc>
+              <a:buNone/>
+            </a:pPr>
+            <a:r>
+              <a:rPr lang="en-US" sz="1100" dirty="0">
+                <a:solidFill>
+                  <a:srgbClr val="00357A"/>
+                </a:solidFill>
+                <a:latin typeface="Poppins" pitchFamily="34" charset="0"/>
+                <a:ea typeface="Poppins" pitchFamily="34" charset="-122"/>
+                <a:cs typeface="Poppins" pitchFamily="34" charset="-120"/>
+              </a:rPr>
+              <a:t>
+</a:t>
+            </a:r>
+            <a:pPr indent="0" marL="0">
+              <a:lnSpc>
+                <a:spcPct val="115000"/>
               </a:lnSpc>
               <a:buNone/>
             </a:pPr>
@@ -38216,138 +38248,75 @@
             </a:r>
             <a:pPr indent="0" marL="0">
               <a:lnSpc>
-                <a:spcPct val="105000"/>
+                <a:spcPct val="115000"/>
               </a:lnSpc>
               <a:buNone/>
             </a:pPr>
+            <a:r>
+              <a:rPr lang="en-US" sz="1100" dirty="0">
+                <a:solidFill>
+                  <a:srgbClr val="00357A"/>
+                </a:solidFill>
+                <a:latin typeface="Poppins" pitchFamily="34" charset="0"/>
+                <a:ea typeface="Poppins" pitchFamily="34" charset="-122"/>
+                <a:cs typeface="Poppins" pitchFamily="34" charset="-120"/>
+              </a:rPr>
+              <a:t>   under   </a:t>
+            </a:r>
+            <a:pPr indent="0" marL="0">
+              <a:lnSpc>
+                <a:spcPct val="115000"/>
+              </a:lnSpc>
+              <a:buNone/>
+            </a:pPr>
+            <a:r>
+              <a:rPr lang="en-US" sz="1100" b="1" dirty="0">
+                <a:solidFill>
+                  <a:srgbClr val="00357A"/>
+                </a:solidFill>
+                <a:latin typeface="Poppins" pitchFamily="34" charset="0"/>
+                <a:ea typeface="Poppins" pitchFamily="34" charset="-122"/>
+                <a:cs typeface="Poppins" pitchFamily="34" charset="-120"/>
+              </a:rPr>
+              <a:t>DSARCH → Dataset Information</a:t>
+            </a:r>
+            <a:pPr indent="0" marL="0">
+              <a:lnSpc>
+                <a:spcPct val="115000"/>
+              </a:lnSpc>
+              <a:buNone/>
+            </a:pPr>
             <a:endParaRPr lang="en-US" sz="1100" dirty="0"/>
           </a:p>
           <a:p>
             <a:pPr indent="0" marL="0">
               <a:lnSpc>
-                <a:spcPct val="105000"/>
+                <a:spcPct val="115000"/>
               </a:lnSpc>
               <a:buNone/>
             </a:pPr>
             <a:r>
-              <a:rPr lang="en-US" sz="1100" dirty="0">
-                <a:solidFill>
-                  <a:srgbClr val="00357A"/>
-                </a:solidFill>
-                <a:latin typeface="Poppins" pitchFamily="34" charset="0"/>
-                <a:ea typeface="Poppins" pitchFamily="34" charset="-122"/>
-                <a:cs typeface="Poppins" pitchFamily="34" charset="-120"/>
-              </a:rPr>
-              <a:t>under </a:t>
+              <a:rPr lang="en-US" sz="1100" b="1" dirty="0">
+                <a:solidFill>
+                  <a:srgbClr val="0057C2"/>
+                </a:solidFill>
+                <a:latin typeface="Poppins" pitchFamily="34" charset="0"/>
+                <a:ea typeface="Poppins" pitchFamily="34" charset="-122"/>
+                <a:cs typeface="Poppins" pitchFamily="34" charset="-120"/>
+              </a:rPr>
+              <a:t>Per-run override: </a:t>
             </a:r>
             <a:endParaRPr lang="en-US" sz="1100" dirty="0"/>
           </a:p>
           <a:p>
             <a:pPr indent="0" marL="0">
               <a:lnSpc>
-                <a:spcPct val="105000"/>
+                <a:spcPct val="115000"/>
               </a:lnSpc>
               <a:buNone/>
             </a:pPr>
             <a:r>
               <a:rPr lang="en-US" sz="1100" b="1" dirty="0">
-                <a:solidFill>
-                  <a:srgbClr val="00357A"/>
-                </a:solidFill>
-                <a:latin typeface="Poppins" pitchFamily="34" charset="0"/>
-                <a:ea typeface="Poppins" pitchFamily="34" charset="-122"/>
-                <a:cs typeface="Poppins" pitchFamily="34" charset="-120"/>
-              </a:rPr>
-              <a:t>DSARCH → Dataset Information</a:t>
-            </a:r>
-            <a:pPr indent="0" marL="0">
-              <a:lnSpc>
-                <a:spcPct val="105000"/>
-              </a:lnSpc>
-              <a:buNone/>
-            </a:pPr>
-            <a:r>
-              <a:rPr lang="en-US" sz="1100" dirty="0">
-                <a:solidFill>
-                  <a:srgbClr val="00357A"/>
-                </a:solidFill>
-                <a:latin typeface="Poppins" pitchFamily="34" charset="0"/>
-                <a:ea typeface="Poppins" pitchFamily="34" charset="-122"/>
-                <a:cs typeface="Poppins" pitchFamily="34" charset="-120"/>
-              </a:rPr>
-              <a:t>, where backflag is set or changed per dataset.</a:t>
-            </a:r>
-            <a:endParaRPr lang="en-US" sz="1100" dirty="0"/>
-          </a:p>
-        </p:txBody>
-      </p:sp>
-      <p:sp>
-        <p:nvSpPr>
-          <p:cNvPr id="9" name="Shape 6"/>
-          <p:cNvSpPr/>
-          <p:nvPr/>
-        </p:nvSpPr>
-        <p:spPr>
-          <a:xfrm>
-            <a:off x="457200" y="5614416"/>
-            <a:ext cx="5532120" cy="457200"/>
-          </a:xfrm>
-          <a:prstGeom prst="roundRect">
-            <a:avLst>
-              <a:gd name="adj" fmla="val 16000"/>
-            </a:avLst>
-          </a:prstGeom>
-          <a:solidFill>
-            <a:srgbClr val="C7E4F5"/>
-          </a:solidFill>
-          <a:ln w="12700">
-            <a:solidFill>
-              <a:srgbClr val="A9D6F2"/>
-            </a:solidFill>
-            <a:prstDash val="solid"/>
-          </a:ln>
-        </p:spPr>
-      </p:sp>
-      <p:sp>
-        <p:nvSpPr>
-          <p:cNvPr id="10" name="Text 7"/>
-          <p:cNvSpPr/>
-          <p:nvPr/>
-        </p:nvSpPr>
-        <p:spPr>
-          <a:xfrm>
-            <a:off x="658368" y="5614416"/>
-            <a:ext cx="5120640" cy="457200"/>
-          </a:xfrm>
-          <a:prstGeom prst="rect">
-            <a:avLst/>
-          </a:prstGeom>
-          <a:noFill/>
-          <a:ln/>
-        </p:spPr>
-        <p:txBody>
-          <a:bodyPr wrap="square" lIns="0" tIns="0" rIns="0" bIns="0" rtlCol="0" anchor="ctr"/>
-          <a:lstStyle/>
-          <a:p>
-            <a:pPr indent="0" marL="0">
-              <a:buNone/>
-            </a:pPr>
-            <a:r>
-              <a:rPr lang="en-US" sz="1050" b="1" dirty="0">
-                <a:solidFill>
-                  <a:srgbClr val="0057C2"/>
-                </a:solidFill>
-                <a:latin typeface="Poppins" pitchFamily="34" charset="0"/>
-                <a:ea typeface="Poppins" pitchFamily="34" charset="-122"/>
-                <a:cs typeface="Poppins" pitchFamily="34" charset="-120"/>
-              </a:rPr>
-              <a:t>Per-run override:  </a:t>
-            </a:r>
-            <a:pPr indent="0" marL="0">
-              <a:buNone/>
-            </a:pPr>
-            <a:r>
-              <a:rPr lang="en-US" sz="1050" b="1" dirty="0">
                 <a:solidFill>
                   <a:srgbClr val="00357A"/>
                 </a:solidFill>
@@ -38358,10 +38327,13 @@
               <a:t>-B</a:t>
             </a:r>
             <a:pPr indent="0" marL="0">
-              <a:buNone/>
-            </a:pPr>
-            <a:r>
-              <a:rPr lang="en-US" sz="1050" dirty="0">
+              <a:lnSpc>
+                <a:spcPct val="115000"/>
+              </a:lnSpc>
+              <a:buNone/>
+            </a:pPr>
+            <a:r>
+              <a:rPr lang="en-US" sz="1100" dirty="0">
                 <a:solidFill>
                   <a:srgbClr val="00357A"/>
                 </a:solidFill>
@@ -38372,10 +38344,13 @@
               <a:t> or </a:t>
             </a:r>
             <a:pPr indent="0" marL="0">
-              <a:buNone/>
-            </a:pPr>
-            <a:r>
-              <a:rPr lang="en-US" sz="1050" b="1" dirty="0">
+              <a:lnSpc>
+                <a:spcPct val="115000"/>
+              </a:lnSpc>
+              <a:buNone/>
+            </a:pPr>
+            <a:r>
+              <a:rPr lang="en-US" sz="1100" b="1" dirty="0">
                 <a:solidFill>
                   <a:srgbClr val="00357A"/>
                 </a:solidFill>
@@ -38386,10 +38361,13 @@
               <a:t>-D</a:t>
             </a:r>
             <a:pPr indent="0" marL="0">
-              <a:buNone/>
-            </a:pPr>
-            <a:r>
-              <a:rPr lang="en-US" sz="1050" dirty="0">
+              <a:lnSpc>
+                <a:spcPct val="115000"/>
+              </a:lnSpc>
+              <a:buNone/>
+            </a:pPr>
+            <a:r>
+              <a:rPr lang="en-US" sz="1100" dirty="0">
                 <a:solidFill>
                   <a:srgbClr val="00357A"/>
                 </a:solidFill>
@@ -38397,15 +38375,15 @@
                 <a:ea typeface="Poppins" pitchFamily="34" charset="-122"/>
                 <a:cs typeface="Poppins" pitchFamily="34" charset="-120"/>
               </a:rPr>
-              <a:t> narrows a run to one copy — mutually exclusive; neither means both.</a:t>
-            </a:r>
-            <a:endParaRPr lang="en-US" sz="1050" dirty="0"/>
-          </a:p>
-        </p:txBody>
-      </p:sp>
-      <p:sp>
-        <p:nvSpPr>
-          <p:cNvPr id="11" name="Shape 8"/>
+              <a:t> narrows a run to one copy; neither means both.</a:t>
+            </a:r>
+            <a:endParaRPr lang="en-US" sz="1100" dirty="0"/>
+          </a:p>
+        </p:txBody>
+      </p:sp>
+      <p:sp>
+        <p:nvSpPr>
+          <p:cNvPr id="9" name="Shape 6"/>
           <p:cNvSpPr/>
           <p:nvPr/>
         </p:nvSpPr>
@@ -38432,7 +38410,7 @@
       </p:sp>
       <p:sp>
         <p:nvSpPr>
-          <p:cNvPr id="12" name="Text 9"/>
+          <p:cNvPr id="10" name="Text 7"/>
           <p:cNvSpPr/>
           <p:nvPr/>
         </p:nvSpPr>
@@ -38471,7 +38449,7 @@
       </p:sp>
       <p:sp>
         <p:nvSpPr>
-          <p:cNvPr id="13" name="Shape 10"/>
+          <p:cNvPr id="11" name="Shape 8"/>
           <p:cNvSpPr/>
           <p:nvPr/>
         </p:nvSpPr>
@@ -38493,7 +38471,7 @@
       </p:sp>
       <p:sp>
         <p:nvSpPr>
-          <p:cNvPr id="14" name="Text 11"/>
+          <p:cNvPr id="12" name="Text 9"/>
           <p:cNvSpPr/>
           <p:nvPr/>
         </p:nvSpPr>
@@ -38547,7 +38525,7 @@
       </p:sp>
       <p:sp>
         <p:nvSpPr>
-          <p:cNvPr id="15" name="Text 12"/>
+          <p:cNvPr id="13" name="Text 10"/>
           <p:cNvSpPr/>
           <p:nvPr/>
         </p:nvSpPr>
@@ -38586,18 +38564,18 @@
       </p:sp>
       <p:sp>
         <p:nvSpPr>
-          <p:cNvPr id="16" name="Shape 13"/>
-          <p:cNvSpPr/>
-          <p:nvPr/>
-        </p:nvSpPr>
-        <p:spPr>
-          <a:xfrm>
-            <a:off x="6537960" y="3584448"/>
-            <a:ext cx="4846320" cy="960120"/>
+          <p:cNvPr id="14" name="Shape 11"/>
+          <p:cNvSpPr/>
+          <p:nvPr/>
+        </p:nvSpPr>
+        <p:spPr>
+          <a:xfrm>
+            <a:off x="6537960" y="3520440"/>
+            <a:ext cx="4846320" cy="914400"/>
           </a:xfrm>
           <a:prstGeom prst="roundRect">
             <a:avLst>
-              <a:gd name="adj" fmla="val 7619"/>
+              <a:gd name="adj" fmla="val 8000"/>
             </a:avLst>
           </a:prstGeom>
           <a:solidFill>
@@ -38613,13 +38591,13 @@
       </p:sp>
       <p:sp>
         <p:nvSpPr>
-          <p:cNvPr id="17" name="Text 14"/>
-          <p:cNvSpPr/>
-          <p:nvPr/>
-        </p:nvSpPr>
-        <p:spPr>
-          <a:xfrm>
-            <a:off x="6766560" y="3694176"/>
+          <p:cNvPr id="15" name="Text 12"/>
+          <p:cNvSpPr/>
+          <p:nvPr/>
+        </p:nvSpPr>
+        <p:spPr>
+          <a:xfrm>
+            <a:off x="6766560" y="3611880"/>
             <a:ext cx="4480560" cy="365760"/>
           </a:xfrm>
           <a:prstGeom prst="rect">
@@ -38652,13 +38630,13 @@
       </p:sp>
       <p:sp>
         <p:nvSpPr>
-          <p:cNvPr id="18" name="Text 15"/>
-          <p:cNvSpPr/>
-          <p:nvPr/>
-        </p:nvSpPr>
-        <p:spPr>
-          <a:xfrm>
-            <a:off x="6766560" y="4059936"/>
+          <p:cNvPr id="16" name="Text 13"/>
+          <p:cNvSpPr/>
+          <p:nvPr/>
+        </p:nvSpPr>
+        <p:spPr>
+          <a:xfrm>
+            <a:off x="6766560" y="3977640"/>
             <a:ext cx="4480560" cy="365760"/>
           </a:xfrm>
           <a:prstGeom prst="rect">
@@ -38691,18 +38669,18 @@
       </p:sp>
       <p:sp>
         <p:nvSpPr>
-          <p:cNvPr id="19" name="Shape 16"/>
-          <p:cNvSpPr/>
-          <p:nvPr/>
-        </p:nvSpPr>
-        <p:spPr>
-          <a:xfrm>
-            <a:off x="6537960" y="4681728"/>
-            <a:ext cx="4846320" cy="960120"/>
+          <p:cNvPr id="17" name="Shape 14"/>
+          <p:cNvSpPr/>
+          <p:nvPr/>
+        </p:nvSpPr>
+        <p:spPr>
+          <a:xfrm>
+            <a:off x="6537960" y="4544568"/>
+            <a:ext cx="4846320" cy="914400"/>
           </a:xfrm>
           <a:prstGeom prst="roundRect">
             <a:avLst>
-              <a:gd name="adj" fmla="val 7619"/>
+              <a:gd name="adj" fmla="val 8000"/>
             </a:avLst>
           </a:prstGeom>
           <a:solidFill>
@@ -38718,13 +38696,13 @@
       </p:sp>
       <p:sp>
         <p:nvSpPr>
-          <p:cNvPr id="20" name="Text 17"/>
-          <p:cNvSpPr/>
-          <p:nvPr/>
-        </p:nvSpPr>
-        <p:spPr>
-          <a:xfrm>
-            <a:off x="6766560" y="4791456"/>
+          <p:cNvPr id="18" name="Text 15"/>
+          <p:cNvSpPr/>
+          <p:nvPr/>
+        </p:nvSpPr>
+        <p:spPr>
+          <a:xfrm>
+            <a:off x="6766560" y="4636008"/>
             <a:ext cx="4480560" cy="365760"/>
           </a:xfrm>
           <a:prstGeom prst="rect">
@@ -38757,13 +38735,13 @@
       </p:sp>
       <p:sp>
         <p:nvSpPr>
-          <p:cNvPr id="21" name="Text 18"/>
-          <p:cNvSpPr/>
-          <p:nvPr/>
-        </p:nvSpPr>
-        <p:spPr>
-          <a:xfrm>
-            <a:off x="6766560" y="5157216"/>
+          <p:cNvPr id="19" name="Text 16"/>
+          <p:cNvSpPr/>
+          <p:nvPr/>
+        </p:nvSpPr>
+        <p:spPr>
+          <a:xfrm>
+            <a:off x="6766560" y="5001768"/>
             <a:ext cx="4480560" cy="365760"/>
           </a:xfrm>
           <a:prstGeom prst="rect">
@@ -38796,14 +38774,14 @@
       </p:sp>
       <p:sp>
         <p:nvSpPr>
-          <p:cNvPr id="22" name="Text 19"/>
-          <p:cNvSpPr/>
-          <p:nvPr/>
-        </p:nvSpPr>
-        <p:spPr>
-          <a:xfrm>
-            <a:off x="6537960" y="5623560"/>
-            <a:ext cx="4846320" cy="411480"/>
+          <p:cNvPr id="20" name="Text 17"/>
+          <p:cNvSpPr/>
+          <p:nvPr/>
+        </p:nvSpPr>
+        <p:spPr>
+          <a:xfrm>
+            <a:off x="6537960" y="5532120"/>
+            <a:ext cx="4846320" cy="457200"/>
           </a:xfrm>
           <a:prstGeom prst="rect">
             <a:avLst/>
@@ -38822,7 +38800,7 @@
               <a:buNone/>
             </a:pPr>
             <a:r>
-              <a:rPr lang="en-US" sz="1150" dirty="0">
+              <a:rPr lang="en-US" sz="1100" dirty="0">
                 <a:solidFill>
                   <a:srgbClr val="53565A"/>
                 </a:solidFill>
@@ -38830,15 +38808,15 @@
                 <a:ea typeface="Poppins" pitchFamily="34" charset="-122"/>
                 <a:cs typeface="Poppins" pitchFamily="34" charset="-120"/>
               </a:rPr>
-              <a:t>A 'D' backup writes the Drdata copy first, then the Backup copy; both must succeed before the local tar is deleted and the record is marked 'A'.</a:t>
-            </a:r>
-            <a:endParaRPr lang="en-US" sz="1150" dirty="0"/>
+              <a:t>A 'D' backup writes Drdata first, then Backup; both must succeed before the local tar is deleted.</a:t>
+            </a:r>
+            <a:endParaRPr lang="en-US" sz="1100" dirty="0"/>
           </a:p>
         </p:txBody>
       </p:sp>
       <p:pic>
         <p:nvPicPr>
-          <p:cNvPr id="23" name="Image 0" descr="nsf_ncar_logo_color.png">    </p:cNvPr>
+          <p:cNvPr id="21" name="Image 0" descr="nsf_ncar_logo_color.png">    </p:cNvPr>
           <p:cNvPicPr>
             <a:picLocks noChangeAspect="1"/>
           </p:cNvPicPr>
@@ -38862,7 +38840,7 @@
       </p:pic>
       <p:sp>
         <p:nvSpPr>
-          <p:cNvPr id="24" name="Text 20"/>
+          <p:cNvPr id="22" name="Text 18"/>
           <p:cNvSpPr/>
           <p:nvPr/>
         </p:nvSpPr>
@@ -38901,7 +38879,7 @@
       </p:sp>
       <p:sp>
         <p:nvSpPr>
-          <p:cNvPr id="25" name="Text 21"/>
+          <p:cNvPr id="23" name="Text 19"/>
           <p:cNvSpPr/>
           <p:nvPr/>
         </p:nvSpPr>

--- a/docs/slides/dsquasar_guide.pptx
+++ b/docs/slides/dsquasar_guide.pptx
@@ -30599,7 +30599,7 @@
         <p:spPr>
           <a:xfrm>
             <a:off x="731520" y="4855464"/>
-            <a:ext cx="3054096" cy="310896"/>
+            <a:ext cx="3218688" cy="310896"/>
           </a:xfrm>
           <a:prstGeom prst="rect">
             <a:avLst/>
@@ -30615,7 +30615,7 @@
               <a:buNone/>
             </a:pPr>
             <a:r>
-              <a:rPr lang="en-US" sz="1050" b="1" dirty="0">
+              <a:rPr lang="en-US" sz="950" b="1" dirty="0">
                 <a:solidFill>
                   <a:srgbClr val="0057C2"/>
                 </a:solidFill>
@@ -30629,7 +30629,7 @@
               <a:buNone/>
             </a:pPr>
             <a:r>
-              <a:rPr lang="en-US" sz="1050" b="1" u="sng" dirty="0">
+              <a:rPr lang="en-US" sz="950" b="1" u="sng" dirty="0">
                 <a:solidFill>
                   <a:srgbClr val="0057C2"/>
                 </a:solidFill>
@@ -30646,7 +30646,7 @@
               </a:rPr>
               <a:t>github.com/NCAR/rda-python-dsquasar</a:t>
             </a:r>
-            <a:endParaRPr lang="en-US" sz="1050" dirty="0"/>
+            <a:endParaRPr lang="en-US" sz="950" dirty="0"/>
           </a:p>
         </p:txBody>
       </p:sp>
@@ -30940,7 +30940,7 @@
         <p:spPr>
           <a:xfrm>
             <a:off x="4572000" y="4855464"/>
-            <a:ext cx="3054096" cy="310896"/>
+            <a:ext cx="3218688" cy="310896"/>
           </a:xfrm>
           <a:prstGeom prst="rect">
             <a:avLst/>
@@ -30956,7 +30956,7 @@
               <a:buNone/>
             </a:pPr>
             <a:r>
-              <a:rPr lang="en-US" sz="1050" b="1" dirty="0">
+              <a:rPr lang="en-US" sz="950" b="1" dirty="0">
                 <a:solidFill>
                   <a:srgbClr val="0097A7"/>
                 </a:solidFill>
@@ -30970,7 +30970,7 @@
               <a:buNone/>
             </a:pPr>
             <a:r>
-              <a:rPr lang="en-US" sz="1050" b="1" u="sng" dirty="0">
+              <a:rPr lang="en-US" sz="950" b="1" u="sng" dirty="0">
                 <a:solidFill>
                   <a:srgbClr val="0057C2"/>
                 </a:solidFill>
@@ -30987,7 +30987,7 @@
               </a:rPr>
               <a:t>pypi.org/project/rda-python-dsquasar</a:t>
             </a:r>
-            <a:endParaRPr lang="en-US" sz="1050" dirty="0"/>
+            <a:endParaRPr lang="en-US" sz="950" dirty="0"/>
           </a:p>
         </p:txBody>
       </p:sp>
@@ -31301,7 +31301,7 @@
         <p:spPr>
           <a:xfrm>
             <a:off x="8412480" y="4855464"/>
-            <a:ext cx="3054096" cy="310896"/>
+            <a:ext cx="3218688" cy="310896"/>
           </a:xfrm>
           <a:prstGeom prst="rect">
             <a:avLst/>
@@ -31317,7 +31317,7 @@
               <a:buNone/>
             </a:pPr>
             <a:r>
-              <a:rPr lang="en-US" sz="1050" b="1" dirty="0">
+              <a:rPr lang="en-US" sz="950" b="1" dirty="0">
                 <a:solidFill>
                   <a:srgbClr val="C25E00"/>
                 </a:solidFill>
@@ -31331,7 +31331,7 @@
               <a:buNone/>
             </a:pPr>
             <a:r>
-              <a:rPr lang="en-US" sz="1050" b="1" u="sng" dirty="0">
+              <a:rPr lang="en-US" sz="950" b="1" u="sng" dirty="0">
                 <a:solidFill>
                   <a:srgbClr val="0057C2"/>
                 </a:solidFill>
@@ -31348,7 +31348,7 @@
               </a:rPr>
               <a:t>src/rda_python_dsquasar/dsquasar.usg</a:t>
             </a:r>
-            <a:endParaRPr lang="en-US" sz="1050" dirty="0"/>
+            <a:endParaRPr lang="en-US" sz="950" dirty="0"/>
           </a:p>
         </p:txBody>
       </p:sp>
@@ -37986,8 +37986,8 @@
         </p:nvSpPr>
         <p:spPr>
           <a:xfrm>
-            <a:off x="457200" y="3950208"/>
-            <a:ext cx="5532120" cy="731520"/>
+            <a:off x="457200" y="3968496"/>
+            <a:ext cx="5532120" cy="502920"/>
           </a:xfrm>
           <a:prstGeom prst="rect">
             <a:avLst/>
@@ -38065,75 +38065,7 @@
                 <a:ea typeface="Poppins" pitchFamily="34" charset="-122"/>
                 <a:cs typeface="Poppins" pitchFamily="34" charset="-120"/>
               </a:rPr>
-              <a:t> with its own flag is applied group by group — </a:t>
-            </a:r>
-            <a:pPr indent="0" marL="0">
-              <a:lnSpc>
-                <a:spcPct val="106000"/>
-              </a:lnSpc>
-              <a:buNone/>
-            </a:pPr>
-            <a:r>
-              <a:rPr lang="en-US" sz="1200" b="1" dirty="0">
-                <a:solidFill>
-                  <a:srgbClr val="00357A"/>
-                </a:solidFill>
-                <a:latin typeface="Courier New" pitchFamily="34" charset="0"/>
-                <a:ea typeface="Courier New" pitchFamily="34" charset="-122"/>
-                <a:cs typeface="Courier New" pitchFamily="34" charset="-120"/>
-              </a:rPr>
-              <a:t>'P'</a:t>
-            </a:r>
-            <a:pPr indent="0" marL="0">
-              <a:lnSpc>
-                <a:spcPct val="106000"/>
-              </a:lnSpc>
-              <a:buNone/>
-            </a:pPr>
-            <a:r>
-              <a:rPr lang="en-US" sz="1200" dirty="0">
-                <a:solidFill>
-                  <a:srgbClr val="00357A"/>
-                </a:solidFill>
-                <a:latin typeface="Poppins" pitchFamily="34" charset="0"/>
-                <a:ea typeface="Poppins" pitchFamily="34" charset="-122"/>
-                <a:cs typeface="Poppins" pitchFamily="34" charset="-120"/>
-              </a:rPr>
-              <a:t> inherits, </a:t>
-            </a:r>
-            <a:pPr indent="0" marL="0">
-              <a:lnSpc>
-                <a:spcPct val="106000"/>
-              </a:lnSpc>
-              <a:buNone/>
-            </a:pPr>
-            <a:r>
-              <a:rPr lang="en-US" sz="1200" b="1" dirty="0">
-                <a:solidFill>
-                  <a:srgbClr val="00357A"/>
-                </a:solidFill>
-                <a:latin typeface="Courier New" pitchFamily="34" charset="0"/>
-                <a:ea typeface="Courier New" pitchFamily="34" charset="-122"/>
-                <a:cs typeface="Courier New" pitchFamily="34" charset="-120"/>
-              </a:rPr>
-              <a:t>'N'</a:t>
-            </a:r>
-            <a:pPr indent="0" marL="0">
-              <a:lnSpc>
-                <a:spcPct val="106000"/>
-              </a:lnSpc>
-              <a:buNone/>
-            </a:pPr>
-            <a:r>
-              <a:rPr lang="en-US" sz="1200" dirty="0">
-                <a:solidFill>
-                  <a:srgbClr val="00357A"/>
-                </a:solidFill>
-                <a:latin typeface="Poppins" pitchFamily="34" charset="0"/>
-                <a:ea typeface="Poppins" pitchFamily="34" charset="-122"/>
-                <a:cs typeface="Poppins" pitchFamily="34" charset="-120"/>
-              </a:rPr>
-              <a:t> excludes.</a:t>
+              <a:t> flag is applied group by group.</a:t>
             </a:r>
             <a:endParaRPr lang="en-US" sz="1200" dirty="0"/>
           </a:p>
@@ -38147,12 +38079,12 @@
         </p:nvSpPr>
         <p:spPr>
           <a:xfrm>
-            <a:off x="457200" y="4754880"/>
-            <a:ext cx="5532120" cy="1298448"/>
+            <a:off x="457200" y="4498848"/>
+            <a:ext cx="5532120" cy="1554480"/>
           </a:xfrm>
           <a:prstGeom prst="roundRect">
             <a:avLst>
-              <a:gd name="adj" fmla="val 6338"/>
+              <a:gd name="adj" fmla="val 5294"/>
             </a:avLst>
           </a:prstGeom>
           <a:solidFill>
@@ -38174,8 +38106,8 @@
         </p:nvSpPr>
         <p:spPr>
           <a:xfrm>
-            <a:off x="658368" y="4754880"/>
-            <a:ext cx="5120640" cy="1298448"/>
+            <a:off x="658368" y="4498848"/>
+            <a:ext cx="5166360" cy="1554480"/>
           </a:xfrm>
           <a:prstGeom prst="rect">
             <a:avLst/>
@@ -38189,12 +38121,12 @@
           <a:p>
             <a:pPr indent="0" marL="0">
               <a:lnSpc>
-                <a:spcPct val="115000"/>
+                <a:spcPct val="118000"/>
               </a:lnSpc>
               <a:buNone/>
             </a:pPr>
             <a:r>
-              <a:rPr lang="en-US" sz="1100" b="1" dirty="0">
+              <a:rPr lang="en-US" sz="1050" b="1" dirty="0">
                 <a:solidFill>
                   <a:srgbClr val="0057C2"/>
                 </a:solidFill>
@@ -38202,34 +38134,16 @@
                 <a:ea typeface="Poppins" pitchFamily="34" charset="-122"/>
                 <a:cs typeface="Poppins" pitchFamily="34" charset="-120"/>
               </a:rPr>
-              <a:t>Set the flag in the web config tool</a:t>
+              <a:t>Set Backup Flag in the web config tool   </a:t>
             </a:r>
             <a:pPr indent="0" marL="0">
               <a:lnSpc>
-                <a:spcPct val="115000"/>
+                <a:spcPct val="118000"/>
               </a:lnSpc>
               <a:buNone/>
             </a:pPr>
             <a:r>
-              <a:rPr lang="en-US" sz="1100" dirty="0">
-                <a:solidFill>
-                  <a:srgbClr val="00357A"/>
-                </a:solidFill>
-                <a:latin typeface="Poppins" pitchFamily="34" charset="0"/>
-                <a:ea typeface="Poppins" pitchFamily="34" charset="-122"/>
-                <a:cs typeface="Poppins" pitchFamily="34" charset="-120"/>
-              </a:rPr>
-              <a:t>
-</a:t>
-            </a:r>
-            <a:pPr indent="0" marL="0">
-              <a:lnSpc>
-                <a:spcPct val="115000"/>
-              </a:lnSpc>
-              <a:buNone/>
-            </a:pPr>
-            <a:r>
-              <a:rPr lang="en-US" sz="1100" b="1" u="sng" dirty="0">
+              <a:rPr lang="en-US" sz="1050" b="1" u="sng" dirty="0">
                 <a:solidFill>
                   <a:srgbClr val="0057C2"/>
                 </a:solidFill>
@@ -38248,12 +38162,21 @@
             </a:r>
             <a:pPr indent="0" marL="0">
               <a:lnSpc>
-                <a:spcPct val="115000"/>
+                <a:spcPct val="118000"/>
               </a:lnSpc>
               <a:buNone/>
             </a:pPr>
-            <a:r>
-              <a:rPr lang="en-US" sz="1100" dirty="0">
+            <a:endParaRPr lang="en-US" sz="1050" dirty="0"/>
+          </a:p>
+          <a:p>
+            <a:pPr indent="0" marL="0">
+              <a:lnSpc>
+                <a:spcPct val="118000"/>
+              </a:lnSpc>
+              <a:buNone/>
+            </a:pPr>
+            <a:r>
+              <a:rPr lang="en-US" sz="1050" b="1" dirty="0">
                 <a:solidFill>
                   <a:srgbClr val="00357A"/>
                 </a:solidFill>
@@ -38261,16 +38184,19 @@
                 <a:ea typeface="Poppins" pitchFamily="34" charset="-122"/>
                 <a:cs typeface="Poppins" pitchFamily="34" charset="-120"/>
               </a:rPr>
-              <a:t>   under   </a:t>
-            </a:r>
+              <a:t>DSARCH → Dataset Information</a:t>
+            </a:r>
+            <a:endParaRPr lang="en-US" sz="1050" dirty="0"/>
+          </a:p>
+          <a:p>
             <a:pPr indent="0" marL="0">
               <a:lnSpc>
-                <a:spcPct val="115000"/>
+                <a:spcPct val="118000"/>
               </a:lnSpc>
               <a:buNone/>
             </a:pPr>
             <a:r>
-              <a:rPr lang="en-US" sz="1100" b="1" dirty="0">
+              <a:rPr lang="en-US" sz="1050" dirty="0">
                 <a:solidFill>
                   <a:srgbClr val="00357A"/>
                 </a:solidFill>
@@ -38278,45 +38204,16 @@
                 <a:ea typeface="Poppins" pitchFamily="34" charset="-122"/>
                 <a:cs typeface="Poppins" pitchFamily="34" charset="-120"/>
               </a:rPr>
-              <a:t>DSARCH → Dataset Information</a:t>
+              <a:t>  sets </a:t>
             </a:r>
             <a:pPr indent="0" marL="0">
               <a:lnSpc>
-                <a:spcPct val="115000"/>
+                <a:spcPct val="118000"/>
               </a:lnSpc>
               <a:buNone/>
             </a:pPr>
-            <a:endParaRPr lang="en-US" sz="1100" dirty="0"/>
-          </a:p>
-          <a:p>
-            <a:pPr indent="0" marL="0">
-              <a:lnSpc>
-                <a:spcPct val="115000"/>
-              </a:lnSpc>
-              <a:buNone/>
-            </a:pPr>
-            <a:r>
-              <a:rPr lang="en-US" sz="1100" b="1" dirty="0">
-                <a:solidFill>
-                  <a:srgbClr val="0057C2"/>
-                </a:solidFill>
-                <a:latin typeface="Poppins" pitchFamily="34" charset="0"/>
-                <a:ea typeface="Poppins" pitchFamily="34" charset="-122"/>
-                <a:cs typeface="Poppins" pitchFamily="34" charset="-120"/>
-              </a:rPr>
-              <a:t>Per-run override: </a:t>
-            </a:r>
-            <a:endParaRPr lang="en-US" sz="1100" dirty="0"/>
-          </a:p>
-          <a:p>
-            <a:pPr indent="0" marL="0">
-              <a:lnSpc>
-                <a:spcPct val="115000"/>
-              </a:lnSpc>
-              <a:buNone/>
-            </a:pPr>
-            <a:r>
-              <a:rPr lang="en-US" sz="1100" b="1" dirty="0">
+            <a:r>
+              <a:rPr lang="en-US" sz="1050" b="1" dirty="0">
                 <a:solidFill>
                   <a:srgbClr val="00357A"/>
                 </a:solidFill>
@@ -38324,16 +38221,16 @@
                 <a:ea typeface="Courier New" pitchFamily="34" charset="-122"/>
                 <a:cs typeface="Courier New" pitchFamily="34" charset="-120"/>
               </a:rPr>
-              <a:t>-B</a:t>
+              <a:t>dataset.backflag</a:t>
             </a:r>
             <a:pPr indent="0" marL="0">
               <a:lnSpc>
-                <a:spcPct val="115000"/>
+                <a:spcPct val="118000"/>
               </a:lnSpc>
               <a:buNone/>
             </a:pPr>
             <a:r>
-              <a:rPr lang="en-US" sz="1100" dirty="0">
+              <a:rPr lang="en-US" sz="1050" dirty="0">
                 <a:solidFill>
                   <a:srgbClr val="00357A"/>
                 </a:solidFill>
@@ -38341,16 +38238,62 @@
                 <a:ea typeface="Poppins" pitchFamily="34" charset="-122"/>
                 <a:cs typeface="Poppins" pitchFamily="34" charset="-120"/>
               </a:rPr>
-              <a:t> or </a:t>
+              <a:t> for the whole dataset</a:t>
             </a:r>
             <a:pPr indent="0" marL="0">
               <a:lnSpc>
-                <a:spcPct val="115000"/>
+                <a:spcPct val="118000"/>
               </a:lnSpc>
               <a:buNone/>
             </a:pPr>
-            <a:r>
-              <a:rPr lang="en-US" sz="1100" b="1" dirty="0">
+            <a:endParaRPr lang="en-US" sz="1050" dirty="0"/>
+          </a:p>
+          <a:p>
+            <a:pPr indent="0" marL="0">
+              <a:lnSpc>
+                <a:spcPct val="118000"/>
+              </a:lnSpc>
+              <a:buNone/>
+            </a:pPr>
+            <a:r>
+              <a:rPr lang="en-US" sz="1050" b="1" dirty="0">
+                <a:solidFill>
+                  <a:srgbClr val="00357A"/>
+                </a:solidFill>
+                <a:latin typeface="Poppins" pitchFamily="34" charset="0"/>
+                <a:ea typeface="Poppins" pitchFamily="34" charset="-122"/>
+                <a:cs typeface="Poppins" pitchFamily="34" charset="-120"/>
+              </a:rPr>
+              <a:t>DSARCH → Group Information</a:t>
+            </a:r>
+            <a:endParaRPr lang="en-US" sz="1050" dirty="0"/>
+          </a:p>
+          <a:p>
+            <a:pPr indent="0" marL="0">
+              <a:lnSpc>
+                <a:spcPct val="118000"/>
+              </a:lnSpc>
+              <a:buNone/>
+            </a:pPr>
+            <a:r>
+              <a:rPr lang="en-US" sz="1050" dirty="0">
+                <a:solidFill>
+                  <a:srgbClr val="00357A"/>
+                </a:solidFill>
+                <a:latin typeface="Poppins" pitchFamily="34" charset="0"/>
+                <a:ea typeface="Poppins" pitchFamily="34" charset="-122"/>
+                <a:cs typeface="Poppins" pitchFamily="34" charset="-120"/>
+              </a:rPr>
+              <a:t>  sets </a:t>
+            </a:r>
+            <a:pPr indent="0" marL="0">
+              <a:lnSpc>
+                <a:spcPct val="118000"/>
+              </a:lnSpc>
+              <a:buNone/>
+            </a:pPr>
+            <a:r>
+              <a:rPr lang="en-US" sz="1050" b="1" dirty="0">
                 <a:solidFill>
                   <a:srgbClr val="00357A"/>
                 </a:solidFill>
@@ -38358,16 +38301,113 @@
                 <a:ea typeface="Courier New" pitchFamily="34" charset="-122"/>
                 <a:cs typeface="Courier New" pitchFamily="34" charset="-120"/>
               </a:rPr>
+              <a:t>dsgroup.backflag</a:t>
+            </a:r>
+            <a:pPr indent="0" marL="0">
+              <a:lnSpc>
+                <a:spcPct val="118000"/>
+              </a:lnSpc>
+              <a:buNone/>
+            </a:pPr>
+            <a:r>
+              <a:rPr lang="en-US" sz="1050" dirty="0">
+                <a:solidFill>
+                  <a:srgbClr val="00357A"/>
+                </a:solidFill>
+                <a:latin typeface="Poppins" pitchFamily="34" charset="0"/>
+                <a:ea typeface="Poppins" pitchFamily="34" charset="-122"/>
+                <a:cs typeface="Poppins" pitchFamily="34" charset="-120"/>
+              </a:rPr>
+              <a:t> for one group</a:t>
+            </a:r>
+            <a:pPr indent="0" marL="0">
+              <a:lnSpc>
+                <a:spcPct val="118000"/>
+              </a:lnSpc>
+              <a:buNone/>
+            </a:pPr>
+            <a:endParaRPr lang="en-US" sz="1050" dirty="0"/>
+          </a:p>
+          <a:p>
+            <a:pPr indent="0" marL="0">
+              <a:lnSpc>
+                <a:spcPct val="118000"/>
+              </a:lnSpc>
+              <a:buNone/>
+            </a:pPr>
+            <a:r>
+              <a:rPr lang="en-US" sz="1050" b="1" dirty="0">
+                <a:solidFill>
+                  <a:srgbClr val="0057C2"/>
+                </a:solidFill>
+                <a:latin typeface="Poppins" pitchFamily="34" charset="0"/>
+                <a:ea typeface="Poppins" pitchFamily="34" charset="-122"/>
+                <a:cs typeface="Poppins" pitchFamily="34" charset="-120"/>
+              </a:rPr>
+              <a:t>Per-run override: </a:t>
+            </a:r>
+            <a:endParaRPr lang="en-US" sz="1050" dirty="0"/>
+          </a:p>
+          <a:p>
+            <a:pPr indent="0" marL="0">
+              <a:lnSpc>
+                <a:spcPct val="118000"/>
+              </a:lnSpc>
+              <a:buNone/>
+            </a:pPr>
+            <a:r>
+              <a:rPr lang="en-US" sz="1050" b="1" dirty="0">
+                <a:solidFill>
+                  <a:srgbClr val="00357A"/>
+                </a:solidFill>
+                <a:latin typeface="Courier New" pitchFamily="34" charset="0"/>
+                <a:ea typeface="Courier New" pitchFamily="34" charset="-122"/>
+                <a:cs typeface="Courier New" pitchFamily="34" charset="-120"/>
+              </a:rPr>
+              <a:t>-B</a:t>
+            </a:r>
+            <a:pPr indent="0" marL="0">
+              <a:lnSpc>
+                <a:spcPct val="118000"/>
+              </a:lnSpc>
+              <a:buNone/>
+            </a:pPr>
+            <a:r>
+              <a:rPr lang="en-US" sz="1050" dirty="0">
+                <a:solidFill>
+                  <a:srgbClr val="00357A"/>
+                </a:solidFill>
+                <a:latin typeface="Poppins" pitchFamily="34" charset="0"/>
+                <a:ea typeface="Poppins" pitchFamily="34" charset="-122"/>
+                <a:cs typeface="Poppins" pitchFamily="34" charset="-120"/>
+              </a:rPr>
+              <a:t> or </a:t>
+            </a:r>
+            <a:pPr indent="0" marL="0">
+              <a:lnSpc>
+                <a:spcPct val="118000"/>
+              </a:lnSpc>
+              <a:buNone/>
+            </a:pPr>
+            <a:r>
+              <a:rPr lang="en-US" sz="1050" b="1" dirty="0">
+                <a:solidFill>
+                  <a:srgbClr val="00357A"/>
+                </a:solidFill>
+                <a:latin typeface="Courier New" pitchFamily="34" charset="0"/>
+                <a:ea typeface="Courier New" pitchFamily="34" charset="-122"/>
+                <a:cs typeface="Courier New" pitchFamily="34" charset="-120"/>
+              </a:rPr>
               <a:t>-D</a:t>
             </a:r>
             <a:pPr indent="0" marL="0">
               <a:lnSpc>
-                <a:spcPct val="115000"/>
+                <a:spcPct val="118000"/>
               </a:lnSpc>
               <a:buNone/>
             </a:pPr>
             <a:r>
-              <a:rPr lang="en-US" sz="1100" dirty="0">
+              <a:rPr lang="en-US" sz="1050" dirty="0">
                 <a:solidFill>
                   <a:srgbClr val="00357A"/>
                 </a:solidFill>
@@ -38377,7 +38417,7 @@
               </a:rPr>
               <a:t> narrows a run to one copy; neither means both.</a:t>
             </a:r>
-            <a:endParaRPr lang="en-US" sz="1100" dirty="0"/>
+            <a:endParaRPr lang="en-US" sz="1050" dirty="0"/>
           </a:p>
         </p:txBody>
       </p:sp>

--- a/docs/slides/dsquasar_guide.pptx
+++ b/docs/slides/dsquasar_guide.pptx
@@ -17625,14 +17625,34 @@
       </p:sp>
       <p:sp>
         <p:nvSpPr>
-          <p:cNvPr id="6" name="Text 4"/>
-          <p:cNvSpPr/>
-          <p:nvPr/>
-        </p:nvSpPr>
-        <p:spPr>
-          <a:xfrm>
-            <a:off x="685800" y="3520440"/>
-            <a:ext cx="4480560" cy="365760"/>
+          <p:cNvPr id="6" name="Shape 4"/>
+          <p:cNvSpPr/>
+          <p:nvPr/>
+        </p:nvSpPr>
+        <p:spPr>
+          <a:xfrm>
+            <a:off x="457200" y="3337560"/>
+            <a:ext cx="109728" cy="2697480"/>
+          </a:xfrm>
+          <a:prstGeom prst="rect">
+            <a:avLst/>
+          </a:prstGeom>
+          <a:solidFill>
+            <a:srgbClr val="0057C2"/>
+          </a:solidFill>
+          <a:ln/>
+        </p:spPr>
+      </p:sp>
+      <p:sp>
+        <p:nvSpPr>
+          <p:cNvPr id="7" name="Text 5"/>
+          <p:cNvSpPr/>
+          <p:nvPr/>
+        </p:nvSpPr>
+        <p:spPr>
+          <a:xfrm>
+            <a:off x="731520" y="3493008"/>
+            <a:ext cx="4434840" cy="365760"/>
           </a:xfrm>
           <a:prstGeom prst="rect">
             <a:avLst/>
@@ -17648,7 +17668,7 @@
               <a:buNone/>
             </a:pPr>
             <a:r>
-              <a:rPr lang="en-US" sz="1400" b="1" dirty="0">
+              <a:rPr lang="en-US" sz="1450" b="1" dirty="0">
                 <a:solidFill>
                   <a:srgbClr val="0057C2"/>
                 </a:solidFill>
@@ -17658,20 +17678,43 @@
               </a:rPr>
               <a:t>Driven entirely by GDEXDB flags</a:t>
             </a:r>
-            <a:endParaRPr lang="en-US" sz="1400" dirty="0"/>
-          </a:p>
-        </p:txBody>
-      </p:sp>
-      <p:sp>
-        <p:nvSpPr>
-          <p:cNvPr id="7" name="Text 5"/>
-          <p:cNvSpPr/>
-          <p:nvPr/>
-        </p:nvSpPr>
-        <p:spPr>
-          <a:xfrm>
-            <a:off x="685800" y="3913632"/>
-            <a:ext cx="4434840" cy="2011680"/>
+            <a:endParaRPr lang="en-US" sz="1450" dirty="0"/>
+          </a:p>
+        </p:txBody>
+      </p:sp>
+      <p:sp>
+        <p:nvSpPr>
+          <p:cNvPr id="8" name="Shape 6"/>
+          <p:cNvSpPr/>
+          <p:nvPr/>
+        </p:nvSpPr>
+        <p:spPr>
+          <a:xfrm>
+            <a:off x="731520" y="3877056"/>
+            <a:ext cx="4279392" cy="0"/>
+          </a:xfrm>
+          <a:prstGeom prst="line">
+            <a:avLst/>
+          </a:prstGeom>
+          <a:noFill/>
+          <a:ln w="12700">
+            <a:solidFill>
+              <a:srgbClr val="A9D6F2"/>
+            </a:solidFill>
+            <a:prstDash val="solid"/>
+          </a:ln>
+        </p:spPr>
+      </p:sp>
+      <p:sp>
+        <p:nvSpPr>
+          <p:cNvPr id="9" name="Text 7"/>
+          <p:cNvSpPr/>
+          <p:nvPr/>
+        </p:nvSpPr>
+        <p:spPr>
+          <a:xfrm>
+            <a:off x="731520" y="3986784"/>
+            <a:ext cx="4389120" cy="1920240"/>
           </a:xfrm>
           <a:prstGeom prst="rect">
             <a:avLst/>
@@ -17683,11 +17726,15 @@
           <a:bodyPr wrap="square" lIns="0" tIns="0" rIns="0" bIns="0" rtlCol="0" anchor="t"/>
           <a:lstStyle/>
           <a:p>
-            <a:pPr indent="0" marL="0">
+            <a:pPr marL="190500" indent="-190500">
               <a:lnSpc>
-                <a:spcPct val="110000"/>
+                <a:spcPct val="106000"/>
               </a:lnSpc>
-              <a:buNone/>
+              <a:spcAft>
+                <a:spcPts val="700"/>
+              </a:spcAft>
+              <a:buSzPct val="100000"/>
+              <a:buChar char="•"/>
             </a:pPr>
             <a:r>
               <a:rPr lang="en-US" sz="1200" dirty="0">
@@ -17702,8 +17749,11 @@
             </a:r>
             <a:pPr indent="0" marL="0">
               <a:lnSpc>
-                <a:spcPct val="110000"/>
+                <a:spcPct val="106000"/>
               </a:lnSpc>
+              <a:spcAft>
+                <a:spcPts val="700"/>
+              </a:spcAft>
               <a:buNone/>
             </a:pPr>
             <a:r>
@@ -17719,8 +17769,11 @@
             </a:r>
             <a:pPr indent="0" marL="0">
               <a:lnSpc>
-                <a:spcPct val="110000"/>
+                <a:spcPct val="106000"/>
               </a:lnSpc>
+              <a:spcAft>
+                <a:spcPts val="700"/>
+              </a:spcAft>
               <a:buNone/>
             </a:pPr>
             <a:r>
@@ -17732,12 +17785,15 @@
                 <a:ea typeface="Poppins" pitchFamily="34" charset="-122"/>
                 <a:cs typeface="Poppins" pitchFamily="34" charset="-120"/>
               </a:rPr>
-              <a:t> is set, and </a:t>
+              <a:t> is set; </a:t>
             </a:r>
             <a:pPr indent="0" marL="0">
               <a:lnSpc>
-                <a:spcPct val="110000"/>
+                <a:spcPct val="106000"/>
               </a:lnSpc>
+              <a:spcAft>
+                <a:spcPts val="700"/>
+              </a:spcAft>
               <a:buNone/>
             </a:pPr>
             <a:r>
@@ -17753,8 +17809,11 @@
             </a:r>
             <a:pPr indent="0" marL="0">
               <a:lnSpc>
-                <a:spcPct val="110000"/>
+                <a:spcPct val="106000"/>
               </a:lnSpc>
+              <a:spcAft>
+                <a:spcPts val="700"/>
+              </a:spcAft>
               <a:buNone/>
             </a:pPr>
             <a:r>
@@ -17768,39 +17827,37 @@
               </a:rPr>
               <a:t> refines it per group.</a:t>
             </a:r>
-            <a:pPr indent="0" marL="0">
+            <a:endParaRPr lang="en-US" sz="1200" dirty="0"/>
+          </a:p>
+          <a:p>
+            <a:pPr marL="190500" indent="-190500">
               <a:lnSpc>
-                <a:spcPct val="110000"/>
+                <a:spcPct val="106000"/>
               </a:lnSpc>
-              <a:buNone/>
-            </a:pPr>
-            <a:endParaRPr lang="en-US" sz="1200" dirty="0"/>
-          </a:p>
-          <a:p>
+              <a:spcAft>
+                <a:spcPts val="700"/>
+              </a:spcAft>
+              <a:buSzPct val="100000"/>
+              <a:buChar char="•"/>
+            </a:pPr>
+            <a:r>
+              <a:rPr lang="en-US" sz="1200" dirty="0">
+                <a:solidFill>
+                  <a:srgbClr val="00357A"/>
+                </a:solidFill>
+                <a:latin typeface="Poppins" pitchFamily="34" charset="0"/>
+                <a:ea typeface="Poppins" pitchFamily="34" charset="-122"/>
+                <a:cs typeface="Poppins" pitchFamily="34" charset="-120"/>
+              </a:rPr>
+              <a:t>Any file with </a:t>
+            </a:r>
             <a:pPr indent="0" marL="0">
               <a:lnSpc>
-                <a:spcPct val="110000"/>
+                <a:spcPct val="106000"/>
               </a:lnSpc>
-              <a:buNone/>
-            </a:pPr>
-            <a:r>
-              <a:rPr lang="en-US" sz="1200" dirty="0">
-                <a:solidFill>
-                  <a:srgbClr val="00357A"/>
-                </a:solidFill>
-                <a:latin typeface="Poppins" pitchFamily="34" charset="0"/>
-                <a:ea typeface="Poppins" pitchFamily="34" charset="-122"/>
-                <a:cs typeface="Poppins" pitchFamily="34" charset="-120"/>
-              </a:rPr>
-              <a:t>Any file with </a:t>
-            </a:r>
-            <a:endParaRPr lang="en-US" sz="1200" dirty="0"/>
-          </a:p>
-          <a:p>
-            <a:pPr indent="0" marL="0">
-              <a:lnSpc>
-                <a:spcPct val="110000"/>
-              </a:lnSpc>
+              <a:spcAft>
+                <a:spcPts val="700"/>
+              </a:spcAft>
               <a:buNone/>
             </a:pPr>
             <a:r>
@@ -17816,8 +17873,11 @@
             </a:r>
             <a:pPr indent="0" marL="0">
               <a:lnSpc>
-                <a:spcPct val="110000"/>
+                <a:spcPct val="106000"/>
               </a:lnSpc>
+              <a:spcAft>
+                <a:spcPts val="700"/>
+              </a:spcAft>
               <a:buNone/>
             </a:pPr>
             <a:r>
@@ -17831,39 +17891,37 @@
               </a:rPr>
               <a:t> is not backed up yet, and is picked up automatically.</a:t>
             </a:r>
-            <a:pPr indent="0" marL="0">
+            <a:endParaRPr lang="en-US" sz="1200" dirty="0"/>
+          </a:p>
+          <a:p>
+            <a:pPr marL="190500" indent="-190500">
               <a:lnSpc>
-                <a:spcPct val="110000"/>
+                <a:spcPct val="106000"/>
               </a:lnSpc>
-              <a:buNone/>
-            </a:pPr>
-            <a:endParaRPr lang="en-US" sz="1200" dirty="0"/>
-          </a:p>
-          <a:p>
+              <a:spcAft>
+                <a:spcPts val="700"/>
+              </a:spcAft>
+              <a:buSzPct val="100000"/>
+              <a:buChar char="•"/>
+            </a:pPr>
+            <a:r>
+              <a:rPr lang="en-US" sz="1200" dirty="0">
+                <a:solidFill>
+                  <a:srgbClr val="00357A"/>
+                </a:solidFill>
+                <a:latin typeface="Poppins" pitchFamily="34" charset="0"/>
+                <a:ea typeface="Poppins" pitchFamily="34" charset="-122"/>
+                <a:cs typeface="Poppins" pitchFamily="34" charset="-120"/>
+              </a:rPr>
+              <a:t>Every tar gets a </a:t>
+            </a:r>
             <a:pPr indent="0" marL="0">
               <a:lnSpc>
-                <a:spcPct val="110000"/>
+                <a:spcPct val="106000"/>
               </a:lnSpc>
-              <a:buNone/>
-            </a:pPr>
-            <a:r>
-              <a:rPr lang="en-US" sz="1200" dirty="0">
-                <a:solidFill>
-                  <a:srgbClr val="00357A"/>
-                </a:solidFill>
-                <a:latin typeface="Poppins" pitchFamily="34" charset="0"/>
-                <a:ea typeface="Poppins" pitchFamily="34" charset="-122"/>
-                <a:cs typeface="Poppins" pitchFamily="34" charset="-120"/>
-              </a:rPr>
-              <a:t>Every tar gets a </a:t>
-            </a:r>
-            <a:endParaRPr lang="en-US" sz="1200" dirty="0"/>
-          </a:p>
-          <a:p>
-            <a:pPr indent="0" marL="0">
-              <a:lnSpc>
-                <a:spcPct val="110000"/>
-              </a:lnSpc>
+              <a:spcAft>
+                <a:spcPts val="700"/>
+              </a:spcAft>
               <a:buNone/>
             </a:pPr>
             <a:r>
@@ -17879,8 +17937,11 @@
             </a:r>
             <a:pPr indent="0" marL="0">
               <a:lnSpc>
-                <a:spcPct val="110000"/>
+                <a:spcPct val="106000"/>
               </a:lnSpc>
+              <a:spcAft>
+                <a:spcPts val="700"/>
+              </a:spcAft>
               <a:buNone/>
             </a:pPr>
             <a:r>
@@ -17894,39 +17955,37 @@
               </a:rPr>
               <a:t> record whose status tracks it from list to tape.</a:t>
             </a:r>
-            <a:pPr indent="0" marL="0">
+            <a:endParaRPr lang="en-US" sz="1200" dirty="0"/>
+          </a:p>
+          <a:p>
+            <a:pPr marL="190500" indent="-190500">
               <a:lnSpc>
-                <a:spcPct val="110000"/>
+                <a:spcPct val="106000"/>
               </a:lnSpc>
-              <a:buNone/>
-            </a:pPr>
+              <a:spcAft>
+                <a:spcPts val="700"/>
+              </a:spcAft>
+              <a:buSzPct val="100000"/>
+              <a:buChar char="•"/>
+            </a:pPr>
+            <a:r>
+              <a:rPr lang="en-US" sz="1200" dirty="0">
+                <a:solidFill>
+                  <a:srgbClr val="00357A"/>
+                </a:solidFill>
+                <a:latin typeface="Poppins" pitchFamily="34" charset="0"/>
+                <a:ea typeface="Poppins" pitchFamily="34" charset="-122"/>
+                <a:cs typeface="Poppins" pitchFamily="34" charset="-120"/>
+              </a:rPr>
+              <a:t>Work is resumable: a run that stops leaves its pending records behind.</a:t>
+            </a:r>
             <a:endParaRPr lang="en-US" sz="1200" dirty="0"/>
           </a:p>
-          <a:p>
-            <a:pPr indent="0" marL="0">
-              <a:lnSpc>
-                <a:spcPct val="110000"/>
-              </a:lnSpc>
-              <a:buNone/>
-            </a:pPr>
-            <a:r>
-              <a:rPr lang="en-US" sz="1200" dirty="0">
-                <a:solidFill>
-                  <a:srgbClr val="00357A"/>
-                </a:solidFill>
-                <a:latin typeface="Poppins" pitchFamily="34" charset="0"/>
-                <a:ea typeface="Poppins" pitchFamily="34" charset="-122"/>
-                <a:cs typeface="Poppins" pitchFamily="34" charset="-120"/>
-              </a:rPr>
-              <a:t>Work is resumable: a run that stops leaves its pending records behind.</a:t>
-            </a:r>
-            <a:endParaRPr lang="en-US" sz="1200" dirty="0"/>
-          </a:p>
-        </p:txBody>
-      </p:sp>
-      <p:sp>
-        <p:nvSpPr>
-          <p:cNvPr id="8" name="Shape 6"/>
+        </p:txBody>
+      </p:sp>
+      <p:sp>
+        <p:nvSpPr>
+          <p:cNvPr id="10" name="Shape 8"/>
           <p:cNvSpPr/>
           <p:nvPr/>
         </p:nvSpPr>
@@ -17960,7 +18019,7 @@
       </p:sp>
       <p:sp>
         <p:nvSpPr>
-          <p:cNvPr id="9" name="Shape 7"/>
+          <p:cNvPr id="11" name="Shape 9"/>
           <p:cNvSpPr/>
           <p:nvPr/>
         </p:nvSpPr>
@@ -17980,7 +18039,7 @@
       </p:sp>
       <p:sp>
         <p:nvSpPr>
-          <p:cNvPr id="10" name="Text 8"/>
+          <p:cNvPr id="12" name="Text 10"/>
           <p:cNvSpPr/>
           <p:nvPr/>
         </p:nvSpPr>
@@ -18019,7 +18078,7 @@
       </p:sp>
       <p:sp>
         <p:nvSpPr>
-          <p:cNvPr id="11" name="Text 9"/>
+          <p:cNvPr id="13" name="Text 11"/>
           <p:cNvSpPr/>
           <p:nvPr/>
         </p:nvSpPr>
@@ -18058,7 +18117,7 @@
       </p:sp>
       <p:sp>
         <p:nvSpPr>
-          <p:cNvPr id="12" name="Text 10"/>
+          <p:cNvPr id="14" name="Text 12"/>
           <p:cNvSpPr/>
           <p:nvPr/>
         </p:nvSpPr>
@@ -18100,7 +18159,7 @@
       </p:sp>
       <p:sp>
         <p:nvSpPr>
-          <p:cNvPr id="13" name="Shape 11"/>
+          <p:cNvPr id="15" name="Shape 13"/>
           <p:cNvSpPr/>
           <p:nvPr/>
         </p:nvSpPr>
@@ -18134,7 +18193,7 @@
       </p:sp>
       <p:sp>
         <p:nvSpPr>
-          <p:cNvPr id="14" name="Shape 12"/>
+          <p:cNvPr id="16" name="Shape 14"/>
           <p:cNvSpPr/>
           <p:nvPr/>
         </p:nvSpPr>
@@ -18154,7 +18213,7 @@
       </p:sp>
       <p:sp>
         <p:nvSpPr>
-          <p:cNvPr id="15" name="Text 13"/>
+          <p:cNvPr id="17" name="Text 15"/>
           <p:cNvSpPr/>
           <p:nvPr/>
         </p:nvSpPr>
@@ -18193,7 +18252,7 @@
       </p:sp>
       <p:sp>
         <p:nvSpPr>
-          <p:cNvPr id="16" name="Text 14"/>
+          <p:cNvPr id="18" name="Text 16"/>
           <p:cNvSpPr/>
           <p:nvPr/>
         </p:nvSpPr>
@@ -18232,7 +18291,7 @@
       </p:sp>
       <p:sp>
         <p:nvSpPr>
-          <p:cNvPr id="17" name="Text 15"/>
+          <p:cNvPr id="19" name="Text 17"/>
           <p:cNvSpPr/>
           <p:nvPr/>
         </p:nvSpPr>
@@ -18274,7 +18333,7 @@
       </p:sp>
       <p:sp>
         <p:nvSpPr>
-          <p:cNvPr id="18" name="Shape 16"/>
+          <p:cNvPr id="20" name="Shape 18"/>
           <p:cNvSpPr/>
           <p:nvPr/>
         </p:nvSpPr>
@@ -18308,7 +18367,7 @@
       </p:sp>
       <p:sp>
         <p:nvSpPr>
-          <p:cNvPr id="19" name="Shape 17"/>
+          <p:cNvPr id="21" name="Shape 19"/>
           <p:cNvSpPr/>
           <p:nvPr/>
         </p:nvSpPr>
@@ -18328,7 +18387,7 @@
       </p:sp>
       <p:sp>
         <p:nvSpPr>
-          <p:cNvPr id="20" name="Text 18"/>
+          <p:cNvPr id="22" name="Text 20"/>
           <p:cNvSpPr/>
           <p:nvPr/>
         </p:nvSpPr>
@@ -18367,7 +18426,7 @@
       </p:sp>
       <p:sp>
         <p:nvSpPr>
-          <p:cNvPr id="21" name="Text 19"/>
+          <p:cNvPr id="23" name="Text 21"/>
           <p:cNvSpPr/>
           <p:nvPr/>
         </p:nvSpPr>
@@ -18406,7 +18465,7 @@
       </p:sp>
       <p:sp>
         <p:nvSpPr>
-          <p:cNvPr id="22" name="Text 20"/>
+          <p:cNvPr id="24" name="Text 22"/>
           <p:cNvSpPr/>
           <p:nvPr/>
         </p:nvSpPr>
@@ -18448,7 +18507,7 @@
       </p:sp>
       <p:sp>
         <p:nvSpPr>
-          <p:cNvPr id="23" name="Shape 21"/>
+          <p:cNvPr id="25" name="Shape 23"/>
           <p:cNvSpPr/>
           <p:nvPr/>
         </p:nvSpPr>
@@ -18482,7 +18541,7 @@
       </p:sp>
       <p:sp>
         <p:nvSpPr>
-          <p:cNvPr id="24" name="Shape 22"/>
+          <p:cNvPr id="26" name="Shape 24"/>
           <p:cNvSpPr/>
           <p:nvPr/>
         </p:nvSpPr>
@@ -18502,7 +18561,7 @@
       </p:sp>
       <p:sp>
         <p:nvSpPr>
-          <p:cNvPr id="25" name="Text 23"/>
+          <p:cNvPr id="27" name="Text 25"/>
           <p:cNvSpPr/>
           <p:nvPr/>
         </p:nvSpPr>
@@ -18541,7 +18600,7 @@
       </p:sp>
       <p:sp>
         <p:nvSpPr>
-          <p:cNvPr id="26" name="Text 24"/>
+          <p:cNvPr id="28" name="Text 26"/>
           <p:cNvSpPr/>
           <p:nvPr/>
         </p:nvSpPr>
@@ -18580,7 +18639,7 @@
       </p:sp>
       <p:sp>
         <p:nvSpPr>
-          <p:cNvPr id="27" name="Text 25"/>
+          <p:cNvPr id="29" name="Text 27"/>
           <p:cNvSpPr/>
           <p:nvPr/>
         </p:nvSpPr>
@@ -18622,7 +18681,7 @@
       </p:sp>
       <p:sp>
         <p:nvSpPr>
-          <p:cNvPr id="28" name="Shape 26"/>
+          <p:cNvPr id="30" name="Shape 28"/>
           <p:cNvSpPr/>
           <p:nvPr/>
         </p:nvSpPr>
@@ -18656,7 +18715,7 @@
       </p:sp>
       <p:sp>
         <p:nvSpPr>
-          <p:cNvPr id="29" name="Shape 27"/>
+          <p:cNvPr id="31" name="Shape 29"/>
           <p:cNvSpPr/>
           <p:nvPr/>
         </p:nvSpPr>
@@ -18676,7 +18735,7 @@
       </p:sp>
       <p:sp>
         <p:nvSpPr>
-          <p:cNvPr id="30" name="Text 28"/>
+          <p:cNvPr id="32" name="Text 30"/>
           <p:cNvSpPr/>
           <p:nvPr/>
         </p:nvSpPr>
@@ -18715,7 +18774,7 @@
       </p:sp>
       <p:sp>
         <p:nvSpPr>
-          <p:cNvPr id="31" name="Text 29"/>
+          <p:cNvPr id="33" name="Text 31"/>
           <p:cNvSpPr/>
           <p:nvPr/>
         </p:nvSpPr>
@@ -18754,7 +18813,7 @@
       </p:sp>
       <p:sp>
         <p:nvSpPr>
-          <p:cNvPr id="32" name="Text 30"/>
+          <p:cNvPr id="34" name="Text 32"/>
           <p:cNvSpPr/>
           <p:nvPr/>
         </p:nvSpPr>
@@ -18796,7 +18855,7 @@
       </p:sp>
       <p:sp>
         <p:nvSpPr>
-          <p:cNvPr id="33" name="Shape 31"/>
+          <p:cNvPr id="35" name="Shape 33"/>
           <p:cNvSpPr/>
           <p:nvPr/>
         </p:nvSpPr>
@@ -18830,7 +18889,7 @@
       </p:sp>
       <p:sp>
         <p:nvSpPr>
-          <p:cNvPr id="34" name="Shape 32"/>
+          <p:cNvPr id="36" name="Shape 34"/>
           <p:cNvSpPr/>
           <p:nvPr/>
         </p:nvSpPr>
@@ -18850,7 +18909,7 @@
       </p:sp>
       <p:sp>
         <p:nvSpPr>
-          <p:cNvPr id="35" name="Text 33"/>
+          <p:cNvPr id="37" name="Text 35"/>
           <p:cNvSpPr/>
           <p:nvPr/>
         </p:nvSpPr>
@@ -18889,7 +18948,7 @@
       </p:sp>
       <p:sp>
         <p:nvSpPr>
-          <p:cNvPr id="36" name="Text 34"/>
+          <p:cNvPr id="38" name="Text 36"/>
           <p:cNvSpPr/>
           <p:nvPr/>
         </p:nvSpPr>
@@ -18928,7 +18987,7 @@
       </p:sp>
       <p:sp>
         <p:nvSpPr>
-          <p:cNvPr id="37" name="Text 35"/>
+          <p:cNvPr id="39" name="Text 37"/>
           <p:cNvSpPr/>
           <p:nvPr/>
         </p:nvSpPr>
@@ -18970,7 +19029,7 @@
       </p:sp>
       <p:pic>
         <p:nvPicPr>
-          <p:cNvPr id="38" name="Image 0" descr="nsf_ncar_logo_color.png">    </p:cNvPr>
+          <p:cNvPr id="40" name="Image 0" descr="nsf_ncar_logo_color.png">    </p:cNvPr>
           <p:cNvPicPr>
             <a:picLocks noChangeAspect="1"/>
           </p:cNvPicPr>
@@ -18994,7 +19053,7 @@
       </p:pic>
       <p:sp>
         <p:nvSpPr>
-          <p:cNvPr id="39" name="Text 36"/>
+          <p:cNvPr id="41" name="Text 38"/>
           <p:cNvSpPr/>
           <p:nvPr/>
         </p:nvSpPr>
@@ -19033,7 +19092,7 @@
       </p:sp>
       <p:sp>
         <p:nvSpPr>
-          <p:cNvPr id="40" name="Text 37"/>
+          <p:cNvPr id="42" name="Text 39"/>
           <p:cNvSpPr/>
           <p:nvPr/>
         </p:nvSpPr>
@@ -21848,7 +21907,7 @@
                           <a:ea typeface="Poppins" pitchFamily="34" charset="-122"/>
                           <a:cs typeface="Poppins" pitchFamily="34" charset="-120"/>
                         </a:rPr>
-                        <a:t>Backup end point only</a:t>
+                        <a:t>only work flagged 'B' (Backup only)</a:t>
                       </a:r>
                       <a:endParaRPr lang="en-US" sz="1200" dirty="0">
                         <a:latin typeface="Poppins" charset="0"/>
@@ -21986,7 +22045,7 @@
                           <a:ea typeface="Poppins" pitchFamily="34" charset="-122"/>
                           <a:cs typeface="Poppins" pitchFamily="34" charset="-120"/>
                         </a:rPr>
-                        <a:t>Backup and Drdata end points</a:t>
+                        <a:t>only work flagged 'D' (Backup + Drdata)</a:t>
                       </a:r>
                       <a:endParaRPr lang="en-US" sz="1200" dirty="0">
                         <a:latin typeface="Poppins" charset="0"/>
@@ -23902,7 +23961,7 @@
                 <a:ea typeface="Poppins" pitchFamily="34" charset="-122"/>
                 <a:cs typeface="Poppins" pitchFamily="34" charset="-120"/>
               </a:rPr>
-              <a:t>Either -a or -t is required — without one, dsquasar prints its usage and exits. -B and -D are mutually exclusive; giving neither backs up to both end points.</a:t>
+              <a:t>Either -a or -t is required — without one, dsquasar prints its usage and exits. -B and -D only narrow what a run processes; with neither, each dataset is backed up per its own backflag.</a:t>
             </a:r>
             <a:endParaRPr lang="en-US" sz="1150" dirty="0"/>
           </a:p>
@@ -25952,7 +26011,7 @@
         </p:nvSpPr>
         <p:spPr>
           <a:xfrm>
-            <a:off x="457200" y="4617720"/>
+            <a:off x="457200" y="4709160"/>
             <a:ext cx="11292840" cy="320040"/>
           </a:xfrm>
           <a:prstGeom prst="rect">
@@ -25977,7 +26036,7 @@
                 <a:ea typeface="Poppins" pitchFamily="34" charset="-122"/>
                 <a:cs typeface="Poppins" pitchFamily="34" charset="-120"/>
               </a:rPr>
-              <a:t>Related console commands</a:t>
+              <a:t>Where the backup flags are set</a:t>
             </a:r>
             <a:endParaRPr lang="en-US" sz="1500" dirty="0"/>
           </a:p>
@@ -25991,12 +26050,12 @@
         </p:nvSpPr>
         <p:spPr>
           <a:xfrm>
-            <a:off x="457200" y="4983480"/>
-            <a:ext cx="3703320" cy="914400"/>
+            <a:off x="457200" y="5074920"/>
+            <a:ext cx="11292840" cy="1051560"/>
           </a:xfrm>
           <a:prstGeom prst="roundRect">
             <a:avLst>
-              <a:gd name="adj" fmla="val 8000"/>
+              <a:gd name="adj" fmla="val 6957"/>
             </a:avLst>
           </a:prstGeom>
           <a:solidFill>
@@ -26018,8 +26077,8 @@
         </p:nvSpPr>
         <p:spPr>
           <a:xfrm>
-            <a:off x="640080" y="5102352"/>
-            <a:ext cx="3337560" cy="320040"/>
+            <a:off x="685800" y="5074920"/>
+            <a:ext cx="10835640" cy="1051560"/>
           </a:xfrm>
           <a:prstGeom prst="rect">
             <a:avLst/>
@@ -26032,10 +26091,13 @@
           <a:lstStyle/>
           <a:p>
             <a:pPr indent="0" marL="0">
-              <a:buNone/>
-            </a:pPr>
-            <a:r>
-              <a:rPr lang="en-US" sz="1400" b="1" dirty="0">
+              <a:lnSpc>
+                <a:spcPct val="110000"/>
+              </a:lnSpc>
+              <a:buNone/>
+            </a:pPr>
+            <a:r>
+              <a:rPr lang="en-US" sz="1300" b="1" dirty="0">
                 <a:solidFill>
                   <a:srgbClr val="0057C2"/>
                 </a:solidFill>
@@ -26045,308 +26107,31 @@
               </a:rPr>
               <a:t>dsquasar</a:t>
             </a:r>
-            <a:endParaRPr lang="en-US" sz="1400" dirty="0"/>
-          </a:p>
-        </p:txBody>
-      </p:sp>
-      <p:sp>
-        <p:nvSpPr>
-          <p:cNvPr id="12" name="Text 8"/>
-          <p:cNvSpPr/>
-          <p:nvPr/>
-        </p:nvSpPr>
-        <p:spPr>
-          <a:xfrm>
-            <a:off x="640080" y="5413248"/>
-            <a:ext cx="3337560" cy="457200"/>
-          </a:xfrm>
-          <a:prstGeom prst="rect">
-            <a:avLst/>
-          </a:prstGeom>
-          <a:noFill/>
-          <a:ln/>
-        </p:spPr>
-        <p:txBody>
-          <a:bodyPr wrap="square" lIns="0" tIns="0" rIns="0" bIns="0" rtlCol="0" anchor="t"/>
-          <a:lstStyle/>
-          <a:p>
             <a:pPr indent="0" marL="0">
               <a:lnSpc>
-                <a:spcPct val="103000"/>
+                <a:spcPct val="110000"/>
               </a:lnSpc>
               <a:buNone/>
             </a:pPr>
             <a:r>
-              <a:rPr lang="en-US" sz="1100" dirty="0">
-                <a:solidFill>
-                  <a:srgbClr val="53565A"/>
-                </a:solidFill>
-                <a:latin typeface="Poppins" pitchFamily="34" charset="0"/>
-                <a:ea typeface="Poppins" pitchFamily="34" charset="-122"/>
-                <a:cs typeface="Poppins" pitchFamily="34" charset="-120"/>
-              </a:rPr>
-              <a:t>back up GDEX archives onto the Quasar end points</a:t>
-            </a:r>
-            <a:endParaRPr lang="en-US" sz="1100" dirty="0"/>
-          </a:p>
-        </p:txBody>
-      </p:sp>
-      <p:sp>
-        <p:nvSpPr>
-          <p:cNvPr id="13" name="Shape 9"/>
-          <p:cNvSpPr/>
-          <p:nvPr/>
-        </p:nvSpPr>
-        <p:spPr>
-          <a:xfrm>
-            <a:off x="4251960" y="4983480"/>
-            <a:ext cx="3703320" cy="914400"/>
-          </a:xfrm>
-          <a:prstGeom prst="roundRect">
-            <a:avLst>
-              <a:gd name="adj" fmla="val 8000"/>
-            </a:avLst>
-          </a:prstGeom>
-          <a:solidFill>
-            <a:srgbClr val="DCEBF7"/>
-          </a:solidFill>
-          <a:ln w="15240">
-            <a:solidFill>
-              <a:srgbClr val="0092DB"/>
-            </a:solidFill>
-            <a:prstDash val="solid"/>
-          </a:ln>
-        </p:spPr>
-      </p:sp>
-      <p:sp>
-        <p:nvSpPr>
-          <p:cNvPr id="14" name="Text 10"/>
-          <p:cNvSpPr/>
-          <p:nvPr/>
-        </p:nvSpPr>
-        <p:spPr>
-          <a:xfrm>
-            <a:off x="4434840" y="5102352"/>
-            <a:ext cx="3337560" cy="320040"/>
-          </a:xfrm>
-          <a:prstGeom prst="rect">
-            <a:avLst/>
-          </a:prstGeom>
-          <a:noFill/>
-          <a:ln/>
-        </p:spPr>
-        <p:txBody>
-          <a:bodyPr wrap="square" lIns="0" tIns="0" rIns="0" bIns="0" rtlCol="0" anchor="ctr"/>
-          <a:lstStyle/>
-          <a:p>
-            <a:pPr indent="0" marL="0">
-              <a:buNone/>
-            </a:pPr>
-            <a:r>
-              <a:rPr lang="en-US" sz="1400" b="1" dirty="0">
-                <a:solidFill>
-                  <a:srgbClr val="0092DB"/>
-                </a:solidFill>
-                <a:latin typeface="Courier New" pitchFamily="34" charset="0"/>
-                <a:ea typeface="Courier New" pitchFamily="34" charset="-122"/>
-                <a:cs typeface="Courier New" pitchFamily="34" charset="-120"/>
-              </a:rPr>
-              <a:t>tacctar</a:t>
-            </a:r>
-            <a:endParaRPr lang="en-US" sz="1400" dirty="0"/>
-          </a:p>
-        </p:txBody>
-      </p:sp>
-      <p:sp>
-        <p:nvSpPr>
-          <p:cNvPr id="15" name="Text 11"/>
-          <p:cNvSpPr/>
-          <p:nvPr/>
-        </p:nvSpPr>
-        <p:spPr>
-          <a:xfrm>
-            <a:off x="4434840" y="5413248"/>
-            <a:ext cx="3337560" cy="457200"/>
-          </a:xfrm>
-          <a:prstGeom prst="rect">
-            <a:avLst/>
-          </a:prstGeom>
-          <a:noFill/>
-          <a:ln/>
-        </p:spPr>
-        <p:txBody>
-          <a:bodyPr wrap="square" lIns="0" tIns="0" rIns="0" bIns="0" rtlCol="0" anchor="t"/>
-          <a:lstStyle/>
-          <a:p>
+              <a:rPr lang="en-US" sz="1300" dirty="0">
+                <a:solidFill>
+                  <a:srgbClr val="00357A"/>
+                </a:solidFill>
+                <a:latin typeface="Poppins" pitchFamily="34" charset="0"/>
+                <a:ea typeface="Poppins" pitchFamily="34" charset="-122"/>
+                <a:cs typeface="Poppins" pitchFamily="34" charset="-120"/>
+              </a:rPr>
+              <a:t> ships with rda_python_dsquasar.   Backup flags are edited at </a:t>
+            </a:r>
             <a:pPr indent="0" marL="0">
               <a:lnSpc>
-                <a:spcPct val="103000"/>
+                <a:spcPct val="110000"/>
               </a:lnSpc>
               <a:buNone/>
             </a:pPr>
             <a:r>
-              <a:rPr lang="en-US" sz="1100" dirty="0">
-                <a:solidFill>
-                  <a:srgbClr val="53565A"/>
-                </a:solidFill>
-                <a:latin typeface="Poppins" pitchFamily="34" charset="0"/>
-                <a:ea typeface="Poppins" pitchFamily="34" charset="-122"/>
-                <a:cs typeface="Poppins" pitchFamily="34" charset="-120"/>
-              </a:rPr>
-              <a:t>build tar files for the TACC copy of the archive</a:t>
-            </a:r>
-            <a:endParaRPr lang="en-US" sz="1100" dirty="0"/>
-          </a:p>
-        </p:txBody>
-      </p:sp>
-      <p:sp>
-        <p:nvSpPr>
-          <p:cNvPr id="16" name="Shape 12"/>
-          <p:cNvSpPr/>
-          <p:nvPr/>
-        </p:nvSpPr>
-        <p:spPr>
-          <a:xfrm>
-            <a:off x="8046720" y="4983480"/>
-            <a:ext cx="3703320" cy="914400"/>
-          </a:xfrm>
-          <a:prstGeom prst="roundRect">
-            <a:avLst>
-              <a:gd name="adj" fmla="val 8000"/>
-            </a:avLst>
-          </a:prstGeom>
-          <a:solidFill>
-            <a:srgbClr val="DCEBF7"/>
-          </a:solidFill>
-          <a:ln w="15240">
-            <a:solidFill>
-              <a:srgbClr val="0097A7"/>
-            </a:solidFill>
-            <a:prstDash val="solid"/>
-          </a:ln>
-        </p:spPr>
-      </p:sp>
-      <p:sp>
-        <p:nvSpPr>
-          <p:cNvPr id="17" name="Text 13"/>
-          <p:cNvSpPr/>
-          <p:nvPr/>
-        </p:nvSpPr>
-        <p:spPr>
-          <a:xfrm>
-            <a:off x="8229600" y="5102352"/>
-            <a:ext cx="3337560" cy="320040"/>
-          </a:xfrm>
-          <a:prstGeom prst="rect">
-            <a:avLst/>
-          </a:prstGeom>
-          <a:noFill/>
-          <a:ln/>
-        </p:spPr>
-        <p:txBody>
-          <a:bodyPr wrap="square" lIns="0" tIns="0" rIns="0" bIns="0" rtlCol="0" anchor="ctr"/>
-          <a:lstStyle/>
-          <a:p>
-            <a:pPr indent="0" marL="0">
-              <a:buNone/>
-            </a:pPr>
-            <a:r>
-              <a:rPr lang="en-US" sz="1400" b="1" dirty="0">
-                <a:solidFill>
-                  <a:srgbClr val="0097A7"/>
-                </a:solidFill>
-                <a:latin typeface="Courier New" pitchFamily="34" charset="0"/>
-                <a:ea typeface="Courier New" pitchFamily="34" charset="-122"/>
-                <a:cs typeface="Courier New" pitchFamily="34" charset="-120"/>
-              </a:rPr>
-              <a:t>taccrec</a:t>
-            </a:r>
-            <a:endParaRPr lang="en-US" sz="1400" dirty="0"/>
-          </a:p>
-        </p:txBody>
-      </p:sp>
-      <p:sp>
-        <p:nvSpPr>
-          <p:cNvPr id="18" name="Text 14"/>
-          <p:cNvSpPr/>
-          <p:nvPr/>
-        </p:nvSpPr>
-        <p:spPr>
-          <a:xfrm>
-            <a:off x="8229600" y="5413248"/>
-            <a:ext cx="3337560" cy="457200"/>
-          </a:xfrm>
-          <a:prstGeom prst="rect">
-            <a:avLst/>
-          </a:prstGeom>
-          <a:noFill/>
-          <a:ln/>
-        </p:spPr>
-        <p:txBody>
-          <a:bodyPr wrap="square" lIns="0" tIns="0" rIns="0" bIns="0" rtlCol="0" anchor="t"/>
-          <a:lstStyle/>
-          <a:p>
-            <a:pPr indent="0" marL="0">
-              <a:lnSpc>
-                <a:spcPct val="103000"/>
-              </a:lnSpc>
-              <a:buNone/>
-            </a:pPr>
-            <a:r>
-              <a:rPr lang="en-US" sz="1100" dirty="0">
-                <a:solidFill>
-                  <a:srgbClr val="53565A"/>
-                </a:solidFill>
-                <a:latin typeface="Poppins" pitchFamily="34" charset="0"/>
-                <a:ea typeface="Poppins" pitchFamily="34" charset="-122"/>
-                <a:cs typeface="Poppins" pitchFamily="34" charset="-120"/>
-              </a:rPr>
-              <a:t>recover files from the TACC copy</a:t>
-            </a:r>
-            <a:endParaRPr lang="en-US" sz="1100" dirty="0"/>
-          </a:p>
-        </p:txBody>
-      </p:sp>
-      <p:sp>
-        <p:nvSpPr>
-          <p:cNvPr id="19" name="Text 15"/>
-          <p:cNvSpPr/>
-          <p:nvPr/>
-        </p:nvSpPr>
-        <p:spPr>
-          <a:xfrm>
-            <a:off x="457200" y="5961888"/>
-            <a:ext cx="11292840" cy="292608"/>
-          </a:xfrm>
-          <a:prstGeom prst="rect">
-            <a:avLst/>
-          </a:prstGeom>
-          <a:noFill/>
-          <a:ln/>
-        </p:spPr>
-        <p:txBody>
-          <a:bodyPr wrap="square" lIns="0" tIns="0" rIns="0" bIns="0" rtlCol="0" anchor="ctr"/>
-          <a:lstStyle/>
-          <a:p>
-            <a:pPr indent="0" marL="0">
-              <a:buNone/>
-            </a:pPr>
-            <a:r>
-              <a:rPr lang="en-US" sz="1100" i="1" dirty="0">
-                <a:solidFill>
-                  <a:srgbClr val="53565A"/>
-                </a:solidFill>
-                <a:latin typeface="Poppins" pitchFamily="34" charset="0"/>
-                <a:ea typeface="Poppins" pitchFamily="34" charset="-122"/>
-                <a:cs typeface="Poppins" pitchFamily="34" charset="-120"/>
-              </a:rPr>
-              <a:t>All three ship with rda_python_dsquasar.   Backup flags are edited at </a:t>
-            </a:r>
-            <a:pPr indent="0" marL="0">
-              <a:buNone/>
-            </a:pPr>
-            <a:r>
-              <a:rPr lang="en-US" sz="1100" b="1" u="sng" dirty="0">
+              <a:rPr lang="en-US" sz="1300" b="1" u="sng" dirty="0">
                 <a:solidFill>
                   <a:srgbClr val="0057C2"/>
                 </a:solidFill>
@@ -26364,12 +26149,15 @@
               <a:t>gdex.ucar.edu/rda_pg_config/</a:t>
             </a:r>
             <a:pPr indent="0" marL="0">
-              <a:buNone/>
-            </a:pPr>
-            <a:r>
-              <a:rPr lang="en-US" sz="1100" i="1" dirty="0">
-                <a:solidFill>
-                  <a:srgbClr val="53565A"/>
+              <a:lnSpc>
+                <a:spcPct val="110000"/>
+              </a:lnSpc>
+              <a:buNone/>
+            </a:pPr>
+            <a:r>
+              <a:rPr lang="en-US" sz="1300" dirty="0">
+                <a:solidFill>
+                  <a:srgbClr val="00357A"/>
                 </a:solidFill>
                 <a:latin typeface="Poppins" pitchFamily="34" charset="0"/>
                 <a:ea typeface="Poppins" pitchFamily="34" charset="-122"/>
@@ -26377,13 +26165,13 @@
               </a:rPr>
               <a:t>  (DSARCH → Dataset Information).</a:t>
             </a:r>
-            <a:endParaRPr lang="en-US" sz="1100" dirty="0"/>
+            <a:endParaRPr lang="en-US" sz="1300" dirty="0"/>
           </a:p>
         </p:txBody>
       </p:sp>
       <p:pic>
         <p:nvPicPr>
-          <p:cNvPr id="20" name="Image 0" descr="nsf_ncar_logo_color.png">    </p:cNvPr>
+          <p:cNvPr id="12" name="Image 0" descr="nsf_ncar_logo_color.png">    </p:cNvPr>
           <p:cNvPicPr>
             <a:picLocks noChangeAspect="1"/>
           </p:cNvPicPr>
@@ -26407,7 +26195,7 @@
       </p:pic>
       <p:sp>
         <p:nvSpPr>
-          <p:cNvPr id="21" name="Text 16"/>
+          <p:cNvPr id="13" name="Text 8"/>
           <p:cNvSpPr/>
           <p:nvPr/>
         </p:nvSpPr>
@@ -26446,7 +26234,7 @@
       </p:sp>
       <p:sp>
         <p:nvSpPr>
-          <p:cNvPr id="22" name="Text 17"/>
+          <p:cNvPr id="14" name="Text 9"/>
           <p:cNvSpPr/>
           <p:nvPr/>
         </p:nvSpPr>
@@ -28446,7 +28234,7 @@
         </p:nvSpPr>
         <p:spPr>
           <a:xfrm>
-            <a:off x="457200" y="4617720"/>
+            <a:off x="457200" y="4709160"/>
             <a:ext cx="11292840" cy="320040"/>
           </a:xfrm>
           <a:prstGeom prst="rect">
@@ -28471,7 +28259,7 @@
                 <a:ea typeface="Poppins" pitchFamily="34" charset="-122"/>
                 <a:cs typeface="Poppins" pitchFamily="34" charset="-120"/>
               </a:rPr>
-              <a:t>The TACC utilities</a:t>
+              <a:t>No separate recovery tool</a:t>
             </a:r>
             <a:endParaRPr lang="en-US" sz="1500" dirty="0"/>
           </a:p>
@@ -28485,8 +28273,8 @@
         </p:nvSpPr>
         <p:spPr>
           <a:xfrm>
-            <a:off x="457200" y="4956048"/>
-            <a:ext cx="11292840" cy="640080"/>
+            <a:off x="457200" y="5047488"/>
+            <a:ext cx="11292840" cy="548640"/>
           </a:xfrm>
           <a:prstGeom prst="rect">
             <a:avLst/>
@@ -28513,7 +28301,7 @@
                 <a:ea typeface="Poppins" pitchFamily="34" charset="-122"/>
                 <a:cs typeface="Poppins" pitchFamily="34" charset="-120"/>
               </a:rPr>
-              <a:t>The same package ships tacctar and taccrec for the separate TACC copy of the archive: tacctar builds the tar files, taccrec recovers from them. They follow the same tar-then-transfer shape but talk to the TACC servers rather than the Quasar Globus end points.</a:t>
+              <a:t>Nothing extra to install: the same dsarch that stages files for the backup also reads them back. Point -RQ at a dataset and file, and it fetches the right tar from the right end point and unpacks only what you asked for.</a:t>
             </a:r>
             <a:endParaRPr lang="en-US" sz="1200" dirty="0"/>
           </a:p>
@@ -31385,7 +31173,7 @@
                 <a:ea typeface="Poppins" pitchFamily="34" charset="-122"/>
                 <a:cs typeface="Poppins" pitchFamily="34" charset="-120"/>
               </a:rPr>
-              <a:t>three console commands:  </a:t>
+              <a:t>one console command:  </a:t>
             </a:r>
             <a:pPr algn="ctr" indent="0" marL="0">
               <a:buNone/>
@@ -31413,63 +31201,7 @@
                 <a:ea typeface="Poppins" pitchFamily="34" charset="-122"/>
                 <a:cs typeface="Poppins" pitchFamily="34" charset="-120"/>
               </a:rPr>
-              <a:t>  (Quasar backup),  </a:t>
-            </a:r>
-            <a:pPr algn="ctr" indent="0" marL="0">
-              <a:buNone/>
-            </a:pPr>
-            <a:r>
-              <a:rPr lang="en-US" sz="1300" b="1" dirty="0">
-                <a:solidFill>
-                  <a:srgbClr val="00357A"/>
-                </a:solidFill>
-                <a:latin typeface="Courier New" pitchFamily="34" charset="0"/>
-                <a:ea typeface="Courier New" pitchFamily="34" charset="-122"/>
-                <a:cs typeface="Courier New" pitchFamily="34" charset="-120"/>
-              </a:rPr>
-              <a:t>tacctar</a:t>
-            </a:r>
-            <a:pPr algn="ctr" indent="0" marL="0">
-              <a:buNone/>
-            </a:pPr>
-            <a:r>
-              <a:rPr lang="en-US" sz="1300" dirty="0">
-                <a:solidFill>
-                  <a:srgbClr val="00357A"/>
-                </a:solidFill>
-                <a:latin typeface="Poppins" pitchFamily="34" charset="0"/>
-                <a:ea typeface="Poppins" pitchFamily="34" charset="-122"/>
-                <a:cs typeface="Poppins" pitchFamily="34" charset="-120"/>
-              </a:rPr>
-              <a:t>  (build TACC tar bundles),  </a:t>
-            </a:r>
-            <a:pPr algn="ctr" indent="0" marL="0">
-              <a:buNone/>
-            </a:pPr>
-            <a:r>
-              <a:rPr lang="en-US" sz="1300" b="1" dirty="0">
-                <a:solidFill>
-                  <a:srgbClr val="00357A"/>
-                </a:solidFill>
-                <a:latin typeface="Courier New" pitchFamily="34" charset="0"/>
-                <a:ea typeface="Courier New" pitchFamily="34" charset="-122"/>
-                <a:cs typeface="Courier New" pitchFamily="34" charset="-120"/>
-              </a:rPr>
-              <a:t>taccrec</a:t>
-            </a:r>
-            <a:pPr algn="ctr" indent="0" marL="0">
-              <a:buNone/>
-            </a:pPr>
-            <a:r>
-              <a:rPr lang="en-US" sz="1300" dirty="0">
-                <a:solidFill>
-                  <a:srgbClr val="00357A"/>
-                </a:solidFill>
-                <a:latin typeface="Poppins" pitchFamily="34" charset="0"/>
-                <a:ea typeface="Poppins" pitchFamily="34" charset="-122"/>
-                <a:cs typeface="Poppins" pitchFamily="34" charset="-120"/>
-              </a:rPr>
-              <a:t>  (recover from TACC bundles).</a:t>
+              <a:t>  backs up the whole GDEX archive onto the Quasar end points.</a:t>
             </a:r>
             <a:endParaRPr lang="en-US" sz="1300" dirty="0"/>
           </a:p>
@@ -38344,7 +38076,7 @@
                 <a:ea typeface="Poppins" pitchFamily="34" charset="-122"/>
                 <a:cs typeface="Poppins" pitchFamily="34" charset="-120"/>
               </a:rPr>
-              <a:t>Per-run override: </a:t>
+              <a:t>Per-run filter: </a:t>
             </a:r>
             <a:endParaRPr lang="en-US" sz="1050" dirty="0"/>
           </a:p>
@@ -38415,7 +38147,7 @@
                 <a:ea typeface="Poppins" pitchFamily="34" charset="-122"/>
                 <a:cs typeface="Poppins" pitchFamily="34" charset="-120"/>
               </a:rPr>
-              <a:t> narrows a run to one copy; neither means both.</a:t>
+              <a:t> limits a run to what is flagged that way; with neither, each dataset follows its own flag.</a:t>
             </a:r>
             <a:endParaRPr lang="en-US" sz="1050" dirty="0"/>
           </a:p>

--- a/docs/slides/dsquasar_guide.pptx
+++ b/docs/slides/dsquasar_guide.pptx
@@ -2888,6 +2888,329 @@
 </p:sldLayout>
 </file>
 
+<file path=ppt/slideLayouts/slideLayout2.xml><?xml version="1.0" encoding="utf-8"?>
+<p:sldLayout xmlns:a="http://schemas.openxmlformats.org/drawingml/2006/main" xmlns:r="http://schemas.openxmlformats.org/officeDocument/2006/relationships" xmlns:p="http://schemas.openxmlformats.org/presentationml/2006/main" preserve="1">
+  <p:cSld name="INTERIOR">
+    <p:bg>
+      <p:bgPr>
+        <a:blipFill dpi="0" rotWithShape="1">
+          <a:blip r:embed="rId3">
+            <a:lum/>
+          </a:blip>
+          <a:srcRect/>
+          <a:stretch>
+            <a:fillRect/>
+          </a:stretch>
+        </a:blipFill>
+        <a:effectLst/>
+      </p:bgPr>
+    </p:bg>
+    <p:spTree>
+      <p:nvGrpSpPr>
+        <p:cNvPr id="1" name=""/>
+        <p:cNvGrpSpPr/>
+        <p:nvPr/>
+      </p:nvGrpSpPr>
+      <p:grpSpPr>
+        <a:xfrm>
+          <a:off x="0" y="0"/>
+          <a:ext cx="0" cy="0"/>
+          <a:chOff x="0" y="0"/>
+          <a:chExt cx="0" cy="0"/>
+        </a:xfrm>
+      </p:grpSpPr>
+      <p:pic>
+        <p:nvPicPr>
+          <p:cNvPr id="2" name="Image 0" descr="nsf_ncar_logo_color.png">    </p:cNvPr>
+          <p:cNvPicPr>
+            <a:picLocks noChangeAspect="1"/>
+          </p:cNvPicPr>
+          <p:nvPr/>
+        </p:nvPicPr>
+        <p:blipFill>
+          <a:blip r:embed="rId1"/>
+          <a:stretch>
+            <a:fillRect/>
+          </a:stretch>
+        </p:blipFill>
+        <p:spPr>
+          <a:xfrm>
+            <a:off x="9683496" y="402336"/>
+            <a:ext cx="1892808" cy="521208"/>
+          </a:xfrm>
+          <a:prstGeom prst="rect">
+            <a:avLst/>
+          </a:prstGeom>
+        </p:spPr>
+      </p:pic>
+      <p:pic>
+        <p:nvPicPr>
+          <p:cNvPr id="3" name="Image 1" descr="gdex_lockup_color.png">    </p:cNvPr>
+          <p:cNvPicPr>
+            <a:picLocks noChangeAspect="1"/>
+          </p:cNvPicPr>
+          <p:nvPr/>
+        </p:nvPicPr>
+        <p:blipFill>
+          <a:blip r:embed="rId2"/>
+          <a:stretch>
+            <a:fillRect/>
+          </a:stretch>
+        </p:blipFill>
+        <p:spPr>
+          <a:xfrm>
+            <a:off x="10616184" y="6126480"/>
+            <a:ext cx="960120" cy="484632"/>
+          </a:xfrm>
+          <a:prstGeom prst="rect">
+            <a:avLst/>
+          </a:prstGeom>
+        </p:spPr>
+      </p:pic>
+      <p:sp>
+        <p:nvSpPr>
+          <p:cNvPr id="4" name="Shape 0"/>
+          <p:cNvSpPr/>
+          <p:nvPr/>
+        </p:nvSpPr>
+        <p:spPr>
+          <a:xfrm>
+            <a:off x="612648" y="6437376"/>
+            <a:ext cx="0" cy="201168"/>
+          </a:xfrm>
+          <a:prstGeom prst="line">
+            <a:avLst/>
+          </a:prstGeom>
+          <a:noFill/>
+          <a:ln w="9525">
+            <a:solidFill>
+              <a:srgbClr val="00357A"/>
+            </a:solidFill>
+            <a:prstDash val="solid"/>
+          </a:ln>
+        </p:spPr>
+      </p:sp>
+    </p:spTree>
+  </p:cSld>
+  <p:clrMapOvr>
+    <a:masterClrMapping/>
+  </p:clrMapOvr>
+</p:sldLayout>
+</file>
+
+<file path=ppt/slideLayouts/slideLayout3.xml><?xml version="1.0" encoding="utf-8"?>
+<p:sldLayout xmlns:a="http://schemas.openxmlformats.org/drawingml/2006/main" xmlns:r="http://schemas.openxmlformats.org/officeDocument/2006/relationships" xmlns:p="http://schemas.openxmlformats.org/presentationml/2006/main" preserve="1">
+  <p:cSld name="INTERIOR_NG">
+    <p:bg>
+      <p:bgPr>
+        <a:blipFill dpi="0" rotWithShape="1">
+          <a:blip r:embed="rId2">
+            <a:lum/>
+          </a:blip>
+          <a:srcRect/>
+          <a:stretch>
+            <a:fillRect/>
+          </a:stretch>
+        </a:blipFill>
+        <a:effectLst/>
+      </p:bgPr>
+    </p:bg>
+    <p:spTree>
+      <p:nvGrpSpPr>
+        <p:cNvPr id="1" name=""/>
+        <p:cNvGrpSpPr/>
+        <p:nvPr/>
+      </p:nvGrpSpPr>
+      <p:grpSpPr>
+        <a:xfrm>
+          <a:off x="0" y="0"/>
+          <a:ext cx="0" cy="0"/>
+          <a:chOff x="0" y="0"/>
+          <a:chExt cx="0" cy="0"/>
+        </a:xfrm>
+      </p:grpSpPr>
+      <p:pic>
+        <p:nvPicPr>
+          <p:cNvPr id="2" name="Image 0" descr="nsf_ncar_logo_color.png">    </p:cNvPr>
+          <p:cNvPicPr>
+            <a:picLocks noChangeAspect="1"/>
+          </p:cNvPicPr>
+          <p:nvPr/>
+        </p:nvPicPr>
+        <p:blipFill>
+          <a:blip r:embed="rId1"/>
+          <a:stretch>
+            <a:fillRect/>
+          </a:stretch>
+        </p:blipFill>
+        <p:spPr>
+          <a:xfrm>
+            <a:off x="9683496" y="402336"/>
+            <a:ext cx="1892808" cy="521208"/>
+          </a:xfrm>
+          <a:prstGeom prst="rect">
+            <a:avLst/>
+          </a:prstGeom>
+        </p:spPr>
+      </p:pic>
+      <p:sp>
+        <p:nvSpPr>
+          <p:cNvPr id="3" name="Shape 0"/>
+          <p:cNvSpPr/>
+          <p:nvPr/>
+        </p:nvSpPr>
+        <p:spPr>
+          <a:xfrm>
+            <a:off x="612648" y="6437376"/>
+            <a:ext cx="0" cy="201168"/>
+          </a:xfrm>
+          <a:prstGeom prst="line">
+            <a:avLst/>
+          </a:prstGeom>
+          <a:noFill/>
+          <a:ln w="9525">
+            <a:solidFill>
+              <a:srgbClr val="00357A"/>
+            </a:solidFill>
+            <a:prstDash val="solid"/>
+          </a:ln>
+        </p:spPr>
+      </p:sp>
+    </p:spTree>
+  </p:cSld>
+  <p:clrMapOvr>
+    <a:masterClrMapping/>
+  </p:clrMapOvr>
+</p:sldLayout>
+</file>
+
+<file path=ppt/slideLayouts/slideLayout4.xml><?xml version="1.0" encoding="utf-8"?>
+<p:sldLayout xmlns:a="http://schemas.openxmlformats.org/drawingml/2006/main" xmlns:r="http://schemas.openxmlformats.org/officeDocument/2006/relationships" xmlns:p="http://schemas.openxmlformats.org/presentationml/2006/main" preserve="1">
+  <p:cSld name="INTERIOR_DARK">
+    <p:bg>
+      <p:bgPr>
+        <a:solidFill>
+          <a:srgbClr val="0057C2"/>
+        </a:solidFill>
+      </p:bgPr>
+    </p:bg>
+    <p:spTree>
+      <p:nvGrpSpPr>
+        <p:cNvPr id="1" name=""/>
+        <p:cNvGrpSpPr/>
+        <p:nvPr/>
+      </p:nvGrpSpPr>
+      <p:grpSpPr>
+        <a:xfrm>
+          <a:off x="0" y="0"/>
+          <a:ext cx="0" cy="0"/>
+          <a:chOff x="0" y="0"/>
+          <a:chExt cx="0" cy="0"/>
+        </a:xfrm>
+      </p:grpSpPr>
+      <p:pic>
+        <p:nvPicPr>
+          <p:cNvPr id="2" name="Image 0" descr="interior_bg.png">    </p:cNvPr>
+          <p:cNvPicPr>
+            <a:picLocks noChangeAspect="1"/>
+          </p:cNvPicPr>
+          <p:nvPr/>
+        </p:nvPicPr>
+        <p:blipFill>
+          <a:blip r:embed="rId1"/>
+          <a:stretch>
+            <a:fillRect/>
+          </a:stretch>
+        </p:blipFill>
+        <p:spPr>
+          <a:xfrm>
+            <a:off x="0" y="0"/>
+            <a:ext cx="12191695" cy="6858000"/>
+          </a:xfrm>
+          <a:prstGeom prst="rect">
+            <a:avLst/>
+          </a:prstGeom>
+        </p:spPr>
+      </p:pic>
+      <p:pic>
+        <p:nvPicPr>
+          <p:cNvPr id="3" name="Image 1" descr="nsf_ncar_logo_white.png">    </p:cNvPr>
+          <p:cNvPicPr>
+            <a:picLocks noChangeAspect="1"/>
+          </p:cNvPicPr>
+          <p:nvPr/>
+        </p:nvPicPr>
+        <p:blipFill>
+          <a:blip r:embed="rId2"/>
+          <a:stretch>
+            <a:fillRect/>
+          </a:stretch>
+        </p:blipFill>
+        <p:spPr>
+          <a:xfrm>
+            <a:off x="9683496" y="402336"/>
+            <a:ext cx="1892808" cy="521208"/>
+          </a:xfrm>
+          <a:prstGeom prst="rect">
+            <a:avLst/>
+          </a:prstGeom>
+        </p:spPr>
+      </p:pic>
+      <p:pic>
+        <p:nvPicPr>
+          <p:cNvPr id="4" name="Image 2" descr="gdex_lockup_white.png">    </p:cNvPr>
+          <p:cNvPicPr>
+            <a:picLocks noChangeAspect="1"/>
+          </p:cNvPicPr>
+          <p:nvPr/>
+        </p:nvPicPr>
+        <p:blipFill>
+          <a:blip r:embed="rId3"/>
+          <a:stretch>
+            <a:fillRect/>
+          </a:stretch>
+        </p:blipFill>
+        <p:spPr>
+          <a:xfrm>
+            <a:off x="10616184" y="6126480"/>
+            <a:ext cx="960120" cy="484632"/>
+          </a:xfrm>
+          <a:prstGeom prst="rect">
+            <a:avLst/>
+          </a:prstGeom>
+        </p:spPr>
+      </p:pic>
+      <p:sp>
+        <p:nvSpPr>
+          <p:cNvPr id="5" name="Shape 0"/>
+          <p:cNvSpPr/>
+          <p:nvPr/>
+        </p:nvSpPr>
+        <p:spPr>
+          <a:xfrm>
+            <a:off x="612648" y="6437376"/>
+            <a:ext cx="0" cy="201168"/>
+          </a:xfrm>
+          <a:prstGeom prst="line">
+            <a:avLst/>
+          </a:prstGeom>
+          <a:noFill/>
+          <a:ln w="9525">
+            <a:solidFill>
+              <a:srgbClr val="FFFFFF"/>
+            </a:solidFill>
+            <a:prstDash val="solid"/>
+          </a:ln>
+        </p:spPr>
+      </p:sp>
+    </p:spTree>
+  </p:cSld>
+  <p:clrMapOvr>
+    <a:masterClrMapping/>
+  </p:clrMapOvr>
+</p:sldLayout>
+</file>
+
 <file path=ppt/slideMasters/slideMaster1.xml><?xml version="1.0" encoding="utf-8"?>
 <p:sldMaster xmlns:a="http://schemas.openxmlformats.org/drawingml/2006/main" xmlns:r="http://schemas.openxmlformats.org/officeDocument/2006/relationships" xmlns:p="http://schemas.openxmlformats.org/presentationml/2006/main">
   <p:cSld>
@@ -2910,6 +3233,9 @@
   <p:clrMap bg1="lt1" tx1="dk1" bg2="lt2" tx2="dk2" accent1="accent1" accent2="accent2" accent3="accent3" accent4="accent4" accent5="accent5" accent6="accent6" hlink="hlink" folHlink="folHlink"/>
   <p:sldLayoutIdLst>
     <p:sldLayoutId id="2147483649" r:id="rId1"/>
+    <p:sldLayoutId id="2147483650" r:id="rId2"/>
+    <p:sldLayoutId id="2147483651" r:id="rId3"/>
+    <p:sldLayoutId id="2147483652" r:id="rId4"/>
   </p:sldLayoutIdLst>
   <p:hf sldNum="0" hdr="0" ftr="0" dt="0"/>
   <p:txStyles>
@@ -3191,7 +3517,7 @@
       </p:grpSpPr>
       <p:pic>
         <p:nvPicPr>
-          <p:cNvPr id="2" name="Image 0" descr="nsf_ncar_logo_white.png">    </p:cNvPr>
+          <p:cNvPr id="2" name="Image 0" descr="cover_earth.jpg">    </p:cNvPr>
           <p:cNvPicPr>
             <a:picLocks noChangeAspect="1"/>
           </p:cNvPicPr>
@@ -3205,8 +3531,8 @@
         </p:blipFill>
         <p:spPr>
           <a:xfrm>
-            <a:off x="640080" y="548640"/>
-            <a:ext cx="2560320" cy="704088"/>
+            <a:off x="3081528" y="0"/>
+            <a:ext cx="9107424" cy="6858000"/>
           </a:xfrm>
           <a:prstGeom prst="rect">
             <a:avLst/>
@@ -3215,7 +3541,7 @@
       </p:pic>
       <p:pic>
         <p:nvPicPr>
-          <p:cNvPr id="3" name="Image 1" descr="gdex_lockup_white.png">    </p:cNvPr>
+          <p:cNvPr id="3" name="Image 1" descr="cover_blue.png">    </p:cNvPr>
           <p:cNvPicPr>
             <a:picLocks noChangeAspect="1"/>
           </p:cNvPicPr>
@@ -3229,24 +3555,92 @@
         </p:blipFill>
         <p:spPr>
           <a:xfrm>
-            <a:off x="9905695" y="640080"/>
-            <a:ext cx="1737360" cy="877824"/>
+            <a:off x="0" y="0"/>
+            <a:ext cx="8686800" cy="6858000"/>
           </a:xfrm>
           <a:prstGeom prst="rect">
             <a:avLst/>
           </a:prstGeom>
         </p:spPr>
       </p:pic>
-      <p:sp>
-        <p:nvSpPr>
-          <p:cNvPr id="4" name="Text 0"/>
-          <p:cNvSpPr/>
-          <p:nvPr/>
-        </p:nvSpPr>
-        <p:spPr>
-          <a:xfrm>
-            <a:off x="640080" y="2148840"/>
-            <a:ext cx="8229600" cy="1280160"/>
+      <p:pic>
+        <p:nvPicPr>
+          <p:cNvPr id="4" name="Image 2" descr="nsf_ncar_logo_white.png">    </p:cNvPr>
+          <p:cNvPicPr>
+            <a:picLocks noChangeAspect="1"/>
+          </p:cNvPicPr>
+          <p:nvPr/>
+        </p:nvPicPr>
+        <p:blipFill>
+          <a:blip r:embed="rId3"/>
+          <a:stretch>
+            <a:fillRect/>
+          </a:stretch>
+        </p:blipFill>
+        <p:spPr>
+          <a:xfrm>
+            <a:off x="841248" y="758952"/>
+            <a:ext cx="3794760" cy="1042416"/>
+          </a:xfrm>
+          <a:prstGeom prst="rect">
+            <a:avLst/>
+          </a:prstGeom>
+        </p:spPr>
+      </p:pic>
+      <p:pic>
+        <p:nvPicPr>
+          <p:cNvPr id="5" name="Image 3" descr="gdex_lockup_white.png">    </p:cNvPr>
+          <p:cNvPicPr>
+            <a:picLocks noChangeAspect="1"/>
+          </p:cNvPicPr>
+          <p:nvPr/>
+        </p:nvPicPr>
+        <p:blipFill>
+          <a:blip r:embed="rId4"/>
+          <a:stretch>
+            <a:fillRect/>
+          </a:stretch>
+        </p:blipFill>
+        <p:spPr>
+          <a:xfrm>
+            <a:off x="8247888" y="722376"/>
+            <a:ext cx="2212848" cy="1115568"/>
+          </a:xfrm>
+          <a:prstGeom prst="rect">
+            <a:avLst/>
+          </a:prstGeom>
+        </p:spPr>
+      </p:pic>
+      <p:sp>
+        <p:nvSpPr>
+          <p:cNvPr id="6" name="Shape 0"/>
+          <p:cNvSpPr/>
+          <p:nvPr/>
+        </p:nvSpPr>
+        <p:spPr>
+          <a:xfrm>
+            <a:off x="0" y="2258568"/>
+            <a:ext cx="210312" cy="3429000"/>
+          </a:xfrm>
+          <a:prstGeom prst="rect">
+            <a:avLst/>
+          </a:prstGeom>
+          <a:solidFill>
+            <a:srgbClr val="FAA119"/>
+          </a:solidFill>
+          <a:ln/>
+        </p:spPr>
+      </p:sp>
+      <p:sp>
+        <p:nvSpPr>
+          <p:cNvPr id="7" name="Text 1"/>
+          <p:cNvSpPr/>
+          <p:nvPr/>
+        </p:nvSpPr>
+        <p:spPr>
+          <a:xfrm>
+            <a:off x="923544" y="2002536"/>
+            <a:ext cx="5029200" cy="274320"/>
           </a:xfrm>
           <a:prstGeom prst="rect">
             <a:avLst/>
@@ -3262,7 +3656,7 @@
               <a:buNone/>
             </a:pPr>
             <a:r>
-              <a:rPr lang="en-US" sz="7800" b="1" dirty="0">
+              <a:rPr lang="en-US" sz="1100" b="1" spc="100" kern="0" dirty="0">
                 <a:solidFill>
                   <a:srgbClr val="FFFFFF"/>
                 </a:solidFill>
@@ -3270,22 +3664,64 @@
                 <a:ea typeface="Poppins" pitchFamily="34" charset="-122"/>
                 <a:cs typeface="Poppins" pitchFamily="34" charset="-120"/>
               </a:rPr>
-              <a:t>dsquasar</a:t>
-            </a:r>
-            <a:endParaRPr lang="en-US" sz="7800" dirty="0"/>
-          </a:p>
-        </p:txBody>
-      </p:sp>
-      <p:sp>
-        <p:nvSpPr>
-          <p:cNvPr id="5" name="Text 1"/>
-          <p:cNvSpPr/>
-          <p:nvPr/>
-        </p:nvSpPr>
-        <p:spPr>
-          <a:xfrm>
-            <a:off x="658368" y="3383280"/>
-            <a:ext cx="10515600" cy="548640"/>
+              <a:t>UPDATED AUGUST 2026</a:t>
+            </a:r>
+            <a:endParaRPr lang="en-US" sz="1100" dirty="0"/>
+          </a:p>
+        </p:txBody>
+      </p:sp>
+      <p:sp>
+        <p:nvSpPr>
+          <p:cNvPr id="8" name="Text 2"/>
+          <p:cNvSpPr/>
+          <p:nvPr/>
+        </p:nvSpPr>
+        <p:spPr>
+          <a:xfrm>
+            <a:off x="923544" y="2331720"/>
+            <a:ext cx="5029200" cy="1691640"/>
+          </a:xfrm>
+          <a:prstGeom prst="rect">
+            <a:avLst/>
+          </a:prstGeom>
+          <a:noFill/>
+          <a:ln/>
+        </p:spPr>
+        <p:txBody>
+          <a:bodyPr wrap="square" lIns="0" tIns="0" rIns="0" bIns="0" rtlCol="0" anchor="t"/>
+          <a:lstStyle/>
+          <a:p>
+            <a:pPr indent="0" marL="0">
+              <a:lnSpc>
+                <a:spcPct val="95000"/>
+              </a:lnSpc>
+              <a:buNone/>
+            </a:pPr>
+            <a:r>
+              <a:rPr lang="en-US" sz="2900" b="1" dirty="0">
+                <a:solidFill>
+                  <a:srgbClr val="FFFFFF"/>
+                </a:solidFill>
+                <a:latin typeface="Poppins" pitchFamily="34" charset="0"/>
+                <a:ea typeface="Poppins" pitchFamily="34" charset="-122"/>
+                <a:cs typeface="Poppins" pitchFamily="34" charset="-120"/>
+              </a:rPr>
+              <a:t>dsquasar: Backing Up the GDEX Archive onto Quasar</a:t>
+            </a:r>
+            <a:endParaRPr lang="en-US" sz="2900" dirty="0"/>
+          </a:p>
+        </p:txBody>
+      </p:sp>
+      <p:sp>
+        <p:nvSpPr>
+          <p:cNvPr id="9" name="Text 3"/>
+          <p:cNvSpPr/>
+          <p:nvPr/>
+        </p:nvSpPr>
+        <p:spPr>
+          <a:xfrm>
+            <a:off x="923544" y="4069080"/>
+            <a:ext cx="5029200" cy="365760"/>
           </a:xfrm>
           <a:prstGeom prst="rect">
             <a:avLst/>
@@ -3301,48 +3737,9 @@
               <a:buNone/>
             </a:pPr>
             <a:r>
-              <a:rPr lang="en-US" sz="2400" dirty="0">
-                <a:solidFill>
-                  <a:srgbClr val="C3D7EE"/>
-                </a:solidFill>
-                <a:latin typeface="Poppins" pitchFamily="34" charset="0"/>
-                <a:ea typeface="Poppins" pitchFamily="34" charset="-122"/>
-                <a:cs typeface="Poppins" pitchFamily="34" charset="-120"/>
-              </a:rPr>
-              <a:t>Backing Up the GDEX Archive onto Quasar</a:t>
-            </a:r>
-            <a:endParaRPr lang="en-US" sz="2400" dirty="0"/>
-          </a:p>
-        </p:txBody>
-      </p:sp>
-      <p:sp>
-        <p:nvSpPr>
-          <p:cNvPr id="6" name="Text 2"/>
-          <p:cNvSpPr/>
-          <p:nvPr/>
-        </p:nvSpPr>
-        <p:spPr>
-          <a:xfrm>
-            <a:off x="658368" y="3977640"/>
-            <a:ext cx="10058400" cy="457200"/>
-          </a:xfrm>
-          <a:prstGeom prst="rect">
-            <a:avLst/>
-          </a:prstGeom>
-          <a:noFill/>
-          <a:ln/>
-        </p:spPr>
-        <p:txBody>
-          <a:bodyPr wrap="square" lIns="0" tIns="0" rIns="0" bIns="0" rtlCol="0" anchor="ctr"/>
-          <a:lstStyle/>
-          <a:p>
-            <a:pPr indent="0" marL="0">
-              <a:buNone/>
-            </a:pPr>
-            <a:r>
-              <a:rPr lang="en-US" sz="1500" i="1" dirty="0">
-                <a:solidFill>
-                  <a:srgbClr val="C3D7EE"/>
+              <a:rPr lang="en-US" sz="1300" b="1" dirty="0">
+                <a:solidFill>
+                  <a:srgbClr val="FFFFFF"/>
                 </a:solidFill>
                 <a:latin typeface="Poppins" pitchFamily="34" charset="0"/>
                 <a:ea typeface="Poppins" pitchFamily="34" charset="-122"/>
@@ -3350,32 +3747,28 @@
               </a:rPr>
               <a:t>Gather → List → Tar → Transfer, tracked end-to-end in GDEXDB</a:t>
             </a:r>
-            <a:endParaRPr lang="en-US" sz="1500" dirty="0"/>
-          </a:p>
-        </p:txBody>
-      </p:sp>
-      <p:sp>
-        <p:nvSpPr>
-          <p:cNvPr id="7" name="Shape 3"/>
-          <p:cNvSpPr/>
-          <p:nvPr/>
-        </p:nvSpPr>
-        <p:spPr>
-          <a:xfrm>
-            <a:off x="658368" y="4892040"/>
-            <a:ext cx="2585923" cy="457200"/>
-          </a:xfrm>
-          <a:prstGeom prst="roundRect">
-            <a:avLst>
-              <a:gd name="adj" fmla="val 20000"/>
-            </a:avLst>
-          </a:prstGeom>
-          <a:solidFill>
-            <a:srgbClr val="0B2A63"/>
-          </a:solidFill>
-          <a:ln w="12700">
+            <a:endParaRPr lang="en-US" sz="1300" dirty="0"/>
+          </a:p>
+        </p:txBody>
+      </p:sp>
+      <p:sp>
+        <p:nvSpPr>
+          <p:cNvPr id="10" name="Shape 4"/>
+          <p:cNvSpPr/>
+          <p:nvPr/>
+        </p:nvSpPr>
+        <p:spPr>
+          <a:xfrm>
+            <a:off x="923544" y="4581144"/>
+            <a:ext cx="804672" cy="0"/>
+          </a:xfrm>
+          <a:prstGeom prst="line">
+            <a:avLst/>
+          </a:prstGeom>
+          <a:noFill/>
+          <a:ln w="38100">
             <a:solidFill>
-              <a:srgbClr val="2C4E7D"/>
+              <a:srgbClr val="42C0FF"/>
             </a:solidFill>
             <a:prstDash val="solid"/>
           </a:ln>
@@ -3383,14 +3776,14 @@
       </p:sp>
       <p:sp>
         <p:nvSpPr>
-          <p:cNvPr id="8" name="Text 4"/>
-          <p:cNvSpPr/>
-          <p:nvPr/>
-        </p:nvSpPr>
-        <p:spPr>
-          <a:xfrm>
-            <a:off x="658368" y="4892040"/>
-            <a:ext cx="2585923" cy="457200"/>
+          <p:cNvPr id="11" name="Text 5"/>
+          <p:cNvSpPr/>
+          <p:nvPr/>
+        </p:nvSpPr>
+        <p:spPr>
+          <a:xfrm>
+            <a:off x="923544" y="4828032"/>
+            <a:ext cx="5029200" cy="320040"/>
           </a:xfrm>
           <a:prstGeom prst="rect">
             <a:avLst/>
@@ -3402,61 +3795,34 @@
           <a:bodyPr wrap="square" lIns="0" tIns="0" rIns="0" bIns="0" rtlCol="0" anchor="ctr"/>
           <a:lstStyle/>
           <a:p>
-            <a:pPr algn="ctr" indent="0" marL="0">
-              <a:buNone/>
-            </a:pPr>
-            <a:r>
-              <a:rPr lang="en-US" sz="1200" b="1" dirty="0">
-                <a:solidFill>
-                  <a:srgbClr val="C3D7EE"/>
-                </a:solidFill>
-                <a:latin typeface="Poppins" pitchFamily="34" charset="0"/>
-                <a:ea typeface="Poppins" pitchFamily="34" charset="-122"/>
-                <a:cs typeface="Poppins" pitchFamily="34" charset="-120"/>
-              </a:rPr>
-              <a:t>Backup &amp; Disaster Recovery</a:t>
-            </a:r>
-            <a:endParaRPr lang="en-US" sz="1200" dirty="0"/>
-          </a:p>
-        </p:txBody>
-      </p:sp>
-      <p:sp>
-        <p:nvSpPr>
-          <p:cNvPr id="9" name="Shape 5"/>
-          <p:cNvSpPr/>
-          <p:nvPr/>
-        </p:nvSpPr>
-        <p:spPr>
-          <a:xfrm>
-            <a:off x="3427171" y="4892040"/>
-            <a:ext cx="1689811" cy="457200"/>
-          </a:xfrm>
-          <a:prstGeom prst="roundRect">
-            <a:avLst>
-              <a:gd name="adj" fmla="val 20000"/>
-            </a:avLst>
-          </a:prstGeom>
-          <a:solidFill>
-            <a:srgbClr val="0B2A63"/>
-          </a:solidFill>
-          <a:ln w="12700">
-            <a:solidFill>
-              <a:srgbClr val="2C4E7D"/>
-            </a:solidFill>
-            <a:prstDash val="solid"/>
-          </a:ln>
-        </p:spPr>
-      </p:sp>
-      <p:sp>
-        <p:nvSpPr>
-          <p:cNvPr id="10" name="Text 6"/>
-          <p:cNvSpPr/>
-          <p:nvPr/>
-        </p:nvSpPr>
-        <p:spPr>
-          <a:xfrm>
-            <a:off x="3427171" y="4892040"/>
-            <a:ext cx="1689811" cy="457200"/>
+            <a:pPr indent="0" marL="0">
+              <a:buNone/>
+            </a:pPr>
+            <a:r>
+              <a:rPr lang="en-US" sz="1600" b="1" dirty="0">
+                <a:solidFill>
+                  <a:srgbClr val="FFFFFF"/>
+                </a:solidFill>
+                <a:latin typeface="Poppins" pitchFamily="34" charset="0"/>
+                <a:ea typeface="Poppins" pitchFamily="34" charset="-122"/>
+                <a:cs typeface="Poppins" pitchFamily="34" charset="-120"/>
+              </a:rPr>
+              <a:t>Zaihua Ji</a:t>
+            </a:r>
+            <a:endParaRPr lang="en-US" sz="1600" dirty="0"/>
+          </a:p>
+        </p:txBody>
+      </p:sp>
+      <p:sp>
+        <p:nvSpPr>
+          <p:cNvPr id="12" name="Text 6"/>
+          <p:cNvSpPr/>
+          <p:nvPr/>
+        </p:nvSpPr>
+        <p:spPr>
+          <a:xfrm>
+            <a:off x="923544" y="5148072"/>
+            <a:ext cx="5029200" cy="320040"/>
           </a:xfrm>
           <a:prstGeom prst="rect">
             <a:avLst/>
@@ -3468,61 +3834,34 @@
           <a:bodyPr wrap="square" lIns="0" tIns="0" rIns="0" bIns="0" rtlCol="0" anchor="ctr"/>
           <a:lstStyle/>
           <a:p>
-            <a:pPr algn="ctr" indent="0" marL="0">
-              <a:buNone/>
-            </a:pPr>
-            <a:r>
-              <a:rPr lang="en-US" sz="1200" b="1" dirty="0">
-                <a:solidFill>
-                  <a:srgbClr val="C3D7EE"/>
-                </a:solidFill>
-                <a:latin typeface="Poppins" pitchFamily="34" charset="0"/>
-                <a:ea typeface="Poppins" pitchFamily="34" charset="-122"/>
-                <a:cs typeface="Poppins" pitchFamily="34" charset="-120"/>
-              </a:rPr>
-              <a:t>Batch Operations</a:t>
-            </a:r>
-            <a:endParaRPr lang="en-US" sz="1200" dirty="0"/>
-          </a:p>
-        </p:txBody>
-      </p:sp>
-      <p:sp>
-        <p:nvSpPr>
-          <p:cNvPr id="11" name="Shape 7"/>
-          <p:cNvSpPr/>
-          <p:nvPr/>
-        </p:nvSpPr>
-        <p:spPr>
-          <a:xfrm>
-            <a:off x="5299862" y="4892040"/>
-            <a:ext cx="1600200" cy="457200"/>
-          </a:xfrm>
-          <a:prstGeom prst="roundRect">
-            <a:avLst>
-              <a:gd name="adj" fmla="val 20000"/>
-            </a:avLst>
-          </a:prstGeom>
-          <a:solidFill>
-            <a:srgbClr val="0B2A63"/>
-          </a:solidFill>
-          <a:ln w="12700">
-            <a:solidFill>
-              <a:srgbClr val="2C4E7D"/>
-            </a:solidFill>
-            <a:prstDash val="solid"/>
-          </a:ln>
-        </p:spPr>
-      </p:sp>
-      <p:sp>
-        <p:nvSpPr>
-          <p:cNvPr id="12" name="Text 8"/>
-          <p:cNvSpPr/>
-          <p:nvPr/>
-        </p:nvSpPr>
-        <p:spPr>
-          <a:xfrm>
-            <a:off x="5299862" y="4892040"/>
-            <a:ext cx="1600200" cy="457200"/>
+            <a:pPr indent="0" marL="0">
+              <a:buNone/>
+            </a:pPr>
+            <a:r>
+              <a:rPr lang="en-US" sz="1600" dirty="0">
+                <a:solidFill>
+                  <a:srgbClr val="FFFFFF"/>
+                </a:solidFill>
+                <a:latin typeface="Poppins" pitchFamily="34" charset="0"/>
+                <a:ea typeface="Poppins" pitchFamily="34" charset="-122"/>
+                <a:cs typeface="Poppins" pitchFamily="34" charset="-120"/>
+              </a:rPr>
+              <a:t>Software Engineer  •  zji@ucar.edu</a:t>
+            </a:r>
+            <a:endParaRPr lang="en-US" sz="1600" dirty="0"/>
+          </a:p>
+        </p:txBody>
+      </p:sp>
+      <p:sp>
+        <p:nvSpPr>
+          <p:cNvPr id="13" name="Text 7"/>
+          <p:cNvSpPr/>
+          <p:nvPr/>
+        </p:nvSpPr>
+        <p:spPr>
+          <a:xfrm>
+            <a:off x="923544" y="5559552"/>
+            <a:ext cx="5029200" cy="457200"/>
           </a:xfrm>
           <a:prstGeom prst="rect">
             <a:avLst/>
@@ -3534,34 +3873,37 @@
           <a:bodyPr wrap="square" lIns="0" tIns="0" rIns="0" bIns="0" rtlCol="0" anchor="ctr"/>
           <a:lstStyle/>
           <a:p>
-            <a:pPr algn="ctr" indent="0" marL="0">
-              <a:buNone/>
-            </a:pPr>
-            <a:r>
-              <a:rPr lang="en-US" sz="1200" b="1" dirty="0">
-                <a:solidFill>
-                  <a:srgbClr val="C3D7EE"/>
-                </a:solidFill>
-                <a:latin typeface="Poppins" pitchFamily="34" charset="0"/>
-                <a:ea typeface="Poppins" pitchFamily="34" charset="-122"/>
-                <a:cs typeface="Poppins" pitchFamily="34" charset="-120"/>
-              </a:rPr>
-              <a:t>Updated 2026-08</a:t>
-            </a:r>
-            <a:endParaRPr lang="en-US" sz="1200" dirty="0"/>
-          </a:p>
-        </p:txBody>
-      </p:sp>
-      <p:sp>
-        <p:nvSpPr>
-          <p:cNvPr id="13" name="Text 9"/>
-          <p:cNvSpPr/>
-          <p:nvPr/>
-        </p:nvSpPr>
-        <p:spPr>
-          <a:xfrm>
-            <a:off x="658368" y="5532120"/>
-            <a:ext cx="10058400" cy="365760"/>
+            <a:pPr indent="0" marL="0">
+              <a:lnSpc>
+                <a:spcPct val="110000"/>
+              </a:lnSpc>
+              <a:buNone/>
+            </a:pPr>
+            <a:r>
+              <a:rPr lang="en-US" sz="950" dirty="0">
+                <a:solidFill>
+                  <a:srgbClr val="FFFFFF"/>
+                </a:solidFill>
+                <a:latin typeface="Poppins" pitchFamily="34" charset="0"/>
+                <a:ea typeface="Poppins" pitchFamily="34" charset="-122"/>
+                <a:cs typeface="Poppins" pitchFamily="34" charset="-120"/>
+              </a:rPr>
+              <a:t>BACKUP &amp; DISASTER RECOVERY • BATCH OPERATIONS • COMPANION UTILITY TO DSARCH</a:t>
+            </a:r>
+            <a:endParaRPr lang="en-US" sz="950" dirty="0"/>
+          </a:p>
+        </p:txBody>
+      </p:sp>
+      <p:sp>
+        <p:nvSpPr>
+          <p:cNvPr id="14" name="Text 8"/>
+          <p:cNvSpPr/>
+          <p:nvPr/>
+        </p:nvSpPr>
+        <p:spPr>
+          <a:xfrm>
+            <a:off x="923544" y="6217920"/>
+            <a:ext cx="5029200" cy="411480"/>
           </a:xfrm>
           <a:prstGeom prst="rect">
             <a:avLst/>
@@ -3574,73 +3916,23 @@
           <a:lstStyle/>
           <a:p>
             <a:pPr indent="0" marL="0">
-              <a:buNone/>
-            </a:pPr>
-            <a:r>
-              <a:rPr lang="en-US" sz="1300" b="1" dirty="0">
-                <a:solidFill>
-                  <a:srgbClr val="C3D7EE"/>
-                </a:solidFill>
-                <a:latin typeface="Poppins" pitchFamily="34" charset="0"/>
-                <a:ea typeface="Poppins" pitchFamily="34" charset="-122"/>
-                <a:cs typeface="Poppins" pitchFamily="34" charset="-120"/>
-              </a:rPr>
-              <a:t>Zaihua Ji</a:t>
-            </a:r>
-            <a:pPr indent="0" marL="0">
-              <a:buNone/>
-            </a:pPr>
-            <a:r>
-              <a:rPr lang="en-US" sz="1300" dirty="0">
-                <a:solidFill>
-                  <a:srgbClr val="C3D7EE"/>
-                </a:solidFill>
-                <a:latin typeface="Poppins" pitchFamily="34" charset="0"/>
-                <a:ea typeface="Poppins" pitchFamily="34" charset="-122"/>
-                <a:cs typeface="Poppins" pitchFamily="34" charset="-120"/>
-              </a:rPr>
-              <a:t>   zji@ucar.edu</a:t>
-            </a:r>
-            <a:endParaRPr lang="en-US" sz="1300" dirty="0"/>
-          </a:p>
-        </p:txBody>
-      </p:sp>
-      <p:sp>
-        <p:nvSpPr>
-          <p:cNvPr id="14" name="Text 10"/>
-          <p:cNvSpPr/>
-          <p:nvPr/>
-        </p:nvSpPr>
-        <p:spPr>
-          <a:xfrm>
-            <a:off x="658368" y="5943600"/>
-            <a:ext cx="10058400" cy="365760"/>
-          </a:xfrm>
-          <a:prstGeom prst="rect">
-            <a:avLst/>
-          </a:prstGeom>
-          <a:noFill/>
-          <a:ln/>
-        </p:spPr>
-        <p:txBody>
-          <a:bodyPr wrap="square" lIns="0" tIns="0" rIns="0" bIns="0" rtlCol="0" anchor="ctr"/>
-          <a:lstStyle/>
-          <a:p>
-            <a:pPr indent="0" marL="0">
-              <a:buNone/>
-            </a:pPr>
-            <a:r>
-              <a:rPr lang="en-US" sz="1200" dirty="0">
-                <a:solidFill>
-                  <a:srgbClr val="97999B"/>
-                </a:solidFill>
-                <a:latin typeface="Courier New" pitchFamily="34" charset="0"/>
-                <a:ea typeface="Courier New" pitchFamily="34" charset="-122"/>
-                <a:cs typeface="Courier New" pitchFamily="34" charset="-120"/>
-              </a:rPr>
-              <a:t>Tars through  dsarch AQ  •  uploads through  dsglobus  •  scheduled by  dscheck</a:t>
-            </a:r>
-            <a:endParaRPr lang="en-US" sz="1200" dirty="0"/>
+              <a:lnSpc>
+                <a:spcPct val="110000"/>
+              </a:lnSpc>
+              <a:buNone/>
+            </a:pPr>
+            <a:r>
+              <a:rPr lang="en-US" sz="700" i="1" dirty="0">
+                <a:solidFill>
+                  <a:srgbClr val="FFFFFF"/>
+                </a:solidFill>
+                <a:latin typeface="Poppins" pitchFamily="34" charset="0"/>
+                <a:ea typeface="Poppins" pitchFamily="34" charset="-122"/>
+                <a:cs typeface="Poppins" pitchFamily="34" charset="-120"/>
+              </a:rPr>
+              <a:t>Tars are built through dsarch AQ, uploaded through dsglobus, and scheduled by dscheck — every step tracked in GDEXDB.</a:t>
+            </a:r>
+            <a:endParaRPr lang="en-US" sz="700" dirty="0"/>
           </a:p>
         </p:txBody>
       </p:sp>
@@ -3655,13 +3947,6 @@
 <file path=ppt/slides/slide10.xml><?xml version="1.0" encoding="utf-8"?>
 <p:sld xmlns:a="http://schemas.openxmlformats.org/drawingml/2006/main" xmlns:r="http://schemas.openxmlformats.org/officeDocument/2006/relationships" xmlns:p="http://schemas.openxmlformats.org/presentationml/2006/main">
   <p:cSld name="Slide 10">
-    <p:bg>
-      <p:bgPr>
-        <a:solidFill>
-          <a:srgbClr val="FFFFFF"/>
-        </a:solidFill>
-      </p:bgPr>
-    </p:bg>
     <p:spTree>
       <p:nvGrpSpPr>
         <p:cNvPr id="1" name=""/>
@@ -4773,8 +5058,8 @@
         </p:nvSpPr>
         <p:spPr>
           <a:xfrm>
-            <a:off x="457200" y="6035040"/>
-            <a:ext cx="11274552" cy="292608"/>
+            <a:off x="457200" y="5961888"/>
+            <a:ext cx="9966960" cy="365760"/>
           </a:xfrm>
           <a:prstGeom prst="rect">
             <a:avLst/>
@@ -4790,7 +5075,7 @@
               <a:buNone/>
             </a:pPr>
             <a:r>
-              <a:rPr lang="en-US" sz="1200" dirty="0">
+              <a:rPr lang="en-US" sz="1150" dirty="0">
                 <a:solidFill>
                   <a:srgbClr val="53565A"/>
                 </a:solidFill>
@@ -4804,7 +5089,7 @@
               <a:buNone/>
             </a:pPr>
             <a:r>
-              <a:rPr lang="en-US" sz="1200" b="1" dirty="0">
+              <a:rPr lang="en-US" sz="1150" b="1" dirty="0">
                 <a:solidFill>
                   <a:srgbClr val="53565A"/>
                 </a:solidFill>
@@ -4818,7 +5103,7 @@
               <a:buNone/>
             </a:pPr>
             <a:r>
-              <a:rPr lang="en-US" sz="1200" dirty="0">
+              <a:rPr lang="en-US" sz="1150" dirty="0">
                 <a:solidFill>
                   <a:srgbClr val="53565A"/>
                 </a:solidFill>
@@ -4832,7 +5117,7 @@
               <a:buNone/>
             </a:pPr>
             <a:r>
-              <a:rPr lang="en-US" sz="1200" b="1" dirty="0">
+              <a:rPr lang="en-US" sz="1150" b="1" dirty="0">
                 <a:solidFill>
                   <a:srgbClr val="53565A"/>
                 </a:solidFill>
@@ -4846,7 +5131,7 @@
               <a:buNone/>
             </a:pPr>
             <a:r>
-              <a:rPr lang="en-US" sz="1200" dirty="0">
+              <a:rPr lang="en-US" sz="1150" dirty="0">
                 <a:solidFill>
                   <a:srgbClr val="53565A"/>
                 </a:solidFill>
@@ -4856,44 +5141,20 @@
               </a:rPr>
               <a:t> is simply picked up by the next run.</a:t>
             </a:r>
-            <a:endParaRPr lang="en-US" sz="1200" dirty="0"/>
-          </a:p>
-        </p:txBody>
-      </p:sp>
-      <p:pic>
-        <p:nvPicPr>
-          <p:cNvPr id="34" name="Image 0" descr="nsf_ncar_logo_color.png">    </p:cNvPr>
-          <p:cNvPicPr>
-            <a:picLocks noChangeAspect="1"/>
-          </p:cNvPicPr>
-          <p:nvPr/>
-        </p:nvPicPr>
-        <p:blipFill>
-          <a:blip r:embed="rId1"/>
-          <a:stretch>
-            <a:fillRect/>
-          </a:stretch>
-        </p:blipFill>
-        <p:spPr>
-          <a:xfrm>
-            <a:off x="9951415" y="274320"/>
-            <a:ext cx="1874520" cy="512064"/>
-          </a:xfrm>
-          <a:prstGeom prst="rect">
-            <a:avLst/>
-          </a:prstGeom>
-        </p:spPr>
-      </p:pic>
-      <p:sp>
-        <p:nvSpPr>
-          <p:cNvPr id="35" name="Text 32"/>
-          <p:cNvSpPr/>
-          <p:nvPr/>
-        </p:nvSpPr>
-        <p:spPr>
-          <a:xfrm>
-            <a:off x="457200" y="6473952"/>
-            <a:ext cx="7315200" cy="274320"/>
+            <a:endParaRPr lang="en-US" sz="1150" dirty="0"/>
+          </a:p>
+        </p:txBody>
+      </p:sp>
+      <p:sp>
+        <p:nvSpPr>
+          <p:cNvPr id="34" name="Text 32"/>
+          <p:cNvSpPr/>
+          <p:nvPr/>
+        </p:nvSpPr>
+        <p:spPr>
+          <a:xfrm>
+            <a:off x="256032" y="6446520"/>
+            <a:ext cx="365760" cy="274320"/>
           </a:xfrm>
           <a:prstGeom prst="rect">
             <a:avLst/>
@@ -4905,34 +5166,34 @@
           <a:bodyPr wrap="square" lIns="0" tIns="0" rIns="0" bIns="0" rtlCol="0" anchor="ctr"/>
           <a:lstStyle/>
           <a:p>
-            <a:pPr algn="l" indent="0" marL="0">
-              <a:buNone/>
-            </a:pPr>
-            <a:r>
-              <a:rPr lang="en-US" sz="900" dirty="0">
-                <a:solidFill>
-                  <a:srgbClr val="53565A"/>
-                </a:solidFill>
-                <a:latin typeface="Poppins" pitchFamily="34" charset="0"/>
-                <a:ea typeface="Poppins" pitchFamily="34" charset="-122"/>
-                <a:cs typeface="Poppins" pitchFamily="34" charset="-120"/>
-              </a:rPr>
-              <a:t>dsquasar  •  Quasar Backup Guide</a:t>
-            </a:r>
-            <a:endParaRPr lang="en-US" sz="900" dirty="0"/>
-          </a:p>
-        </p:txBody>
-      </p:sp>
-      <p:sp>
-        <p:nvSpPr>
-          <p:cNvPr id="36" name="Text 33"/>
-          <p:cNvSpPr/>
-          <p:nvPr/>
-        </p:nvSpPr>
-        <p:spPr>
-          <a:xfrm>
-            <a:off x="11368735" y="6473952"/>
-            <a:ext cx="365760" cy="274320"/>
+            <a:pPr indent="0" marL="0">
+              <a:buNone/>
+            </a:pPr>
+            <a:r>
+              <a:rPr lang="en-US" sz="950" b="1" dirty="0">
+                <a:solidFill>
+                  <a:srgbClr val="00357A"/>
+                </a:solidFill>
+                <a:latin typeface="Poppins" pitchFamily="34" charset="0"/>
+                <a:ea typeface="Poppins" pitchFamily="34" charset="-122"/>
+                <a:cs typeface="Poppins" pitchFamily="34" charset="-120"/>
+              </a:rPr>
+              <a:t>9</a:t>
+            </a:r>
+            <a:endParaRPr lang="en-US" sz="950" dirty="0"/>
+          </a:p>
+        </p:txBody>
+      </p:sp>
+      <p:sp>
+        <p:nvSpPr>
+          <p:cNvPr id="35" name="Text 33"/>
+          <p:cNvSpPr/>
+          <p:nvPr/>
+        </p:nvSpPr>
+        <p:spPr>
+          <a:xfrm>
+            <a:off x="786384" y="6446520"/>
+            <a:ext cx="5486400" cy="274320"/>
           </a:xfrm>
           <a:prstGeom prst="rect">
             <a:avLst/>
@@ -4944,21 +5205,21 @@
           <a:bodyPr wrap="square" lIns="0" tIns="0" rIns="0" bIns="0" rtlCol="0" anchor="ctr"/>
           <a:lstStyle/>
           <a:p>
-            <a:pPr algn="r" indent="0" marL="0">
-              <a:buNone/>
-            </a:pPr>
-            <a:r>
-              <a:rPr lang="en-US" sz="900" dirty="0">
-                <a:solidFill>
-                  <a:srgbClr val="53565A"/>
-                </a:solidFill>
-                <a:latin typeface="Poppins" pitchFamily="34" charset="0"/>
-                <a:ea typeface="Poppins" pitchFamily="34" charset="-122"/>
-                <a:cs typeface="Poppins" pitchFamily="34" charset="-120"/>
-              </a:rPr>
-              <a:t>9</a:t>
-            </a:r>
-            <a:endParaRPr lang="en-US" sz="900" dirty="0"/>
+            <a:pPr indent="0" marL="0">
+              <a:buNone/>
+            </a:pPr>
+            <a:r>
+              <a:rPr lang="en-US" sz="950" b="1" dirty="0">
+                <a:solidFill>
+                  <a:srgbClr val="00357A"/>
+                </a:solidFill>
+                <a:latin typeface="Poppins" pitchFamily="34" charset="0"/>
+                <a:ea typeface="Poppins" pitchFamily="34" charset="-122"/>
+                <a:cs typeface="Poppins" pitchFamily="34" charset="-120"/>
+              </a:rPr>
+              <a:t>DSQUASAR  •  QUASAR BACKUP GUIDE</a:t>
+            </a:r>
+            <a:endParaRPr lang="en-US" sz="950" dirty="0"/>
           </a:p>
         </p:txBody>
       </p:sp>
@@ -4973,13 +5234,6 @@
 <file path=ppt/slides/slide11.xml><?xml version="1.0" encoding="utf-8"?>
 <p:sld xmlns:a="http://schemas.openxmlformats.org/drawingml/2006/main" xmlns:r="http://schemas.openxmlformats.org/officeDocument/2006/relationships" xmlns:p="http://schemas.openxmlformats.org/presentationml/2006/main">
   <p:cSld name="Slide 11">
-    <p:bg>
-      <p:bgPr>
-        <a:solidFill>
-          <a:srgbClr val="FFFFFF"/>
-        </a:solidFill>
-      </p:bgPr>
-    </p:bg>
     <p:spTree>
       <p:nvGrpSpPr>
         <p:cNvPr id="1" name=""/>
@@ -6412,40 +6666,16 @@
           </a:p>
         </p:txBody>
       </p:sp>
-      <p:pic>
-        <p:nvPicPr>
-          <p:cNvPr id="18" name="Image 0" descr="nsf_ncar_logo_color.png">    </p:cNvPr>
-          <p:cNvPicPr>
-            <a:picLocks noChangeAspect="1"/>
-          </p:cNvPicPr>
-          <p:nvPr/>
-        </p:nvPicPr>
-        <p:blipFill>
-          <a:blip r:embed="rId1"/>
-          <a:stretch>
-            <a:fillRect/>
-          </a:stretch>
-        </p:blipFill>
-        <p:spPr>
-          <a:xfrm>
-            <a:off x="9951415" y="274320"/>
-            <a:ext cx="1874520" cy="512064"/>
-          </a:xfrm>
-          <a:prstGeom prst="rect">
-            <a:avLst/>
-          </a:prstGeom>
-        </p:spPr>
-      </p:pic>
-      <p:sp>
-        <p:nvSpPr>
-          <p:cNvPr id="19" name="Text 15"/>
-          <p:cNvSpPr/>
-          <p:nvPr/>
-        </p:nvSpPr>
-        <p:spPr>
-          <a:xfrm>
-            <a:off x="457200" y="6473952"/>
-            <a:ext cx="7315200" cy="274320"/>
+      <p:sp>
+        <p:nvSpPr>
+          <p:cNvPr id="18" name="Text 15"/>
+          <p:cNvSpPr/>
+          <p:nvPr/>
+        </p:nvSpPr>
+        <p:spPr>
+          <a:xfrm>
+            <a:off x="256032" y="6446520"/>
+            <a:ext cx="365760" cy="274320"/>
           </a:xfrm>
           <a:prstGeom prst="rect">
             <a:avLst/>
@@ -6457,34 +6687,34 @@
           <a:bodyPr wrap="square" lIns="0" tIns="0" rIns="0" bIns="0" rtlCol="0" anchor="ctr"/>
           <a:lstStyle/>
           <a:p>
-            <a:pPr algn="l" indent="0" marL="0">
-              <a:buNone/>
-            </a:pPr>
-            <a:r>
-              <a:rPr lang="en-US" sz="900" dirty="0">
-                <a:solidFill>
-                  <a:srgbClr val="53565A"/>
-                </a:solidFill>
-                <a:latin typeface="Poppins" pitchFamily="34" charset="0"/>
-                <a:ea typeface="Poppins" pitchFamily="34" charset="-122"/>
-                <a:cs typeface="Poppins" pitchFamily="34" charset="-120"/>
-              </a:rPr>
-              <a:t>dsquasar  •  Quasar Backup Guide</a:t>
-            </a:r>
-            <a:endParaRPr lang="en-US" sz="900" dirty="0"/>
-          </a:p>
-        </p:txBody>
-      </p:sp>
-      <p:sp>
-        <p:nvSpPr>
-          <p:cNvPr id="20" name="Text 16"/>
-          <p:cNvSpPr/>
-          <p:nvPr/>
-        </p:nvSpPr>
-        <p:spPr>
-          <a:xfrm>
-            <a:off x="11368735" y="6473952"/>
-            <a:ext cx="365760" cy="274320"/>
+            <a:pPr indent="0" marL="0">
+              <a:buNone/>
+            </a:pPr>
+            <a:r>
+              <a:rPr lang="en-US" sz="950" b="1" dirty="0">
+                <a:solidFill>
+                  <a:srgbClr val="00357A"/>
+                </a:solidFill>
+                <a:latin typeface="Poppins" pitchFamily="34" charset="0"/>
+                <a:ea typeface="Poppins" pitchFamily="34" charset="-122"/>
+                <a:cs typeface="Poppins" pitchFamily="34" charset="-120"/>
+              </a:rPr>
+              <a:t>10</a:t>
+            </a:r>
+            <a:endParaRPr lang="en-US" sz="950" dirty="0"/>
+          </a:p>
+        </p:txBody>
+      </p:sp>
+      <p:sp>
+        <p:nvSpPr>
+          <p:cNvPr id="19" name="Text 16"/>
+          <p:cNvSpPr/>
+          <p:nvPr/>
+        </p:nvSpPr>
+        <p:spPr>
+          <a:xfrm>
+            <a:off x="786384" y="6446520"/>
+            <a:ext cx="5486400" cy="274320"/>
           </a:xfrm>
           <a:prstGeom prst="rect">
             <a:avLst/>
@@ -6496,21 +6726,21 @@
           <a:bodyPr wrap="square" lIns="0" tIns="0" rIns="0" bIns="0" rtlCol="0" anchor="ctr"/>
           <a:lstStyle/>
           <a:p>
-            <a:pPr algn="r" indent="0" marL="0">
-              <a:buNone/>
-            </a:pPr>
-            <a:r>
-              <a:rPr lang="en-US" sz="900" dirty="0">
-                <a:solidFill>
-                  <a:srgbClr val="53565A"/>
-                </a:solidFill>
-                <a:latin typeface="Poppins" pitchFamily="34" charset="0"/>
-                <a:ea typeface="Poppins" pitchFamily="34" charset="-122"/>
-                <a:cs typeface="Poppins" pitchFamily="34" charset="-120"/>
-              </a:rPr>
-              <a:t>10</a:t>
-            </a:r>
-            <a:endParaRPr lang="en-US" sz="900" dirty="0"/>
+            <a:pPr indent="0" marL="0">
+              <a:buNone/>
+            </a:pPr>
+            <a:r>
+              <a:rPr lang="en-US" sz="950" b="1" dirty="0">
+                <a:solidFill>
+                  <a:srgbClr val="00357A"/>
+                </a:solidFill>
+                <a:latin typeface="Poppins" pitchFamily="34" charset="0"/>
+                <a:ea typeface="Poppins" pitchFamily="34" charset="-122"/>
+                <a:cs typeface="Poppins" pitchFamily="34" charset="-120"/>
+              </a:rPr>
+              <a:t>DSQUASAR  •  QUASAR BACKUP GUIDE</a:t>
+            </a:r>
+            <a:endParaRPr lang="en-US" sz="950" dirty="0"/>
           </a:p>
         </p:txBody>
       </p:sp>
@@ -6525,13 +6755,6 @@
 <file path=ppt/slides/slide12.xml><?xml version="1.0" encoding="utf-8"?>
 <p:sld xmlns:a="http://schemas.openxmlformats.org/drawingml/2006/main" xmlns:r="http://schemas.openxmlformats.org/officeDocument/2006/relationships" xmlns:p="http://schemas.openxmlformats.org/presentationml/2006/main">
   <p:cSld name="Slide 12">
-    <p:bg>
-      <p:bgPr>
-        <a:solidFill>
-          <a:srgbClr val="FFFFFF"/>
-        </a:solidFill>
-      </p:bgPr>
-    </p:bg>
     <p:spTree>
       <p:nvGrpSpPr>
         <p:cNvPr id="1" name=""/>
@@ -7951,8 +8174,8 @@
         </p:nvSpPr>
         <p:spPr>
           <a:xfrm>
-            <a:off x="457200" y="6035040"/>
-            <a:ext cx="11274552" cy="365760"/>
+            <a:off x="457200" y="5989320"/>
+            <a:ext cx="9966960" cy="365760"/>
           </a:xfrm>
           <a:prstGeom prst="rect">
             <a:avLst/>
@@ -7968,7 +8191,7 @@
               <a:buNone/>
             </a:pPr>
             <a:r>
-              <a:rPr lang="en-US" sz="1300" b="1" dirty="0">
+              <a:rPr lang="en-US" sz="1150" b="1" dirty="0">
                 <a:solidFill>
                   <a:srgbClr val="0057C2"/>
                 </a:solidFill>
@@ -7982,7 +8205,7 @@
               <a:buNone/>
             </a:pPr>
             <a:r>
-              <a:rPr lang="en-US" sz="1300" dirty="0">
+              <a:rPr lang="en-US" sz="1150" dirty="0">
                 <a:solidFill>
                   <a:srgbClr val="00357A"/>
                 </a:solidFill>
@@ -7992,44 +8215,20 @@
               </a:rPr>
               <a:t>A list created this run is tarred right away, and any 'N' record left over from before is tarred too.</a:t>
             </a:r>
-            <a:endParaRPr lang="en-US" sz="1300" dirty="0"/>
-          </a:p>
-        </p:txBody>
-      </p:sp>
-      <p:pic>
-        <p:nvPicPr>
-          <p:cNvPr id="40" name="Image 0" descr="nsf_ncar_logo_color.png">    </p:cNvPr>
-          <p:cNvPicPr>
-            <a:picLocks noChangeAspect="1"/>
-          </p:cNvPicPr>
-          <p:nvPr/>
-        </p:nvPicPr>
-        <p:blipFill>
-          <a:blip r:embed="rId1"/>
-          <a:stretch>
-            <a:fillRect/>
-          </a:stretch>
-        </p:blipFill>
-        <p:spPr>
-          <a:xfrm>
-            <a:off x="9951415" y="274320"/>
-            <a:ext cx="1874520" cy="512064"/>
-          </a:xfrm>
-          <a:prstGeom prst="rect">
-            <a:avLst/>
-          </a:prstGeom>
-        </p:spPr>
-      </p:pic>
-      <p:sp>
-        <p:nvSpPr>
-          <p:cNvPr id="41" name="Text 38"/>
-          <p:cNvSpPr/>
-          <p:nvPr/>
-        </p:nvSpPr>
-        <p:spPr>
-          <a:xfrm>
-            <a:off x="457200" y="6473952"/>
-            <a:ext cx="7315200" cy="274320"/>
+            <a:endParaRPr lang="en-US" sz="1150" dirty="0"/>
+          </a:p>
+        </p:txBody>
+      </p:sp>
+      <p:sp>
+        <p:nvSpPr>
+          <p:cNvPr id="40" name="Text 38"/>
+          <p:cNvSpPr/>
+          <p:nvPr/>
+        </p:nvSpPr>
+        <p:spPr>
+          <a:xfrm>
+            <a:off x="256032" y="6446520"/>
+            <a:ext cx="365760" cy="274320"/>
           </a:xfrm>
           <a:prstGeom prst="rect">
             <a:avLst/>
@@ -8041,34 +8240,34 @@
           <a:bodyPr wrap="square" lIns="0" tIns="0" rIns="0" bIns="0" rtlCol="0" anchor="ctr"/>
           <a:lstStyle/>
           <a:p>
-            <a:pPr algn="l" indent="0" marL="0">
-              <a:buNone/>
-            </a:pPr>
-            <a:r>
-              <a:rPr lang="en-US" sz="900" dirty="0">
-                <a:solidFill>
-                  <a:srgbClr val="53565A"/>
-                </a:solidFill>
-                <a:latin typeface="Poppins" pitchFamily="34" charset="0"/>
-                <a:ea typeface="Poppins" pitchFamily="34" charset="-122"/>
-                <a:cs typeface="Poppins" pitchFamily="34" charset="-120"/>
-              </a:rPr>
-              <a:t>dsquasar  •  Quasar Backup Guide</a:t>
-            </a:r>
-            <a:endParaRPr lang="en-US" sz="900" dirty="0"/>
-          </a:p>
-        </p:txBody>
-      </p:sp>
-      <p:sp>
-        <p:nvSpPr>
-          <p:cNvPr id="42" name="Text 39"/>
-          <p:cNvSpPr/>
-          <p:nvPr/>
-        </p:nvSpPr>
-        <p:spPr>
-          <a:xfrm>
-            <a:off x="11368735" y="6473952"/>
-            <a:ext cx="365760" cy="274320"/>
+            <a:pPr indent="0" marL="0">
+              <a:buNone/>
+            </a:pPr>
+            <a:r>
+              <a:rPr lang="en-US" sz="950" b="1" dirty="0">
+                <a:solidFill>
+                  <a:srgbClr val="00357A"/>
+                </a:solidFill>
+                <a:latin typeface="Poppins" pitchFamily="34" charset="0"/>
+                <a:ea typeface="Poppins" pitchFamily="34" charset="-122"/>
+                <a:cs typeface="Poppins" pitchFamily="34" charset="-120"/>
+              </a:rPr>
+              <a:t>11</a:t>
+            </a:r>
+            <a:endParaRPr lang="en-US" sz="950" dirty="0"/>
+          </a:p>
+        </p:txBody>
+      </p:sp>
+      <p:sp>
+        <p:nvSpPr>
+          <p:cNvPr id="41" name="Text 39"/>
+          <p:cNvSpPr/>
+          <p:nvPr/>
+        </p:nvSpPr>
+        <p:spPr>
+          <a:xfrm>
+            <a:off x="786384" y="6446520"/>
+            <a:ext cx="5486400" cy="274320"/>
           </a:xfrm>
           <a:prstGeom prst="rect">
             <a:avLst/>
@@ -8080,21 +8279,21 @@
           <a:bodyPr wrap="square" lIns="0" tIns="0" rIns="0" bIns="0" rtlCol="0" anchor="ctr"/>
           <a:lstStyle/>
           <a:p>
-            <a:pPr algn="r" indent="0" marL="0">
-              <a:buNone/>
-            </a:pPr>
-            <a:r>
-              <a:rPr lang="en-US" sz="900" dirty="0">
-                <a:solidFill>
-                  <a:srgbClr val="53565A"/>
-                </a:solidFill>
-                <a:latin typeface="Poppins" pitchFamily="34" charset="0"/>
-                <a:ea typeface="Poppins" pitchFamily="34" charset="-122"/>
-                <a:cs typeface="Poppins" pitchFamily="34" charset="-120"/>
-              </a:rPr>
-              <a:t>11</a:t>
-            </a:r>
-            <a:endParaRPr lang="en-US" sz="900" dirty="0"/>
+            <a:pPr indent="0" marL="0">
+              <a:buNone/>
+            </a:pPr>
+            <a:r>
+              <a:rPr lang="en-US" sz="950" b="1" dirty="0">
+                <a:solidFill>
+                  <a:srgbClr val="00357A"/>
+                </a:solidFill>
+                <a:latin typeface="Poppins" pitchFamily="34" charset="0"/>
+                <a:ea typeface="Poppins" pitchFamily="34" charset="-122"/>
+                <a:cs typeface="Poppins" pitchFamily="34" charset="-120"/>
+              </a:rPr>
+              <a:t>DSQUASAR  •  QUASAR BACKUP GUIDE</a:t>
+            </a:r>
+            <a:endParaRPr lang="en-US" sz="950" dirty="0"/>
           </a:p>
         </p:txBody>
       </p:sp>
@@ -8109,13 +8308,6 @@
 <file path=ppt/slides/slide13.xml><?xml version="1.0" encoding="utf-8"?>
 <p:sld xmlns:a="http://schemas.openxmlformats.org/drawingml/2006/main" xmlns:r="http://schemas.openxmlformats.org/officeDocument/2006/relationships" xmlns:p="http://schemas.openxmlformats.org/presentationml/2006/main">
   <p:cSld name="Slide 13">
-    <p:bg>
-      <p:bgPr>
-        <a:solidFill>
-          <a:srgbClr val="FFFFFF"/>
-        </a:solidFill>
-      </p:bgPr>
-    </p:bg>
     <p:spTree>
       <p:nvGrpSpPr>
         <p:cNvPr id="1" name=""/>
@@ -9270,40 +9462,16 @@
           </a:p>
         </p:txBody>
       </p:sp>
-      <p:pic>
-        <p:nvPicPr>
-          <p:cNvPr id="36" name="Image 0" descr="nsf_ncar_logo_color.png">    </p:cNvPr>
-          <p:cNvPicPr>
-            <a:picLocks noChangeAspect="1"/>
-          </p:cNvPicPr>
-          <p:nvPr/>
-        </p:nvPicPr>
-        <p:blipFill>
-          <a:blip r:embed="rId1"/>
-          <a:stretch>
-            <a:fillRect/>
-          </a:stretch>
-        </p:blipFill>
-        <p:spPr>
-          <a:xfrm>
-            <a:off x="9951415" y="274320"/>
-            <a:ext cx="1874520" cy="512064"/>
-          </a:xfrm>
-          <a:prstGeom prst="rect">
-            <a:avLst/>
-          </a:prstGeom>
-        </p:spPr>
-      </p:pic>
-      <p:sp>
-        <p:nvSpPr>
-          <p:cNvPr id="37" name="Text 34"/>
-          <p:cNvSpPr/>
-          <p:nvPr/>
-        </p:nvSpPr>
-        <p:spPr>
-          <a:xfrm>
-            <a:off x="457200" y="6473952"/>
-            <a:ext cx="7315200" cy="274320"/>
+      <p:sp>
+        <p:nvSpPr>
+          <p:cNvPr id="36" name="Text 34"/>
+          <p:cNvSpPr/>
+          <p:nvPr/>
+        </p:nvSpPr>
+        <p:spPr>
+          <a:xfrm>
+            <a:off x="256032" y="6446520"/>
+            <a:ext cx="365760" cy="274320"/>
           </a:xfrm>
           <a:prstGeom prst="rect">
             <a:avLst/>
@@ -9315,34 +9483,34 @@
           <a:bodyPr wrap="square" lIns="0" tIns="0" rIns="0" bIns="0" rtlCol="0" anchor="ctr"/>
           <a:lstStyle/>
           <a:p>
-            <a:pPr algn="l" indent="0" marL="0">
-              <a:buNone/>
-            </a:pPr>
-            <a:r>
-              <a:rPr lang="en-US" sz="900" dirty="0">
-                <a:solidFill>
-                  <a:srgbClr val="53565A"/>
-                </a:solidFill>
-                <a:latin typeface="Poppins" pitchFamily="34" charset="0"/>
-                <a:ea typeface="Poppins" pitchFamily="34" charset="-122"/>
-                <a:cs typeface="Poppins" pitchFamily="34" charset="-120"/>
-              </a:rPr>
-              <a:t>dsquasar  •  Quasar Backup Guide</a:t>
-            </a:r>
-            <a:endParaRPr lang="en-US" sz="900" dirty="0"/>
-          </a:p>
-        </p:txBody>
-      </p:sp>
-      <p:sp>
-        <p:nvSpPr>
-          <p:cNvPr id="38" name="Text 35"/>
-          <p:cNvSpPr/>
-          <p:nvPr/>
-        </p:nvSpPr>
-        <p:spPr>
-          <a:xfrm>
-            <a:off x="11368735" y="6473952"/>
-            <a:ext cx="365760" cy="274320"/>
+            <a:pPr indent="0" marL="0">
+              <a:buNone/>
+            </a:pPr>
+            <a:r>
+              <a:rPr lang="en-US" sz="950" b="1" dirty="0">
+                <a:solidFill>
+                  <a:srgbClr val="00357A"/>
+                </a:solidFill>
+                <a:latin typeface="Poppins" pitchFamily="34" charset="0"/>
+                <a:ea typeface="Poppins" pitchFamily="34" charset="-122"/>
+                <a:cs typeface="Poppins" pitchFamily="34" charset="-120"/>
+              </a:rPr>
+              <a:t>12</a:t>
+            </a:r>
+            <a:endParaRPr lang="en-US" sz="950" dirty="0"/>
+          </a:p>
+        </p:txBody>
+      </p:sp>
+      <p:sp>
+        <p:nvSpPr>
+          <p:cNvPr id="37" name="Text 35"/>
+          <p:cNvSpPr/>
+          <p:nvPr/>
+        </p:nvSpPr>
+        <p:spPr>
+          <a:xfrm>
+            <a:off x="786384" y="6446520"/>
+            <a:ext cx="5486400" cy="274320"/>
           </a:xfrm>
           <a:prstGeom prst="rect">
             <a:avLst/>
@@ -9354,21 +9522,21 @@
           <a:bodyPr wrap="square" lIns="0" tIns="0" rIns="0" bIns="0" rtlCol="0" anchor="ctr"/>
           <a:lstStyle/>
           <a:p>
-            <a:pPr algn="r" indent="0" marL="0">
-              <a:buNone/>
-            </a:pPr>
-            <a:r>
-              <a:rPr lang="en-US" sz="900" dirty="0">
-                <a:solidFill>
-                  <a:srgbClr val="53565A"/>
-                </a:solidFill>
-                <a:latin typeface="Poppins" pitchFamily="34" charset="0"/>
-                <a:ea typeface="Poppins" pitchFamily="34" charset="-122"/>
-                <a:cs typeface="Poppins" pitchFamily="34" charset="-120"/>
-              </a:rPr>
-              <a:t>12</a:t>
-            </a:r>
-            <a:endParaRPr lang="en-US" sz="900" dirty="0"/>
+            <a:pPr indent="0" marL="0">
+              <a:buNone/>
+            </a:pPr>
+            <a:r>
+              <a:rPr lang="en-US" sz="950" b="1" dirty="0">
+                <a:solidFill>
+                  <a:srgbClr val="00357A"/>
+                </a:solidFill>
+                <a:latin typeface="Poppins" pitchFamily="34" charset="0"/>
+                <a:ea typeface="Poppins" pitchFamily="34" charset="-122"/>
+                <a:cs typeface="Poppins" pitchFamily="34" charset="-120"/>
+              </a:rPr>
+              <a:t>DSQUASAR  •  QUASAR BACKUP GUIDE</a:t>
+            </a:r>
+            <a:endParaRPr lang="en-US" sz="950" dirty="0"/>
           </a:p>
         </p:txBody>
       </p:sp>
@@ -9383,13 +9551,6 @@
 <file path=ppt/slides/slide14.xml><?xml version="1.0" encoding="utf-8"?>
 <p:sld xmlns:a="http://schemas.openxmlformats.org/drawingml/2006/main" xmlns:r="http://schemas.openxmlformats.org/officeDocument/2006/relationships" xmlns:p="http://schemas.openxmlformats.org/presentationml/2006/main">
   <p:cSld name="Slide 14">
-    <p:bg>
-      <p:bgPr>
-        <a:solidFill>
-          <a:srgbClr val="FFFFFF"/>
-        </a:solidFill>
-      </p:bgPr>
-    </p:bg>
     <p:spTree>
       <p:nvGrpSpPr>
         <p:cNvPr id="1" name=""/>
@@ -10971,40 +11132,16 @@
           </a:p>
         </p:txBody>
       </p:sp>
-      <p:pic>
-        <p:nvPicPr>
-          <p:cNvPr id="26" name="Image 0" descr="nsf_ncar_logo_color.png">    </p:cNvPr>
-          <p:cNvPicPr>
-            <a:picLocks noChangeAspect="1"/>
-          </p:cNvPicPr>
-          <p:nvPr/>
-        </p:nvPicPr>
-        <p:blipFill>
-          <a:blip r:embed="rId1"/>
-          <a:stretch>
-            <a:fillRect/>
-          </a:stretch>
-        </p:blipFill>
-        <p:spPr>
-          <a:xfrm>
-            <a:off x="9951415" y="274320"/>
-            <a:ext cx="1874520" cy="512064"/>
-          </a:xfrm>
-          <a:prstGeom prst="rect">
-            <a:avLst/>
-          </a:prstGeom>
-        </p:spPr>
-      </p:pic>
-      <p:sp>
-        <p:nvSpPr>
-          <p:cNvPr id="27" name="Text 23"/>
-          <p:cNvSpPr/>
-          <p:nvPr/>
-        </p:nvSpPr>
-        <p:spPr>
-          <a:xfrm>
-            <a:off x="457200" y="6473952"/>
-            <a:ext cx="7315200" cy="274320"/>
+      <p:sp>
+        <p:nvSpPr>
+          <p:cNvPr id="26" name="Text 23"/>
+          <p:cNvSpPr/>
+          <p:nvPr/>
+        </p:nvSpPr>
+        <p:spPr>
+          <a:xfrm>
+            <a:off x="256032" y="6446520"/>
+            <a:ext cx="365760" cy="274320"/>
           </a:xfrm>
           <a:prstGeom prst="rect">
             <a:avLst/>
@@ -11016,34 +11153,34 @@
           <a:bodyPr wrap="square" lIns="0" tIns="0" rIns="0" bIns="0" rtlCol="0" anchor="ctr"/>
           <a:lstStyle/>
           <a:p>
-            <a:pPr algn="l" indent="0" marL="0">
-              <a:buNone/>
-            </a:pPr>
-            <a:r>
-              <a:rPr lang="en-US" sz="900" dirty="0">
-                <a:solidFill>
-                  <a:srgbClr val="53565A"/>
-                </a:solidFill>
-                <a:latin typeface="Poppins" pitchFamily="34" charset="0"/>
-                <a:ea typeface="Poppins" pitchFamily="34" charset="-122"/>
-                <a:cs typeface="Poppins" pitchFamily="34" charset="-120"/>
-              </a:rPr>
-              <a:t>dsquasar  •  Quasar Backup Guide</a:t>
-            </a:r>
-            <a:endParaRPr lang="en-US" sz="900" dirty="0"/>
-          </a:p>
-        </p:txBody>
-      </p:sp>
-      <p:sp>
-        <p:nvSpPr>
-          <p:cNvPr id="28" name="Text 24"/>
-          <p:cNvSpPr/>
-          <p:nvPr/>
-        </p:nvSpPr>
-        <p:spPr>
-          <a:xfrm>
-            <a:off x="11368735" y="6473952"/>
-            <a:ext cx="365760" cy="274320"/>
+            <a:pPr indent="0" marL="0">
+              <a:buNone/>
+            </a:pPr>
+            <a:r>
+              <a:rPr lang="en-US" sz="950" b="1" dirty="0">
+                <a:solidFill>
+                  <a:srgbClr val="00357A"/>
+                </a:solidFill>
+                <a:latin typeface="Poppins" pitchFamily="34" charset="0"/>
+                <a:ea typeface="Poppins" pitchFamily="34" charset="-122"/>
+                <a:cs typeface="Poppins" pitchFamily="34" charset="-120"/>
+              </a:rPr>
+              <a:t>13</a:t>
+            </a:r>
+            <a:endParaRPr lang="en-US" sz="950" dirty="0"/>
+          </a:p>
+        </p:txBody>
+      </p:sp>
+      <p:sp>
+        <p:nvSpPr>
+          <p:cNvPr id="27" name="Text 24"/>
+          <p:cNvSpPr/>
+          <p:nvPr/>
+        </p:nvSpPr>
+        <p:spPr>
+          <a:xfrm>
+            <a:off x="786384" y="6446520"/>
+            <a:ext cx="5486400" cy="274320"/>
           </a:xfrm>
           <a:prstGeom prst="rect">
             <a:avLst/>
@@ -11055,21 +11192,21 @@
           <a:bodyPr wrap="square" lIns="0" tIns="0" rIns="0" bIns="0" rtlCol="0" anchor="ctr"/>
           <a:lstStyle/>
           <a:p>
-            <a:pPr algn="r" indent="0" marL="0">
-              <a:buNone/>
-            </a:pPr>
-            <a:r>
-              <a:rPr lang="en-US" sz="900" dirty="0">
-                <a:solidFill>
-                  <a:srgbClr val="53565A"/>
-                </a:solidFill>
-                <a:latin typeface="Poppins" pitchFamily="34" charset="0"/>
-                <a:ea typeface="Poppins" pitchFamily="34" charset="-122"/>
-                <a:cs typeface="Poppins" pitchFamily="34" charset="-120"/>
-              </a:rPr>
-              <a:t>13</a:t>
-            </a:r>
-            <a:endParaRPr lang="en-US" sz="900" dirty="0"/>
+            <a:pPr indent="0" marL="0">
+              <a:buNone/>
+            </a:pPr>
+            <a:r>
+              <a:rPr lang="en-US" sz="950" b="1" dirty="0">
+                <a:solidFill>
+                  <a:srgbClr val="00357A"/>
+                </a:solidFill>
+                <a:latin typeface="Poppins" pitchFamily="34" charset="0"/>
+                <a:ea typeface="Poppins" pitchFamily="34" charset="-122"/>
+                <a:cs typeface="Poppins" pitchFamily="34" charset="-120"/>
+              </a:rPr>
+              <a:t>DSQUASAR  •  QUASAR BACKUP GUIDE</a:t>
+            </a:r>
+            <a:endParaRPr lang="en-US" sz="950" dirty="0"/>
           </a:p>
         </p:txBody>
       </p:sp>
@@ -11084,13 +11221,6 @@
 <file path=ppt/slides/slide15.xml><?xml version="1.0" encoding="utf-8"?>
 <p:sld xmlns:a="http://schemas.openxmlformats.org/drawingml/2006/main" xmlns:r="http://schemas.openxmlformats.org/officeDocument/2006/relationships" xmlns:p="http://schemas.openxmlformats.org/presentationml/2006/main">
   <p:cSld name="Slide 15">
-    <p:bg>
-      <p:bgPr>
-        <a:solidFill>
-          <a:srgbClr val="FFFFFF"/>
-        </a:solidFill>
-      </p:bgPr>
-    </p:bg>
     <p:spTree>
       <p:nvGrpSpPr>
         <p:cNvPr id="1" name=""/>
@@ -12754,40 +12884,16 @@
           </a:p>
         </p:txBody>
       </p:sp>
-      <p:pic>
-        <p:nvPicPr>
-          <p:cNvPr id="30" name="Image 0" descr="nsf_ncar_logo_color.png">    </p:cNvPr>
-          <p:cNvPicPr>
-            <a:picLocks noChangeAspect="1"/>
-          </p:cNvPicPr>
-          <p:nvPr/>
-        </p:nvPicPr>
-        <p:blipFill>
-          <a:blip r:embed="rId1"/>
-          <a:stretch>
-            <a:fillRect/>
-          </a:stretch>
-        </p:blipFill>
-        <p:spPr>
-          <a:xfrm>
-            <a:off x="9951415" y="274320"/>
-            <a:ext cx="1874520" cy="512064"/>
-          </a:xfrm>
-          <a:prstGeom prst="rect">
-            <a:avLst/>
-          </a:prstGeom>
-        </p:spPr>
-      </p:pic>
-      <p:sp>
-        <p:nvSpPr>
-          <p:cNvPr id="31" name="Text 27"/>
-          <p:cNvSpPr/>
-          <p:nvPr/>
-        </p:nvSpPr>
-        <p:spPr>
-          <a:xfrm>
-            <a:off x="457200" y="6473952"/>
-            <a:ext cx="7315200" cy="274320"/>
+      <p:sp>
+        <p:nvSpPr>
+          <p:cNvPr id="30" name="Text 27"/>
+          <p:cNvSpPr/>
+          <p:nvPr/>
+        </p:nvSpPr>
+        <p:spPr>
+          <a:xfrm>
+            <a:off x="256032" y="6446520"/>
+            <a:ext cx="365760" cy="274320"/>
           </a:xfrm>
           <a:prstGeom prst="rect">
             <a:avLst/>
@@ -12799,34 +12905,34 @@
           <a:bodyPr wrap="square" lIns="0" tIns="0" rIns="0" bIns="0" rtlCol="0" anchor="ctr"/>
           <a:lstStyle/>
           <a:p>
-            <a:pPr algn="l" indent="0" marL="0">
-              <a:buNone/>
-            </a:pPr>
-            <a:r>
-              <a:rPr lang="en-US" sz="900" dirty="0">
-                <a:solidFill>
-                  <a:srgbClr val="53565A"/>
-                </a:solidFill>
-                <a:latin typeface="Poppins" pitchFamily="34" charset="0"/>
-                <a:ea typeface="Poppins" pitchFamily="34" charset="-122"/>
-                <a:cs typeface="Poppins" pitchFamily="34" charset="-120"/>
-              </a:rPr>
-              <a:t>dsquasar  •  Quasar Backup Guide</a:t>
-            </a:r>
-            <a:endParaRPr lang="en-US" sz="900" dirty="0"/>
-          </a:p>
-        </p:txBody>
-      </p:sp>
-      <p:sp>
-        <p:nvSpPr>
-          <p:cNvPr id="32" name="Text 28"/>
-          <p:cNvSpPr/>
-          <p:nvPr/>
-        </p:nvSpPr>
-        <p:spPr>
-          <a:xfrm>
-            <a:off x="11368735" y="6473952"/>
-            <a:ext cx="365760" cy="274320"/>
+            <a:pPr indent="0" marL="0">
+              <a:buNone/>
+            </a:pPr>
+            <a:r>
+              <a:rPr lang="en-US" sz="950" b="1" dirty="0">
+                <a:solidFill>
+                  <a:srgbClr val="00357A"/>
+                </a:solidFill>
+                <a:latin typeface="Poppins" pitchFamily="34" charset="0"/>
+                <a:ea typeface="Poppins" pitchFamily="34" charset="-122"/>
+                <a:cs typeface="Poppins" pitchFamily="34" charset="-120"/>
+              </a:rPr>
+              <a:t>14</a:t>
+            </a:r>
+            <a:endParaRPr lang="en-US" sz="950" dirty="0"/>
+          </a:p>
+        </p:txBody>
+      </p:sp>
+      <p:sp>
+        <p:nvSpPr>
+          <p:cNvPr id="31" name="Text 28"/>
+          <p:cNvSpPr/>
+          <p:nvPr/>
+        </p:nvSpPr>
+        <p:spPr>
+          <a:xfrm>
+            <a:off x="786384" y="6446520"/>
+            <a:ext cx="5486400" cy="274320"/>
           </a:xfrm>
           <a:prstGeom prst="rect">
             <a:avLst/>
@@ -12838,21 +12944,21 @@
           <a:bodyPr wrap="square" lIns="0" tIns="0" rIns="0" bIns="0" rtlCol="0" anchor="ctr"/>
           <a:lstStyle/>
           <a:p>
-            <a:pPr algn="r" indent="0" marL="0">
-              <a:buNone/>
-            </a:pPr>
-            <a:r>
-              <a:rPr lang="en-US" sz="900" dirty="0">
-                <a:solidFill>
-                  <a:srgbClr val="53565A"/>
-                </a:solidFill>
-                <a:latin typeface="Poppins" pitchFamily="34" charset="0"/>
-                <a:ea typeface="Poppins" pitchFamily="34" charset="-122"/>
-                <a:cs typeface="Poppins" pitchFamily="34" charset="-120"/>
-              </a:rPr>
-              <a:t>14</a:t>
-            </a:r>
-            <a:endParaRPr lang="en-US" sz="900" dirty="0"/>
+            <a:pPr indent="0" marL="0">
+              <a:buNone/>
+            </a:pPr>
+            <a:r>
+              <a:rPr lang="en-US" sz="950" b="1" dirty="0">
+                <a:solidFill>
+                  <a:srgbClr val="00357A"/>
+                </a:solidFill>
+                <a:latin typeface="Poppins" pitchFamily="34" charset="0"/>
+                <a:ea typeface="Poppins" pitchFamily="34" charset="-122"/>
+                <a:cs typeface="Poppins" pitchFamily="34" charset="-120"/>
+              </a:rPr>
+              <a:t>DSQUASAR  •  QUASAR BACKUP GUIDE</a:t>
+            </a:r>
+            <a:endParaRPr lang="en-US" sz="950" dirty="0"/>
           </a:p>
         </p:txBody>
       </p:sp>
@@ -12867,13 +12973,6 @@
 <file path=ppt/slides/slide16.xml><?xml version="1.0" encoding="utf-8"?>
 <p:sld xmlns:a="http://schemas.openxmlformats.org/drawingml/2006/main" xmlns:r="http://schemas.openxmlformats.org/officeDocument/2006/relationships" xmlns:p="http://schemas.openxmlformats.org/presentationml/2006/main">
   <p:cSld name="Slide 16">
-    <p:bg>
-      <p:bgPr>
-        <a:solidFill>
-          <a:srgbClr val="FFFFFF"/>
-        </a:solidFill>
-      </p:bgPr>
-    </p:bg>
     <p:spTree>
       <p:nvGrpSpPr>
         <p:cNvPr id="1" name=""/>
@@ -13977,40 +14076,16 @@
           </a:p>
         </p:txBody>
       </p:sp>
-      <p:pic>
-        <p:nvPicPr>
-          <p:cNvPr id="34" name="Image 0" descr="nsf_ncar_logo_color.png">    </p:cNvPr>
-          <p:cNvPicPr>
-            <a:picLocks noChangeAspect="1"/>
-          </p:cNvPicPr>
-          <p:nvPr/>
-        </p:nvPicPr>
-        <p:blipFill>
-          <a:blip r:embed="rId1"/>
-          <a:stretch>
-            <a:fillRect/>
-          </a:stretch>
-        </p:blipFill>
-        <p:spPr>
-          <a:xfrm>
-            <a:off x="9951415" y="274320"/>
-            <a:ext cx="1874520" cy="512064"/>
-          </a:xfrm>
-          <a:prstGeom prst="rect">
-            <a:avLst/>
-          </a:prstGeom>
-        </p:spPr>
-      </p:pic>
-      <p:sp>
-        <p:nvSpPr>
-          <p:cNvPr id="35" name="Text 32"/>
-          <p:cNvSpPr/>
-          <p:nvPr/>
-        </p:nvSpPr>
-        <p:spPr>
-          <a:xfrm>
-            <a:off x="457200" y="6473952"/>
-            <a:ext cx="7315200" cy="274320"/>
+      <p:sp>
+        <p:nvSpPr>
+          <p:cNvPr id="34" name="Text 32"/>
+          <p:cNvSpPr/>
+          <p:nvPr/>
+        </p:nvSpPr>
+        <p:spPr>
+          <a:xfrm>
+            <a:off x="256032" y="6446520"/>
+            <a:ext cx="365760" cy="274320"/>
           </a:xfrm>
           <a:prstGeom prst="rect">
             <a:avLst/>
@@ -14022,34 +14097,34 @@
           <a:bodyPr wrap="square" lIns="0" tIns="0" rIns="0" bIns="0" rtlCol="0" anchor="ctr"/>
           <a:lstStyle/>
           <a:p>
-            <a:pPr algn="l" indent="0" marL="0">
-              <a:buNone/>
-            </a:pPr>
-            <a:r>
-              <a:rPr lang="en-US" sz="900" dirty="0">
-                <a:solidFill>
-                  <a:srgbClr val="53565A"/>
-                </a:solidFill>
-                <a:latin typeface="Poppins" pitchFamily="34" charset="0"/>
-                <a:ea typeface="Poppins" pitchFamily="34" charset="-122"/>
-                <a:cs typeface="Poppins" pitchFamily="34" charset="-120"/>
-              </a:rPr>
-              <a:t>dsquasar  •  Quasar Backup Guide</a:t>
-            </a:r>
-            <a:endParaRPr lang="en-US" sz="900" dirty="0"/>
-          </a:p>
-        </p:txBody>
-      </p:sp>
-      <p:sp>
-        <p:nvSpPr>
-          <p:cNvPr id="36" name="Text 33"/>
-          <p:cNvSpPr/>
-          <p:nvPr/>
-        </p:nvSpPr>
-        <p:spPr>
-          <a:xfrm>
-            <a:off x="11368735" y="6473952"/>
-            <a:ext cx="365760" cy="274320"/>
+            <a:pPr indent="0" marL="0">
+              <a:buNone/>
+            </a:pPr>
+            <a:r>
+              <a:rPr lang="en-US" sz="950" b="1" dirty="0">
+                <a:solidFill>
+                  <a:srgbClr val="00357A"/>
+                </a:solidFill>
+                <a:latin typeface="Poppins" pitchFamily="34" charset="0"/>
+                <a:ea typeface="Poppins" pitchFamily="34" charset="-122"/>
+                <a:cs typeface="Poppins" pitchFamily="34" charset="-120"/>
+              </a:rPr>
+              <a:t>15</a:t>
+            </a:r>
+            <a:endParaRPr lang="en-US" sz="950" dirty="0"/>
+          </a:p>
+        </p:txBody>
+      </p:sp>
+      <p:sp>
+        <p:nvSpPr>
+          <p:cNvPr id="35" name="Text 33"/>
+          <p:cNvSpPr/>
+          <p:nvPr/>
+        </p:nvSpPr>
+        <p:spPr>
+          <a:xfrm>
+            <a:off x="786384" y="6446520"/>
+            <a:ext cx="5486400" cy="274320"/>
           </a:xfrm>
           <a:prstGeom prst="rect">
             <a:avLst/>
@@ -14061,21 +14136,21 @@
           <a:bodyPr wrap="square" lIns="0" tIns="0" rIns="0" bIns="0" rtlCol="0" anchor="ctr"/>
           <a:lstStyle/>
           <a:p>
-            <a:pPr algn="r" indent="0" marL="0">
-              <a:buNone/>
-            </a:pPr>
-            <a:r>
-              <a:rPr lang="en-US" sz="900" dirty="0">
-                <a:solidFill>
-                  <a:srgbClr val="53565A"/>
-                </a:solidFill>
-                <a:latin typeface="Poppins" pitchFamily="34" charset="0"/>
-                <a:ea typeface="Poppins" pitchFamily="34" charset="-122"/>
-                <a:cs typeface="Poppins" pitchFamily="34" charset="-120"/>
-              </a:rPr>
-              <a:t>15</a:t>
-            </a:r>
-            <a:endParaRPr lang="en-US" sz="900" dirty="0"/>
+            <a:pPr indent="0" marL="0">
+              <a:buNone/>
+            </a:pPr>
+            <a:r>
+              <a:rPr lang="en-US" sz="950" b="1" dirty="0">
+                <a:solidFill>
+                  <a:srgbClr val="00357A"/>
+                </a:solidFill>
+                <a:latin typeface="Poppins" pitchFamily="34" charset="0"/>
+                <a:ea typeface="Poppins" pitchFamily="34" charset="-122"/>
+                <a:cs typeface="Poppins" pitchFamily="34" charset="-120"/>
+              </a:rPr>
+              <a:t>DSQUASAR  •  QUASAR BACKUP GUIDE</a:t>
+            </a:r>
+            <a:endParaRPr lang="en-US" sz="950" dirty="0"/>
           </a:p>
         </p:txBody>
       </p:sp>
@@ -14090,13 +14165,6 @@
 <file path=ppt/slides/slide17.xml><?xml version="1.0" encoding="utf-8"?>
 <p:sld xmlns:a="http://schemas.openxmlformats.org/drawingml/2006/main" xmlns:r="http://schemas.openxmlformats.org/officeDocument/2006/relationships" xmlns:p="http://schemas.openxmlformats.org/presentationml/2006/main">
   <p:cSld name="Slide 17">
-    <p:bg>
-      <p:bgPr>
-        <a:solidFill>
-          <a:srgbClr val="FFFFFF"/>
-        </a:solidFill>
-      </p:bgPr>
-    </p:bg>
     <p:spTree>
       <p:nvGrpSpPr>
         <p:cNvPr id="1" name=""/>
@@ -14848,40 +14916,16 @@
           </a:p>
         </p:txBody>
       </p:sp>
-      <p:pic>
-        <p:nvPicPr>
-          <p:cNvPr id="21" name="Image 0" descr="nsf_ncar_logo_color.png">    </p:cNvPr>
-          <p:cNvPicPr>
-            <a:picLocks noChangeAspect="1"/>
-          </p:cNvPicPr>
-          <p:nvPr/>
-        </p:nvPicPr>
-        <p:blipFill>
-          <a:blip r:embed="rId1"/>
-          <a:stretch>
-            <a:fillRect/>
-          </a:stretch>
-        </p:blipFill>
-        <p:spPr>
-          <a:xfrm>
-            <a:off x="9951415" y="274320"/>
-            <a:ext cx="1874520" cy="512064"/>
-          </a:xfrm>
-          <a:prstGeom prst="rect">
-            <a:avLst/>
-          </a:prstGeom>
-        </p:spPr>
-      </p:pic>
-      <p:sp>
-        <p:nvSpPr>
-          <p:cNvPr id="22" name="Text 19"/>
-          <p:cNvSpPr/>
-          <p:nvPr/>
-        </p:nvSpPr>
-        <p:spPr>
-          <a:xfrm>
-            <a:off x="457200" y="6473952"/>
-            <a:ext cx="7315200" cy="274320"/>
+      <p:sp>
+        <p:nvSpPr>
+          <p:cNvPr id="21" name="Text 19"/>
+          <p:cNvSpPr/>
+          <p:nvPr/>
+        </p:nvSpPr>
+        <p:spPr>
+          <a:xfrm>
+            <a:off x="256032" y="6446520"/>
+            <a:ext cx="365760" cy="274320"/>
           </a:xfrm>
           <a:prstGeom prst="rect">
             <a:avLst/>
@@ -14893,34 +14937,34 @@
           <a:bodyPr wrap="square" lIns="0" tIns="0" rIns="0" bIns="0" rtlCol="0" anchor="ctr"/>
           <a:lstStyle/>
           <a:p>
-            <a:pPr algn="l" indent="0" marL="0">
-              <a:buNone/>
-            </a:pPr>
-            <a:r>
-              <a:rPr lang="en-US" sz="900" dirty="0">
-                <a:solidFill>
-                  <a:srgbClr val="53565A"/>
-                </a:solidFill>
-                <a:latin typeface="Poppins" pitchFamily="34" charset="0"/>
-                <a:ea typeface="Poppins" pitchFamily="34" charset="-122"/>
-                <a:cs typeface="Poppins" pitchFamily="34" charset="-120"/>
-              </a:rPr>
-              <a:t>dsquasar  •  Quasar Backup Guide</a:t>
-            </a:r>
-            <a:endParaRPr lang="en-US" sz="900" dirty="0"/>
-          </a:p>
-        </p:txBody>
-      </p:sp>
-      <p:sp>
-        <p:nvSpPr>
-          <p:cNvPr id="23" name="Text 20"/>
-          <p:cNvSpPr/>
-          <p:nvPr/>
-        </p:nvSpPr>
-        <p:spPr>
-          <a:xfrm>
-            <a:off x="11368735" y="6473952"/>
-            <a:ext cx="365760" cy="274320"/>
+            <a:pPr indent="0" marL="0">
+              <a:buNone/>
+            </a:pPr>
+            <a:r>
+              <a:rPr lang="en-US" sz="950" b="1" dirty="0">
+                <a:solidFill>
+                  <a:srgbClr val="00357A"/>
+                </a:solidFill>
+                <a:latin typeface="Poppins" pitchFamily="34" charset="0"/>
+                <a:ea typeface="Poppins" pitchFamily="34" charset="-122"/>
+                <a:cs typeface="Poppins" pitchFamily="34" charset="-120"/>
+              </a:rPr>
+              <a:t>16</a:t>
+            </a:r>
+            <a:endParaRPr lang="en-US" sz="950" dirty="0"/>
+          </a:p>
+        </p:txBody>
+      </p:sp>
+      <p:sp>
+        <p:nvSpPr>
+          <p:cNvPr id="22" name="Text 20"/>
+          <p:cNvSpPr/>
+          <p:nvPr/>
+        </p:nvSpPr>
+        <p:spPr>
+          <a:xfrm>
+            <a:off x="786384" y="6446520"/>
+            <a:ext cx="5486400" cy="274320"/>
           </a:xfrm>
           <a:prstGeom prst="rect">
             <a:avLst/>
@@ -14932,21 +14976,21 @@
           <a:bodyPr wrap="square" lIns="0" tIns="0" rIns="0" bIns="0" rtlCol="0" anchor="ctr"/>
           <a:lstStyle/>
           <a:p>
-            <a:pPr algn="r" indent="0" marL="0">
-              <a:buNone/>
-            </a:pPr>
-            <a:r>
-              <a:rPr lang="en-US" sz="900" dirty="0">
-                <a:solidFill>
-                  <a:srgbClr val="53565A"/>
-                </a:solidFill>
-                <a:latin typeface="Poppins" pitchFamily="34" charset="0"/>
-                <a:ea typeface="Poppins" pitchFamily="34" charset="-122"/>
-                <a:cs typeface="Poppins" pitchFamily="34" charset="-120"/>
-              </a:rPr>
-              <a:t>16</a:t>
-            </a:r>
-            <a:endParaRPr lang="en-US" sz="900" dirty="0"/>
+            <a:pPr indent="0" marL="0">
+              <a:buNone/>
+            </a:pPr>
+            <a:r>
+              <a:rPr lang="en-US" sz="950" b="1" dirty="0">
+                <a:solidFill>
+                  <a:srgbClr val="00357A"/>
+                </a:solidFill>
+                <a:latin typeface="Poppins" pitchFamily="34" charset="0"/>
+                <a:ea typeface="Poppins" pitchFamily="34" charset="-122"/>
+                <a:cs typeface="Poppins" pitchFamily="34" charset="-120"/>
+              </a:rPr>
+              <a:t>DSQUASAR  •  QUASAR BACKUP GUIDE</a:t>
+            </a:r>
+            <a:endParaRPr lang="en-US" sz="950" dirty="0"/>
           </a:p>
         </p:txBody>
       </p:sp>
@@ -14961,13 +15005,6 @@
 <file path=ppt/slides/slide18.xml><?xml version="1.0" encoding="utf-8"?>
 <p:sld xmlns:a="http://schemas.openxmlformats.org/drawingml/2006/main" xmlns:r="http://schemas.openxmlformats.org/officeDocument/2006/relationships" xmlns:p="http://schemas.openxmlformats.org/presentationml/2006/main">
   <p:cSld name="Slide 18">
-    <p:bg>
-      <p:bgPr>
-        <a:solidFill>
-          <a:srgbClr val="011837"/>
-        </a:solidFill>
-      </p:bgPr>
-    </p:bg>
     <p:spTree>
       <p:nvGrpSpPr>
         <p:cNvPr id="1" name=""/>
@@ -15030,7 +15067,7 @@
         <p:spPr>
           <a:xfrm>
             <a:off x="457200" y="658368"/>
-            <a:ext cx="10058400" cy="640080"/>
+            <a:ext cx="9326880" cy="640080"/>
           </a:xfrm>
           <a:prstGeom prst="rect">
             <a:avLst/>
@@ -15829,40 +15866,16 @@
           </a:p>
         </p:txBody>
       </p:sp>
-      <p:pic>
-        <p:nvPicPr>
-          <p:cNvPr id="25" name="Image 0" descr="nsf_ncar_logo_white.png">    </p:cNvPr>
-          <p:cNvPicPr>
-            <a:picLocks noChangeAspect="1"/>
-          </p:cNvPicPr>
-          <p:nvPr/>
-        </p:nvPicPr>
-        <p:blipFill>
-          <a:blip r:embed="rId1"/>
-          <a:stretch>
-            <a:fillRect/>
-          </a:stretch>
-        </p:blipFill>
-        <p:spPr>
-          <a:xfrm>
-            <a:off x="9951415" y="274320"/>
-            <a:ext cx="1874520" cy="512064"/>
-          </a:xfrm>
-          <a:prstGeom prst="rect">
-            <a:avLst/>
-          </a:prstGeom>
-        </p:spPr>
-      </p:pic>
-      <p:sp>
-        <p:nvSpPr>
-          <p:cNvPr id="26" name="Text 23"/>
-          <p:cNvSpPr/>
-          <p:nvPr/>
-        </p:nvSpPr>
-        <p:spPr>
-          <a:xfrm>
-            <a:off x="457200" y="6473952"/>
-            <a:ext cx="7315200" cy="274320"/>
+      <p:sp>
+        <p:nvSpPr>
+          <p:cNvPr id="25" name="Text 23"/>
+          <p:cNvSpPr/>
+          <p:nvPr/>
+        </p:nvSpPr>
+        <p:spPr>
+          <a:xfrm>
+            <a:off x="256032" y="6446520"/>
+            <a:ext cx="365760" cy="274320"/>
           </a:xfrm>
           <a:prstGeom prst="rect">
             <a:avLst/>
@@ -15874,34 +15887,34 @@
           <a:bodyPr wrap="square" lIns="0" tIns="0" rIns="0" bIns="0" rtlCol="0" anchor="ctr"/>
           <a:lstStyle/>
           <a:p>
-            <a:pPr algn="l" indent="0" marL="0">
-              <a:buNone/>
-            </a:pPr>
-            <a:r>
-              <a:rPr lang="en-US" sz="900" dirty="0">
-                <a:solidFill>
-                  <a:srgbClr val="97999B"/>
-                </a:solidFill>
-                <a:latin typeface="Poppins" pitchFamily="34" charset="0"/>
-                <a:ea typeface="Poppins" pitchFamily="34" charset="-122"/>
-                <a:cs typeface="Poppins" pitchFamily="34" charset="-120"/>
-              </a:rPr>
-              <a:t>dsquasar  •  Quasar Backup Guide</a:t>
-            </a:r>
-            <a:endParaRPr lang="en-US" sz="900" dirty="0"/>
-          </a:p>
-        </p:txBody>
-      </p:sp>
-      <p:sp>
-        <p:nvSpPr>
-          <p:cNvPr id="27" name="Text 24"/>
-          <p:cNvSpPr/>
-          <p:nvPr/>
-        </p:nvSpPr>
-        <p:spPr>
-          <a:xfrm>
-            <a:off x="11368735" y="6473952"/>
-            <a:ext cx="365760" cy="274320"/>
+            <a:pPr indent="0" marL="0">
+              <a:buNone/>
+            </a:pPr>
+            <a:r>
+              <a:rPr lang="en-US" sz="950" b="1" dirty="0">
+                <a:solidFill>
+                  <a:srgbClr val="FFFFFF"/>
+                </a:solidFill>
+                <a:latin typeface="Poppins" pitchFamily="34" charset="0"/>
+                <a:ea typeface="Poppins" pitchFamily="34" charset="-122"/>
+                <a:cs typeface="Poppins" pitchFamily="34" charset="-120"/>
+              </a:rPr>
+              <a:t>17</a:t>
+            </a:r>
+            <a:endParaRPr lang="en-US" sz="950" dirty="0"/>
+          </a:p>
+        </p:txBody>
+      </p:sp>
+      <p:sp>
+        <p:nvSpPr>
+          <p:cNvPr id="26" name="Text 24"/>
+          <p:cNvSpPr/>
+          <p:nvPr/>
+        </p:nvSpPr>
+        <p:spPr>
+          <a:xfrm>
+            <a:off x="786384" y="6446520"/>
+            <a:ext cx="5486400" cy="274320"/>
           </a:xfrm>
           <a:prstGeom prst="rect">
             <a:avLst/>
@@ -15913,21 +15926,21 @@
           <a:bodyPr wrap="square" lIns="0" tIns="0" rIns="0" bIns="0" rtlCol="0" anchor="ctr"/>
           <a:lstStyle/>
           <a:p>
-            <a:pPr algn="r" indent="0" marL="0">
-              <a:buNone/>
-            </a:pPr>
-            <a:r>
-              <a:rPr lang="en-US" sz="900" dirty="0">
-                <a:solidFill>
-                  <a:srgbClr val="97999B"/>
-                </a:solidFill>
-                <a:latin typeface="Poppins" pitchFamily="34" charset="0"/>
-                <a:ea typeface="Poppins" pitchFamily="34" charset="-122"/>
-                <a:cs typeface="Poppins" pitchFamily="34" charset="-120"/>
-              </a:rPr>
-              <a:t>17</a:t>
-            </a:r>
-            <a:endParaRPr lang="en-US" sz="900" dirty="0"/>
+            <a:pPr indent="0" marL="0">
+              <a:buNone/>
+            </a:pPr>
+            <a:r>
+              <a:rPr lang="en-US" sz="950" b="1" dirty="0">
+                <a:solidFill>
+                  <a:srgbClr val="FFFFFF"/>
+                </a:solidFill>
+                <a:latin typeface="Poppins" pitchFamily="34" charset="0"/>
+                <a:ea typeface="Poppins" pitchFamily="34" charset="-122"/>
+                <a:cs typeface="Poppins" pitchFamily="34" charset="-120"/>
+              </a:rPr>
+              <a:t>DSQUASAR  •  QUASAR BACKUP GUIDE</a:t>
+            </a:r>
+            <a:endParaRPr lang="en-US" sz="950" dirty="0"/>
           </a:p>
         </p:txBody>
       </p:sp>
@@ -15942,13 +15955,6 @@
 <file path=ppt/slides/slide19.xml><?xml version="1.0" encoding="utf-8"?>
 <p:sld xmlns:a="http://schemas.openxmlformats.org/drawingml/2006/main" xmlns:r="http://schemas.openxmlformats.org/officeDocument/2006/relationships" xmlns:p="http://schemas.openxmlformats.org/presentationml/2006/main">
   <p:cSld name="Slide 19">
-    <p:bg>
-      <p:bgPr>
-        <a:solidFill>
-          <a:srgbClr val="FFFFFF"/>
-        </a:solidFill>
-      </p:bgPr>
-    </p:bg>
     <p:spTree>
       <p:nvGrpSpPr>
         <p:cNvPr id="1" name=""/>
@@ -17223,40 +17229,16 @@
           </a:p>
         </p:txBody>
       </p:sp>
-      <p:pic>
-        <p:nvPicPr>
-          <p:cNvPr id="20" name="Image 0" descr="nsf_ncar_logo_color.png">    </p:cNvPr>
-          <p:cNvPicPr>
-            <a:picLocks noChangeAspect="1"/>
-          </p:cNvPicPr>
-          <p:nvPr/>
-        </p:nvPicPr>
-        <p:blipFill>
-          <a:blip r:embed="rId1"/>
-          <a:stretch>
-            <a:fillRect/>
-          </a:stretch>
-        </p:blipFill>
-        <p:spPr>
-          <a:xfrm>
-            <a:off x="9951415" y="274320"/>
-            <a:ext cx="1874520" cy="512064"/>
-          </a:xfrm>
-          <a:prstGeom prst="rect">
-            <a:avLst/>
-          </a:prstGeom>
-        </p:spPr>
-      </p:pic>
-      <p:sp>
-        <p:nvSpPr>
-          <p:cNvPr id="21" name="Text 17"/>
-          <p:cNvSpPr/>
-          <p:nvPr/>
-        </p:nvSpPr>
-        <p:spPr>
-          <a:xfrm>
-            <a:off x="457200" y="6473952"/>
-            <a:ext cx="7315200" cy="274320"/>
+      <p:sp>
+        <p:nvSpPr>
+          <p:cNvPr id="20" name="Text 17"/>
+          <p:cNvSpPr/>
+          <p:nvPr/>
+        </p:nvSpPr>
+        <p:spPr>
+          <a:xfrm>
+            <a:off x="256032" y="6446520"/>
+            <a:ext cx="365760" cy="274320"/>
           </a:xfrm>
           <a:prstGeom prst="rect">
             <a:avLst/>
@@ -17268,34 +17250,34 @@
           <a:bodyPr wrap="square" lIns="0" tIns="0" rIns="0" bIns="0" rtlCol="0" anchor="ctr"/>
           <a:lstStyle/>
           <a:p>
-            <a:pPr algn="l" indent="0" marL="0">
-              <a:buNone/>
-            </a:pPr>
-            <a:r>
-              <a:rPr lang="en-US" sz="900" dirty="0">
-                <a:solidFill>
-                  <a:srgbClr val="53565A"/>
-                </a:solidFill>
-                <a:latin typeface="Poppins" pitchFamily="34" charset="0"/>
-                <a:ea typeface="Poppins" pitchFamily="34" charset="-122"/>
-                <a:cs typeface="Poppins" pitchFamily="34" charset="-120"/>
-              </a:rPr>
-              <a:t>dsquasar  •  Quasar Backup Guide</a:t>
-            </a:r>
-            <a:endParaRPr lang="en-US" sz="900" dirty="0"/>
-          </a:p>
-        </p:txBody>
-      </p:sp>
-      <p:sp>
-        <p:nvSpPr>
-          <p:cNvPr id="22" name="Text 18"/>
-          <p:cNvSpPr/>
-          <p:nvPr/>
-        </p:nvSpPr>
-        <p:spPr>
-          <a:xfrm>
-            <a:off x="11368735" y="6473952"/>
-            <a:ext cx="365760" cy="274320"/>
+            <a:pPr indent="0" marL="0">
+              <a:buNone/>
+            </a:pPr>
+            <a:r>
+              <a:rPr lang="en-US" sz="950" b="1" dirty="0">
+                <a:solidFill>
+                  <a:srgbClr val="00357A"/>
+                </a:solidFill>
+                <a:latin typeface="Poppins" pitchFamily="34" charset="0"/>
+                <a:ea typeface="Poppins" pitchFamily="34" charset="-122"/>
+                <a:cs typeface="Poppins" pitchFamily="34" charset="-120"/>
+              </a:rPr>
+              <a:t>18</a:t>
+            </a:r>
+            <a:endParaRPr lang="en-US" sz="950" dirty="0"/>
+          </a:p>
+        </p:txBody>
+      </p:sp>
+      <p:sp>
+        <p:nvSpPr>
+          <p:cNvPr id="21" name="Text 18"/>
+          <p:cNvSpPr/>
+          <p:nvPr/>
+        </p:nvSpPr>
+        <p:spPr>
+          <a:xfrm>
+            <a:off x="786384" y="6446520"/>
+            <a:ext cx="5486400" cy="274320"/>
           </a:xfrm>
           <a:prstGeom prst="rect">
             <a:avLst/>
@@ -17307,21 +17289,21 @@
           <a:bodyPr wrap="square" lIns="0" tIns="0" rIns="0" bIns="0" rtlCol="0" anchor="ctr"/>
           <a:lstStyle/>
           <a:p>
-            <a:pPr algn="r" indent="0" marL="0">
-              <a:buNone/>
-            </a:pPr>
-            <a:r>
-              <a:rPr lang="en-US" sz="900" dirty="0">
-                <a:solidFill>
-                  <a:srgbClr val="53565A"/>
-                </a:solidFill>
-                <a:latin typeface="Poppins" pitchFamily="34" charset="0"/>
-                <a:ea typeface="Poppins" pitchFamily="34" charset="-122"/>
-                <a:cs typeface="Poppins" pitchFamily="34" charset="-120"/>
-              </a:rPr>
-              <a:t>18</a:t>
-            </a:r>
-            <a:endParaRPr lang="en-US" sz="900" dirty="0"/>
+            <a:pPr indent="0" marL="0">
+              <a:buNone/>
+            </a:pPr>
+            <a:r>
+              <a:rPr lang="en-US" sz="950" b="1" dirty="0">
+                <a:solidFill>
+                  <a:srgbClr val="00357A"/>
+                </a:solidFill>
+                <a:latin typeface="Poppins" pitchFamily="34" charset="0"/>
+                <a:ea typeface="Poppins" pitchFamily="34" charset="-122"/>
+                <a:cs typeface="Poppins" pitchFamily="34" charset="-120"/>
+              </a:rPr>
+              <a:t>DSQUASAR  •  QUASAR BACKUP GUIDE</a:t>
+            </a:r>
+            <a:endParaRPr lang="en-US" sz="950" dirty="0"/>
           </a:p>
         </p:txBody>
       </p:sp>
@@ -17336,13 +17318,6 @@
 <file path=ppt/slides/slide2.xml><?xml version="1.0" encoding="utf-8"?>
 <p:sld xmlns:a="http://schemas.openxmlformats.org/drawingml/2006/main" xmlns:r="http://schemas.openxmlformats.org/officeDocument/2006/relationships" xmlns:p="http://schemas.openxmlformats.org/presentationml/2006/main">
   <p:cSld name="Slide 2">
-    <p:bg>
-      <p:bgPr>
-        <a:solidFill>
-          <a:srgbClr val="FFFFFF"/>
-        </a:solidFill>
-      </p:bgPr>
-    </p:bg>
     <p:spTree>
       <p:nvGrpSpPr>
         <p:cNvPr id="1" name=""/>
@@ -19027,40 +19002,16 @@
           </a:p>
         </p:txBody>
       </p:sp>
-      <p:pic>
-        <p:nvPicPr>
-          <p:cNvPr id="40" name="Image 0" descr="nsf_ncar_logo_color.png">    </p:cNvPr>
-          <p:cNvPicPr>
-            <a:picLocks noChangeAspect="1"/>
-          </p:cNvPicPr>
-          <p:nvPr/>
-        </p:nvPicPr>
-        <p:blipFill>
-          <a:blip r:embed="rId1"/>
-          <a:stretch>
-            <a:fillRect/>
-          </a:stretch>
-        </p:blipFill>
-        <p:spPr>
-          <a:xfrm>
-            <a:off x="9951415" y="274320"/>
-            <a:ext cx="1874520" cy="512064"/>
-          </a:xfrm>
-          <a:prstGeom prst="rect">
-            <a:avLst/>
-          </a:prstGeom>
-        </p:spPr>
-      </p:pic>
-      <p:sp>
-        <p:nvSpPr>
-          <p:cNvPr id="41" name="Text 38"/>
-          <p:cNvSpPr/>
-          <p:nvPr/>
-        </p:nvSpPr>
-        <p:spPr>
-          <a:xfrm>
-            <a:off x="457200" y="6473952"/>
-            <a:ext cx="7315200" cy="274320"/>
+      <p:sp>
+        <p:nvSpPr>
+          <p:cNvPr id="40" name="Text 38"/>
+          <p:cNvSpPr/>
+          <p:nvPr/>
+        </p:nvSpPr>
+        <p:spPr>
+          <a:xfrm>
+            <a:off x="256032" y="6446520"/>
+            <a:ext cx="365760" cy="274320"/>
           </a:xfrm>
           <a:prstGeom prst="rect">
             <a:avLst/>
@@ -19072,34 +19023,34 @@
           <a:bodyPr wrap="square" lIns="0" tIns="0" rIns="0" bIns="0" rtlCol="0" anchor="ctr"/>
           <a:lstStyle/>
           <a:p>
-            <a:pPr algn="l" indent="0" marL="0">
-              <a:buNone/>
-            </a:pPr>
-            <a:r>
-              <a:rPr lang="en-US" sz="900" dirty="0">
-                <a:solidFill>
-                  <a:srgbClr val="53565A"/>
-                </a:solidFill>
-                <a:latin typeface="Poppins" pitchFamily="34" charset="0"/>
-                <a:ea typeface="Poppins" pitchFamily="34" charset="-122"/>
-                <a:cs typeface="Poppins" pitchFamily="34" charset="-120"/>
-              </a:rPr>
-              <a:t>dsquasar  •  Quasar Backup Guide</a:t>
-            </a:r>
-            <a:endParaRPr lang="en-US" sz="900" dirty="0"/>
-          </a:p>
-        </p:txBody>
-      </p:sp>
-      <p:sp>
-        <p:nvSpPr>
-          <p:cNvPr id="42" name="Text 39"/>
-          <p:cNvSpPr/>
-          <p:nvPr/>
-        </p:nvSpPr>
-        <p:spPr>
-          <a:xfrm>
-            <a:off x="11368735" y="6473952"/>
-            <a:ext cx="365760" cy="274320"/>
+            <a:pPr indent="0" marL="0">
+              <a:buNone/>
+            </a:pPr>
+            <a:r>
+              <a:rPr lang="en-US" sz="950" b="1" dirty="0">
+                <a:solidFill>
+                  <a:srgbClr val="00357A"/>
+                </a:solidFill>
+                <a:latin typeface="Poppins" pitchFamily="34" charset="0"/>
+                <a:ea typeface="Poppins" pitchFamily="34" charset="-122"/>
+                <a:cs typeface="Poppins" pitchFamily="34" charset="-120"/>
+              </a:rPr>
+              <a:t>1</a:t>
+            </a:r>
+            <a:endParaRPr lang="en-US" sz="950" dirty="0"/>
+          </a:p>
+        </p:txBody>
+      </p:sp>
+      <p:sp>
+        <p:nvSpPr>
+          <p:cNvPr id="41" name="Text 39"/>
+          <p:cNvSpPr/>
+          <p:nvPr/>
+        </p:nvSpPr>
+        <p:spPr>
+          <a:xfrm>
+            <a:off x="786384" y="6446520"/>
+            <a:ext cx="5486400" cy="274320"/>
           </a:xfrm>
           <a:prstGeom prst="rect">
             <a:avLst/>
@@ -19111,21 +19062,21 @@
           <a:bodyPr wrap="square" lIns="0" tIns="0" rIns="0" bIns="0" rtlCol="0" anchor="ctr"/>
           <a:lstStyle/>
           <a:p>
-            <a:pPr algn="r" indent="0" marL="0">
-              <a:buNone/>
-            </a:pPr>
-            <a:r>
-              <a:rPr lang="en-US" sz="900" dirty="0">
-                <a:solidFill>
-                  <a:srgbClr val="53565A"/>
-                </a:solidFill>
-                <a:latin typeface="Poppins" pitchFamily="34" charset="0"/>
-                <a:ea typeface="Poppins" pitchFamily="34" charset="-122"/>
-                <a:cs typeface="Poppins" pitchFamily="34" charset="-120"/>
-              </a:rPr>
-              <a:t>1</a:t>
-            </a:r>
-            <a:endParaRPr lang="en-US" sz="900" dirty="0"/>
+            <a:pPr indent="0" marL="0">
+              <a:buNone/>
+            </a:pPr>
+            <a:r>
+              <a:rPr lang="en-US" sz="950" b="1" dirty="0">
+                <a:solidFill>
+                  <a:srgbClr val="00357A"/>
+                </a:solidFill>
+                <a:latin typeface="Poppins" pitchFamily="34" charset="0"/>
+                <a:ea typeface="Poppins" pitchFamily="34" charset="-122"/>
+                <a:cs typeface="Poppins" pitchFamily="34" charset="-120"/>
+              </a:rPr>
+              <a:t>DSQUASAR  •  QUASAR BACKUP GUIDE</a:t>
+            </a:r>
+            <a:endParaRPr lang="en-US" sz="950" dirty="0"/>
           </a:p>
         </p:txBody>
       </p:sp>
@@ -19140,13 +19091,6 @@
 <file path=ppt/slides/slide20.xml><?xml version="1.0" encoding="utf-8"?>
 <p:sld xmlns:a="http://schemas.openxmlformats.org/drawingml/2006/main" xmlns:r="http://schemas.openxmlformats.org/officeDocument/2006/relationships" xmlns:p="http://schemas.openxmlformats.org/presentationml/2006/main">
   <p:cSld name="Slide 20">
-    <p:bg>
-      <p:bgPr>
-        <a:solidFill>
-          <a:srgbClr val="FFFFFF"/>
-        </a:solidFill>
-      </p:bgPr>
-    </p:bg>
     <p:spTree>
       <p:nvGrpSpPr>
         <p:cNvPr id="1" name=""/>
@@ -20323,40 +20267,16 @@
           </a:p>
         </p:txBody>
       </p:sp>
-      <p:pic>
-        <p:nvPicPr>
-          <p:cNvPr id="24" name="Image 0" descr="nsf_ncar_logo_color.png">    </p:cNvPr>
-          <p:cNvPicPr>
-            <a:picLocks noChangeAspect="1"/>
-          </p:cNvPicPr>
-          <p:nvPr/>
-        </p:nvPicPr>
-        <p:blipFill>
-          <a:blip r:embed="rId1"/>
-          <a:stretch>
-            <a:fillRect/>
-          </a:stretch>
-        </p:blipFill>
-        <p:spPr>
-          <a:xfrm>
-            <a:off x="9951415" y="274320"/>
-            <a:ext cx="1874520" cy="512064"/>
-          </a:xfrm>
-          <a:prstGeom prst="rect">
-            <a:avLst/>
-          </a:prstGeom>
-        </p:spPr>
-      </p:pic>
-      <p:sp>
-        <p:nvSpPr>
-          <p:cNvPr id="25" name="Text 21"/>
-          <p:cNvSpPr/>
-          <p:nvPr/>
-        </p:nvSpPr>
-        <p:spPr>
-          <a:xfrm>
-            <a:off x="457200" y="6473952"/>
-            <a:ext cx="7315200" cy="274320"/>
+      <p:sp>
+        <p:nvSpPr>
+          <p:cNvPr id="24" name="Text 21"/>
+          <p:cNvSpPr/>
+          <p:nvPr/>
+        </p:nvSpPr>
+        <p:spPr>
+          <a:xfrm>
+            <a:off x="256032" y="6446520"/>
+            <a:ext cx="365760" cy="274320"/>
           </a:xfrm>
           <a:prstGeom prst="rect">
             <a:avLst/>
@@ -20368,34 +20288,34 @@
           <a:bodyPr wrap="square" lIns="0" tIns="0" rIns="0" bIns="0" rtlCol="0" anchor="ctr"/>
           <a:lstStyle/>
           <a:p>
-            <a:pPr algn="l" indent="0" marL="0">
-              <a:buNone/>
-            </a:pPr>
-            <a:r>
-              <a:rPr lang="en-US" sz="900" dirty="0">
-                <a:solidFill>
-                  <a:srgbClr val="53565A"/>
-                </a:solidFill>
-                <a:latin typeface="Poppins" pitchFamily="34" charset="0"/>
-                <a:ea typeface="Poppins" pitchFamily="34" charset="-122"/>
-                <a:cs typeface="Poppins" pitchFamily="34" charset="-120"/>
-              </a:rPr>
-              <a:t>dsquasar  •  Quasar Backup Guide</a:t>
-            </a:r>
-            <a:endParaRPr lang="en-US" sz="900" dirty="0"/>
-          </a:p>
-        </p:txBody>
-      </p:sp>
-      <p:sp>
-        <p:nvSpPr>
-          <p:cNvPr id="26" name="Text 22"/>
-          <p:cNvSpPr/>
-          <p:nvPr/>
-        </p:nvSpPr>
-        <p:spPr>
-          <a:xfrm>
-            <a:off x="11368735" y="6473952"/>
-            <a:ext cx="365760" cy="274320"/>
+            <a:pPr indent="0" marL="0">
+              <a:buNone/>
+            </a:pPr>
+            <a:r>
+              <a:rPr lang="en-US" sz="950" b="1" dirty="0">
+                <a:solidFill>
+                  <a:srgbClr val="00357A"/>
+                </a:solidFill>
+                <a:latin typeface="Poppins" pitchFamily="34" charset="0"/>
+                <a:ea typeface="Poppins" pitchFamily="34" charset="-122"/>
+                <a:cs typeface="Poppins" pitchFamily="34" charset="-120"/>
+              </a:rPr>
+              <a:t>19</a:t>
+            </a:r>
+            <a:endParaRPr lang="en-US" sz="950" dirty="0"/>
+          </a:p>
+        </p:txBody>
+      </p:sp>
+      <p:sp>
+        <p:nvSpPr>
+          <p:cNvPr id="25" name="Text 22"/>
+          <p:cNvSpPr/>
+          <p:nvPr/>
+        </p:nvSpPr>
+        <p:spPr>
+          <a:xfrm>
+            <a:off x="786384" y="6446520"/>
+            <a:ext cx="5486400" cy="274320"/>
           </a:xfrm>
           <a:prstGeom prst="rect">
             <a:avLst/>
@@ -20407,21 +20327,21 @@
           <a:bodyPr wrap="square" lIns="0" tIns="0" rIns="0" bIns="0" rtlCol="0" anchor="ctr"/>
           <a:lstStyle/>
           <a:p>
-            <a:pPr algn="r" indent="0" marL="0">
-              <a:buNone/>
-            </a:pPr>
-            <a:r>
-              <a:rPr lang="en-US" sz="900" dirty="0">
-                <a:solidFill>
-                  <a:srgbClr val="53565A"/>
-                </a:solidFill>
-                <a:latin typeface="Poppins" pitchFamily="34" charset="0"/>
-                <a:ea typeface="Poppins" pitchFamily="34" charset="-122"/>
-                <a:cs typeface="Poppins" pitchFamily="34" charset="-120"/>
-              </a:rPr>
-              <a:t>19</a:t>
-            </a:r>
-            <a:endParaRPr lang="en-US" sz="900" dirty="0"/>
+            <a:pPr indent="0" marL="0">
+              <a:buNone/>
+            </a:pPr>
+            <a:r>
+              <a:rPr lang="en-US" sz="950" b="1" dirty="0">
+                <a:solidFill>
+                  <a:srgbClr val="00357A"/>
+                </a:solidFill>
+                <a:latin typeface="Poppins" pitchFamily="34" charset="0"/>
+                <a:ea typeface="Poppins" pitchFamily="34" charset="-122"/>
+                <a:cs typeface="Poppins" pitchFamily="34" charset="-120"/>
+              </a:rPr>
+              <a:t>DSQUASAR  •  QUASAR BACKUP GUIDE</a:t>
+            </a:r>
+            <a:endParaRPr lang="en-US" sz="950" dirty="0"/>
           </a:p>
         </p:txBody>
       </p:sp>
@@ -20436,13 +20356,6 @@
 <file path=ppt/slides/slide21.xml><?xml version="1.0" encoding="utf-8"?>
 <p:sld xmlns:a="http://schemas.openxmlformats.org/drawingml/2006/main" xmlns:r="http://schemas.openxmlformats.org/officeDocument/2006/relationships" xmlns:p="http://schemas.openxmlformats.org/presentationml/2006/main">
   <p:cSld name="Slide 21">
-    <p:bg>
-      <p:bgPr>
-        <a:solidFill>
-          <a:srgbClr val="FFFFFF"/>
-        </a:solidFill>
-      </p:bgPr>
-    </p:bg>
     <p:spTree>
       <p:nvGrpSpPr>
         <p:cNvPr id="1" name=""/>
@@ -21125,7 +21038,7 @@
         <p:spPr>
           <a:xfrm>
             <a:off x="658368" y="5742432"/>
-            <a:ext cx="10881360" cy="548640"/>
+            <a:ext cx="9784080" cy="548640"/>
           </a:xfrm>
           <a:prstGeom prst="rect">
             <a:avLst/>
@@ -21169,40 +21082,16 @@
           </a:p>
         </p:txBody>
       </p:sp>
-      <p:pic>
-        <p:nvPicPr>
-          <p:cNvPr id="18" name="Image 0" descr="nsf_ncar_logo_color.png">    </p:cNvPr>
-          <p:cNvPicPr>
-            <a:picLocks noChangeAspect="1"/>
-          </p:cNvPicPr>
-          <p:nvPr/>
-        </p:nvPicPr>
-        <p:blipFill>
-          <a:blip r:embed="rId1"/>
-          <a:stretch>
-            <a:fillRect/>
-          </a:stretch>
-        </p:blipFill>
-        <p:spPr>
-          <a:xfrm>
-            <a:off x="9951415" y="274320"/>
-            <a:ext cx="1874520" cy="512064"/>
-          </a:xfrm>
-          <a:prstGeom prst="rect">
-            <a:avLst/>
-          </a:prstGeom>
-        </p:spPr>
-      </p:pic>
-      <p:sp>
-        <p:nvSpPr>
-          <p:cNvPr id="19" name="Text 16"/>
-          <p:cNvSpPr/>
-          <p:nvPr/>
-        </p:nvSpPr>
-        <p:spPr>
-          <a:xfrm>
-            <a:off x="457200" y="6473952"/>
-            <a:ext cx="7315200" cy="274320"/>
+      <p:sp>
+        <p:nvSpPr>
+          <p:cNvPr id="18" name="Text 16"/>
+          <p:cNvSpPr/>
+          <p:nvPr/>
+        </p:nvSpPr>
+        <p:spPr>
+          <a:xfrm>
+            <a:off x="256032" y="6446520"/>
+            <a:ext cx="365760" cy="274320"/>
           </a:xfrm>
           <a:prstGeom prst="rect">
             <a:avLst/>
@@ -21214,34 +21103,34 @@
           <a:bodyPr wrap="square" lIns="0" tIns="0" rIns="0" bIns="0" rtlCol="0" anchor="ctr"/>
           <a:lstStyle/>
           <a:p>
-            <a:pPr algn="l" indent="0" marL="0">
-              <a:buNone/>
-            </a:pPr>
-            <a:r>
-              <a:rPr lang="en-US" sz="900" dirty="0">
-                <a:solidFill>
-                  <a:srgbClr val="53565A"/>
-                </a:solidFill>
-                <a:latin typeface="Poppins" pitchFamily="34" charset="0"/>
-                <a:ea typeface="Poppins" pitchFamily="34" charset="-122"/>
-                <a:cs typeface="Poppins" pitchFamily="34" charset="-120"/>
-              </a:rPr>
-              <a:t>dsquasar  •  Quasar Backup Guide</a:t>
-            </a:r>
-            <a:endParaRPr lang="en-US" sz="900" dirty="0"/>
-          </a:p>
-        </p:txBody>
-      </p:sp>
-      <p:sp>
-        <p:nvSpPr>
-          <p:cNvPr id="20" name="Text 17"/>
-          <p:cNvSpPr/>
-          <p:nvPr/>
-        </p:nvSpPr>
-        <p:spPr>
-          <a:xfrm>
-            <a:off x="11368735" y="6473952"/>
-            <a:ext cx="365760" cy="274320"/>
+            <a:pPr indent="0" marL="0">
+              <a:buNone/>
+            </a:pPr>
+            <a:r>
+              <a:rPr lang="en-US" sz="950" b="1" dirty="0">
+                <a:solidFill>
+                  <a:srgbClr val="00357A"/>
+                </a:solidFill>
+                <a:latin typeface="Poppins" pitchFamily="34" charset="0"/>
+                <a:ea typeface="Poppins" pitchFamily="34" charset="-122"/>
+                <a:cs typeface="Poppins" pitchFamily="34" charset="-120"/>
+              </a:rPr>
+              <a:t>20</a:t>
+            </a:r>
+            <a:endParaRPr lang="en-US" sz="950" dirty="0"/>
+          </a:p>
+        </p:txBody>
+      </p:sp>
+      <p:sp>
+        <p:nvSpPr>
+          <p:cNvPr id="19" name="Text 17"/>
+          <p:cNvSpPr/>
+          <p:nvPr/>
+        </p:nvSpPr>
+        <p:spPr>
+          <a:xfrm>
+            <a:off x="786384" y="6446520"/>
+            <a:ext cx="5486400" cy="274320"/>
           </a:xfrm>
           <a:prstGeom prst="rect">
             <a:avLst/>
@@ -21253,21 +21142,21 @@
           <a:bodyPr wrap="square" lIns="0" tIns="0" rIns="0" bIns="0" rtlCol="0" anchor="ctr"/>
           <a:lstStyle/>
           <a:p>
-            <a:pPr algn="r" indent="0" marL="0">
-              <a:buNone/>
-            </a:pPr>
-            <a:r>
-              <a:rPr lang="en-US" sz="900" dirty="0">
-                <a:solidFill>
-                  <a:srgbClr val="53565A"/>
-                </a:solidFill>
-                <a:latin typeface="Poppins" pitchFamily="34" charset="0"/>
-                <a:ea typeface="Poppins" pitchFamily="34" charset="-122"/>
-                <a:cs typeface="Poppins" pitchFamily="34" charset="-120"/>
-              </a:rPr>
-              <a:t>20</a:t>
-            </a:r>
-            <a:endParaRPr lang="en-US" sz="900" dirty="0"/>
+            <a:pPr indent="0" marL="0">
+              <a:buNone/>
+            </a:pPr>
+            <a:r>
+              <a:rPr lang="en-US" sz="950" b="1" dirty="0">
+                <a:solidFill>
+                  <a:srgbClr val="00357A"/>
+                </a:solidFill>
+                <a:latin typeface="Poppins" pitchFamily="34" charset="0"/>
+                <a:ea typeface="Poppins" pitchFamily="34" charset="-122"/>
+                <a:cs typeface="Poppins" pitchFamily="34" charset="-120"/>
+              </a:rPr>
+              <a:t>DSQUASAR  •  QUASAR BACKUP GUIDE</a:t>
+            </a:r>
+            <a:endParaRPr lang="en-US" sz="950" dirty="0"/>
           </a:p>
         </p:txBody>
       </p:sp>
@@ -21282,13 +21171,6 @@
 <file path=ppt/slides/slide22.xml><?xml version="1.0" encoding="utf-8"?>
 <p:sld xmlns:a="http://schemas.openxmlformats.org/drawingml/2006/main" xmlns:r="http://schemas.openxmlformats.org/officeDocument/2006/relationships" xmlns:p="http://schemas.openxmlformats.org/presentationml/2006/main">
   <p:cSld name="Slide 22">
-    <p:bg>
-      <p:bgPr>
-        <a:solidFill>
-          <a:srgbClr val="FFFFFF"/>
-        </a:solidFill>
-      </p:bgPr>
-    </p:bg>
     <p:spTree>
       <p:nvGrpSpPr>
         <p:cNvPr id="1" name=""/>
@@ -24110,40 +23992,16 @@
           </a:p>
         </p:txBody>
       </p:sp>
-      <p:pic>
-        <p:nvPicPr>
-          <p:cNvPr id="10" name="Image 0" descr="nsf_ncar_logo_color.png">    </p:cNvPr>
-          <p:cNvPicPr>
-            <a:picLocks noChangeAspect="1"/>
-          </p:cNvPicPr>
-          <p:nvPr/>
-        </p:nvPicPr>
-        <p:blipFill>
-          <a:blip r:embed="rId1"/>
-          <a:stretch>
-            <a:fillRect/>
-          </a:stretch>
-        </p:blipFill>
-        <p:spPr>
-          <a:xfrm>
-            <a:off x="9951415" y="274320"/>
-            <a:ext cx="1874520" cy="512064"/>
-          </a:xfrm>
-          <a:prstGeom prst="rect">
-            <a:avLst/>
-          </a:prstGeom>
-        </p:spPr>
-      </p:pic>
-      <p:sp>
-        <p:nvSpPr>
-          <p:cNvPr id="11" name="Text 6"/>
-          <p:cNvSpPr/>
-          <p:nvPr/>
-        </p:nvSpPr>
-        <p:spPr>
-          <a:xfrm>
-            <a:off x="457200" y="6473952"/>
-            <a:ext cx="7315200" cy="274320"/>
+      <p:sp>
+        <p:nvSpPr>
+          <p:cNvPr id="10" name="Text 6"/>
+          <p:cNvSpPr/>
+          <p:nvPr/>
+        </p:nvSpPr>
+        <p:spPr>
+          <a:xfrm>
+            <a:off x="256032" y="6446520"/>
+            <a:ext cx="365760" cy="274320"/>
           </a:xfrm>
           <a:prstGeom prst="rect">
             <a:avLst/>
@@ -24155,34 +24013,34 @@
           <a:bodyPr wrap="square" lIns="0" tIns="0" rIns="0" bIns="0" rtlCol="0" anchor="ctr"/>
           <a:lstStyle/>
           <a:p>
-            <a:pPr algn="l" indent="0" marL="0">
-              <a:buNone/>
-            </a:pPr>
-            <a:r>
-              <a:rPr lang="en-US" sz="900" dirty="0">
-                <a:solidFill>
-                  <a:srgbClr val="53565A"/>
-                </a:solidFill>
-                <a:latin typeface="Poppins" pitchFamily="34" charset="0"/>
-                <a:ea typeface="Poppins" pitchFamily="34" charset="-122"/>
-                <a:cs typeface="Poppins" pitchFamily="34" charset="-120"/>
-              </a:rPr>
-              <a:t>dsquasar  •  Quasar Backup Guide</a:t>
-            </a:r>
-            <a:endParaRPr lang="en-US" sz="900" dirty="0"/>
-          </a:p>
-        </p:txBody>
-      </p:sp>
-      <p:sp>
-        <p:nvSpPr>
-          <p:cNvPr id="12" name="Text 7"/>
-          <p:cNvSpPr/>
-          <p:nvPr/>
-        </p:nvSpPr>
-        <p:spPr>
-          <a:xfrm>
-            <a:off x="11368735" y="6473952"/>
-            <a:ext cx="365760" cy="274320"/>
+            <a:pPr indent="0" marL="0">
+              <a:buNone/>
+            </a:pPr>
+            <a:r>
+              <a:rPr lang="en-US" sz="950" b="1" dirty="0">
+                <a:solidFill>
+                  <a:srgbClr val="00357A"/>
+                </a:solidFill>
+                <a:latin typeface="Poppins" pitchFamily="34" charset="0"/>
+                <a:ea typeface="Poppins" pitchFamily="34" charset="-122"/>
+                <a:cs typeface="Poppins" pitchFamily="34" charset="-120"/>
+              </a:rPr>
+              <a:t>21</a:t>
+            </a:r>
+            <a:endParaRPr lang="en-US" sz="950" dirty="0"/>
+          </a:p>
+        </p:txBody>
+      </p:sp>
+      <p:sp>
+        <p:nvSpPr>
+          <p:cNvPr id="11" name="Text 7"/>
+          <p:cNvSpPr/>
+          <p:nvPr/>
+        </p:nvSpPr>
+        <p:spPr>
+          <a:xfrm>
+            <a:off x="786384" y="6446520"/>
+            <a:ext cx="5486400" cy="274320"/>
           </a:xfrm>
           <a:prstGeom prst="rect">
             <a:avLst/>
@@ -24194,21 +24052,21 @@
           <a:bodyPr wrap="square" lIns="0" tIns="0" rIns="0" bIns="0" rtlCol="0" anchor="ctr"/>
           <a:lstStyle/>
           <a:p>
-            <a:pPr algn="r" indent="0" marL="0">
-              <a:buNone/>
-            </a:pPr>
-            <a:r>
-              <a:rPr lang="en-US" sz="900" dirty="0">
-                <a:solidFill>
-                  <a:srgbClr val="53565A"/>
-                </a:solidFill>
-                <a:latin typeface="Poppins" pitchFamily="34" charset="0"/>
-                <a:ea typeface="Poppins" pitchFamily="34" charset="-122"/>
-                <a:cs typeface="Poppins" pitchFamily="34" charset="-120"/>
-              </a:rPr>
-              <a:t>21</a:t>
-            </a:r>
-            <a:endParaRPr lang="en-US" sz="900" dirty="0"/>
+            <a:pPr indent="0" marL="0">
+              <a:buNone/>
+            </a:pPr>
+            <a:r>
+              <a:rPr lang="en-US" sz="950" b="1" dirty="0">
+                <a:solidFill>
+                  <a:srgbClr val="00357A"/>
+                </a:solidFill>
+                <a:latin typeface="Poppins" pitchFamily="34" charset="0"/>
+                <a:ea typeface="Poppins" pitchFamily="34" charset="-122"/>
+                <a:cs typeface="Poppins" pitchFamily="34" charset="-120"/>
+              </a:rPr>
+              <a:t>DSQUASAR  •  QUASAR BACKUP GUIDE</a:t>
+            </a:r>
+            <a:endParaRPr lang="en-US" sz="950" dirty="0"/>
           </a:p>
         </p:txBody>
       </p:sp>
@@ -24223,13 +24081,6 @@
 <file path=ppt/slides/slide23.xml><?xml version="1.0" encoding="utf-8"?>
 <p:sld xmlns:a="http://schemas.openxmlformats.org/drawingml/2006/main" xmlns:r="http://schemas.openxmlformats.org/officeDocument/2006/relationships" xmlns:p="http://schemas.openxmlformats.org/presentationml/2006/main">
   <p:cSld name="Slide 23">
-    <p:bg>
-      <p:bgPr>
-        <a:solidFill>
-          <a:srgbClr val="FFFFFF"/>
-        </a:solidFill>
-      </p:bgPr>
-    </p:bg>
     <p:spTree>
       <p:nvGrpSpPr>
         <p:cNvPr id="1" name=""/>
@@ -26169,40 +26020,16 @@
           </a:p>
         </p:txBody>
       </p:sp>
-      <p:pic>
-        <p:nvPicPr>
-          <p:cNvPr id="12" name="Image 0" descr="nsf_ncar_logo_color.png">    </p:cNvPr>
-          <p:cNvPicPr>
-            <a:picLocks noChangeAspect="1"/>
-          </p:cNvPicPr>
-          <p:nvPr/>
-        </p:nvPicPr>
-        <p:blipFill>
-          <a:blip r:embed="rId2"/>
-          <a:stretch>
-            <a:fillRect/>
-          </a:stretch>
-        </p:blipFill>
-        <p:spPr>
-          <a:xfrm>
-            <a:off x="9951415" y="274320"/>
-            <a:ext cx="1874520" cy="512064"/>
-          </a:xfrm>
-          <a:prstGeom prst="rect">
-            <a:avLst/>
-          </a:prstGeom>
-        </p:spPr>
-      </p:pic>
-      <p:sp>
-        <p:nvSpPr>
-          <p:cNvPr id="13" name="Text 8"/>
-          <p:cNvSpPr/>
-          <p:nvPr/>
-        </p:nvSpPr>
-        <p:spPr>
-          <a:xfrm>
-            <a:off x="457200" y="6473952"/>
-            <a:ext cx="7315200" cy="274320"/>
+      <p:sp>
+        <p:nvSpPr>
+          <p:cNvPr id="12" name="Text 8"/>
+          <p:cNvSpPr/>
+          <p:nvPr/>
+        </p:nvSpPr>
+        <p:spPr>
+          <a:xfrm>
+            <a:off x="256032" y="6446520"/>
+            <a:ext cx="365760" cy="274320"/>
           </a:xfrm>
           <a:prstGeom prst="rect">
             <a:avLst/>
@@ -26214,34 +26041,34 @@
           <a:bodyPr wrap="square" lIns="0" tIns="0" rIns="0" bIns="0" rtlCol="0" anchor="ctr"/>
           <a:lstStyle/>
           <a:p>
-            <a:pPr algn="l" indent="0" marL="0">
-              <a:buNone/>
-            </a:pPr>
-            <a:r>
-              <a:rPr lang="en-US" sz="900" dirty="0">
-                <a:solidFill>
-                  <a:srgbClr val="53565A"/>
-                </a:solidFill>
-                <a:latin typeface="Poppins" pitchFamily="34" charset="0"/>
-                <a:ea typeface="Poppins" pitchFamily="34" charset="-122"/>
-                <a:cs typeface="Poppins" pitchFamily="34" charset="-120"/>
-              </a:rPr>
-              <a:t>dsquasar  •  Quasar Backup Guide</a:t>
-            </a:r>
-            <a:endParaRPr lang="en-US" sz="900" dirty="0"/>
-          </a:p>
-        </p:txBody>
-      </p:sp>
-      <p:sp>
-        <p:nvSpPr>
-          <p:cNvPr id="14" name="Text 9"/>
-          <p:cNvSpPr/>
-          <p:nvPr/>
-        </p:nvSpPr>
-        <p:spPr>
-          <a:xfrm>
-            <a:off x="11368735" y="6473952"/>
-            <a:ext cx="365760" cy="274320"/>
+            <a:pPr indent="0" marL="0">
+              <a:buNone/>
+            </a:pPr>
+            <a:r>
+              <a:rPr lang="en-US" sz="950" b="1" dirty="0">
+                <a:solidFill>
+                  <a:srgbClr val="00357A"/>
+                </a:solidFill>
+                <a:latin typeface="Poppins" pitchFamily="34" charset="0"/>
+                <a:ea typeface="Poppins" pitchFamily="34" charset="-122"/>
+                <a:cs typeface="Poppins" pitchFamily="34" charset="-120"/>
+              </a:rPr>
+              <a:t>22</a:t>
+            </a:r>
+            <a:endParaRPr lang="en-US" sz="950" dirty="0"/>
+          </a:p>
+        </p:txBody>
+      </p:sp>
+      <p:sp>
+        <p:nvSpPr>
+          <p:cNvPr id="13" name="Text 9"/>
+          <p:cNvSpPr/>
+          <p:nvPr/>
+        </p:nvSpPr>
+        <p:spPr>
+          <a:xfrm>
+            <a:off x="786384" y="6446520"/>
+            <a:ext cx="5486400" cy="274320"/>
           </a:xfrm>
           <a:prstGeom prst="rect">
             <a:avLst/>
@@ -26253,21 +26080,21 @@
           <a:bodyPr wrap="square" lIns="0" tIns="0" rIns="0" bIns="0" rtlCol="0" anchor="ctr"/>
           <a:lstStyle/>
           <a:p>
-            <a:pPr algn="r" indent="0" marL="0">
-              <a:buNone/>
-            </a:pPr>
-            <a:r>
-              <a:rPr lang="en-US" sz="900" dirty="0">
-                <a:solidFill>
-                  <a:srgbClr val="53565A"/>
-                </a:solidFill>
-                <a:latin typeface="Poppins" pitchFamily="34" charset="0"/>
-                <a:ea typeface="Poppins" pitchFamily="34" charset="-122"/>
-                <a:cs typeface="Poppins" pitchFamily="34" charset="-120"/>
-              </a:rPr>
-              <a:t>22</a:t>
-            </a:r>
-            <a:endParaRPr lang="en-US" sz="900" dirty="0"/>
+            <a:pPr indent="0" marL="0">
+              <a:buNone/>
+            </a:pPr>
+            <a:r>
+              <a:rPr lang="en-US" sz="950" b="1" dirty="0">
+                <a:solidFill>
+                  <a:srgbClr val="00357A"/>
+                </a:solidFill>
+                <a:latin typeface="Poppins" pitchFamily="34" charset="0"/>
+                <a:ea typeface="Poppins" pitchFamily="34" charset="-122"/>
+                <a:cs typeface="Poppins" pitchFamily="34" charset="-120"/>
+              </a:rPr>
+              <a:t>DSQUASAR  •  QUASAR BACKUP GUIDE</a:t>
+            </a:r>
+            <a:endParaRPr lang="en-US" sz="950" dirty="0"/>
           </a:p>
         </p:txBody>
       </p:sp>
@@ -26282,13 +26109,6 @@
 <file path=ppt/slides/slide24.xml><?xml version="1.0" encoding="utf-8"?>
 <p:sld xmlns:a="http://schemas.openxmlformats.org/drawingml/2006/main" xmlns:r="http://schemas.openxmlformats.org/officeDocument/2006/relationships" xmlns:p="http://schemas.openxmlformats.org/presentationml/2006/main">
   <p:cSld name="Slide 24">
-    <p:bg>
-      <p:bgPr>
-        <a:solidFill>
-          <a:srgbClr val="FFFFFF"/>
-        </a:solidFill>
-      </p:bgPr>
-    </p:bg>
     <p:spTree>
       <p:nvGrpSpPr>
         <p:cNvPr id="1" name=""/>
@@ -27140,7 +26960,7 @@
         <p:spPr>
           <a:xfrm>
             <a:off x="457200" y="5852160"/>
-            <a:ext cx="11292840" cy="502920"/>
+            <a:ext cx="9966960" cy="502920"/>
           </a:xfrm>
           <a:prstGeom prst="roundRect">
             <a:avLst>
@@ -27162,7 +26982,7 @@
         <p:spPr>
           <a:xfrm>
             <a:off x="658368" y="5852160"/>
-            <a:ext cx="10881360" cy="502920"/>
+            <a:ext cx="9564624" cy="502920"/>
           </a:xfrm>
           <a:prstGeom prst="rect">
             <a:avLst/>
@@ -27178,7 +26998,7 @@
               <a:buNone/>
             </a:pPr>
             <a:r>
-              <a:rPr lang="en-US" sz="1150" b="1" dirty="0">
+              <a:rPr lang="en-US" sz="1100" b="1" dirty="0">
                 <a:solidFill>
                   <a:srgbClr val="42C0FF"/>
                 </a:solidFill>
@@ -27192,7 +27012,7 @@
               <a:buNone/>
             </a:pPr>
             <a:r>
-              <a:rPr lang="en-US" sz="1150" dirty="0">
+              <a:rPr lang="en-US" sz="1100" dirty="0">
                 <a:solidFill>
                   <a:srgbClr val="C3D7EE"/>
                 </a:solidFill>
@@ -27202,44 +27022,20 @@
               </a:rPr>
               <a:t>Every backwards step — T→N, A→N — is deliberate, and just means the work is queued to be done again.</a:t>
             </a:r>
-            <a:endParaRPr lang="en-US" sz="1150" dirty="0"/>
-          </a:p>
-        </p:txBody>
-      </p:sp>
-      <p:pic>
-        <p:nvPicPr>
-          <p:cNvPr id="30" name="Image 0" descr="nsf_ncar_logo_color.png">    </p:cNvPr>
-          <p:cNvPicPr>
-            <a:picLocks noChangeAspect="1"/>
-          </p:cNvPicPr>
-          <p:nvPr/>
-        </p:nvPicPr>
-        <p:blipFill>
-          <a:blip r:embed="rId1"/>
-          <a:stretch>
-            <a:fillRect/>
-          </a:stretch>
-        </p:blipFill>
-        <p:spPr>
-          <a:xfrm>
-            <a:off x="9951415" y="274320"/>
-            <a:ext cx="1874520" cy="512064"/>
-          </a:xfrm>
-          <a:prstGeom prst="rect">
-            <a:avLst/>
-          </a:prstGeom>
-        </p:spPr>
-      </p:pic>
-      <p:sp>
-        <p:nvSpPr>
-          <p:cNvPr id="31" name="Text 28"/>
-          <p:cNvSpPr/>
-          <p:nvPr/>
-        </p:nvSpPr>
-        <p:spPr>
-          <a:xfrm>
-            <a:off x="457200" y="6473952"/>
-            <a:ext cx="7315200" cy="274320"/>
+            <a:endParaRPr lang="en-US" sz="1100" dirty="0"/>
+          </a:p>
+        </p:txBody>
+      </p:sp>
+      <p:sp>
+        <p:nvSpPr>
+          <p:cNvPr id="30" name="Text 28"/>
+          <p:cNvSpPr/>
+          <p:nvPr/>
+        </p:nvSpPr>
+        <p:spPr>
+          <a:xfrm>
+            <a:off x="256032" y="6446520"/>
+            <a:ext cx="365760" cy="274320"/>
           </a:xfrm>
           <a:prstGeom prst="rect">
             <a:avLst/>
@@ -27251,34 +27047,34 @@
           <a:bodyPr wrap="square" lIns="0" tIns="0" rIns="0" bIns="0" rtlCol="0" anchor="ctr"/>
           <a:lstStyle/>
           <a:p>
-            <a:pPr algn="l" indent="0" marL="0">
-              <a:buNone/>
-            </a:pPr>
-            <a:r>
-              <a:rPr lang="en-US" sz="900" dirty="0">
-                <a:solidFill>
-                  <a:srgbClr val="53565A"/>
-                </a:solidFill>
-                <a:latin typeface="Poppins" pitchFamily="34" charset="0"/>
-                <a:ea typeface="Poppins" pitchFamily="34" charset="-122"/>
-                <a:cs typeface="Poppins" pitchFamily="34" charset="-120"/>
-              </a:rPr>
-              <a:t>dsquasar  •  Quasar Backup Guide</a:t>
-            </a:r>
-            <a:endParaRPr lang="en-US" sz="900" dirty="0"/>
-          </a:p>
-        </p:txBody>
-      </p:sp>
-      <p:sp>
-        <p:nvSpPr>
-          <p:cNvPr id="32" name="Text 29"/>
-          <p:cNvSpPr/>
-          <p:nvPr/>
-        </p:nvSpPr>
-        <p:spPr>
-          <a:xfrm>
-            <a:off x="11368735" y="6473952"/>
-            <a:ext cx="365760" cy="274320"/>
+            <a:pPr indent="0" marL="0">
+              <a:buNone/>
+            </a:pPr>
+            <a:r>
+              <a:rPr lang="en-US" sz="950" b="1" dirty="0">
+                <a:solidFill>
+                  <a:srgbClr val="00357A"/>
+                </a:solidFill>
+                <a:latin typeface="Poppins" pitchFamily="34" charset="0"/>
+                <a:ea typeface="Poppins" pitchFamily="34" charset="-122"/>
+                <a:cs typeface="Poppins" pitchFamily="34" charset="-120"/>
+              </a:rPr>
+              <a:t>23</a:t>
+            </a:r>
+            <a:endParaRPr lang="en-US" sz="950" dirty="0"/>
+          </a:p>
+        </p:txBody>
+      </p:sp>
+      <p:sp>
+        <p:nvSpPr>
+          <p:cNvPr id="31" name="Text 29"/>
+          <p:cNvSpPr/>
+          <p:nvPr/>
+        </p:nvSpPr>
+        <p:spPr>
+          <a:xfrm>
+            <a:off x="786384" y="6446520"/>
+            <a:ext cx="5486400" cy="274320"/>
           </a:xfrm>
           <a:prstGeom prst="rect">
             <a:avLst/>
@@ -27290,21 +27086,21 @@
           <a:bodyPr wrap="square" lIns="0" tIns="0" rIns="0" bIns="0" rtlCol="0" anchor="ctr"/>
           <a:lstStyle/>
           <a:p>
-            <a:pPr algn="r" indent="0" marL="0">
-              <a:buNone/>
-            </a:pPr>
-            <a:r>
-              <a:rPr lang="en-US" sz="900" dirty="0">
-                <a:solidFill>
-                  <a:srgbClr val="53565A"/>
-                </a:solidFill>
-                <a:latin typeface="Poppins" pitchFamily="34" charset="0"/>
-                <a:ea typeface="Poppins" pitchFamily="34" charset="-122"/>
-                <a:cs typeface="Poppins" pitchFamily="34" charset="-120"/>
-              </a:rPr>
-              <a:t>23</a:t>
-            </a:r>
-            <a:endParaRPr lang="en-US" sz="900" dirty="0"/>
+            <a:pPr indent="0" marL="0">
+              <a:buNone/>
+            </a:pPr>
+            <a:r>
+              <a:rPr lang="en-US" sz="950" b="1" dirty="0">
+                <a:solidFill>
+                  <a:srgbClr val="00357A"/>
+                </a:solidFill>
+                <a:latin typeface="Poppins" pitchFamily="34" charset="0"/>
+                <a:ea typeface="Poppins" pitchFamily="34" charset="-122"/>
+                <a:cs typeface="Poppins" pitchFamily="34" charset="-120"/>
+              </a:rPr>
+              <a:t>DSQUASAR  •  QUASAR BACKUP GUIDE</a:t>
+            </a:r>
+            <a:endParaRPr lang="en-US" sz="950" dirty="0"/>
           </a:p>
         </p:txBody>
       </p:sp>
@@ -27319,13 +27115,6 @@
 <file path=ppt/slides/slide25.xml><?xml version="1.0" encoding="utf-8"?>
 <p:sld xmlns:a="http://schemas.openxmlformats.org/drawingml/2006/main" xmlns:r="http://schemas.openxmlformats.org/officeDocument/2006/relationships" xmlns:p="http://schemas.openxmlformats.org/presentationml/2006/main">
   <p:cSld name="Slide 25">
-    <p:bg>
-      <p:bgPr>
-        <a:solidFill>
-          <a:srgbClr val="FFFFFF"/>
-        </a:solidFill>
-      </p:bgPr>
-    </p:bg>
     <p:spTree>
       <p:nvGrpSpPr>
         <p:cNvPr id="1" name=""/>
@@ -28387,40 +28176,16 @@
           </a:p>
         </p:txBody>
       </p:sp>
-      <p:pic>
-        <p:nvPicPr>
-          <p:cNvPr id="19" name="Image 0" descr="nsf_ncar_logo_color.png">    </p:cNvPr>
-          <p:cNvPicPr>
-            <a:picLocks noChangeAspect="1"/>
-          </p:cNvPicPr>
-          <p:nvPr/>
-        </p:nvPicPr>
-        <p:blipFill>
-          <a:blip r:embed="rId1"/>
-          <a:stretch>
-            <a:fillRect/>
-          </a:stretch>
-        </p:blipFill>
-        <p:spPr>
-          <a:xfrm>
-            <a:off x="9951415" y="274320"/>
-            <a:ext cx="1874520" cy="512064"/>
-          </a:xfrm>
-          <a:prstGeom prst="rect">
-            <a:avLst/>
-          </a:prstGeom>
-        </p:spPr>
-      </p:pic>
-      <p:sp>
-        <p:nvSpPr>
-          <p:cNvPr id="20" name="Text 16"/>
-          <p:cNvSpPr/>
-          <p:nvPr/>
-        </p:nvSpPr>
-        <p:spPr>
-          <a:xfrm>
-            <a:off x="457200" y="6473952"/>
-            <a:ext cx="7315200" cy="274320"/>
+      <p:sp>
+        <p:nvSpPr>
+          <p:cNvPr id="19" name="Text 16"/>
+          <p:cNvSpPr/>
+          <p:nvPr/>
+        </p:nvSpPr>
+        <p:spPr>
+          <a:xfrm>
+            <a:off x="256032" y="6446520"/>
+            <a:ext cx="365760" cy="274320"/>
           </a:xfrm>
           <a:prstGeom prst="rect">
             <a:avLst/>
@@ -28432,34 +28197,34 @@
           <a:bodyPr wrap="square" lIns="0" tIns="0" rIns="0" bIns="0" rtlCol="0" anchor="ctr"/>
           <a:lstStyle/>
           <a:p>
-            <a:pPr algn="l" indent="0" marL="0">
-              <a:buNone/>
-            </a:pPr>
-            <a:r>
-              <a:rPr lang="en-US" sz="900" dirty="0">
-                <a:solidFill>
-                  <a:srgbClr val="53565A"/>
-                </a:solidFill>
-                <a:latin typeface="Poppins" pitchFamily="34" charset="0"/>
-                <a:ea typeface="Poppins" pitchFamily="34" charset="-122"/>
-                <a:cs typeface="Poppins" pitchFamily="34" charset="-120"/>
-              </a:rPr>
-              <a:t>dsquasar  •  Quasar Backup Guide</a:t>
-            </a:r>
-            <a:endParaRPr lang="en-US" sz="900" dirty="0"/>
-          </a:p>
-        </p:txBody>
-      </p:sp>
-      <p:sp>
-        <p:nvSpPr>
-          <p:cNvPr id="21" name="Text 17"/>
-          <p:cNvSpPr/>
-          <p:nvPr/>
-        </p:nvSpPr>
-        <p:spPr>
-          <a:xfrm>
-            <a:off x="11368735" y="6473952"/>
-            <a:ext cx="365760" cy="274320"/>
+            <a:pPr indent="0" marL="0">
+              <a:buNone/>
+            </a:pPr>
+            <a:r>
+              <a:rPr lang="en-US" sz="950" b="1" dirty="0">
+                <a:solidFill>
+                  <a:srgbClr val="00357A"/>
+                </a:solidFill>
+                <a:latin typeface="Poppins" pitchFamily="34" charset="0"/>
+                <a:ea typeface="Poppins" pitchFamily="34" charset="-122"/>
+                <a:cs typeface="Poppins" pitchFamily="34" charset="-120"/>
+              </a:rPr>
+              <a:t>24</a:t>
+            </a:r>
+            <a:endParaRPr lang="en-US" sz="950" dirty="0"/>
+          </a:p>
+        </p:txBody>
+      </p:sp>
+      <p:sp>
+        <p:nvSpPr>
+          <p:cNvPr id="20" name="Text 17"/>
+          <p:cNvSpPr/>
+          <p:nvPr/>
+        </p:nvSpPr>
+        <p:spPr>
+          <a:xfrm>
+            <a:off x="786384" y="6446520"/>
+            <a:ext cx="5486400" cy="274320"/>
           </a:xfrm>
           <a:prstGeom prst="rect">
             <a:avLst/>
@@ -28471,21 +28236,21 @@
           <a:bodyPr wrap="square" lIns="0" tIns="0" rIns="0" bIns="0" rtlCol="0" anchor="ctr"/>
           <a:lstStyle/>
           <a:p>
-            <a:pPr algn="r" indent="0" marL="0">
-              <a:buNone/>
-            </a:pPr>
-            <a:r>
-              <a:rPr lang="en-US" sz="900" dirty="0">
-                <a:solidFill>
-                  <a:srgbClr val="53565A"/>
-                </a:solidFill>
-                <a:latin typeface="Poppins" pitchFamily="34" charset="0"/>
-                <a:ea typeface="Poppins" pitchFamily="34" charset="-122"/>
-                <a:cs typeface="Poppins" pitchFamily="34" charset="-120"/>
-              </a:rPr>
-              <a:t>24</a:t>
-            </a:r>
-            <a:endParaRPr lang="en-US" sz="900" dirty="0"/>
+            <a:pPr indent="0" marL="0">
+              <a:buNone/>
+            </a:pPr>
+            <a:r>
+              <a:rPr lang="en-US" sz="950" b="1" dirty="0">
+                <a:solidFill>
+                  <a:srgbClr val="00357A"/>
+                </a:solidFill>
+                <a:latin typeface="Poppins" pitchFamily="34" charset="0"/>
+                <a:ea typeface="Poppins" pitchFamily="34" charset="-122"/>
+                <a:cs typeface="Poppins" pitchFamily="34" charset="-120"/>
+              </a:rPr>
+              <a:t>DSQUASAR  •  QUASAR BACKUP GUIDE</a:t>
+            </a:r>
+            <a:endParaRPr lang="en-US" sz="950" dirty="0"/>
           </a:p>
         </p:txBody>
       </p:sp>
@@ -28503,1221 +28268,7 @@
     <p:bg>
       <p:bgPr>
         <a:solidFill>
-          <a:srgbClr val="FFFFFF"/>
-        </a:solidFill>
-      </p:bgPr>
-    </p:bg>
-    <p:spTree>
-      <p:nvGrpSpPr>
-        <p:cNvPr id="1" name=""/>
-        <p:cNvGrpSpPr/>
-        <p:nvPr/>
-      </p:nvGrpSpPr>
-      <p:grpSpPr>
-        <a:xfrm>
-          <a:off x="0" y="0"/>
-          <a:ext cx="0" cy="0"/>
-          <a:chOff x="0" y="0"/>
-          <a:chExt cx="0" cy="0"/>
-        </a:xfrm>
-      </p:grpSpPr>
-      <p:sp>
-        <p:nvSpPr>
-          <p:cNvPr id="2" name="Text 0"/>
-          <p:cNvSpPr/>
-          <p:nvPr/>
-        </p:nvSpPr>
-        <p:spPr>
-          <a:xfrm>
-            <a:off x="457200" y="384048"/>
-            <a:ext cx="8229600" cy="274320"/>
-          </a:xfrm>
-          <a:prstGeom prst="rect">
-            <a:avLst/>
-          </a:prstGeom>
-          <a:noFill/>
-          <a:ln/>
-        </p:spPr>
-        <p:txBody>
-          <a:bodyPr wrap="square" lIns="0" tIns="0" rIns="0" bIns="0" rtlCol="0" anchor="ctr"/>
-          <a:lstStyle/>
-          <a:p>
-            <a:pPr indent="0" marL="0">
-              <a:buNone/>
-            </a:pPr>
-            <a:r>
-              <a:rPr lang="en-US" sz="1200" b="1" spc="200" kern="0" dirty="0">
-                <a:solidFill>
-                  <a:srgbClr val="0092DB"/>
-                </a:solidFill>
-                <a:latin typeface="Poppins" pitchFamily="34" charset="0"/>
-                <a:ea typeface="Poppins" pitchFamily="34" charset="-122"/>
-                <a:cs typeface="Poppins" pitchFamily="34" charset="-120"/>
-              </a:rPr>
-              <a:t>WRAP UP</a:t>
-            </a:r>
-            <a:endParaRPr lang="en-US" sz="1200" dirty="0"/>
-          </a:p>
-        </p:txBody>
-      </p:sp>
-      <p:sp>
-        <p:nvSpPr>
-          <p:cNvPr id="3" name="Text 1"/>
-          <p:cNvSpPr/>
-          <p:nvPr/>
-        </p:nvSpPr>
-        <p:spPr>
-          <a:xfrm>
-            <a:off x="457200" y="658368"/>
-            <a:ext cx="9326880" cy="640080"/>
-          </a:xfrm>
-          <a:prstGeom prst="rect">
-            <a:avLst/>
-          </a:prstGeom>
-          <a:noFill/>
-          <a:ln/>
-        </p:spPr>
-        <p:txBody>
-          <a:bodyPr wrap="square" lIns="0" tIns="0" rIns="0" bIns="0" rtlCol="0" anchor="ctr"/>
-          <a:lstStyle/>
-          <a:p>
-            <a:pPr indent="0" marL="0">
-              <a:buNone/>
-            </a:pPr>
-            <a:r>
-              <a:rPr lang="en-US" sz="3200" b="1" dirty="0">
-                <a:solidFill>
-                  <a:srgbClr val="00357A"/>
-                </a:solidFill>
-                <a:latin typeface="Poppins" pitchFamily="34" charset="0"/>
-                <a:ea typeface="Poppins" pitchFamily="34" charset="-122"/>
-                <a:cs typeface="Poppins" pitchFamily="34" charset="-120"/>
-              </a:rPr>
-              <a:t>Six Things Worth Remembering</a:t>
-            </a:r>
-            <a:endParaRPr lang="en-US" sz="3200" dirty="0"/>
-          </a:p>
-        </p:txBody>
-      </p:sp>
-      <p:sp>
-        <p:nvSpPr>
-          <p:cNvPr id="4" name="Shape 2"/>
-          <p:cNvSpPr/>
-          <p:nvPr/>
-        </p:nvSpPr>
-        <p:spPr>
-          <a:xfrm>
-            <a:off x="457200" y="1463040"/>
-            <a:ext cx="5532120" cy="1371600"/>
-          </a:xfrm>
-          <a:prstGeom prst="roundRect">
-            <a:avLst>
-              <a:gd name="adj" fmla="val 6667"/>
-            </a:avLst>
-          </a:prstGeom>
-          <a:solidFill>
-            <a:srgbClr val="FFFFFF"/>
-          </a:solidFill>
-          <a:ln w="12700">
-            <a:solidFill>
-              <a:srgbClr val="A9D6F2"/>
-            </a:solidFill>
-            <a:prstDash val="solid"/>
-          </a:ln>
-        </p:spPr>
-      </p:sp>
-      <p:sp>
-        <p:nvSpPr>
-          <p:cNvPr id="5" name="Shape 3"/>
-          <p:cNvSpPr/>
-          <p:nvPr/>
-        </p:nvSpPr>
-        <p:spPr>
-          <a:xfrm>
-            <a:off x="658368" y="1682496"/>
-            <a:ext cx="420624" cy="420624"/>
-          </a:xfrm>
-          <a:prstGeom prst="ellipse">
-            <a:avLst/>
-          </a:prstGeom>
-          <a:solidFill>
-            <a:srgbClr val="0057C2"/>
-          </a:solidFill>
-          <a:ln/>
-        </p:spPr>
-      </p:sp>
-      <p:sp>
-        <p:nvSpPr>
-          <p:cNvPr id="6" name="Text 4"/>
-          <p:cNvSpPr/>
-          <p:nvPr/>
-        </p:nvSpPr>
-        <p:spPr>
-          <a:xfrm>
-            <a:off x="658368" y="1682496"/>
-            <a:ext cx="420624" cy="420624"/>
-          </a:xfrm>
-          <a:prstGeom prst="rect">
-            <a:avLst/>
-          </a:prstGeom>
-          <a:noFill/>
-          <a:ln/>
-        </p:spPr>
-        <p:txBody>
-          <a:bodyPr wrap="square" lIns="0" tIns="0" rIns="0" bIns="0" rtlCol="0" anchor="ctr"/>
-          <a:lstStyle/>
-          <a:p>
-            <a:pPr algn="ctr" indent="0" marL="0">
-              <a:buNone/>
-            </a:pPr>
-            <a:r>
-              <a:rPr lang="en-US" sz="1400" b="1" dirty="0">
-                <a:solidFill>
-                  <a:srgbClr val="FFFFFF"/>
-                </a:solidFill>
-                <a:latin typeface="Poppins" pitchFamily="34" charset="0"/>
-                <a:ea typeface="Poppins" pitchFamily="34" charset="-122"/>
-                <a:cs typeface="Poppins" pitchFamily="34" charset="-120"/>
-              </a:rPr>
-              <a:t>1</a:t>
-            </a:r>
-            <a:endParaRPr lang="en-US" sz="1400" dirty="0"/>
-          </a:p>
-        </p:txBody>
-      </p:sp>
-      <p:sp>
-        <p:nvSpPr>
-          <p:cNvPr id="7" name="Text 5"/>
-          <p:cNvSpPr/>
-          <p:nvPr/>
-        </p:nvSpPr>
-        <p:spPr>
-          <a:xfrm>
-            <a:off x="1207008" y="1627632"/>
-            <a:ext cx="4572000" cy="384048"/>
-          </a:xfrm>
-          <a:prstGeom prst="rect">
-            <a:avLst/>
-          </a:prstGeom>
-          <a:noFill/>
-          <a:ln/>
-        </p:spPr>
-        <p:txBody>
-          <a:bodyPr wrap="square" lIns="0" tIns="0" rIns="0" bIns="0" rtlCol="0" anchor="ctr"/>
-          <a:lstStyle/>
-          <a:p>
-            <a:pPr indent="0" marL="0">
-              <a:buNone/>
-            </a:pPr>
-            <a:r>
-              <a:rPr lang="en-US" sz="1350" b="1" dirty="0">
-                <a:solidFill>
-                  <a:srgbClr val="0057C2"/>
-                </a:solidFill>
-                <a:latin typeface="Poppins" pitchFamily="34" charset="0"/>
-                <a:ea typeface="Poppins" pitchFamily="34" charset="-122"/>
-                <a:cs typeface="Poppins" pitchFamily="34" charset="-120"/>
-              </a:rPr>
-              <a:t>dataset.backflag enrolls</a:t>
-            </a:r>
-            <a:endParaRPr lang="en-US" sz="1350" dirty="0"/>
-          </a:p>
-        </p:txBody>
-      </p:sp>
-      <p:sp>
-        <p:nvSpPr>
-          <p:cNvPr id="8" name="Text 6"/>
-          <p:cNvSpPr/>
-          <p:nvPr/>
-        </p:nvSpPr>
-        <p:spPr>
-          <a:xfrm>
-            <a:off x="1207008" y="2029968"/>
-            <a:ext cx="4572000" cy="640080"/>
-          </a:xfrm>
-          <a:prstGeom prst="rect">
-            <a:avLst/>
-          </a:prstGeom>
-          <a:noFill/>
-          <a:ln/>
-        </p:spPr>
-        <p:txBody>
-          <a:bodyPr wrap="square" lIns="0" tIns="0" rIns="0" bIns="0" rtlCol="0" anchor="t"/>
-          <a:lstStyle/>
-          <a:p>
-            <a:pPr indent="0" marL="0">
-              <a:lnSpc>
-                <a:spcPct val="105000"/>
-              </a:lnSpc>
-              <a:buNone/>
-            </a:pPr>
-            <a:r>
-              <a:rPr lang="en-US" sz="1100" dirty="0">
-                <a:solidFill>
-                  <a:srgbClr val="53565A"/>
-                </a:solidFill>
-                <a:latin typeface="Poppins" pitchFamily="34" charset="0"/>
-                <a:ea typeface="Poppins" pitchFamily="34" charset="-122"/>
-                <a:cs typeface="Poppins" pitchFamily="34" charset="-120"/>
-              </a:rPr>
-              <a:t>Setting that one field puts a dataset under backup; dsgroup.backflag refines it. -t narrows a run, it does not override a flag.</a:t>
-            </a:r>
-            <a:endParaRPr lang="en-US" sz="1100" dirty="0"/>
-          </a:p>
-        </p:txBody>
-      </p:sp>
-      <p:sp>
-        <p:nvSpPr>
-          <p:cNvPr id="9" name="Shape 7"/>
-          <p:cNvSpPr/>
-          <p:nvPr/>
-        </p:nvSpPr>
-        <p:spPr>
-          <a:xfrm>
-            <a:off x="6263640" y="1463040"/>
-            <a:ext cx="5532120" cy="1371600"/>
-          </a:xfrm>
-          <a:prstGeom prst="roundRect">
-            <a:avLst>
-              <a:gd name="adj" fmla="val 6667"/>
-            </a:avLst>
-          </a:prstGeom>
-          <a:solidFill>
-            <a:srgbClr val="FFFFFF"/>
-          </a:solidFill>
-          <a:ln w="12700">
-            <a:solidFill>
-              <a:srgbClr val="A9D6F2"/>
-            </a:solidFill>
-            <a:prstDash val="solid"/>
-          </a:ln>
-        </p:spPr>
-      </p:sp>
-      <p:sp>
-        <p:nvSpPr>
-          <p:cNvPr id="10" name="Shape 8"/>
-          <p:cNvSpPr/>
-          <p:nvPr/>
-        </p:nvSpPr>
-        <p:spPr>
-          <a:xfrm>
-            <a:off x="6464808" y="1682496"/>
-            <a:ext cx="420624" cy="420624"/>
-          </a:xfrm>
-          <a:prstGeom prst="ellipse">
-            <a:avLst/>
-          </a:prstGeom>
-          <a:solidFill>
-            <a:srgbClr val="0092DB"/>
-          </a:solidFill>
-          <a:ln/>
-        </p:spPr>
-      </p:sp>
-      <p:sp>
-        <p:nvSpPr>
-          <p:cNvPr id="11" name="Text 9"/>
-          <p:cNvSpPr/>
-          <p:nvPr/>
-        </p:nvSpPr>
-        <p:spPr>
-          <a:xfrm>
-            <a:off x="6464808" y="1682496"/>
-            <a:ext cx="420624" cy="420624"/>
-          </a:xfrm>
-          <a:prstGeom prst="rect">
-            <a:avLst/>
-          </a:prstGeom>
-          <a:noFill/>
-          <a:ln/>
-        </p:spPr>
-        <p:txBody>
-          <a:bodyPr wrap="square" lIns="0" tIns="0" rIns="0" bIns="0" rtlCol="0" anchor="ctr"/>
-          <a:lstStyle/>
-          <a:p>
-            <a:pPr algn="ctr" indent="0" marL="0">
-              <a:buNone/>
-            </a:pPr>
-            <a:r>
-              <a:rPr lang="en-US" sz="1400" b="1" dirty="0">
-                <a:solidFill>
-                  <a:srgbClr val="FFFFFF"/>
-                </a:solidFill>
-                <a:latin typeface="Poppins" pitchFamily="34" charset="0"/>
-                <a:ea typeface="Poppins" pitchFamily="34" charset="-122"/>
-                <a:cs typeface="Poppins" pitchFamily="34" charset="-120"/>
-              </a:rPr>
-              <a:t>2</a:t>
-            </a:r>
-            <a:endParaRPr lang="en-US" sz="1400" dirty="0"/>
-          </a:p>
-        </p:txBody>
-      </p:sp>
-      <p:sp>
-        <p:nvSpPr>
-          <p:cNvPr id="12" name="Text 10"/>
-          <p:cNvSpPr/>
-          <p:nvPr/>
-        </p:nvSpPr>
-        <p:spPr>
-          <a:xfrm>
-            <a:off x="7013448" y="1627632"/>
-            <a:ext cx="4572000" cy="384048"/>
-          </a:xfrm>
-          <a:prstGeom prst="rect">
-            <a:avLst/>
-          </a:prstGeom>
-          <a:noFill/>
-          <a:ln/>
-        </p:spPr>
-        <p:txBody>
-          <a:bodyPr wrap="square" lIns="0" tIns="0" rIns="0" bIns="0" rtlCol="0" anchor="ctr"/>
-          <a:lstStyle/>
-          <a:p>
-            <a:pPr indent="0" marL="0">
-              <a:buNone/>
-            </a:pPr>
-            <a:r>
-              <a:rPr lang="en-US" sz="1350" b="1" dirty="0">
-                <a:solidFill>
-                  <a:srgbClr val="0092DB"/>
-                </a:solidFill>
-                <a:latin typeface="Poppins" pitchFamily="34" charset="0"/>
-                <a:ea typeface="Poppins" pitchFamily="34" charset="-122"/>
-                <a:cs typeface="Poppins" pitchFamily="34" charset="-120"/>
-              </a:rPr>
-              <a:t>-A 3 is the working default</a:t>
-            </a:r>
-            <a:endParaRPr lang="en-US" sz="1350" dirty="0"/>
-          </a:p>
-        </p:txBody>
-      </p:sp>
-      <p:sp>
-        <p:nvSpPr>
-          <p:cNvPr id="13" name="Text 11"/>
-          <p:cNvSpPr/>
-          <p:nvPr/>
-        </p:nvSpPr>
-        <p:spPr>
-          <a:xfrm>
-            <a:off x="7013448" y="2029968"/>
-            <a:ext cx="4572000" cy="640080"/>
-          </a:xfrm>
-          <a:prstGeom prst="rect">
-            <a:avLst/>
-          </a:prstGeom>
-          <a:noFill/>
-          <a:ln/>
-        </p:spPr>
-        <p:txBody>
-          <a:bodyPr wrap="square" lIns="0" tIns="0" rIns="0" bIns="0" rtlCol="0" anchor="t"/>
-          <a:lstStyle/>
-          <a:p>
-            <a:pPr indent="0" marL="0">
-              <a:lnSpc>
-                <a:spcPct val="105000"/>
-              </a:lnSpc>
-              <a:buNone/>
-            </a:pPr>
-            <a:r>
-              <a:rPr lang="en-US" sz="1100" dirty="0">
-                <a:solidFill>
-                  <a:srgbClr val="53565A"/>
-                </a:solidFill>
-                <a:latin typeface="Poppins" pitchFamily="34" charset="0"/>
-                <a:ea typeface="Poppins" pitchFamily="34" charset="-122"/>
-                <a:cs typeface="Poppins" pitchFamily="34" charset="-120"/>
-              </a:rPr>
-              <a:t>Create the input lists and build the tars in one pass. -A 4 ships them. -A 7 does both.</a:t>
-            </a:r>
-            <a:endParaRPr lang="en-US" sz="1100" dirty="0"/>
-          </a:p>
-        </p:txBody>
-      </p:sp>
-      <p:sp>
-        <p:nvSpPr>
-          <p:cNvPr id="14" name="Shape 12"/>
-          <p:cNvSpPr/>
-          <p:nvPr/>
-        </p:nvSpPr>
-        <p:spPr>
-          <a:xfrm>
-            <a:off x="457200" y="2971800"/>
-            <a:ext cx="5532120" cy="1371600"/>
-          </a:xfrm>
-          <a:prstGeom prst="roundRect">
-            <a:avLst>
-              <a:gd name="adj" fmla="val 6667"/>
-            </a:avLst>
-          </a:prstGeom>
-          <a:solidFill>
-            <a:srgbClr val="FFFFFF"/>
-          </a:solidFill>
-          <a:ln w="12700">
-            <a:solidFill>
-              <a:srgbClr val="A9D6F2"/>
-            </a:solidFill>
-            <a:prstDash val="solid"/>
-          </a:ln>
-        </p:spPr>
-      </p:sp>
-      <p:sp>
-        <p:nvSpPr>
-          <p:cNvPr id="15" name="Shape 13"/>
-          <p:cNvSpPr/>
-          <p:nvPr/>
-        </p:nvSpPr>
-        <p:spPr>
-          <a:xfrm>
-            <a:off x="658368" y="3191256"/>
-            <a:ext cx="420624" cy="420624"/>
-          </a:xfrm>
-          <a:prstGeom prst="ellipse">
-            <a:avLst/>
-          </a:prstGeom>
-          <a:solidFill>
-            <a:srgbClr val="0097A7"/>
-          </a:solidFill>
-          <a:ln/>
-        </p:spPr>
-      </p:sp>
-      <p:sp>
-        <p:nvSpPr>
-          <p:cNvPr id="16" name="Text 14"/>
-          <p:cNvSpPr/>
-          <p:nvPr/>
-        </p:nvSpPr>
-        <p:spPr>
-          <a:xfrm>
-            <a:off x="658368" y="3191256"/>
-            <a:ext cx="420624" cy="420624"/>
-          </a:xfrm>
-          <a:prstGeom prst="rect">
-            <a:avLst/>
-          </a:prstGeom>
-          <a:noFill/>
-          <a:ln/>
-        </p:spPr>
-        <p:txBody>
-          <a:bodyPr wrap="square" lIns="0" tIns="0" rIns="0" bIns="0" rtlCol="0" anchor="ctr"/>
-          <a:lstStyle/>
-          <a:p>
-            <a:pPr algn="ctr" indent="0" marL="0">
-              <a:buNone/>
-            </a:pPr>
-            <a:r>
-              <a:rPr lang="en-US" sz="1400" b="1" dirty="0">
-                <a:solidFill>
-                  <a:srgbClr val="FFFFFF"/>
-                </a:solidFill>
-                <a:latin typeface="Poppins" pitchFamily="34" charset="0"/>
-                <a:ea typeface="Poppins" pitchFamily="34" charset="-122"/>
-                <a:cs typeface="Poppins" pitchFamily="34" charset="-120"/>
-              </a:rPr>
-              <a:t>3</a:t>
-            </a:r>
-            <a:endParaRPr lang="en-US" sz="1400" dirty="0"/>
-          </a:p>
-        </p:txBody>
-      </p:sp>
-      <p:sp>
-        <p:nvSpPr>
-          <p:cNvPr id="17" name="Text 15"/>
-          <p:cNvSpPr/>
-          <p:nvPr/>
-        </p:nvSpPr>
-        <p:spPr>
-          <a:xfrm>
-            <a:off x="1207008" y="3136392"/>
-            <a:ext cx="4572000" cy="384048"/>
-          </a:xfrm>
-          <a:prstGeom prst="rect">
-            <a:avLst/>
-          </a:prstGeom>
-          <a:noFill/>
-          <a:ln/>
-        </p:spPr>
-        <p:txBody>
-          <a:bodyPr wrap="square" lIns="0" tIns="0" rIns="0" bIns="0" rtlCol="0" anchor="ctr"/>
-          <a:lstStyle/>
-          <a:p>
-            <a:pPr indent="0" marL="0">
-              <a:buNone/>
-            </a:pPr>
-            <a:r>
-              <a:rPr lang="en-US" sz="1350" b="1" dirty="0">
-                <a:solidFill>
-                  <a:srgbClr val="0097A7"/>
-                </a:solidFill>
-                <a:latin typeface="Poppins" pitchFamily="34" charset="0"/>
-                <a:ea typeface="Poppins" pitchFamily="34" charset="-122"/>
-                <a:cs typeface="Poppins" pitchFamily="34" charset="-120"/>
-              </a:rPr>
-              <a:t>Status is the whole story</a:t>
-            </a:r>
-            <a:endParaRPr lang="en-US" sz="1350" dirty="0"/>
-          </a:p>
-        </p:txBody>
-      </p:sp>
-      <p:sp>
-        <p:nvSpPr>
-          <p:cNvPr id="18" name="Text 16"/>
-          <p:cNvSpPr/>
-          <p:nvPr/>
-        </p:nvSpPr>
-        <p:spPr>
-          <a:xfrm>
-            <a:off x="1207008" y="3538728"/>
-            <a:ext cx="4572000" cy="640080"/>
-          </a:xfrm>
-          <a:prstGeom prst="rect">
-            <a:avLst/>
-          </a:prstGeom>
-          <a:noFill/>
-          <a:ln/>
-        </p:spPr>
-        <p:txBody>
-          <a:bodyPr wrap="square" lIns="0" tIns="0" rIns="0" bIns="0" rtlCol="0" anchor="t"/>
-          <a:lstStyle/>
-          <a:p>
-            <a:pPr indent="0" marL="0">
-              <a:lnSpc>
-                <a:spcPct val="105000"/>
-              </a:lnSpc>
-              <a:buNone/>
-            </a:pPr>
-            <a:r>
-              <a:rPr lang="en-US" sz="1100" dirty="0">
-                <a:solidFill>
-                  <a:srgbClr val="53565A"/>
-                </a:solidFill>
-                <a:latin typeface="Poppins" pitchFamily="34" charset="0"/>
-                <a:ea typeface="Poppins" pitchFamily="34" charset="-122"/>
-                <a:cs typeface="Poppins" pitchFamily="34" charset="-120"/>
-              </a:rPr>
-              <a:t>N listed, T tarred, A archived. Backwards moves are deliberate and simply requeue the work.</a:t>
-            </a:r>
-            <a:endParaRPr lang="en-US" sz="1100" dirty="0"/>
-          </a:p>
-        </p:txBody>
-      </p:sp>
-      <p:sp>
-        <p:nvSpPr>
-          <p:cNvPr id="19" name="Shape 17"/>
-          <p:cNvSpPr/>
-          <p:nvPr/>
-        </p:nvSpPr>
-        <p:spPr>
-          <a:xfrm>
-            <a:off x="6263640" y="2971800"/>
-            <a:ext cx="5532120" cy="1371600"/>
-          </a:xfrm>
-          <a:prstGeom prst="roundRect">
-            <a:avLst>
-              <a:gd name="adj" fmla="val 6667"/>
-            </a:avLst>
-          </a:prstGeom>
-          <a:solidFill>
-            <a:srgbClr val="FFFFFF"/>
-          </a:solidFill>
-          <a:ln w="12700">
-            <a:solidFill>
-              <a:srgbClr val="A9D6F2"/>
-            </a:solidFill>
-            <a:prstDash val="solid"/>
-          </a:ln>
-        </p:spPr>
-      </p:sp>
-      <p:sp>
-        <p:nvSpPr>
-          <p:cNvPr id="20" name="Shape 18"/>
-          <p:cNvSpPr/>
-          <p:nvPr/>
-        </p:nvSpPr>
-        <p:spPr>
-          <a:xfrm>
-            <a:off x="6464808" y="3191256"/>
-            <a:ext cx="420624" cy="420624"/>
-          </a:xfrm>
-          <a:prstGeom prst="ellipse">
-            <a:avLst/>
-          </a:prstGeom>
-          <a:solidFill>
-            <a:srgbClr val="C25E00"/>
-          </a:solidFill>
-          <a:ln/>
-        </p:spPr>
-      </p:sp>
-      <p:sp>
-        <p:nvSpPr>
-          <p:cNvPr id="21" name="Text 19"/>
-          <p:cNvSpPr/>
-          <p:nvPr/>
-        </p:nvSpPr>
-        <p:spPr>
-          <a:xfrm>
-            <a:off x="6464808" y="3191256"/>
-            <a:ext cx="420624" cy="420624"/>
-          </a:xfrm>
-          <a:prstGeom prst="rect">
-            <a:avLst/>
-          </a:prstGeom>
-          <a:noFill/>
-          <a:ln/>
-        </p:spPr>
-        <p:txBody>
-          <a:bodyPr wrap="square" lIns="0" tIns="0" rIns="0" bIns="0" rtlCol="0" anchor="ctr"/>
-          <a:lstStyle/>
-          <a:p>
-            <a:pPr algn="ctr" indent="0" marL="0">
-              <a:buNone/>
-            </a:pPr>
-            <a:r>
-              <a:rPr lang="en-US" sz="1400" b="1" dirty="0">
-                <a:solidFill>
-                  <a:srgbClr val="FFFFFF"/>
-                </a:solidFill>
-                <a:latin typeface="Poppins" pitchFamily="34" charset="0"/>
-                <a:ea typeface="Poppins" pitchFamily="34" charset="-122"/>
-                <a:cs typeface="Poppins" pitchFamily="34" charset="-120"/>
-              </a:rPr>
-              <a:t>4</a:t>
-            </a:r>
-            <a:endParaRPr lang="en-US" sz="1400" dirty="0"/>
-          </a:p>
-        </p:txBody>
-      </p:sp>
-      <p:sp>
-        <p:nvSpPr>
-          <p:cNvPr id="22" name="Text 20"/>
-          <p:cNvSpPr/>
-          <p:nvPr/>
-        </p:nvSpPr>
-        <p:spPr>
-          <a:xfrm>
-            <a:off x="7013448" y="3136392"/>
-            <a:ext cx="4572000" cy="384048"/>
-          </a:xfrm>
-          <a:prstGeom prst="rect">
-            <a:avLst/>
-          </a:prstGeom>
-          <a:noFill/>
-          <a:ln/>
-        </p:spPr>
-        <p:txBody>
-          <a:bodyPr wrap="square" lIns="0" tIns="0" rIns="0" bIns="0" rtlCol="0" anchor="ctr"/>
-          <a:lstStyle/>
-          <a:p>
-            <a:pPr indent="0" marL="0">
-              <a:buNone/>
-            </a:pPr>
-            <a:r>
-              <a:rPr lang="en-US" sz="1350" b="1" dirty="0">
-                <a:solidFill>
-                  <a:srgbClr val="C25E00"/>
-                </a:solidFill>
-                <a:latin typeface="Poppins" pitchFamily="34" charset="0"/>
-                <a:ea typeface="Poppins" pitchFamily="34" charset="-122"/>
-                <a:cs typeface="Poppins" pitchFamily="34" charset="-120"/>
-              </a:rPr>
-              <a:t>Tar size is the economics</a:t>
-            </a:r>
-            <a:endParaRPr lang="en-US" sz="1350" dirty="0"/>
-          </a:p>
-        </p:txBody>
-      </p:sp>
-      <p:sp>
-        <p:nvSpPr>
-          <p:cNvPr id="23" name="Text 21"/>
-          <p:cNvSpPr/>
-          <p:nvPr/>
-        </p:nvSpPr>
-        <p:spPr>
-          <a:xfrm>
-            <a:off x="7013448" y="3538728"/>
-            <a:ext cx="4572000" cy="640080"/>
-          </a:xfrm>
-          <a:prstGeom prst="rect">
-            <a:avLst/>
-          </a:prstGeom>
-          <a:noFill/>
-          <a:ln/>
-        </p:spPr>
-        <p:txBody>
-          <a:bodyPr wrap="square" lIns="0" tIns="0" rIns="0" bIns="0" rtlCol="0" anchor="t"/>
-          <a:lstStyle/>
-          <a:p>
-            <a:pPr indent="0" marL="0">
-              <a:lnSpc>
-                <a:spcPct val="105000"/>
-              </a:lnSpc>
-              <a:buNone/>
-            </a:pPr>
-            <a:r>
-              <a:rPr lang="en-US" sz="1100" dirty="0">
-                <a:solidFill>
-                  <a:srgbClr val="53565A"/>
-                </a:solidFill>
-                <a:latin typeface="Poppins" pitchFamily="34" charset="0"/>
-                <a:ea typeface="Poppins" pitchFamily="34" charset="-122"/>
-                <a:cs typeface="Poppins" pitchFamily="34" charset="-120"/>
-              </a:rPr>
-              <a:t>5 GB target tars batched into 90 GB transfers is what makes tape and Globus efficient.</a:t>
-            </a:r>
-            <a:endParaRPr lang="en-US" sz="1100" dirty="0"/>
-          </a:p>
-        </p:txBody>
-      </p:sp>
-      <p:sp>
-        <p:nvSpPr>
-          <p:cNvPr id="24" name="Shape 22"/>
-          <p:cNvSpPr/>
-          <p:nvPr/>
-        </p:nvSpPr>
-        <p:spPr>
-          <a:xfrm>
-            <a:off x="457200" y="4480560"/>
-            <a:ext cx="5532120" cy="1371600"/>
-          </a:xfrm>
-          <a:prstGeom prst="roundRect">
-            <a:avLst>
-              <a:gd name="adj" fmla="val 6667"/>
-            </a:avLst>
-          </a:prstGeom>
-          <a:solidFill>
-            <a:srgbClr val="FFFFFF"/>
-          </a:solidFill>
-          <a:ln w="12700">
-            <a:solidFill>
-              <a:srgbClr val="A9D6F2"/>
-            </a:solidFill>
-            <a:prstDash val="solid"/>
-          </a:ln>
-        </p:spPr>
-      </p:sp>
-      <p:sp>
-        <p:nvSpPr>
-          <p:cNvPr id="25" name="Shape 23"/>
-          <p:cNvSpPr/>
-          <p:nvPr/>
-        </p:nvSpPr>
-        <p:spPr>
-          <a:xfrm>
-            <a:off x="658368" y="4700016"/>
-            <a:ext cx="420624" cy="420624"/>
-          </a:xfrm>
-          <a:prstGeom prst="ellipse">
-            <a:avLst/>
-          </a:prstGeom>
-          <a:solidFill>
-            <a:srgbClr val="0057C2"/>
-          </a:solidFill>
-          <a:ln/>
-        </p:spPr>
-      </p:sp>
-      <p:sp>
-        <p:nvSpPr>
-          <p:cNvPr id="26" name="Text 24"/>
-          <p:cNvSpPr/>
-          <p:nvPr/>
-        </p:nvSpPr>
-        <p:spPr>
-          <a:xfrm>
-            <a:off x="658368" y="4700016"/>
-            <a:ext cx="420624" cy="420624"/>
-          </a:xfrm>
-          <a:prstGeom prst="rect">
-            <a:avLst/>
-          </a:prstGeom>
-          <a:noFill/>
-          <a:ln/>
-        </p:spPr>
-        <p:txBody>
-          <a:bodyPr wrap="square" lIns="0" tIns="0" rIns="0" bIns="0" rtlCol="0" anchor="ctr"/>
-          <a:lstStyle/>
-          <a:p>
-            <a:pPr algn="ctr" indent="0" marL="0">
-              <a:buNone/>
-            </a:pPr>
-            <a:r>
-              <a:rPr lang="en-US" sz="1400" b="1" dirty="0">
-                <a:solidFill>
-                  <a:srgbClr val="FFFFFF"/>
-                </a:solidFill>
-                <a:latin typeface="Poppins" pitchFamily="34" charset="0"/>
-                <a:ea typeface="Poppins" pitchFamily="34" charset="-122"/>
-                <a:cs typeface="Poppins" pitchFamily="34" charset="-120"/>
-              </a:rPr>
-              <a:t>5</a:t>
-            </a:r>
-            <a:endParaRPr lang="en-US" sz="1400" dirty="0"/>
-          </a:p>
-        </p:txBody>
-      </p:sp>
-      <p:sp>
-        <p:nvSpPr>
-          <p:cNvPr id="27" name="Text 25"/>
-          <p:cNvSpPr/>
-          <p:nvPr/>
-        </p:nvSpPr>
-        <p:spPr>
-          <a:xfrm>
-            <a:off x="1207008" y="4645152"/>
-            <a:ext cx="4572000" cy="384048"/>
-          </a:xfrm>
-          <a:prstGeom prst="rect">
-            <a:avLst/>
-          </a:prstGeom>
-          <a:noFill/>
-          <a:ln/>
-        </p:spPr>
-        <p:txBody>
-          <a:bodyPr wrap="square" lIns="0" tIns="0" rIns="0" bIns="0" rtlCol="0" anchor="ctr"/>
-          <a:lstStyle/>
-          <a:p>
-            <a:pPr indent="0" marL="0">
-              <a:buNone/>
-            </a:pPr>
-            <a:r>
-              <a:rPr lang="en-US" sz="1350" b="1" dirty="0">
-                <a:solidFill>
-                  <a:srgbClr val="0057C2"/>
-                </a:solidFill>
-                <a:latin typeface="Poppins" pitchFamily="34" charset="0"/>
-                <a:ea typeface="Poppins" pitchFamily="34" charset="-122"/>
-                <a:cs typeface="Poppins" pitchFamily="34" charset="-120"/>
-              </a:rPr>
-              <a:t>The dataset lock is the only lock</a:t>
-            </a:r>
-            <a:endParaRPr lang="en-US" sz="1350" dirty="0"/>
-          </a:p>
-        </p:txBody>
-      </p:sp>
-      <p:sp>
-        <p:nvSpPr>
-          <p:cNvPr id="28" name="Text 26"/>
-          <p:cNvSpPr/>
-          <p:nvPr/>
-        </p:nvSpPr>
-        <p:spPr>
-          <a:xfrm>
-            <a:off x="1207008" y="5047488"/>
-            <a:ext cx="4572000" cy="640080"/>
-          </a:xfrm>
-          <a:prstGeom prst="rect">
-            <a:avLst/>
-          </a:prstGeom>
-          <a:noFill/>
-          <a:ln/>
-        </p:spPr>
-        <p:txBody>
-          <a:bodyPr wrap="square" lIns="0" tIns="0" rIns="0" bIns="0" rtlCol="0" anchor="t"/>
-          <a:lstStyle/>
-          <a:p>
-            <a:pPr indent="0" marL="0">
-              <a:lnSpc>
-                <a:spcPct val="105000"/>
-              </a:lnSpc>
-              <a:buNone/>
-            </a:pPr>
-            <a:r>
-              <a:rPr lang="en-US" sz="1100" dirty="0">
-                <a:solidFill>
-                  <a:srgbClr val="53565A"/>
-                </a:solidFill>
-                <a:latin typeface="Poppins" pitchFamily="34" charset="0"/>
-                <a:ea typeface="Poppins" pitchFamily="34" charset="-122"/>
-                <a:cs typeface="Poppins" pitchFamily="34" charset="-120"/>
-              </a:rPr>
-              <a:t>Everything about concurrency — workers, re-checks, multi-dataset tars — is built on it.</a:t>
-            </a:r>
-            <a:endParaRPr lang="en-US" sz="1100" dirty="0"/>
-          </a:p>
-        </p:txBody>
-      </p:sp>
-      <p:sp>
-        <p:nvSpPr>
-          <p:cNvPr id="29" name="Shape 27"/>
-          <p:cNvSpPr/>
-          <p:nvPr/>
-        </p:nvSpPr>
-        <p:spPr>
-          <a:xfrm>
-            <a:off x="6263640" y="4480560"/>
-            <a:ext cx="5532120" cy="1371600"/>
-          </a:xfrm>
-          <a:prstGeom prst="roundRect">
-            <a:avLst>
-              <a:gd name="adj" fmla="val 6667"/>
-            </a:avLst>
-          </a:prstGeom>
-          <a:solidFill>
-            <a:srgbClr val="FFFFFF"/>
-          </a:solidFill>
-          <a:ln w="12700">
-            <a:solidFill>
-              <a:srgbClr val="A9D6F2"/>
-            </a:solidFill>
-            <a:prstDash val="solid"/>
-          </a:ln>
-        </p:spPr>
-      </p:sp>
-      <p:sp>
-        <p:nvSpPr>
-          <p:cNvPr id="30" name="Shape 28"/>
-          <p:cNvSpPr/>
-          <p:nvPr/>
-        </p:nvSpPr>
-        <p:spPr>
-          <a:xfrm>
-            <a:off x="6464808" y="4700016"/>
-            <a:ext cx="420624" cy="420624"/>
-          </a:xfrm>
-          <a:prstGeom prst="ellipse">
-            <a:avLst/>
-          </a:prstGeom>
-          <a:solidFill>
-            <a:srgbClr val="0092DB"/>
-          </a:solidFill>
-          <a:ln/>
-        </p:spPr>
-      </p:sp>
-      <p:sp>
-        <p:nvSpPr>
-          <p:cNvPr id="31" name="Text 29"/>
-          <p:cNvSpPr/>
-          <p:nvPr/>
-        </p:nvSpPr>
-        <p:spPr>
-          <a:xfrm>
-            <a:off x="6464808" y="4700016"/>
-            <a:ext cx="420624" cy="420624"/>
-          </a:xfrm>
-          <a:prstGeom prst="rect">
-            <a:avLst/>
-          </a:prstGeom>
-          <a:noFill/>
-          <a:ln/>
-        </p:spPr>
-        <p:txBody>
-          <a:bodyPr wrap="square" lIns="0" tIns="0" rIns="0" bIns="0" rtlCol="0" anchor="ctr"/>
-          <a:lstStyle/>
-          <a:p>
-            <a:pPr algn="ctr" indent="0" marL="0">
-              <a:buNone/>
-            </a:pPr>
-            <a:r>
-              <a:rPr lang="en-US" sz="1400" b="1" dirty="0">
-                <a:solidFill>
-                  <a:srgbClr val="FFFFFF"/>
-                </a:solidFill>
-                <a:latin typeface="Poppins" pitchFamily="34" charset="0"/>
-                <a:ea typeface="Poppins" pitchFamily="34" charset="-122"/>
-                <a:cs typeface="Poppins" pitchFamily="34" charset="-120"/>
-              </a:rPr>
-              <a:t>6</a:t>
-            </a:r>
-            <a:endParaRPr lang="en-US" sz="1400" dirty="0"/>
-          </a:p>
-        </p:txBody>
-      </p:sp>
-      <p:sp>
-        <p:nvSpPr>
-          <p:cNvPr id="32" name="Text 30"/>
-          <p:cNvSpPr/>
-          <p:nvPr/>
-        </p:nvSpPr>
-        <p:spPr>
-          <a:xfrm>
-            <a:off x="7013448" y="4645152"/>
-            <a:ext cx="4572000" cy="384048"/>
-          </a:xfrm>
-          <a:prstGeom prst="rect">
-            <a:avLst/>
-          </a:prstGeom>
-          <a:noFill/>
-          <a:ln/>
-        </p:spPr>
-        <p:txBody>
-          <a:bodyPr wrap="square" lIns="0" tIns="0" rIns="0" bIns="0" rtlCol="0" anchor="ctr"/>
-          <a:lstStyle/>
-          <a:p>
-            <a:pPr indent="0" marL="0">
-              <a:buNone/>
-            </a:pPr>
-            <a:r>
-              <a:rPr lang="en-US" sz="1350" b="1" dirty="0">
-                <a:solidFill>
-                  <a:srgbClr val="0092DB"/>
-                </a:solidFill>
-                <a:latin typeface="Poppins" pitchFamily="34" charset="0"/>
-                <a:ea typeface="Poppins" pitchFamily="34" charset="-122"/>
-                <a:cs typeface="Poppins" pitchFamily="34" charset="-120"/>
-              </a:rPr>
-              <a:t>Nothing is lost by stopping</a:t>
-            </a:r>
-            <a:endParaRPr lang="en-US" sz="1350" dirty="0"/>
-          </a:p>
-        </p:txBody>
-      </p:sp>
-      <p:sp>
-        <p:nvSpPr>
-          <p:cNvPr id="33" name="Text 31"/>
-          <p:cNvSpPr/>
-          <p:nvPr/>
-        </p:nvSpPr>
-        <p:spPr>
-          <a:xfrm>
-            <a:off x="7013448" y="5047488"/>
-            <a:ext cx="4572000" cy="640080"/>
-          </a:xfrm>
-          <a:prstGeom prst="rect">
-            <a:avLst/>
-          </a:prstGeom>
-          <a:noFill/>
-          <a:ln/>
-        </p:spPr>
-        <p:txBody>
-          <a:bodyPr wrap="square" lIns="0" tIns="0" rIns="0" bIns="0" rtlCol="0" anchor="t"/>
-          <a:lstStyle/>
-          <a:p>
-            <a:pPr indent="0" marL="0">
-              <a:lnSpc>
-                <a:spcPct val="105000"/>
-              </a:lnSpc>
-              <a:buNone/>
-            </a:pPr>
-            <a:r>
-              <a:rPr lang="en-US" sz="1100" dirty="0">
-                <a:solidFill>
-                  <a:srgbClr val="53565A"/>
-                </a:solidFill>
-                <a:latin typeface="Poppins" pitchFamily="34" charset="0"/>
-                <a:ea typeface="Poppins" pitchFamily="34" charset="-122"/>
-                <a:cs typeface="Poppins" pitchFamily="34" charset="-120"/>
-              </a:rPr>
-              <a:t>The 23-hour guard, the retry limit and the resumable statuses mean an interrupted run just continues later.</a:t>
-            </a:r>
-            <a:endParaRPr lang="en-US" sz="1100" dirty="0"/>
-          </a:p>
-        </p:txBody>
-      </p:sp>
-      <p:pic>
-        <p:nvPicPr>
-          <p:cNvPr id="34" name="Image 0" descr="nsf_ncar_logo_color.png">    </p:cNvPr>
-          <p:cNvPicPr>
-            <a:picLocks noChangeAspect="1"/>
-          </p:cNvPicPr>
-          <p:nvPr/>
-        </p:nvPicPr>
-        <p:blipFill>
-          <a:blip r:embed="rId1"/>
-          <a:stretch>
-            <a:fillRect/>
-          </a:stretch>
-        </p:blipFill>
-        <p:spPr>
-          <a:xfrm>
-            <a:off x="9951415" y="274320"/>
-            <a:ext cx="1874520" cy="512064"/>
-          </a:xfrm>
-          <a:prstGeom prst="rect">
-            <a:avLst/>
-          </a:prstGeom>
-        </p:spPr>
-      </p:pic>
-      <p:sp>
-        <p:nvSpPr>
-          <p:cNvPr id="35" name="Text 32"/>
-          <p:cNvSpPr/>
-          <p:nvPr/>
-        </p:nvSpPr>
-        <p:spPr>
-          <a:xfrm>
-            <a:off x="457200" y="6473952"/>
-            <a:ext cx="7315200" cy="274320"/>
-          </a:xfrm>
-          <a:prstGeom prst="rect">
-            <a:avLst/>
-          </a:prstGeom>
-          <a:noFill/>
-          <a:ln/>
-        </p:spPr>
-        <p:txBody>
-          <a:bodyPr wrap="square" lIns="0" tIns="0" rIns="0" bIns="0" rtlCol="0" anchor="ctr"/>
-          <a:lstStyle/>
-          <a:p>
-            <a:pPr algn="l" indent="0" marL="0">
-              <a:buNone/>
-            </a:pPr>
-            <a:r>
-              <a:rPr lang="en-US" sz="900" dirty="0">
-                <a:solidFill>
-                  <a:srgbClr val="53565A"/>
-                </a:solidFill>
-                <a:latin typeface="Poppins" pitchFamily="34" charset="0"/>
-                <a:ea typeface="Poppins" pitchFamily="34" charset="-122"/>
-                <a:cs typeface="Poppins" pitchFamily="34" charset="-120"/>
-              </a:rPr>
-              <a:t>dsquasar  •  Quasar Backup Guide</a:t>
-            </a:r>
-            <a:endParaRPr lang="en-US" sz="900" dirty="0"/>
-          </a:p>
-        </p:txBody>
-      </p:sp>
-      <p:sp>
-        <p:nvSpPr>
-          <p:cNvPr id="36" name="Text 33"/>
-          <p:cNvSpPr/>
-          <p:nvPr/>
-        </p:nvSpPr>
-        <p:spPr>
-          <a:xfrm>
-            <a:off x="11368735" y="6473952"/>
-            <a:ext cx="365760" cy="274320"/>
-          </a:xfrm>
-          <a:prstGeom prst="rect">
-            <a:avLst/>
-          </a:prstGeom>
-          <a:noFill/>
-          <a:ln/>
-        </p:spPr>
-        <p:txBody>
-          <a:bodyPr wrap="square" lIns="0" tIns="0" rIns="0" bIns="0" rtlCol="0" anchor="ctr"/>
-          <a:lstStyle/>
-          <a:p>
-            <a:pPr algn="r" indent="0" marL="0">
-              <a:buNone/>
-            </a:pPr>
-            <a:r>
-              <a:rPr lang="en-US" sz="900" dirty="0">
-                <a:solidFill>
-                  <a:srgbClr val="53565A"/>
-                </a:solidFill>
-                <a:latin typeface="Poppins" pitchFamily="34" charset="0"/>
-                <a:ea typeface="Poppins" pitchFamily="34" charset="-122"/>
-                <a:cs typeface="Poppins" pitchFamily="34" charset="-120"/>
-              </a:rPr>
-              <a:t>25</a:t>
-            </a:r>
-            <a:endParaRPr lang="en-US" sz="900" dirty="0"/>
-          </a:p>
-        </p:txBody>
-      </p:sp>
-    </p:spTree>
-  </p:cSld>
-  <p:clrMapOvr>
-    <a:masterClrMapping/>
-  </p:clrMapOvr>
-</p:sld>
-</file>
-
-<file path=ppt/slides/slide27.xml><?xml version="1.0" encoding="utf-8"?>
-<p:sld xmlns:a="http://schemas.openxmlformats.org/drawingml/2006/main" xmlns:r="http://schemas.openxmlformats.org/officeDocument/2006/relationships" xmlns:p="http://schemas.openxmlformats.org/presentationml/2006/main">
-  <p:cSld name="Slide 27">
-    <p:bg>
-      <p:bgPr>
-        <a:solidFill>
-          <a:srgbClr val="011837"/>
+          <a:srgbClr val="0057C2"/>
         </a:solidFill>
       </p:bgPr>
     </p:bg>
@@ -29737,7 +28288,7 @@
       </p:grpSpPr>
       <p:pic>
         <p:nvPicPr>
-          <p:cNvPr id="2" name="Image 0" descr="nsf_ncar_logo_white.png">    </p:cNvPr>
+          <p:cNvPr id="2" name="Image 0" descr="interior_bg.png">    </p:cNvPr>
           <p:cNvPicPr>
             <a:picLocks noChangeAspect="1"/>
           </p:cNvPicPr>
@@ -29751,8 +28302,8 @@
         </p:blipFill>
         <p:spPr>
           <a:xfrm>
-            <a:off x="640080" y="548640"/>
-            <a:ext cx="2560320" cy="704088"/>
+            <a:off x="0" y="0"/>
+            <a:ext cx="12191695" cy="6858000"/>
           </a:xfrm>
           <a:prstGeom prst="rect">
             <a:avLst/>
@@ -29775,24 +28326,48 @@
         </p:blipFill>
         <p:spPr>
           <a:xfrm>
-            <a:off x="9905695" y="640080"/>
-            <a:ext cx="1737360" cy="877824"/>
+            <a:off x="612648" y="365760"/>
+            <a:ext cx="1024128" cy="521208"/>
           </a:xfrm>
           <a:prstGeom prst="rect">
             <a:avLst/>
           </a:prstGeom>
         </p:spPr>
       </p:pic>
-      <p:sp>
-        <p:nvSpPr>
-          <p:cNvPr id="4" name="Text 0"/>
-          <p:cNvSpPr/>
-          <p:nvPr/>
-        </p:nvSpPr>
-        <p:spPr>
-          <a:xfrm>
-            <a:off x="640080" y="2286000"/>
-            <a:ext cx="8229600" cy="1188720"/>
+      <p:pic>
+        <p:nvPicPr>
+          <p:cNvPr id="4" name="Image 2" descr="nsf_ncar_logo_white.png">    </p:cNvPr>
+          <p:cNvPicPr>
+            <a:picLocks noChangeAspect="1"/>
+          </p:cNvPicPr>
+          <p:nvPr/>
+        </p:nvPicPr>
+        <p:blipFill>
+          <a:blip r:embed="rId3"/>
+          <a:stretch>
+            <a:fillRect/>
+          </a:stretch>
+        </p:blipFill>
+        <p:spPr>
+          <a:xfrm>
+            <a:off x="9683496" y="393192"/>
+            <a:ext cx="1892808" cy="521208"/>
+          </a:xfrm>
+          <a:prstGeom prst="rect">
+            <a:avLst/>
+          </a:prstGeom>
+        </p:spPr>
+      </p:pic>
+      <p:sp>
+        <p:nvSpPr>
+          <p:cNvPr id="5" name="Text 0"/>
+          <p:cNvSpPr/>
+          <p:nvPr/>
+        </p:nvSpPr>
+        <p:spPr>
+          <a:xfrm>
+            <a:off x="256032" y="6446520"/>
+            <a:ext cx="365760" cy="274320"/>
           </a:xfrm>
           <a:prstGeom prst="rect">
             <a:avLst/>
@@ -29808,7 +28383,7 @@
               <a:buNone/>
             </a:pPr>
             <a:r>
-              <a:rPr lang="en-US" sz="6600" b="1" dirty="0">
+              <a:rPr lang="en-US" sz="950" b="1" dirty="0">
                 <a:solidFill>
                   <a:srgbClr val="FFFFFF"/>
                 </a:solidFill>
@@ -29816,22 +28391,45 @@
                 <a:ea typeface="Poppins" pitchFamily="34" charset="-122"/>
                 <a:cs typeface="Poppins" pitchFamily="34" charset="-120"/>
               </a:rPr>
-              <a:t>Questions?</a:t>
-            </a:r>
-            <a:endParaRPr lang="en-US" sz="6600" dirty="0"/>
-          </a:p>
-        </p:txBody>
-      </p:sp>
-      <p:sp>
-        <p:nvSpPr>
-          <p:cNvPr id="5" name="Text 1"/>
-          <p:cNvSpPr/>
-          <p:nvPr/>
-        </p:nvSpPr>
-        <p:spPr>
-          <a:xfrm>
-            <a:off x="658368" y="3520440"/>
-            <a:ext cx="10515600" cy="457200"/>
+              <a:t>25</a:t>
+            </a:r>
+            <a:endParaRPr lang="en-US" sz="950" dirty="0"/>
+          </a:p>
+        </p:txBody>
+      </p:sp>
+      <p:sp>
+        <p:nvSpPr>
+          <p:cNvPr id="6" name="Shape 1"/>
+          <p:cNvSpPr/>
+          <p:nvPr/>
+        </p:nvSpPr>
+        <p:spPr>
+          <a:xfrm>
+            <a:off x="612648" y="6437376"/>
+            <a:ext cx="0" cy="201168"/>
+          </a:xfrm>
+          <a:prstGeom prst="line">
+            <a:avLst/>
+          </a:prstGeom>
+          <a:noFill/>
+          <a:ln w="9525">
+            <a:solidFill>
+              <a:srgbClr val="FFFFFF"/>
+            </a:solidFill>
+            <a:prstDash val="solid"/>
+          </a:ln>
+        </p:spPr>
+      </p:sp>
+      <p:sp>
+        <p:nvSpPr>
+          <p:cNvPr id="7" name="Text 2"/>
+          <p:cNvSpPr/>
+          <p:nvPr/>
+        </p:nvSpPr>
+        <p:spPr>
+          <a:xfrm>
+            <a:off x="786384" y="6446520"/>
+            <a:ext cx="5486400" cy="274320"/>
           </a:xfrm>
           <a:prstGeom prst="rect">
             <a:avLst/>
@@ -29847,30 +28445,30 @@
               <a:buNone/>
             </a:pPr>
             <a:r>
-              <a:rPr lang="en-US" sz="2000" dirty="0">
-                <a:solidFill>
-                  <a:srgbClr val="C3D7EE"/>
-                </a:solidFill>
-                <a:latin typeface="Poppins" pitchFamily="34" charset="0"/>
-                <a:ea typeface="Poppins" pitchFamily="34" charset="-122"/>
-                <a:cs typeface="Poppins" pitchFamily="34" charset="-120"/>
-              </a:rPr>
-              <a:t>dsquasar  —  Backing Up the GDEX Archive onto Quasar</a:t>
-            </a:r>
-            <a:endParaRPr lang="en-US" sz="2000" dirty="0"/>
-          </a:p>
-        </p:txBody>
-      </p:sp>
-      <p:sp>
-        <p:nvSpPr>
-          <p:cNvPr id="6" name="Text 2"/>
-          <p:cNvSpPr/>
-          <p:nvPr/>
-        </p:nvSpPr>
-        <p:spPr>
-          <a:xfrm>
-            <a:off x="658368" y="4206240"/>
-            <a:ext cx="10515600" cy="365760"/>
+              <a:rPr lang="en-US" sz="950" b="1" dirty="0">
+                <a:solidFill>
+                  <a:srgbClr val="FFFFFF"/>
+                </a:solidFill>
+                <a:latin typeface="Poppins" pitchFamily="34" charset="0"/>
+                <a:ea typeface="Poppins" pitchFamily="34" charset="-122"/>
+                <a:cs typeface="Poppins" pitchFamily="34" charset="-120"/>
+              </a:rPr>
+              <a:t>DSQUASAR  •  QUASAR BACKUP GUIDE</a:t>
+            </a:r>
+            <a:endParaRPr lang="en-US" sz="950" dirty="0"/>
+          </a:p>
+        </p:txBody>
+      </p:sp>
+      <p:sp>
+        <p:nvSpPr>
+          <p:cNvPr id="8" name="Text 3"/>
+          <p:cNvSpPr/>
+          <p:nvPr/>
+        </p:nvSpPr>
+        <p:spPr>
+          <a:xfrm>
+            <a:off x="1527048" y="1060704"/>
+            <a:ext cx="7315200" cy="320040"/>
           </a:xfrm>
           <a:prstGeom prst="rect">
             <a:avLst/>
@@ -29886,21 +28484,338 @@
               <a:buNone/>
             </a:pPr>
             <a:r>
+              <a:rPr lang="en-US" sz="1300" b="1" spc="200" kern="0" dirty="0">
+                <a:solidFill>
+                  <a:srgbClr val="42C0FF"/>
+                </a:solidFill>
+                <a:latin typeface="Poppins" pitchFamily="34" charset="0"/>
+                <a:ea typeface="Poppins" pitchFamily="34" charset="-122"/>
+                <a:cs typeface="Poppins" pitchFamily="34" charset="-120"/>
+              </a:rPr>
+              <a:t>RECAP</a:t>
+            </a:r>
+            <a:endParaRPr lang="en-US" sz="1300" dirty="0"/>
+          </a:p>
+        </p:txBody>
+      </p:sp>
+      <p:sp>
+        <p:nvSpPr>
+          <p:cNvPr id="9" name="Text 4"/>
+          <p:cNvSpPr/>
+          <p:nvPr/>
+        </p:nvSpPr>
+        <p:spPr>
+          <a:xfrm>
+            <a:off x="1527048" y="1408176"/>
+            <a:ext cx="9144000" cy="731520"/>
+          </a:xfrm>
+          <a:prstGeom prst="rect">
+            <a:avLst/>
+          </a:prstGeom>
+          <a:noFill/>
+          <a:ln/>
+        </p:spPr>
+        <p:txBody>
+          <a:bodyPr wrap="square" lIns="0" tIns="0" rIns="0" bIns="0" rtlCol="0" anchor="ctr"/>
+          <a:lstStyle/>
+          <a:p>
+            <a:pPr indent="0" marL="0">
+              <a:buNone/>
+            </a:pPr>
+            <a:r>
+              <a:rPr lang="en-US" sz="4000" b="1" dirty="0">
+                <a:solidFill>
+                  <a:srgbClr val="FFFFFF"/>
+                </a:solidFill>
+                <a:latin typeface="Poppins" pitchFamily="34" charset="0"/>
+                <a:ea typeface="Poppins" pitchFamily="34" charset="-122"/>
+                <a:cs typeface="Poppins" pitchFamily="34" charset="-120"/>
+              </a:rPr>
+              <a:t>Six Things Worth Remembering</a:t>
+            </a:r>
+            <a:endParaRPr lang="en-US" sz="4000" dirty="0"/>
+          </a:p>
+        </p:txBody>
+      </p:sp>
+      <p:sp>
+        <p:nvSpPr>
+          <p:cNvPr id="10" name="Shape 5"/>
+          <p:cNvSpPr/>
+          <p:nvPr/>
+        </p:nvSpPr>
+        <p:spPr>
+          <a:xfrm>
+            <a:off x="822960" y="2450592"/>
+            <a:ext cx="5120640" cy="1170432"/>
+          </a:xfrm>
+          <a:prstGeom prst="roundRect">
+            <a:avLst>
+              <a:gd name="adj" fmla="val 7813"/>
+            </a:avLst>
+          </a:prstGeom>
+          <a:solidFill>
+            <a:srgbClr val="00357A"/>
+          </a:solidFill>
+          <a:ln w="12700">
+            <a:solidFill>
+              <a:srgbClr val="2C6FB8"/>
+            </a:solidFill>
+            <a:prstDash val="solid"/>
+          </a:ln>
+        </p:spPr>
+      </p:sp>
+      <p:sp>
+        <p:nvSpPr>
+          <p:cNvPr id="11" name="Shape 6"/>
+          <p:cNvSpPr/>
+          <p:nvPr/>
+        </p:nvSpPr>
+        <p:spPr>
+          <a:xfrm>
+            <a:off x="1024128" y="2633472"/>
+            <a:ext cx="402336" cy="402336"/>
+          </a:xfrm>
+          <a:prstGeom prst="ellipse">
+            <a:avLst/>
+          </a:prstGeom>
+          <a:solidFill>
+            <a:srgbClr val="42C0FF"/>
+          </a:solidFill>
+          <a:ln/>
+        </p:spPr>
+      </p:sp>
+      <p:sp>
+        <p:nvSpPr>
+          <p:cNvPr id="12" name="Text 7"/>
+          <p:cNvSpPr/>
+          <p:nvPr/>
+        </p:nvSpPr>
+        <p:spPr>
+          <a:xfrm>
+            <a:off x="1024128" y="2633472"/>
+            <a:ext cx="402336" cy="402336"/>
+          </a:xfrm>
+          <a:prstGeom prst="rect">
+            <a:avLst/>
+          </a:prstGeom>
+          <a:noFill/>
+          <a:ln/>
+        </p:spPr>
+        <p:txBody>
+          <a:bodyPr wrap="square" lIns="0" tIns="0" rIns="0" bIns="0" rtlCol="0" anchor="ctr"/>
+          <a:lstStyle/>
+          <a:p>
+            <a:pPr algn="ctr" indent="0" marL="0">
+              <a:buNone/>
+            </a:pPr>
+            <a:r>
               <a:rPr lang="en-US" sz="1400" b="1" dirty="0">
                 <a:solidFill>
+                  <a:srgbClr val="00357A"/>
+                </a:solidFill>
+                <a:latin typeface="Poppins" pitchFamily="34" charset="0"/>
+                <a:ea typeface="Poppins" pitchFamily="34" charset="-122"/>
+                <a:cs typeface="Poppins" pitchFamily="34" charset="-120"/>
+              </a:rPr>
+              <a:t>1</a:t>
+            </a:r>
+            <a:endParaRPr lang="en-US" sz="1400" dirty="0"/>
+          </a:p>
+        </p:txBody>
+      </p:sp>
+      <p:sp>
+        <p:nvSpPr>
+          <p:cNvPr id="13" name="Text 8"/>
+          <p:cNvSpPr/>
+          <p:nvPr/>
+        </p:nvSpPr>
+        <p:spPr>
+          <a:xfrm>
+            <a:off x="1536192" y="2578608"/>
+            <a:ext cx="4206240" cy="347472"/>
+          </a:xfrm>
+          <a:prstGeom prst="rect">
+            <a:avLst/>
+          </a:prstGeom>
+          <a:noFill/>
+          <a:ln/>
+        </p:spPr>
+        <p:txBody>
+          <a:bodyPr wrap="square" lIns="0" tIns="0" rIns="0" bIns="0" rtlCol="0" anchor="ctr"/>
+          <a:lstStyle/>
+          <a:p>
+            <a:pPr indent="0" marL="0">
+              <a:buNone/>
+            </a:pPr>
+            <a:r>
+              <a:rPr lang="en-US" sz="1300" b="1" dirty="0">
+                <a:solidFill>
                   <a:srgbClr val="42C0FF"/>
                 </a:solidFill>
-                <a:latin typeface="Courier New" pitchFamily="34" charset="0"/>
-                <a:ea typeface="Courier New" pitchFamily="34" charset="-122"/>
-                <a:cs typeface="Courier New" pitchFamily="34" charset="-120"/>
-              </a:rPr>
-              <a:t>dsquasar -h</a:t>
-            </a:r>
-            <a:pPr indent="0" marL="0">
-              <a:buNone/>
-            </a:pPr>
-            <a:r>
-              <a:rPr lang="en-US" sz="1400" dirty="0">
+                <a:latin typeface="Poppins" pitchFamily="34" charset="0"/>
+                <a:ea typeface="Poppins" pitchFamily="34" charset="-122"/>
+                <a:cs typeface="Poppins" pitchFamily="34" charset="-120"/>
+              </a:rPr>
+              <a:t>dataset.backflag enrolls</a:t>
+            </a:r>
+            <a:endParaRPr lang="en-US" sz="1300" dirty="0"/>
+          </a:p>
+        </p:txBody>
+      </p:sp>
+      <p:sp>
+        <p:nvSpPr>
+          <p:cNvPr id="14" name="Text 9"/>
+          <p:cNvSpPr/>
+          <p:nvPr/>
+        </p:nvSpPr>
+        <p:spPr>
+          <a:xfrm>
+            <a:off x="1536192" y="2944368"/>
+            <a:ext cx="4206240" cy="585216"/>
+          </a:xfrm>
+          <a:prstGeom prst="rect">
+            <a:avLst/>
+          </a:prstGeom>
+          <a:noFill/>
+          <a:ln/>
+        </p:spPr>
+        <p:txBody>
+          <a:bodyPr wrap="square" lIns="0" tIns="0" rIns="0" bIns="0" rtlCol="0" anchor="t"/>
+          <a:lstStyle/>
+          <a:p>
+            <a:pPr indent="0" marL="0">
+              <a:lnSpc>
+                <a:spcPct val="105000"/>
+              </a:lnSpc>
+              <a:buNone/>
+            </a:pPr>
+            <a:r>
+              <a:rPr lang="en-US" sz="1050" dirty="0">
+                <a:solidFill>
+                  <a:srgbClr val="D5E8FA"/>
+                </a:solidFill>
+                <a:latin typeface="Poppins" pitchFamily="34" charset="0"/>
+                <a:ea typeface="Poppins" pitchFamily="34" charset="-122"/>
+                <a:cs typeface="Poppins" pitchFamily="34" charset="-120"/>
+              </a:rPr>
+              <a:t>Setting that one field puts a dataset under backup; dsgroup.backflag refines it. -t narrows a run, it does not override a flag.</a:t>
+            </a:r>
+            <a:endParaRPr lang="en-US" sz="1050" dirty="0"/>
+          </a:p>
+        </p:txBody>
+      </p:sp>
+      <p:sp>
+        <p:nvSpPr>
+          <p:cNvPr id="15" name="Shape 10"/>
+          <p:cNvSpPr/>
+          <p:nvPr/>
+        </p:nvSpPr>
+        <p:spPr>
+          <a:xfrm>
+            <a:off x="6263640" y="2450592"/>
+            <a:ext cx="5120640" cy="1170432"/>
+          </a:xfrm>
+          <a:prstGeom prst="roundRect">
+            <a:avLst>
+              <a:gd name="adj" fmla="val 7813"/>
+            </a:avLst>
+          </a:prstGeom>
+          <a:solidFill>
+            <a:srgbClr val="00357A"/>
+          </a:solidFill>
+          <a:ln w="12700">
+            <a:solidFill>
+              <a:srgbClr val="2C6FB8"/>
+            </a:solidFill>
+            <a:prstDash val="solid"/>
+          </a:ln>
+        </p:spPr>
+      </p:sp>
+      <p:sp>
+        <p:nvSpPr>
+          <p:cNvPr id="16" name="Shape 11"/>
+          <p:cNvSpPr/>
+          <p:nvPr/>
+        </p:nvSpPr>
+        <p:spPr>
+          <a:xfrm>
+            <a:off x="6464808" y="2633472"/>
+            <a:ext cx="402336" cy="402336"/>
+          </a:xfrm>
+          <a:prstGeom prst="ellipse">
+            <a:avLst/>
+          </a:prstGeom>
+          <a:solidFill>
+            <a:srgbClr val="42C0FF"/>
+          </a:solidFill>
+          <a:ln/>
+        </p:spPr>
+      </p:sp>
+      <p:sp>
+        <p:nvSpPr>
+          <p:cNvPr id="17" name="Text 12"/>
+          <p:cNvSpPr/>
+          <p:nvPr/>
+        </p:nvSpPr>
+        <p:spPr>
+          <a:xfrm>
+            <a:off x="6464808" y="2633472"/>
+            <a:ext cx="402336" cy="402336"/>
+          </a:xfrm>
+          <a:prstGeom prst="rect">
+            <a:avLst/>
+          </a:prstGeom>
+          <a:noFill/>
+          <a:ln/>
+        </p:spPr>
+        <p:txBody>
+          <a:bodyPr wrap="square" lIns="0" tIns="0" rIns="0" bIns="0" rtlCol="0" anchor="ctr"/>
+          <a:lstStyle/>
+          <a:p>
+            <a:pPr algn="ctr" indent="0" marL="0">
+              <a:buNone/>
+            </a:pPr>
+            <a:r>
+              <a:rPr lang="en-US" sz="1400" b="1" dirty="0">
+                <a:solidFill>
+                  <a:srgbClr val="00357A"/>
+                </a:solidFill>
+                <a:latin typeface="Poppins" pitchFamily="34" charset="0"/>
+                <a:ea typeface="Poppins" pitchFamily="34" charset="-122"/>
+                <a:cs typeface="Poppins" pitchFamily="34" charset="-120"/>
+              </a:rPr>
+              <a:t>2</a:t>
+            </a:r>
+            <a:endParaRPr lang="en-US" sz="1400" dirty="0"/>
+          </a:p>
+        </p:txBody>
+      </p:sp>
+      <p:sp>
+        <p:nvSpPr>
+          <p:cNvPr id="18" name="Text 13"/>
+          <p:cNvSpPr/>
+          <p:nvPr/>
+        </p:nvSpPr>
+        <p:spPr>
+          <a:xfrm>
+            <a:off x="6976872" y="2578608"/>
+            <a:ext cx="4206240" cy="347472"/>
+          </a:xfrm>
+          <a:prstGeom prst="rect">
+            <a:avLst/>
+          </a:prstGeom>
+          <a:noFill/>
+          <a:ln/>
+        </p:spPr>
+        <p:txBody>
+          <a:bodyPr wrap="square" lIns="0" tIns="0" rIns="0" bIns="0" rtlCol="0" anchor="ctr"/>
+          <a:lstStyle/>
+          <a:p>
+            <a:pPr indent="0" marL="0">
+              <a:buNone/>
+            </a:pPr>
+            <a:r>
+              <a:rPr lang="en-US" sz="1300" b="1" dirty="0">
                 <a:solidFill>
                   <a:srgbClr val="42C0FF"/>
                 </a:solidFill>
@@ -29908,7 +28823,135 @@
                 <a:ea typeface="Poppins" pitchFamily="34" charset="-122"/>
                 <a:cs typeface="Poppins" pitchFamily="34" charset="-120"/>
               </a:rPr>
-              <a:t>   •   for the full help document</a:t>
+              <a:t>-A 3 is the working default</a:t>
+            </a:r>
+            <a:endParaRPr lang="en-US" sz="1300" dirty="0"/>
+          </a:p>
+        </p:txBody>
+      </p:sp>
+      <p:sp>
+        <p:nvSpPr>
+          <p:cNvPr id="19" name="Text 14"/>
+          <p:cNvSpPr/>
+          <p:nvPr/>
+        </p:nvSpPr>
+        <p:spPr>
+          <a:xfrm>
+            <a:off x="6976872" y="2944368"/>
+            <a:ext cx="4206240" cy="585216"/>
+          </a:xfrm>
+          <a:prstGeom prst="rect">
+            <a:avLst/>
+          </a:prstGeom>
+          <a:noFill/>
+          <a:ln/>
+        </p:spPr>
+        <p:txBody>
+          <a:bodyPr wrap="square" lIns="0" tIns="0" rIns="0" bIns="0" rtlCol="0" anchor="t"/>
+          <a:lstStyle/>
+          <a:p>
+            <a:pPr indent="0" marL="0">
+              <a:lnSpc>
+                <a:spcPct val="105000"/>
+              </a:lnSpc>
+              <a:buNone/>
+            </a:pPr>
+            <a:r>
+              <a:rPr lang="en-US" sz="1050" dirty="0">
+                <a:solidFill>
+                  <a:srgbClr val="D5E8FA"/>
+                </a:solidFill>
+                <a:latin typeface="Poppins" pitchFamily="34" charset="0"/>
+                <a:ea typeface="Poppins" pitchFamily="34" charset="-122"/>
+                <a:cs typeface="Poppins" pitchFamily="34" charset="-120"/>
+              </a:rPr>
+              <a:t>Create the input lists and build the tars in one pass. -A 4 ships them. -A 7 does both.</a:t>
+            </a:r>
+            <a:endParaRPr lang="en-US" sz="1050" dirty="0"/>
+          </a:p>
+        </p:txBody>
+      </p:sp>
+      <p:sp>
+        <p:nvSpPr>
+          <p:cNvPr id="20" name="Shape 15"/>
+          <p:cNvSpPr/>
+          <p:nvPr/>
+        </p:nvSpPr>
+        <p:spPr>
+          <a:xfrm>
+            <a:off x="822960" y="3694176"/>
+            <a:ext cx="5120640" cy="1170432"/>
+          </a:xfrm>
+          <a:prstGeom prst="roundRect">
+            <a:avLst>
+              <a:gd name="adj" fmla="val 7813"/>
+            </a:avLst>
+          </a:prstGeom>
+          <a:solidFill>
+            <a:srgbClr val="00357A"/>
+          </a:solidFill>
+          <a:ln w="12700">
+            <a:solidFill>
+              <a:srgbClr val="2C6FB8"/>
+            </a:solidFill>
+            <a:prstDash val="solid"/>
+          </a:ln>
+        </p:spPr>
+      </p:sp>
+      <p:sp>
+        <p:nvSpPr>
+          <p:cNvPr id="21" name="Shape 16"/>
+          <p:cNvSpPr/>
+          <p:nvPr/>
+        </p:nvSpPr>
+        <p:spPr>
+          <a:xfrm>
+            <a:off x="1024128" y="3877056"/>
+            <a:ext cx="402336" cy="402336"/>
+          </a:xfrm>
+          <a:prstGeom prst="ellipse">
+            <a:avLst/>
+          </a:prstGeom>
+          <a:solidFill>
+            <a:srgbClr val="42C0FF"/>
+          </a:solidFill>
+          <a:ln/>
+        </p:spPr>
+      </p:sp>
+      <p:sp>
+        <p:nvSpPr>
+          <p:cNvPr id="22" name="Text 17"/>
+          <p:cNvSpPr/>
+          <p:nvPr/>
+        </p:nvSpPr>
+        <p:spPr>
+          <a:xfrm>
+            <a:off x="1024128" y="3877056"/>
+            <a:ext cx="402336" cy="402336"/>
+          </a:xfrm>
+          <a:prstGeom prst="rect">
+            <a:avLst/>
+          </a:prstGeom>
+          <a:noFill/>
+          <a:ln/>
+        </p:spPr>
+        <p:txBody>
+          <a:bodyPr wrap="square" lIns="0" tIns="0" rIns="0" bIns="0" rtlCol="0" anchor="ctr"/>
+          <a:lstStyle/>
+          <a:p>
+            <a:pPr algn="ctr" indent="0" marL="0">
+              <a:buNone/>
+            </a:pPr>
+            <a:r>
+              <a:rPr lang="en-US" sz="1400" b="1" dirty="0">
+                <a:solidFill>
+                  <a:srgbClr val="00357A"/>
+                </a:solidFill>
+                <a:latin typeface="Poppins" pitchFamily="34" charset="0"/>
+                <a:ea typeface="Poppins" pitchFamily="34" charset="-122"/>
+                <a:cs typeface="Poppins" pitchFamily="34" charset="-120"/>
+              </a:rPr>
+              <a:t>3</a:t>
             </a:r>
             <a:endParaRPr lang="en-US" sz="1400" dirty="0"/>
           </a:p>
@@ -29916,14 +28959,14 @@
       </p:sp>
       <p:sp>
         <p:nvSpPr>
-          <p:cNvPr id="7" name="Text 3"/>
-          <p:cNvSpPr/>
-          <p:nvPr/>
-        </p:nvSpPr>
-        <p:spPr>
-          <a:xfrm>
-            <a:off x="658368" y="5120640"/>
-            <a:ext cx="10515600" cy="365760"/>
+          <p:cNvPr id="23" name="Text 18"/>
+          <p:cNvSpPr/>
+          <p:nvPr/>
+        </p:nvSpPr>
+        <p:spPr>
+          <a:xfrm>
+            <a:off x="1536192" y="3822192"/>
+            <a:ext cx="4206240" cy="347472"/>
           </a:xfrm>
           <a:prstGeom prst="rect">
             <a:avLst/>
@@ -29939,31 +28982,560 @@
               <a:buNone/>
             </a:pPr>
             <a:r>
+              <a:rPr lang="en-US" sz="1300" b="1" dirty="0">
+                <a:solidFill>
+                  <a:srgbClr val="42C0FF"/>
+                </a:solidFill>
+                <a:latin typeface="Poppins" pitchFamily="34" charset="0"/>
+                <a:ea typeface="Poppins" pitchFamily="34" charset="-122"/>
+                <a:cs typeface="Poppins" pitchFamily="34" charset="-120"/>
+              </a:rPr>
+              <a:t>Status is the whole story</a:t>
+            </a:r>
+            <a:endParaRPr lang="en-US" sz="1300" dirty="0"/>
+          </a:p>
+        </p:txBody>
+      </p:sp>
+      <p:sp>
+        <p:nvSpPr>
+          <p:cNvPr id="24" name="Text 19"/>
+          <p:cNvSpPr/>
+          <p:nvPr/>
+        </p:nvSpPr>
+        <p:spPr>
+          <a:xfrm>
+            <a:off x="1536192" y="4187952"/>
+            <a:ext cx="4206240" cy="585216"/>
+          </a:xfrm>
+          <a:prstGeom prst="rect">
+            <a:avLst/>
+          </a:prstGeom>
+          <a:noFill/>
+          <a:ln/>
+        </p:spPr>
+        <p:txBody>
+          <a:bodyPr wrap="square" lIns="0" tIns="0" rIns="0" bIns="0" rtlCol="0" anchor="t"/>
+          <a:lstStyle/>
+          <a:p>
+            <a:pPr indent="0" marL="0">
+              <a:lnSpc>
+                <a:spcPct val="105000"/>
+              </a:lnSpc>
+              <a:buNone/>
+            </a:pPr>
+            <a:r>
+              <a:rPr lang="en-US" sz="1050" dirty="0">
+                <a:solidFill>
+                  <a:srgbClr val="D5E8FA"/>
+                </a:solidFill>
+                <a:latin typeface="Poppins" pitchFamily="34" charset="0"/>
+                <a:ea typeface="Poppins" pitchFamily="34" charset="-122"/>
+                <a:cs typeface="Poppins" pitchFamily="34" charset="-120"/>
+              </a:rPr>
+              <a:t>N listed, T tarred, A archived. Backwards moves are deliberate and simply requeue the work.</a:t>
+            </a:r>
+            <a:endParaRPr lang="en-US" sz="1050" dirty="0"/>
+          </a:p>
+        </p:txBody>
+      </p:sp>
+      <p:sp>
+        <p:nvSpPr>
+          <p:cNvPr id="25" name="Shape 20"/>
+          <p:cNvSpPr/>
+          <p:nvPr/>
+        </p:nvSpPr>
+        <p:spPr>
+          <a:xfrm>
+            <a:off x="6263640" y="3694176"/>
+            <a:ext cx="5120640" cy="1170432"/>
+          </a:xfrm>
+          <a:prstGeom prst="roundRect">
+            <a:avLst>
+              <a:gd name="adj" fmla="val 7813"/>
+            </a:avLst>
+          </a:prstGeom>
+          <a:solidFill>
+            <a:srgbClr val="00357A"/>
+          </a:solidFill>
+          <a:ln w="12700">
+            <a:solidFill>
+              <a:srgbClr val="2C6FB8"/>
+            </a:solidFill>
+            <a:prstDash val="solid"/>
+          </a:ln>
+        </p:spPr>
+      </p:sp>
+      <p:sp>
+        <p:nvSpPr>
+          <p:cNvPr id="26" name="Shape 21"/>
+          <p:cNvSpPr/>
+          <p:nvPr/>
+        </p:nvSpPr>
+        <p:spPr>
+          <a:xfrm>
+            <a:off x="6464808" y="3877056"/>
+            <a:ext cx="402336" cy="402336"/>
+          </a:xfrm>
+          <a:prstGeom prst="ellipse">
+            <a:avLst/>
+          </a:prstGeom>
+          <a:solidFill>
+            <a:srgbClr val="42C0FF"/>
+          </a:solidFill>
+          <a:ln/>
+        </p:spPr>
+      </p:sp>
+      <p:sp>
+        <p:nvSpPr>
+          <p:cNvPr id="27" name="Text 22"/>
+          <p:cNvSpPr/>
+          <p:nvPr/>
+        </p:nvSpPr>
+        <p:spPr>
+          <a:xfrm>
+            <a:off x="6464808" y="3877056"/>
+            <a:ext cx="402336" cy="402336"/>
+          </a:xfrm>
+          <a:prstGeom prst="rect">
+            <a:avLst/>
+          </a:prstGeom>
+          <a:noFill/>
+          <a:ln/>
+        </p:spPr>
+        <p:txBody>
+          <a:bodyPr wrap="square" lIns="0" tIns="0" rIns="0" bIns="0" rtlCol="0" anchor="ctr"/>
+          <a:lstStyle/>
+          <a:p>
+            <a:pPr algn="ctr" indent="0" marL="0">
+              <a:buNone/>
+            </a:pPr>
+            <a:r>
               <a:rPr lang="en-US" sz="1400" b="1" dirty="0">
                 <a:solidFill>
-                  <a:srgbClr val="C3D7EE"/>
-                </a:solidFill>
-                <a:latin typeface="Poppins" pitchFamily="34" charset="0"/>
-                <a:ea typeface="Poppins" pitchFamily="34" charset="-122"/>
-                <a:cs typeface="Poppins" pitchFamily="34" charset="-120"/>
-              </a:rPr>
-              <a:t>Zaihua Ji</a:t>
-            </a:r>
-            <a:pPr indent="0" marL="0">
-              <a:buNone/>
-            </a:pPr>
-            <a:r>
-              <a:rPr lang="en-US" sz="1400" dirty="0">
-                <a:solidFill>
-                  <a:srgbClr val="C3D7EE"/>
-                </a:solidFill>
-                <a:latin typeface="Poppins" pitchFamily="34" charset="0"/>
-                <a:ea typeface="Poppins" pitchFamily="34" charset="-122"/>
-                <a:cs typeface="Poppins" pitchFamily="34" charset="-120"/>
-              </a:rPr>
-              <a:t>   zji@ucar.edu   •   github.com/NCAR/rda-python-dsquasar</a:t>
+                  <a:srgbClr val="00357A"/>
+                </a:solidFill>
+                <a:latin typeface="Poppins" pitchFamily="34" charset="0"/>
+                <a:ea typeface="Poppins" pitchFamily="34" charset="-122"/>
+                <a:cs typeface="Poppins" pitchFamily="34" charset="-120"/>
+              </a:rPr>
+              <a:t>4</a:t>
             </a:r>
             <a:endParaRPr lang="en-US" sz="1400" dirty="0"/>
+          </a:p>
+        </p:txBody>
+      </p:sp>
+      <p:sp>
+        <p:nvSpPr>
+          <p:cNvPr id="28" name="Text 23"/>
+          <p:cNvSpPr/>
+          <p:nvPr/>
+        </p:nvSpPr>
+        <p:spPr>
+          <a:xfrm>
+            <a:off x="6976872" y="3822192"/>
+            <a:ext cx="4206240" cy="347472"/>
+          </a:xfrm>
+          <a:prstGeom prst="rect">
+            <a:avLst/>
+          </a:prstGeom>
+          <a:noFill/>
+          <a:ln/>
+        </p:spPr>
+        <p:txBody>
+          <a:bodyPr wrap="square" lIns="0" tIns="0" rIns="0" bIns="0" rtlCol="0" anchor="ctr"/>
+          <a:lstStyle/>
+          <a:p>
+            <a:pPr indent="0" marL="0">
+              <a:buNone/>
+            </a:pPr>
+            <a:r>
+              <a:rPr lang="en-US" sz="1300" b="1" dirty="0">
+                <a:solidFill>
+                  <a:srgbClr val="42C0FF"/>
+                </a:solidFill>
+                <a:latin typeface="Poppins" pitchFamily="34" charset="0"/>
+                <a:ea typeface="Poppins" pitchFamily="34" charset="-122"/>
+                <a:cs typeface="Poppins" pitchFamily="34" charset="-120"/>
+              </a:rPr>
+              <a:t>Tar size is the economics</a:t>
+            </a:r>
+            <a:endParaRPr lang="en-US" sz="1300" dirty="0"/>
+          </a:p>
+        </p:txBody>
+      </p:sp>
+      <p:sp>
+        <p:nvSpPr>
+          <p:cNvPr id="29" name="Text 24"/>
+          <p:cNvSpPr/>
+          <p:nvPr/>
+        </p:nvSpPr>
+        <p:spPr>
+          <a:xfrm>
+            <a:off x="6976872" y="4187952"/>
+            <a:ext cx="4206240" cy="585216"/>
+          </a:xfrm>
+          <a:prstGeom prst="rect">
+            <a:avLst/>
+          </a:prstGeom>
+          <a:noFill/>
+          <a:ln/>
+        </p:spPr>
+        <p:txBody>
+          <a:bodyPr wrap="square" lIns="0" tIns="0" rIns="0" bIns="0" rtlCol="0" anchor="t"/>
+          <a:lstStyle/>
+          <a:p>
+            <a:pPr indent="0" marL="0">
+              <a:lnSpc>
+                <a:spcPct val="105000"/>
+              </a:lnSpc>
+              <a:buNone/>
+            </a:pPr>
+            <a:r>
+              <a:rPr lang="en-US" sz="1050" dirty="0">
+                <a:solidFill>
+                  <a:srgbClr val="D5E8FA"/>
+                </a:solidFill>
+                <a:latin typeface="Poppins" pitchFamily="34" charset="0"/>
+                <a:ea typeface="Poppins" pitchFamily="34" charset="-122"/>
+                <a:cs typeface="Poppins" pitchFamily="34" charset="-120"/>
+              </a:rPr>
+              <a:t>5 GB target tars batched into 90 GB transfers is what makes tape and Globus efficient.</a:t>
+            </a:r>
+            <a:endParaRPr lang="en-US" sz="1050" dirty="0"/>
+          </a:p>
+        </p:txBody>
+      </p:sp>
+      <p:sp>
+        <p:nvSpPr>
+          <p:cNvPr id="30" name="Shape 25"/>
+          <p:cNvSpPr/>
+          <p:nvPr/>
+        </p:nvSpPr>
+        <p:spPr>
+          <a:xfrm>
+            <a:off x="822960" y="4937760"/>
+            <a:ext cx="5120640" cy="1170432"/>
+          </a:xfrm>
+          <a:prstGeom prst="roundRect">
+            <a:avLst>
+              <a:gd name="adj" fmla="val 7813"/>
+            </a:avLst>
+          </a:prstGeom>
+          <a:solidFill>
+            <a:srgbClr val="00357A"/>
+          </a:solidFill>
+          <a:ln w="12700">
+            <a:solidFill>
+              <a:srgbClr val="2C6FB8"/>
+            </a:solidFill>
+            <a:prstDash val="solid"/>
+          </a:ln>
+        </p:spPr>
+      </p:sp>
+      <p:sp>
+        <p:nvSpPr>
+          <p:cNvPr id="31" name="Shape 26"/>
+          <p:cNvSpPr/>
+          <p:nvPr/>
+        </p:nvSpPr>
+        <p:spPr>
+          <a:xfrm>
+            <a:off x="1024128" y="5120640"/>
+            <a:ext cx="402336" cy="402336"/>
+          </a:xfrm>
+          <a:prstGeom prst="ellipse">
+            <a:avLst/>
+          </a:prstGeom>
+          <a:solidFill>
+            <a:srgbClr val="42C0FF"/>
+          </a:solidFill>
+          <a:ln/>
+        </p:spPr>
+      </p:sp>
+      <p:sp>
+        <p:nvSpPr>
+          <p:cNvPr id="32" name="Text 27"/>
+          <p:cNvSpPr/>
+          <p:nvPr/>
+        </p:nvSpPr>
+        <p:spPr>
+          <a:xfrm>
+            <a:off x="1024128" y="5120640"/>
+            <a:ext cx="402336" cy="402336"/>
+          </a:xfrm>
+          <a:prstGeom prst="rect">
+            <a:avLst/>
+          </a:prstGeom>
+          <a:noFill/>
+          <a:ln/>
+        </p:spPr>
+        <p:txBody>
+          <a:bodyPr wrap="square" lIns="0" tIns="0" rIns="0" bIns="0" rtlCol="0" anchor="ctr"/>
+          <a:lstStyle/>
+          <a:p>
+            <a:pPr algn="ctr" indent="0" marL="0">
+              <a:buNone/>
+            </a:pPr>
+            <a:r>
+              <a:rPr lang="en-US" sz="1400" b="1" dirty="0">
+                <a:solidFill>
+                  <a:srgbClr val="00357A"/>
+                </a:solidFill>
+                <a:latin typeface="Poppins" pitchFamily="34" charset="0"/>
+                <a:ea typeface="Poppins" pitchFamily="34" charset="-122"/>
+                <a:cs typeface="Poppins" pitchFamily="34" charset="-120"/>
+              </a:rPr>
+              <a:t>5</a:t>
+            </a:r>
+            <a:endParaRPr lang="en-US" sz="1400" dirty="0"/>
+          </a:p>
+        </p:txBody>
+      </p:sp>
+      <p:sp>
+        <p:nvSpPr>
+          <p:cNvPr id="33" name="Text 28"/>
+          <p:cNvSpPr/>
+          <p:nvPr/>
+        </p:nvSpPr>
+        <p:spPr>
+          <a:xfrm>
+            <a:off x="1536192" y="5065776"/>
+            <a:ext cx="4206240" cy="347472"/>
+          </a:xfrm>
+          <a:prstGeom prst="rect">
+            <a:avLst/>
+          </a:prstGeom>
+          <a:noFill/>
+          <a:ln/>
+        </p:spPr>
+        <p:txBody>
+          <a:bodyPr wrap="square" lIns="0" tIns="0" rIns="0" bIns="0" rtlCol="0" anchor="ctr"/>
+          <a:lstStyle/>
+          <a:p>
+            <a:pPr indent="0" marL="0">
+              <a:buNone/>
+            </a:pPr>
+            <a:r>
+              <a:rPr lang="en-US" sz="1300" b="1" dirty="0">
+                <a:solidFill>
+                  <a:srgbClr val="42C0FF"/>
+                </a:solidFill>
+                <a:latin typeface="Poppins" pitchFamily="34" charset="0"/>
+                <a:ea typeface="Poppins" pitchFamily="34" charset="-122"/>
+                <a:cs typeface="Poppins" pitchFamily="34" charset="-120"/>
+              </a:rPr>
+              <a:t>The dataset lock is the only lock</a:t>
+            </a:r>
+            <a:endParaRPr lang="en-US" sz="1300" dirty="0"/>
+          </a:p>
+        </p:txBody>
+      </p:sp>
+      <p:sp>
+        <p:nvSpPr>
+          <p:cNvPr id="34" name="Text 29"/>
+          <p:cNvSpPr/>
+          <p:nvPr/>
+        </p:nvSpPr>
+        <p:spPr>
+          <a:xfrm>
+            <a:off x="1536192" y="5431536"/>
+            <a:ext cx="4206240" cy="585216"/>
+          </a:xfrm>
+          <a:prstGeom prst="rect">
+            <a:avLst/>
+          </a:prstGeom>
+          <a:noFill/>
+          <a:ln/>
+        </p:spPr>
+        <p:txBody>
+          <a:bodyPr wrap="square" lIns="0" tIns="0" rIns="0" bIns="0" rtlCol="0" anchor="t"/>
+          <a:lstStyle/>
+          <a:p>
+            <a:pPr indent="0" marL="0">
+              <a:lnSpc>
+                <a:spcPct val="105000"/>
+              </a:lnSpc>
+              <a:buNone/>
+            </a:pPr>
+            <a:r>
+              <a:rPr lang="en-US" sz="1050" dirty="0">
+                <a:solidFill>
+                  <a:srgbClr val="D5E8FA"/>
+                </a:solidFill>
+                <a:latin typeface="Poppins" pitchFamily="34" charset="0"/>
+                <a:ea typeface="Poppins" pitchFamily="34" charset="-122"/>
+                <a:cs typeface="Poppins" pitchFamily="34" charset="-120"/>
+              </a:rPr>
+              <a:t>Everything about concurrency — workers, re-checks, multi-dataset tars — is built on it.</a:t>
+            </a:r>
+            <a:endParaRPr lang="en-US" sz="1050" dirty="0"/>
+          </a:p>
+        </p:txBody>
+      </p:sp>
+      <p:sp>
+        <p:nvSpPr>
+          <p:cNvPr id="35" name="Shape 30"/>
+          <p:cNvSpPr/>
+          <p:nvPr/>
+        </p:nvSpPr>
+        <p:spPr>
+          <a:xfrm>
+            <a:off x="6263640" y="4937760"/>
+            <a:ext cx="5120640" cy="1170432"/>
+          </a:xfrm>
+          <a:prstGeom prst="roundRect">
+            <a:avLst>
+              <a:gd name="adj" fmla="val 7813"/>
+            </a:avLst>
+          </a:prstGeom>
+          <a:solidFill>
+            <a:srgbClr val="00357A"/>
+          </a:solidFill>
+          <a:ln w="12700">
+            <a:solidFill>
+              <a:srgbClr val="2C6FB8"/>
+            </a:solidFill>
+            <a:prstDash val="solid"/>
+          </a:ln>
+        </p:spPr>
+      </p:sp>
+      <p:sp>
+        <p:nvSpPr>
+          <p:cNvPr id="36" name="Shape 31"/>
+          <p:cNvSpPr/>
+          <p:nvPr/>
+        </p:nvSpPr>
+        <p:spPr>
+          <a:xfrm>
+            <a:off x="6464808" y="5120640"/>
+            <a:ext cx="402336" cy="402336"/>
+          </a:xfrm>
+          <a:prstGeom prst="ellipse">
+            <a:avLst/>
+          </a:prstGeom>
+          <a:solidFill>
+            <a:srgbClr val="42C0FF"/>
+          </a:solidFill>
+          <a:ln/>
+        </p:spPr>
+      </p:sp>
+      <p:sp>
+        <p:nvSpPr>
+          <p:cNvPr id="37" name="Text 32"/>
+          <p:cNvSpPr/>
+          <p:nvPr/>
+        </p:nvSpPr>
+        <p:spPr>
+          <a:xfrm>
+            <a:off x="6464808" y="5120640"/>
+            <a:ext cx="402336" cy="402336"/>
+          </a:xfrm>
+          <a:prstGeom prst="rect">
+            <a:avLst/>
+          </a:prstGeom>
+          <a:noFill/>
+          <a:ln/>
+        </p:spPr>
+        <p:txBody>
+          <a:bodyPr wrap="square" lIns="0" tIns="0" rIns="0" bIns="0" rtlCol="0" anchor="ctr"/>
+          <a:lstStyle/>
+          <a:p>
+            <a:pPr algn="ctr" indent="0" marL="0">
+              <a:buNone/>
+            </a:pPr>
+            <a:r>
+              <a:rPr lang="en-US" sz="1400" b="1" dirty="0">
+                <a:solidFill>
+                  <a:srgbClr val="00357A"/>
+                </a:solidFill>
+                <a:latin typeface="Poppins" pitchFamily="34" charset="0"/>
+                <a:ea typeface="Poppins" pitchFamily="34" charset="-122"/>
+                <a:cs typeface="Poppins" pitchFamily="34" charset="-120"/>
+              </a:rPr>
+              <a:t>6</a:t>
+            </a:r>
+            <a:endParaRPr lang="en-US" sz="1400" dirty="0"/>
+          </a:p>
+        </p:txBody>
+      </p:sp>
+      <p:sp>
+        <p:nvSpPr>
+          <p:cNvPr id="38" name="Text 33"/>
+          <p:cNvSpPr/>
+          <p:nvPr/>
+        </p:nvSpPr>
+        <p:spPr>
+          <a:xfrm>
+            <a:off x="6976872" y="5065776"/>
+            <a:ext cx="4206240" cy="347472"/>
+          </a:xfrm>
+          <a:prstGeom prst="rect">
+            <a:avLst/>
+          </a:prstGeom>
+          <a:noFill/>
+          <a:ln/>
+        </p:spPr>
+        <p:txBody>
+          <a:bodyPr wrap="square" lIns="0" tIns="0" rIns="0" bIns="0" rtlCol="0" anchor="ctr"/>
+          <a:lstStyle/>
+          <a:p>
+            <a:pPr indent="0" marL="0">
+              <a:buNone/>
+            </a:pPr>
+            <a:r>
+              <a:rPr lang="en-US" sz="1300" b="1" dirty="0">
+                <a:solidFill>
+                  <a:srgbClr val="42C0FF"/>
+                </a:solidFill>
+                <a:latin typeface="Poppins" pitchFamily="34" charset="0"/>
+                <a:ea typeface="Poppins" pitchFamily="34" charset="-122"/>
+                <a:cs typeface="Poppins" pitchFamily="34" charset="-120"/>
+              </a:rPr>
+              <a:t>Nothing is lost by stopping</a:t>
+            </a:r>
+            <a:endParaRPr lang="en-US" sz="1300" dirty="0"/>
+          </a:p>
+        </p:txBody>
+      </p:sp>
+      <p:sp>
+        <p:nvSpPr>
+          <p:cNvPr id="39" name="Text 34"/>
+          <p:cNvSpPr/>
+          <p:nvPr/>
+        </p:nvSpPr>
+        <p:spPr>
+          <a:xfrm>
+            <a:off x="6976872" y="5431536"/>
+            <a:ext cx="4206240" cy="585216"/>
+          </a:xfrm>
+          <a:prstGeom prst="rect">
+            <a:avLst/>
+          </a:prstGeom>
+          <a:noFill/>
+          <a:ln/>
+        </p:spPr>
+        <p:txBody>
+          <a:bodyPr wrap="square" lIns="0" tIns="0" rIns="0" bIns="0" rtlCol="0" anchor="t"/>
+          <a:lstStyle/>
+          <a:p>
+            <a:pPr indent="0" marL="0">
+              <a:lnSpc>
+                <a:spcPct val="105000"/>
+              </a:lnSpc>
+              <a:buNone/>
+            </a:pPr>
+            <a:r>
+              <a:rPr lang="en-US" sz="1050" dirty="0">
+                <a:solidFill>
+                  <a:srgbClr val="D5E8FA"/>
+                </a:solidFill>
+                <a:latin typeface="Poppins" pitchFamily="34" charset="0"/>
+                <a:ea typeface="Poppins" pitchFamily="34" charset="-122"/>
+                <a:cs typeface="Poppins" pitchFamily="34" charset="-120"/>
+              </a:rPr>
+              <a:t>The 23-hour guard, the retry limit and the resumable statuses mean an interrupted run just continues later.</a:t>
+            </a:r>
+            <a:endParaRPr lang="en-US" sz="1050" dirty="0"/>
           </a:p>
         </p:txBody>
       </p:sp>
@@ -29975,13 +29547,13 @@
 </p:sld>
 </file>
 
-<file path=ppt/slides/slide3.xml><?xml version="1.0" encoding="utf-8"?>
+<file path=ppt/slides/slide27.xml><?xml version="1.0" encoding="utf-8"?>
 <p:sld xmlns:a="http://schemas.openxmlformats.org/drawingml/2006/main" xmlns:r="http://schemas.openxmlformats.org/officeDocument/2006/relationships" xmlns:p="http://schemas.openxmlformats.org/presentationml/2006/main">
-  <p:cSld name="Slide 3">
+  <p:cSld name="Slide 27">
     <p:bg>
       <p:bgPr>
         <a:solidFill>
-          <a:srgbClr val="FFFFFF"/>
+          <a:srgbClr val="0057C2"/>
         </a:solidFill>
       </p:bgPr>
     </p:bg>
@@ -29999,6 +29571,420 @@
           <a:chExt cx="0" cy="0"/>
         </a:xfrm>
       </p:grpSpPr>
+      <p:pic>
+        <p:nvPicPr>
+          <p:cNvPr id="2" name="Image 0" descr="interior_bg.png">    </p:cNvPr>
+          <p:cNvPicPr>
+            <a:picLocks noChangeAspect="1"/>
+          </p:cNvPicPr>
+          <p:nvPr/>
+        </p:nvPicPr>
+        <p:blipFill>
+          <a:blip r:embed="rId1"/>
+          <a:stretch>
+            <a:fillRect/>
+          </a:stretch>
+        </p:blipFill>
+        <p:spPr>
+          <a:xfrm>
+            <a:off x="0" y="0"/>
+            <a:ext cx="12191695" cy="6858000"/>
+          </a:xfrm>
+          <a:prstGeom prst="rect">
+            <a:avLst/>
+          </a:prstGeom>
+        </p:spPr>
+      </p:pic>
+      <p:pic>
+        <p:nvPicPr>
+          <p:cNvPr id="3" name="Image 1" descr="gdex_lockup_white.png">    </p:cNvPr>
+          <p:cNvPicPr>
+            <a:picLocks noChangeAspect="1"/>
+          </p:cNvPicPr>
+          <p:nvPr/>
+        </p:nvPicPr>
+        <p:blipFill>
+          <a:blip r:embed="rId2"/>
+          <a:stretch>
+            <a:fillRect/>
+          </a:stretch>
+        </p:blipFill>
+        <p:spPr>
+          <a:xfrm>
+            <a:off x="612648" y="365760"/>
+            <a:ext cx="1024128" cy="521208"/>
+          </a:xfrm>
+          <a:prstGeom prst="rect">
+            <a:avLst/>
+          </a:prstGeom>
+        </p:spPr>
+      </p:pic>
+      <p:pic>
+        <p:nvPicPr>
+          <p:cNvPr id="4" name="Image 2" descr="nsf_ncar_logo_white.png">    </p:cNvPr>
+          <p:cNvPicPr>
+            <a:picLocks noChangeAspect="1"/>
+          </p:cNvPicPr>
+          <p:nvPr/>
+        </p:nvPicPr>
+        <p:blipFill>
+          <a:blip r:embed="rId3"/>
+          <a:stretch>
+            <a:fillRect/>
+          </a:stretch>
+        </p:blipFill>
+        <p:spPr>
+          <a:xfrm>
+            <a:off x="9683496" y="393192"/>
+            <a:ext cx="1892808" cy="521208"/>
+          </a:xfrm>
+          <a:prstGeom prst="rect">
+            <a:avLst/>
+          </a:prstGeom>
+        </p:spPr>
+      </p:pic>
+      <p:sp>
+        <p:nvSpPr>
+          <p:cNvPr id="5" name="Text 0"/>
+          <p:cNvSpPr/>
+          <p:nvPr/>
+        </p:nvSpPr>
+        <p:spPr>
+          <a:xfrm>
+            <a:off x="256032" y="6446520"/>
+            <a:ext cx="365760" cy="274320"/>
+          </a:xfrm>
+          <a:prstGeom prst="rect">
+            <a:avLst/>
+          </a:prstGeom>
+          <a:noFill/>
+          <a:ln/>
+        </p:spPr>
+        <p:txBody>
+          <a:bodyPr wrap="square" lIns="0" tIns="0" rIns="0" bIns="0" rtlCol="0" anchor="ctr"/>
+          <a:lstStyle/>
+          <a:p>
+            <a:pPr indent="0" marL="0">
+              <a:buNone/>
+            </a:pPr>
+            <a:r>
+              <a:rPr lang="en-US" sz="950" b="1" dirty="0">
+                <a:solidFill>
+                  <a:srgbClr val="FFFFFF"/>
+                </a:solidFill>
+                <a:latin typeface="Poppins" pitchFamily="34" charset="0"/>
+                <a:ea typeface="Poppins" pitchFamily="34" charset="-122"/>
+                <a:cs typeface="Poppins" pitchFamily="34" charset="-120"/>
+              </a:rPr>
+              <a:t>26</a:t>
+            </a:r>
+            <a:endParaRPr lang="en-US" sz="950" dirty="0"/>
+          </a:p>
+        </p:txBody>
+      </p:sp>
+      <p:sp>
+        <p:nvSpPr>
+          <p:cNvPr id="6" name="Shape 1"/>
+          <p:cNvSpPr/>
+          <p:nvPr/>
+        </p:nvSpPr>
+        <p:spPr>
+          <a:xfrm>
+            <a:off x="612648" y="6437376"/>
+            <a:ext cx="0" cy="201168"/>
+          </a:xfrm>
+          <a:prstGeom prst="line">
+            <a:avLst/>
+          </a:prstGeom>
+          <a:noFill/>
+          <a:ln w="9525">
+            <a:solidFill>
+              <a:srgbClr val="FFFFFF"/>
+            </a:solidFill>
+            <a:prstDash val="solid"/>
+          </a:ln>
+        </p:spPr>
+      </p:sp>
+      <p:sp>
+        <p:nvSpPr>
+          <p:cNvPr id="7" name="Text 2"/>
+          <p:cNvSpPr/>
+          <p:nvPr/>
+        </p:nvSpPr>
+        <p:spPr>
+          <a:xfrm>
+            <a:off x="786384" y="6446520"/>
+            <a:ext cx="5486400" cy="274320"/>
+          </a:xfrm>
+          <a:prstGeom prst="rect">
+            <a:avLst/>
+          </a:prstGeom>
+          <a:noFill/>
+          <a:ln/>
+        </p:spPr>
+        <p:txBody>
+          <a:bodyPr wrap="square" lIns="0" tIns="0" rIns="0" bIns="0" rtlCol="0" anchor="ctr"/>
+          <a:lstStyle/>
+          <a:p>
+            <a:pPr indent="0" marL="0">
+              <a:buNone/>
+            </a:pPr>
+            <a:r>
+              <a:rPr lang="en-US" sz="950" b="1" dirty="0">
+                <a:solidFill>
+                  <a:srgbClr val="FFFFFF"/>
+                </a:solidFill>
+                <a:latin typeface="Poppins" pitchFamily="34" charset="0"/>
+                <a:ea typeface="Poppins" pitchFamily="34" charset="-122"/>
+                <a:cs typeface="Poppins" pitchFamily="34" charset="-120"/>
+              </a:rPr>
+              <a:t>DSQUASAR  •  QUASAR BACKUP GUIDE</a:t>
+            </a:r>
+            <a:endParaRPr lang="en-US" sz="950" dirty="0"/>
+          </a:p>
+        </p:txBody>
+      </p:sp>
+      <p:sp>
+        <p:nvSpPr>
+          <p:cNvPr id="8" name="Text 3"/>
+          <p:cNvSpPr/>
+          <p:nvPr/>
+        </p:nvSpPr>
+        <p:spPr>
+          <a:xfrm>
+            <a:off x="1527048" y="1078992"/>
+            <a:ext cx="9144000" cy="2743200"/>
+          </a:xfrm>
+          <a:prstGeom prst="rect">
+            <a:avLst/>
+          </a:prstGeom>
+          <a:noFill/>
+          <a:ln/>
+        </p:spPr>
+        <p:txBody>
+          <a:bodyPr wrap="square" lIns="0" tIns="0" rIns="0" bIns="0" rtlCol="0" anchor="b"/>
+          <a:lstStyle/>
+          <a:p>
+            <a:pPr indent="0" marL="0">
+              <a:buNone/>
+            </a:pPr>
+            <a:r>
+              <a:rPr lang="en-US" sz="5400" b="1" dirty="0">
+                <a:solidFill>
+                  <a:srgbClr val="FFFFFF"/>
+                </a:solidFill>
+                <a:latin typeface="Poppins" pitchFamily="34" charset="0"/>
+                <a:ea typeface="Poppins" pitchFamily="34" charset="-122"/>
+                <a:cs typeface="Poppins" pitchFamily="34" charset="-120"/>
+              </a:rPr>
+              <a:t>Any Questions?</a:t>
+            </a:r>
+            <a:endParaRPr lang="en-US" sz="5400" dirty="0"/>
+          </a:p>
+        </p:txBody>
+      </p:sp>
+      <p:sp>
+        <p:nvSpPr>
+          <p:cNvPr id="9" name="Shape 4"/>
+          <p:cNvSpPr/>
+          <p:nvPr/>
+        </p:nvSpPr>
+        <p:spPr>
+          <a:xfrm>
+            <a:off x="1527048" y="4160520"/>
+            <a:ext cx="804672" cy="0"/>
+          </a:xfrm>
+          <a:prstGeom prst="line">
+            <a:avLst/>
+          </a:prstGeom>
+          <a:noFill/>
+          <a:ln w="38100">
+            <a:solidFill>
+              <a:srgbClr val="42C0FF"/>
+            </a:solidFill>
+            <a:prstDash val="solid"/>
+          </a:ln>
+        </p:spPr>
+      </p:sp>
+      <p:sp>
+        <p:nvSpPr>
+          <p:cNvPr id="10" name="Text 5"/>
+          <p:cNvSpPr/>
+          <p:nvPr/>
+        </p:nvSpPr>
+        <p:spPr>
+          <a:xfrm>
+            <a:off x="1527048" y="4434840"/>
+            <a:ext cx="9144000" cy="457200"/>
+          </a:xfrm>
+          <a:prstGeom prst="rect">
+            <a:avLst/>
+          </a:prstGeom>
+          <a:noFill/>
+          <a:ln/>
+        </p:spPr>
+        <p:txBody>
+          <a:bodyPr wrap="square" lIns="0" tIns="0" rIns="0" bIns="0" rtlCol="0" anchor="ctr"/>
+          <a:lstStyle/>
+          <a:p>
+            <a:pPr indent="0" marL="0">
+              <a:buNone/>
+            </a:pPr>
+            <a:r>
+              <a:rPr lang="en-US" sz="1600" dirty="0">
+                <a:solidFill>
+                  <a:srgbClr val="D5E8FA"/>
+                </a:solidFill>
+                <a:latin typeface="Poppins" pitchFamily="34" charset="0"/>
+                <a:ea typeface="Poppins" pitchFamily="34" charset="-122"/>
+                <a:cs typeface="Poppins" pitchFamily="34" charset="-120"/>
+              </a:rPr>
+              <a:t>Thank you — dsquasar keeps a tape copy of the whole GDEX archive, run after run.</a:t>
+            </a:r>
+            <a:endParaRPr lang="en-US" sz="1600" dirty="0"/>
+          </a:p>
+        </p:txBody>
+      </p:sp>
+      <p:sp>
+        <p:nvSpPr>
+          <p:cNvPr id="11" name="Shape 6"/>
+          <p:cNvSpPr/>
+          <p:nvPr/>
+        </p:nvSpPr>
+        <p:spPr>
+          <a:xfrm>
+            <a:off x="1527048" y="5166360"/>
+            <a:ext cx="9144000" cy="685800"/>
+          </a:xfrm>
+          <a:prstGeom prst="roundRect">
+            <a:avLst>
+              <a:gd name="adj" fmla="val 13333"/>
+            </a:avLst>
+          </a:prstGeom>
+          <a:solidFill>
+            <a:srgbClr val="00357A"/>
+          </a:solidFill>
+          <a:ln w="12700">
+            <a:solidFill>
+              <a:srgbClr val="42C0FF"/>
+            </a:solidFill>
+            <a:prstDash val="solid"/>
+          </a:ln>
+        </p:spPr>
+      </p:sp>
+      <p:sp>
+        <p:nvSpPr>
+          <p:cNvPr id="12" name="Text 7"/>
+          <p:cNvSpPr/>
+          <p:nvPr/>
+        </p:nvSpPr>
+        <p:spPr>
+          <a:xfrm>
+            <a:off x="1755648" y="5166360"/>
+            <a:ext cx="8686800" cy="685800"/>
+          </a:xfrm>
+          <a:prstGeom prst="rect">
+            <a:avLst/>
+          </a:prstGeom>
+          <a:noFill/>
+          <a:ln/>
+        </p:spPr>
+        <p:txBody>
+          <a:bodyPr wrap="square" lIns="0" tIns="0" rIns="0" bIns="0" rtlCol="0" anchor="ctr"/>
+          <a:lstStyle/>
+          <a:p>
+            <a:pPr indent="0" marL="0">
+              <a:buNone/>
+            </a:pPr>
+            <a:r>
+              <a:rPr lang="en-US" sz="1250" dirty="0">
+                <a:solidFill>
+                  <a:srgbClr val="D5E8FA"/>
+                </a:solidFill>
+                <a:latin typeface="Poppins" pitchFamily="34" charset="0"/>
+                <a:ea typeface="Poppins" pitchFamily="34" charset="-122"/>
+                <a:cs typeface="Poppins" pitchFamily="34" charset="-120"/>
+              </a:rPr>
+              <a:t>Zaihua Ji   •   zji@ucar.edu   •   </a:t>
+            </a:r>
+            <a:pPr indent="0" marL="0">
+              <a:buNone/>
+            </a:pPr>
+            <a:r>
+              <a:rPr lang="en-US" sz="1250" dirty="0">
+                <a:solidFill>
+                  <a:srgbClr val="FFFFFF"/>
+                </a:solidFill>
+                <a:latin typeface="Courier New" pitchFamily="34" charset="0"/>
+                <a:ea typeface="Courier New" pitchFamily="34" charset="-122"/>
+                <a:cs typeface="Courier New" pitchFamily="34" charset="-120"/>
+              </a:rPr>
+              <a:t>dsquasar -h</a:t>
+            </a:r>
+            <a:pPr indent="0" marL="0">
+              <a:buNone/>
+            </a:pPr>
+            <a:r>
+              <a:rPr lang="en-US" sz="1250" dirty="0">
+                <a:solidFill>
+                  <a:srgbClr val="D5E8FA"/>
+                </a:solidFill>
+                <a:latin typeface="Poppins" pitchFamily="34" charset="0"/>
+                <a:ea typeface="Poppins" pitchFamily="34" charset="-122"/>
+                <a:cs typeface="Poppins" pitchFamily="34" charset="-120"/>
+              </a:rPr>
+              <a:t>   •   dsquasar.usg   •   </a:t>
+            </a:r>
+            <a:pPr indent="0" marL="0">
+              <a:buNone/>
+            </a:pPr>
+            <a:r>
+              <a:rPr lang="en-US" sz="1250" u="sng" dirty="0">
+                <a:solidFill>
+                  <a:srgbClr val="D5E8FA"/>
+                </a:solidFill>
+                <a:latin typeface="Poppins" pitchFamily="34" charset="0"/>
+                <a:ea typeface="Poppins" pitchFamily="34" charset="-122"/>
+                <a:cs typeface="Poppins" pitchFamily="34" charset="-120"/>
+                <a:hlinkClick r:id="rId4" invalidUrl="" action="" tgtFrame="" tooltip="" history="1" highlightClick="0" endSnd="0">
+                  <a:extLst>
+                    <a:ext uri="{A12FA001-AC4F-418D-AE19-62706E023703}">
+                      <ahyp:hlinkClr xmlns:ahyp="http://schemas.microsoft.com/office/drawing/2018/hyperlinkcolor" val="tx"/>
+                    </a:ext>
+                  </a:extLst>
+                </a:hlinkClick>
+              </a:rPr>
+              <a:t>github.com/NCAR/rda-python-dsquasar</a:t>
+            </a:r>
+            <a:endParaRPr lang="en-US" sz="1250" dirty="0"/>
+          </a:p>
+        </p:txBody>
+      </p:sp>
+    </p:spTree>
+  </p:cSld>
+  <p:clrMapOvr>
+    <a:masterClrMapping/>
+  </p:clrMapOvr>
+</p:sld>
+</file>
+
+<file path=ppt/slides/slide3.xml><?xml version="1.0" encoding="utf-8"?>
+<p:sld xmlns:a="http://schemas.openxmlformats.org/drawingml/2006/main" xmlns:r="http://schemas.openxmlformats.org/officeDocument/2006/relationships" xmlns:p="http://schemas.openxmlformats.org/presentationml/2006/main">
+  <p:cSld name="Slide 3">
+    <p:spTree>
+      <p:nvGrpSpPr>
+        <p:cNvPr id="1" name=""/>
+        <p:cNvGrpSpPr/>
+        <p:nvPr/>
+      </p:nvGrpSpPr>
+      <p:grpSpPr>
+        <a:xfrm>
+          <a:off x="0" y="0"/>
+          <a:ext cx="0" cy="0"/>
+          <a:chOff x="0" y="0"/>
+          <a:chExt cx="0" cy="0"/>
+        </a:xfrm>
+      </p:grpSpPr>
       <p:sp>
         <p:nvSpPr>
           <p:cNvPr id="2" name="Text 0"/>
@@ -31207,40 +31193,16 @@
           </a:p>
         </p:txBody>
       </p:sp>
-      <p:pic>
-        <p:nvPicPr>
-          <p:cNvPr id="35" name="Image 0" descr="nsf_ncar_logo_color.png">    </p:cNvPr>
-          <p:cNvPicPr>
-            <a:picLocks noChangeAspect="1"/>
-          </p:cNvPicPr>
-          <p:nvPr/>
-        </p:nvPicPr>
-        <p:blipFill>
-          <a:blip r:embed="rId4"/>
-          <a:stretch>
-            <a:fillRect/>
-          </a:stretch>
-        </p:blipFill>
-        <p:spPr>
-          <a:xfrm>
-            <a:off x="9951415" y="274320"/>
-            <a:ext cx="1874520" cy="512064"/>
-          </a:xfrm>
-          <a:prstGeom prst="rect">
-            <a:avLst/>
-          </a:prstGeom>
-        </p:spPr>
-      </p:pic>
-      <p:sp>
-        <p:nvSpPr>
-          <p:cNvPr id="36" name="Text 33"/>
-          <p:cNvSpPr/>
-          <p:nvPr/>
-        </p:nvSpPr>
-        <p:spPr>
-          <a:xfrm>
-            <a:off x="457200" y="6473952"/>
-            <a:ext cx="7315200" cy="274320"/>
+      <p:sp>
+        <p:nvSpPr>
+          <p:cNvPr id="35" name="Text 33"/>
+          <p:cNvSpPr/>
+          <p:nvPr/>
+        </p:nvSpPr>
+        <p:spPr>
+          <a:xfrm>
+            <a:off x="256032" y="6446520"/>
+            <a:ext cx="365760" cy="274320"/>
           </a:xfrm>
           <a:prstGeom prst="rect">
             <a:avLst/>
@@ -31252,34 +31214,34 @@
           <a:bodyPr wrap="square" lIns="0" tIns="0" rIns="0" bIns="0" rtlCol="0" anchor="ctr"/>
           <a:lstStyle/>
           <a:p>
-            <a:pPr algn="l" indent="0" marL="0">
-              <a:buNone/>
-            </a:pPr>
-            <a:r>
-              <a:rPr lang="en-US" sz="900" dirty="0">
-                <a:solidFill>
-                  <a:srgbClr val="53565A"/>
-                </a:solidFill>
-                <a:latin typeface="Poppins" pitchFamily="34" charset="0"/>
-                <a:ea typeface="Poppins" pitchFamily="34" charset="-122"/>
-                <a:cs typeface="Poppins" pitchFamily="34" charset="-120"/>
-              </a:rPr>
-              <a:t>dsquasar  •  Quasar Backup Guide</a:t>
-            </a:r>
-            <a:endParaRPr lang="en-US" sz="900" dirty="0"/>
-          </a:p>
-        </p:txBody>
-      </p:sp>
-      <p:sp>
-        <p:nvSpPr>
-          <p:cNvPr id="37" name="Text 34"/>
-          <p:cNvSpPr/>
-          <p:nvPr/>
-        </p:nvSpPr>
-        <p:spPr>
-          <a:xfrm>
-            <a:off x="11368735" y="6473952"/>
-            <a:ext cx="365760" cy="274320"/>
+            <a:pPr indent="0" marL="0">
+              <a:buNone/>
+            </a:pPr>
+            <a:r>
+              <a:rPr lang="en-US" sz="950" b="1" dirty="0">
+                <a:solidFill>
+                  <a:srgbClr val="00357A"/>
+                </a:solidFill>
+                <a:latin typeface="Poppins" pitchFamily="34" charset="0"/>
+                <a:ea typeface="Poppins" pitchFamily="34" charset="-122"/>
+                <a:cs typeface="Poppins" pitchFamily="34" charset="-120"/>
+              </a:rPr>
+              <a:t>2</a:t>
+            </a:r>
+            <a:endParaRPr lang="en-US" sz="950" dirty="0"/>
+          </a:p>
+        </p:txBody>
+      </p:sp>
+      <p:sp>
+        <p:nvSpPr>
+          <p:cNvPr id="36" name="Text 34"/>
+          <p:cNvSpPr/>
+          <p:nvPr/>
+        </p:nvSpPr>
+        <p:spPr>
+          <a:xfrm>
+            <a:off x="786384" y="6446520"/>
+            <a:ext cx="5486400" cy="274320"/>
           </a:xfrm>
           <a:prstGeom prst="rect">
             <a:avLst/>
@@ -31291,21 +31253,21 @@
           <a:bodyPr wrap="square" lIns="0" tIns="0" rIns="0" bIns="0" rtlCol="0" anchor="ctr"/>
           <a:lstStyle/>
           <a:p>
-            <a:pPr algn="r" indent="0" marL="0">
-              <a:buNone/>
-            </a:pPr>
-            <a:r>
-              <a:rPr lang="en-US" sz="900" dirty="0">
-                <a:solidFill>
-                  <a:srgbClr val="53565A"/>
-                </a:solidFill>
-                <a:latin typeface="Poppins" pitchFamily="34" charset="0"/>
-                <a:ea typeface="Poppins" pitchFamily="34" charset="-122"/>
-                <a:cs typeface="Poppins" pitchFamily="34" charset="-120"/>
-              </a:rPr>
-              <a:t>2</a:t>
-            </a:r>
-            <a:endParaRPr lang="en-US" sz="900" dirty="0"/>
+            <a:pPr indent="0" marL="0">
+              <a:buNone/>
+            </a:pPr>
+            <a:r>
+              <a:rPr lang="en-US" sz="950" b="1" dirty="0">
+                <a:solidFill>
+                  <a:srgbClr val="00357A"/>
+                </a:solidFill>
+                <a:latin typeface="Poppins" pitchFamily="34" charset="0"/>
+                <a:ea typeface="Poppins" pitchFamily="34" charset="-122"/>
+                <a:cs typeface="Poppins" pitchFamily="34" charset="-120"/>
+              </a:rPr>
+              <a:t>DSQUASAR  •  QUASAR BACKUP GUIDE</a:t>
+            </a:r>
+            <a:endParaRPr lang="en-US" sz="950" dirty="0"/>
           </a:p>
         </p:txBody>
       </p:sp>
@@ -31320,13 +31282,6 @@
 <file path=ppt/slides/slide4.xml><?xml version="1.0" encoding="utf-8"?>
 <p:sld xmlns:a="http://schemas.openxmlformats.org/drawingml/2006/main" xmlns:r="http://schemas.openxmlformats.org/officeDocument/2006/relationships" xmlns:p="http://schemas.openxmlformats.org/presentationml/2006/main">
   <p:cSld name="Slide 4">
-    <p:bg>
-      <p:bgPr>
-        <a:solidFill>
-          <a:srgbClr val="FFFFFF"/>
-        </a:solidFill>
-      </p:bgPr>
-    </p:bg>
     <p:spTree>
       <p:nvGrpSpPr>
         <p:cNvPr id="1" name=""/>
@@ -32568,40 +32523,16 @@
           </a:p>
         </p:txBody>
       </p:sp>
-      <p:pic>
-        <p:nvPicPr>
-          <p:cNvPr id="34" name="Image 0" descr="nsf_ncar_logo_color.png">    </p:cNvPr>
-          <p:cNvPicPr>
-            <a:picLocks noChangeAspect="1"/>
-          </p:cNvPicPr>
-          <p:nvPr/>
-        </p:nvPicPr>
-        <p:blipFill>
-          <a:blip r:embed="rId1"/>
-          <a:stretch>
-            <a:fillRect/>
-          </a:stretch>
-        </p:blipFill>
-        <p:spPr>
-          <a:xfrm>
-            <a:off x="9951415" y="274320"/>
-            <a:ext cx="1874520" cy="512064"/>
-          </a:xfrm>
-          <a:prstGeom prst="rect">
-            <a:avLst/>
-          </a:prstGeom>
-        </p:spPr>
-      </p:pic>
-      <p:sp>
-        <p:nvSpPr>
-          <p:cNvPr id="35" name="Text 32"/>
-          <p:cNvSpPr/>
-          <p:nvPr/>
-        </p:nvSpPr>
-        <p:spPr>
-          <a:xfrm>
-            <a:off x="457200" y="6473952"/>
-            <a:ext cx="7315200" cy="274320"/>
+      <p:sp>
+        <p:nvSpPr>
+          <p:cNvPr id="34" name="Text 32"/>
+          <p:cNvSpPr/>
+          <p:nvPr/>
+        </p:nvSpPr>
+        <p:spPr>
+          <a:xfrm>
+            <a:off x="256032" y="6446520"/>
+            <a:ext cx="365760" cy="274320"/>
           </a:xfrm>
           <a:prstGeom prst="rect">
             <a:avLst/>
@@ -32613,34 +32544,34 @@
           <a:bodyPr wrap="square" lIns="0" tIns="0" rIns="0" bIns="0" rtlCol="0" anchor="ctr"/>
           <a:lstStyle/>
           <a:p>
-            <a:pPr algn="l" indent="0" marL="0">
-              <a:buNone/>
-            </a:pPr>
-            <a:r>
-              <a:rPr lang="en-US" sz="900" dirty="0">
-                <a:solidFill>
-                  <a:srgbClr val="53565A"/>
-                </a:solidFill>
-                <a:latin typeface="Poppins" pitchFamily="34" charset="0"/>
-                <a:ea typeface="Poppins" pitchFamily="34" charset="-122"/>
-                <a:cs typeface="Poppins" pitchFamily="34" charset="-120"/>
-              </a:rPr>
-              <a:t>dsquasar  •  Quasar Backup Guide</a:t>
-            </a:r>
-            <a:endParaRPr lang="en-US" sz="900" dirty="0"/>
-          </a:p>
-        </p:txBody>
-      </p:sp>
-      <p:sp>
-        <p:nvSpPr>
-          <p:cNvPr id="36" name="Text 33"/>
-          <p:cNvSpPr/>
-          <p:nvPr/>
-        </p:nvSpPr>
-        <p:spPr>
-          <a:xfrm>
-            <a:off x="11368735" y="6473952"/>
-            <a:ext cx="365760" cy="274320"/>
+            <a:pPr indent="0" marL="0">
+              <a:buNone/>
+            </a:pPr>
+            <a:r>
+              <a:rPr lang="en-US" sz="950" b="1" dirty="0">
+                <a:solidFill>
+                  <a:srgbClr val="00357A"/>
+                </a:solidFill>
+                <a:latin typeface="Poppins" pitchFamily="34" charset="0"/>
+                <a:ea typeface="Poppins" pitchFamily="34" charset="-122"/>
+                <a:cs typeface="Poppins" pitchFamily="34" charset="-120"/>
+              </a:rPr>
+              <a:t>3</a:t>
+            </a:r>
+            <a:endParaRPr lang="en-US" sz="950" dirty="0"/>
+          </a:p>
+        </p:txBody>
+      </p:sp>
+      <p:sp>
+        <p:nvSpPr>
+          <p:cNvPr id="35" name="Text 33"/>
+          <p:cNvSpPr/>
+          <p:nvPr/>
+        </p:nvSpPr>
+        <p:spPr>
+          <a:xfrm>
+            <a:off x="786384" y="6446520"/>
+            <a:ext cx="5486400" cy="274320"/>
           </a:xfrm>
           <a:prstGeom prst="rect">
             <a:avLst/>
@@ -32652,21 +32583,21 @@
           <a:bodyPr wrap="square" lIns="0" tIns="0" rIns="0" bIns="0" rtlCol="0" anchor="ctr"/>
           <a:lstStyle/>
           <a:p>
-            <a:pPr algn="r" indent="0" marL="0">
-              <a:buNone/>
-            </a:pPr>
-            <a:r>
-              <a:rPr lang="en-US" sz="900" dirty="0">
-                <a:solidFill>
-                  <a:srgbClr val="53565A"/>
-                </a:solidFill>
-                <a:latin typeface="Poppins" pitchFamily="34" charset="0"/>
-                <a:ea typeface="Poppins" pitchFamily="34" charset="-122"/>
-                <a:cs typeface="Poppins" pitchFamily="34" charset="-120"/>
-              </a:rPr>
-              <a:t>3</a:t>
-            </a:r>
-            <a:endParaRPr lang="en-US" sz="900" dirty="0"/>
+            <a:pPr indent="0" marL="0">
+              <a:buNone/>
+            </a:pPr>
+            <a:r>
+              <a:rPr lang="en-US" sz="950" b="1" dirty="0">
+                <a:solidFill>
+                  <a:srgbClr val="00357A"/>
+                </a:solidFill>
+                <a:latin typeface="Poppins" pitchFamily="34" charset="0"/>
+                <a:ea typeface="Poppins" pitchFamily="34" charset="-122"/>
+                <a:cs typeface="Poppins" pitchFamily="34" charset="-120"/>
+              </a:rPr>
+              <a:t>DSQUASAR  •  QUASAR BACKUP GUIDE</a:t>
+            </a:r>
+            <a:endParaRPr lang="en-US" sz="950" dirty="0"/>
           </a:p>
         </p:txBody>
       </p:sp>
@@ -32681,13 +32612,6 @@
 <file path=ppt/slides/slide5.xml><?xml version="1.0" encoding="utf-8"?>
 <p:sld xmlns:a="http://schemas.openxmlformats.org/drawingml/2006/main" xmlns:r="http://schemas.openxmlformats.org/officeDocument/2006/relationships" xmlns:p="http://schemas.openxmlformats.org/presentationml/2006/main">
   <p:cSld name="Slide 5">
-    <p:bg>
-      <p:bgPr>
-        <a:solidFill>
-          <a:srgbClr val="FFFFFF"/>
-        </a:solidFill>
-      </p:bgPr>
-    </p:bg>
     <p:spTree>
       <p:nvGrpSpPr>
         <p:cNvPr id="1" name=""/>
@@ -32766,7 +32690,7 @@
               <a:buNone/>
             </a:pPr>
             <a:r>
-              <a:rPr lang="en-US" sz="3200" b="1" dirty="0">
+              <a:rPr lang="en-US" sz="2900" b="1" dirty="0">
                 <a:solidFill>
                   <a:srgbClr val="00357A"/>
                 </a:solidFill>
@@ -32776,7 +32700,7 @@
               </a:rPr>
               <a:t>What dsquasar Reads and Writes in GDEXDB</a:t>
             </a:r>
-            <a:endParaRPr lang="en-US" sz="3200" dirty="0"/>
+            <a:endParaRPr lang="en-US" sz="2900" dirty="0"/>
           </a:p>
         </p:txBody>
       </p:sp>
@@ -33661,8 +33585,8 @@
         </p:nvSpPr>
         <p:spPr>
           <a:xfrm>
-            <a:off x="457200" y="5897880"/>
-            <a:ext cx="11247120" cy="365760"/>
+            <a:off x="457200" y="5870448"/>
+            <a:ext cx="9966960" cy="411480"/>
           </a:xfrm>
           <a:prstGeom prst="rect">
             <a:avLst/>
@@ -33678,7 +33602,7 @@
               <a:buNone/>
             </a:pPr>
             <a:r>
-              <a:rPr lang="en-US" sz="1300" b="1" dirty="0">
+              <a:rPr lang="en-US" sz="1150" b="1" dirty="0">
                 <a:solidFill>
                   <a:srgbClr val="0057C2"/>
                 </a:solidFill>
@@ -33692,7 +33616,7 @@
               <a:buNone/>
             </a:pPr>
             <a:r>
-              <a:rPr lang="en-US" sz="1300" dirty="0">
+              <a:rPr lang="en-US" sz="1150" dirty="0">
                 <a:solidFill>
                   <a:srgbClr val="53565A"/>
                 </a:solidFill>
@@ -33702,44 +33626,20 @@
               </a:rPr>
               <a:t>it records every member file, its size and checksum, so a tar can be re-listed, re-tarred, or restored without re-reading the archive.</a:t>
             </a:r>
-            <a:endParaRPr lang="en-US" sz="1300" dirty="0"/>
-          </a:p>
-        </p:txBody>
-      </p:sp>
-      <p:pic>
-        <p:nvPicPr>
-          <p:cNvPr id="23" name="Image 0" descr="nsf_ncar_logo_color.png">    </p:cNvPr>
-          <p:cNvPicPr>
-            <a:picLocks noChangeAspect="1"/>
-          </p:cNvPicPr>
-          <p:nvPr/>
-        </p:nvPicPr>
-        <p:blipFill>
-          <a:blip r:embed="rId1"/>
-          <a:stretch>
-            <a:fillRect/>
-          </a:stretch>
-        </p:blipFill>
-        <p:spPr>
-          <a:xfrm>
-            <a:off x="9951415" y="274320"/>
-            <a:ext cx="1874520" cy="512064"/>
-          </a:xfrm>
-          <a:prstGeom prst="rect">
-            <a:avLst/>
-          </a:prstGeom>
-        </p:spPr>
-      </p:pic>
-      <p:sp>
-        <p:nvSpPr>
-          <p:cNvPr id="24" name="Text 21"/>
-          <p:cNvSpPr/>
-          <p:nvPr/>
-        </p:nvSpPr>
-        <p:spPr>
-          <a:xfrm>
-            <a:off x="457200" y="6473952"/>
-            <a:ext cx="7315200" cy="274320"/>
+            <a:endParaRPr lang="en-US" sz="1150" dirty="0"/>
+          </a:p>
+        </p:txBody>
+      </p:sp>
+      <p:sp>
+        <p:nvSpPr>
+          <p:cNvPr id="23" name="Text 21"/>
+          <p:cNvSpPr/>
+          <p:nvPr/>
+        </p:nvSpPr>
+        <p:spPr>
+          <a:xfrm>
+            <a:off x="256032" y="6446520"/>
+            <a:ext cx="365760" cy="274320"/>
           </a:xfrm>
           <a:prstGeom prst="rect">
             <a:avLst/>
@@ -33751,34 +33651,34 @@
           <a:bodyPr wrap="square" lIns="0" tIns="0" rIns="0" bIns="0" rtlCol="0" anchor="ctr"/>
           <a:lstStyle/>
           <a:p>
-            <a:pPr algn="l" indent="0" marL="0">
-              <a:buNone/>
-            </a:pPr>
-            <a:r>
-              <a:rPr lang="en-US" sz="900" dirty="0">
-                <a:solidFill>
-                  <a:srgbClr val="53565A"/>
-                </a:solidFill>
-                <a:latin typeface="Poppins" pitchFamily="34" charset="0"/>
-                <a:ea typeface="Poppins" pitchFamily="34" charset="-122"/>
-                <a:cs typeface="Poppins" pitchFamily="34" charset="-120"/>
-              </a:rPr>
-              <a:t>dsquasar  •  Quasar Backup Guide</a:t>
-            </a:r>
-            <a:endParaRPr lang="en-US" sz="900" dirty="0"/>
-          </a:p>
-        </p:txBody>
-      </p:sp>
-      <p:sp>
-        <p:nvSpPr>
-          <p:cNvPr id="25" name="Text 22"/>
-          <p:cNvSpPr/>
-          <p:nvPr/>
-        </p:nvSpPr>
-        <p:spPr>
-          <a:xfrm>
-            <a:off x="11368735" y="6473952"/>
-            <a:ext cx="365760" cy="274320"/>
+            <a:pPr indent="0" marL="0">
+              <a:buNone/>
+            </a:pPr>
+            <a:r>
+              <a:rPr lang="en-US" sz="950" b="1" dirty="0">
+                <a:solidFill>
+                  <a:srgbClr val="00357A"/>
+                </a:solidFill>
+                <a:latin typeface="Poppins" pitchFamily="34" charset="0"/>
+                <a:ea typeface="Poppins" pitchFamily="34" charset="-122"/>
+                <a:cs typeface="Poppins" pitchFamily="34" charset="-120"/>
+              </a:rPr>
+              <a:t>4</a:t>
+            </a:r>
+            <a:endParaRPr lang="en-US" sz="950" dirty="0"/>
+          </a:p>
+        </p:txBody>
+      </p:sp>
+      <p:sp>
+        <p:nvSpPr>
+          <p:cNvPr id="24" name="Text 22"/>
+          <p:cNvSpPr/>
+          <p:nvPr/>
+        </p:nvSpPr>
+        <p:spPr>
+          <a:xfrm>
+            <a:off x="786384" y="6446520"/>
+            <a:ext cx="5486400" cy="274320"/>
           </a:xfrm>
           <a:prstGeom prst="rect">
             <a:avLst/>
@@ -33790,21 +33690,21 @@
           <a:bodyPr wrap="square" lIns="0" tIns="0" rIns="0" bIns="0" rtlCol="0" anchor="ctr"/>
           <a:lstStyle/>
           <a:p>
-            <a:pPr algn="r" indent="0" marL="0">
-              <a:buNone/>
-            </a:pPr>
-            <a:r>
-              <a:rPr lang="en-US" sz="900" dirty="0">
-                <a:solidFill>
-                  <a:srgbClr val="53565A"/>
-                </a:solidFill>
-                <a:latin typeface="Poppins" pitchFamily="34" charset="0"/>
-                <a:ea typeface="Poppins" pitchFamily="34" charset="-122"/>
-                <a:cs typeface="Poppins" pitchFamily="34" charset="-120"/>
-              </a:rPr>
-              <a:t>4</a:t>
-            </a:r>
-            <a:endParaRPr lang="en-US" sz="900" dirty="0"/>
+            <a:pPr indent="0" marL="0">
+              <a:buNone/>
+            </a:pPr>
+            <a:r>
+              <a:rPr lang="en-US" sz="950" b="1" dirty="0">
+                <a:solidFill>
+                  <a:srgbClr val="00357A"/>
+                </a:solidFill>
+                <a:latin typeface="Poppins" pitchFamily="34" charset="0"/>
+                <a:ea typeface="Poppins" pitchFamily="34" charset="-122"/>
+                <a:cs typeface="Poppins" pitchFamily="34" charset="-120"/>
+              </a:rPr>
+              <a:t>DSQUASAR  •  QUASAR BACKUP GUIDE</a:t>
+            </a:r>
+            <a:endParaRPr lang="en-US" sz="950" dirty="0"/>
           </a:p>
         </p:txBody>
       </p:sp>
@@ -33819,13 +33719,6 @@
 <file path=ppt/slides/slide6.xml><?xml version="1.0" encoding="utf-8"?>
 <p:sld xmlns:a="http://schemas.openxmlformats.org/drawingml/2006/main" xmlns:r="http://schemas.openxmlformats.org/officeDocument/2006/relationships" xmlns:p="http://schemas.openxmlformats.org/presentationml/2006/main">
   <p:cSld name="Slide 6">
-    <p:bg>
-      <p:bgPr>
-        <a:solidFill>
-          <a:srgbClr val="FFFFFF"/>
-        </a:solidFill>
-      </p:bgPr>
-    </p:bg>
     <p:spTree>
       <p:nvGrpSpPr>
         <p:cNvPr id="1" name=""/>
@@ -34981,40 +34874,16 @@
           </a:p>
         </p:txBody>
       </p:sp>
-      <p:pic>
-        <p:nvPicPr>
-          <p:cNvPr id="28" name="Image 0" descr="nsf_ncar_logo_color.png">    </p:cNvPr>
-          <p:cNvPicPr>
-            <a:picLocks noChangeAspect="1"/>
-          </p:cNvPicPr>
-          <p:nvPr/>
-        </p:nvPicPr>
-        <p:blipFill>
-          <a:blip r:embed="rId1"/>
-          <a:stretch>
-            <a:fillRect/>
-          </a:stretch>
-        </p:blipFill>
-        <p:spPr>
-          <a:xfrm>
-            <a:off x="9951415" y="274320"/>
-            <a:ext cx="1874520" cy="512064"/>
-          </a:xfrm>
-          <a:prstGeom prst="rect">
-            <a:avLst/>
-          </a:prstGeom>
-        </p:spPr>
-      </p:pic>
-      <p:sp>
-        <p:nvSpPr>
-          <p:cNvPr id="29" name="Text 26"/>
-          <p:cNvSpPr/>
-          <p:nvPr/>
-        </p:nvSpPr>
-        <p:spPr>
-          <a:xfrm>
-            <a:off x="457200" y="6473952"/>
-            <a:ext cx="7315200" cy="274320"/>
+      <p:sp>
+        <p:nvSpPr>
+          <p:cNvPr id="28" name="Text 26"/>
+          <p:cNvSpPr/>
+          <p:nvPr/>
+        </p:nvSpPr>
+        <p:spPr>
+          <a:xfrm>
+            <a:off x="256032" y="6446520"/>
+            <a:ext cx="365760" cy="274320"/>
           </a:xfrm>
           <a:prstGeom prst="rect">
             <a:avLst/>
@@ -35026,34 +34895,34 @@
           <a:bodyPr wrap="square" lIns="0" tIns="0" rIns="0" bIns="0" rtlCol="0" anchor="ctr"/>
           <a:lstStyle/>
           <a:p>
-            <a:pPr algn="l" indent="0" marL="0">
-              <a:buNone/>
-            </a:pPr>
-            <a:r>
-              <a:rPr lang="en-US" sz="900" dirty="0">
-                <a:solidFill>
-                  <a:srgbClr val="53565A"/>
-                </a:solidFill>
-                <a:latin typeface="Poppins" pitchFamily="34" charset="0"/>
-                <a:ea typeface="Poppins" pitchFamily="34" charset="-122"/>
-                <a:cs typeface="Poppins" pitchFamily="34" charset="-120"/>
-              </a:rPr>
-              <a:t>dsquasar  •  Quasar Backup Guide</a:t>
-            </a:r>
-            <a:endParaRPr lang="en-US" sz="900" dirty="0"/>
-          </a:p>
-        </p:txBody>
-      </p:sp>
-      <p:sp>
-        <p:nvSpPr>
-          <p:cNvPr id="30" name="Text 27"/>
-          <p:cNvSpPr/>
-          <p:nvPr/>
-        </p:nvSpPr>
-        <p:spPr>
-          <a:xfrm>
-            <a:off x="11368735" y="6473952"/>
-            <a:ext cx="365760" cy="274320"/>
+            <a:pPr indent="0" marL="0">
+              <a:buNone/>
+            </a:pPr>
+            <a:r>
+              <a:rPr lang="en-US" sz="950" b="1" dirty="0">
+                <a:solidFill>
+                  <a:srgbClr val="00357A"/>
+                </a:solidFill>
+                <a:latin typeface="Poppins" pitchFamily="34" charset="0"/>
+                <a:ea typeface="Poppins" pitchFamily="34" charset="-122"/>
+                <a:cs typeface="Poppins" pitchFamily="34" charset="-120"/>
+              </a:rPr>
+              <a:t>5</a:t>
+            </a:r>
+            <a:endParaRPr lang="en-US" sz="950" dirty="0"/>
+          </a:p>
+        </p:txBody>
+      </p:sp>
+      <p:sp>
+        <p:nvSpPr>
+          <p:cNvPr id="29" name="Text 27"/>
+          <p:cNvSpPr/>
+          <p:nvPr/>
+        </p:nvSpPr>
+        <p:spPr>
+          <a:xfrm>
+            <a:off x="786384" y="6446520"/>
+            <a:ext cx="5486400" cy="274320"/>
           </a:xfrm>
           <a:prstGeom prst="rect">
             <a:avLst/>
@@ -35065,21 +34934,21 @@
           <a:bodyPr wrap="square" lIns="0" tIns="0" rIns="0" bIns="0" rtlCol="0" anchor="ctr"/>
           <a:lstStyle/>
           <a:p>
-            <a:pPr algn="r" indent="0" marL="0">
-              <a:buNone/>
-            </a:pPr>
-            <a:r>
-              <a:rPr lang="en-US" sz="900" dirty="0">
-                <a:solidFill>
-                  <a:srgbClr val="53565A"/>
-                </a:solidFill>
-                <a:latin typeface="Poppins" pitchFamily="34" charset="0"/>
-                <a:ea typeface="Poppins" pitchFamily="34" charset="-122"/>
-                <a:cs typeface="Poppins" pitchFamily="34" charset="-120"/>
-              </a:rPr>
-              <a:t>5</a:t>
-            </a:r>
-            <a:endParaRPr lang="en-US" sz="900" dirty="0"/>
+            <a:pPr indent="0" marL="0">
+              <a:buNone/>
+            </a:pPr>
+            <a:r>
+              <a:rPr lang="en-US" sz="950" b="1" dirty="0">
+                <a:solidFill>
+                  <a:srgbClr val="00357A"/>
+                </a:solidFill>
+                <a:latin typeface="Poppins" pitchFamily="34" charset="0"/>
+                <a:ea typeface="Poppins" pitchFamily="34" charset="-122"/>
+                <a:cs typeface="Poppins" pitchFamily="34" charset="-120"/>
+              </a:rPr>
+              <a:t>DSQUASAR  •  QUASAR BACKUP GUIDE</a:t>
+            </a:r>
+            <a:endParaRPr lang="en-US" sz="950" dirty="0"/>
           </a:p>
         </p:txBody>
       </p:sp>
@@ -35094,13 +34963,6 @@
 <file path=ppt/slides/slide7.xml><?xml version="1.0" encoding="utf-8"?>
 <p:sld xmlns:a="http://schemas.openxmlformats.org/drawingml/2006/main" xmlns:r="http://schemas.openxmlformats.org/officeDocument/2006/relationships" xmlns:p="http://schemas.openxmlformats.org/presentationml/2006/main">
   <p:cSld name="Slide 7">
-    <p:bg>
-      <p:bgPr>
-        <a:solidFill>
-          <a:srgbClr val="FFFFFF"/>
-        </a:solidFill>
-      </p:bgPr>
-    </p:bg>
     <p:spTree>
       <p:nvGrpSpPr>
         <p:cNvPr id="1" name=""/>
@@ -36629,8 +36491,8 @@
         </p:nvSpPr>
         <p:spPr>
           <a:xfrm>
-            <a:off x="457200" y="5989320"/>
-            <a:ext cx="11274552" cy="320040"/>
+            <a:off x="457200" y="5943600"/>
+            <a:ext cx="9966960" cy="320040"/>
           </a:xfrm>
           <a:prstGeom prst="rect">
             <a:avLst/>
@@ -36646,7 +36508,7 @@
               <a:buNone/>
             </a:pPr>
             <a:r>
-              <a:rPr lang="en-US" sz="1300" b="1" dirty="0">
+              <a:rPr lang="en-US" sz="1150" b="1" dirty="0">
                 <a:solidFill>
                   <a:srgbClr val="0057C2"/>
                 </a:solidFill>
@@ -36660,7 +36522,7 @@
               <a:buNone/>
             </a:pPr>
             <a:r>
-              <a:rPr lang="en-US" sz="1300" dirty="0">
+              <a:rPr lang="en-US" sz="1150" dirty="0">
                 <a:solidFill>
                   <a:srgbClr val="00357A"/>
                 </a:solidFill>
@@ -36674,7 +36536,7 @@
               <a:buNone/>
             </a:pPr>
             <a:r>
-              <a:rPr lang="en-US" sz="1300" b="1" dirty="0">
+              <a:rPr lang="en-US" sz="1150" b="1" dirty="0">
                 <a:solidFill>
                   <a:srgbClr val="00357A"/>
                 </a:solidFill>
@@ -36688,7 +36550,7 @@
               <a:buNone/>
             </a:pPr>
             <a:r>
-              <a:rPr lang="en-US" sz="1300" dirty="0">
+              <a:rPr lang="en-US" sz="1150" dirty="0">
                 <a:solidFill>
                   <a:srgbClr val="00357A"/>
                 </a:solidFill>
@@ -36698,44 +36560,20 @@
               </a:rPr>
               <a:t>, so re-running never redoes finished work.</a:t>
             </a:r>
-            <a:endParaRPr lang="en-US" sz="1300" dirty="0"/>
-          </a:p>
-        </p:txBody>
-      </p:sp>
-      <p:pic>
-        <p:nvPicPr>
-          <p:cNvPr id="47" name="Image 0" descr="nsf_ncar_logo_color.png">    </p:cNvPr>
-          <p:cNvPicPr>
-            <a:picLocks noChangeAspect="1"/>
-          </p:cNvPicPr>
-          <p:nvPr/>
-        </p:nvPicPr>
-        <p:blipFill>
-          <a:blip r:embed="rId1"/>
-          <a:stretch>
-            <a:fillRect/>
-          </a:stretch>
-        </p:blipFill>
-        <p:spPr>
-          <a:xfrm>
-            <a:off x="9951415" y="274320"/>
-            <a:ext cx="1874520" cy="512064"/>
-          </a:xfrm>
-          <a:prstGeom prst="rect">
-            <a:avLst/>
-          </a:prstGeom>
-        </p:spPr>
-      </p:pic>
-      <p:sp>
-        <p:nvSpPr>
-          <p:cNvPr id="48" name="Text 45"/>
-          <p:cNvSpPr/>
-          <p:nvPr/>
-        </p:nvSpPr>
-        <p:spPr>
-          <a:xfrm>
-            <a:off x="457200" y="6473952"/>
-            <a:ext cx="7315200" cy="274320"/>
+            <a:endParaRPr lang="en-US" sz="1150" dirty="0"/>
+          </a:p>
+        </p:txBody>
+      </p:sp>
+      <p:sp>
+        <p:nvSpPr>
+          <p:cNvPr id="47" name="Text 45"/>
+          <p:cNvSpPr/>
+          <p:nvPr/>
+        </p:nvSpPr>
+        <p:spPr>
+          <a:xfrm>
+            <a:off x="256032" y="6446520"/>
+            <a:ext cx="365760" cy="274320"/>
           </a:xfrm>
           <a:prstGeom prst="rect">
             <a:avLst/>
@@ -36747,34 +36585,34 @@
           <a:bodyPr wrap="square" lIns="0" tIns="0" rIns="0" bIns="0" rtlCol="0" anchor="ctr"/>
           <a:lstStyle/>
           <a:p>
-            <a:pPr algn="l" indent="0" marL="0">
-              <a:buNone/>
-            </a:pPr>
-            <a:r>
-              <a:rPr lang="en-US" sz="900" dirty="0">
-                <a:solidFill>
-                  <a:srgbClr val="53565A"/>
-                </a:solidFill>
-                <a:latin typeface="Poppins" pitchFamily="34" charset="0"/>
-                <a:ea typeface="Poppins" pitchFamily="34" charset="-122"/>
-                <a:cs typeface="Poppins" pitchFamily="34" charset="-120"/>
-              </a:rPr>
-              <a:t>dsquasar  •  Quasar Backup Guide</a:t>
-            </a:r>
-            <a:endParaRPr lang="en-US" sz="900" dirty="0"/>
-          </a:p>
-        </p:txBody>
-      </p:sp>
-      <p:sp>
-        <p:nvSpPr>
-          <p:cNvPr id="49" name="Text 46"/>
-          <p:cNvSpPr/>
-          <p:nvPr/>
-        </p:nvSpPr>
-        <p:spPr>
-          <a:xfrm>
-            <a:off x="11368735" y="6473952"/>
-            <a:ext cx="365760" cy="274320"/>
+            <a:pPr indent="0" marL="0">
+              <a:buNone/>
+            </a:pPr>
+            <a:r>
+              <a:rPr lang="en-US" sz="950" b="1" dirty="0">
+                <a:solidFill>
+                  <a:srgbClr val="00357A"/>
+                </a:solidFill>
+                <a:latin typeface="Poppins" pitchFamily="34" charset="0"/>
+                <a:ea typeface="Poppins" pitchFamily="34" charset="-122"/>
+                <a:cs typeface="Poppins" pitchFamily="34" charset="-120"/>
+              </a:rPr>
+              <a:t>6</a:t>
+            </a:r>
+            <a:endParaRPr lang="en-US" sz="950" dirty="0"/>
+          </a:p>
+        </p:txBody>
+      </p:sp>
+      <p:sp>
+        <p:nvSpPr>
+          <p:cNvPr id="48" name="Text 46"/>
+          <p:cNvSpPr/>
+          <p:nvPr/>
+        </p:nvSpPr>
+        <p:spPr>
+          <a:xfrm>
+            <a:off x="786384" y="6446520"/>
+            <a:ext cx="5486400" cy="274320"/>
           </a:xfrm>
           <a:prstGeom prst="rect">
             <a:avLst/>
@@ -36786,21 +36624,21 @@
           <a:bodyPr wrap="square" lIns="0" tIns="0" rIns="0" bIns="0" rtlCol="0" anchor="ctr"/>
           <a:lstStyle/>
           <a:p>
-            <a:pPr algn="r" indent="0" marL="0">
-              <a:buNone/>
-            </a:pPr>
-            <a:r>
-              <a:rPr lang="en-US" sz="900" dirty="0">
-                <a:solidFill>
-                  <a:srgbClr val="53565A"/>
-                </a:solidFill>
-                <a:latin typeface="Poppins" pitchFamily="34" charset="0"/>
-                <a:ea typeface="Poppins" pitchFamily="34" charset="-122"/>
-                <a:cs typeface="Poppins" pitchFamily="34" charset="-120"/>
-              </a:rPr>
-              <a:t>6</a:t>
-            </a:r>
-            <a:endParaRPr lang="en-US" sz="900" dirty="0"/>
+            <a:pPr indent="0" marL="0">
+              <a:buNone/>
+            </a:pPr>
+            <a:r>
+              <a:rPr lang="en-US" sz="950" b="1" dirty="0">
+                <a:solidFill>
+                  <a:srgbClr val="00357A"/>
+                </a:solidFill>
+                <a:latin typeface="Poppins" pitchFamily="34" charset="0"/>
+                <a:ea typeface="Poppins" pitchFamily="34" charset="-122"/>
+                <a:cs typeface="Poppins" pitchFamily="34" charset="-120"/>
+              </a:rPr>
+              <a:t>DSQUASAR  •  QUASAR BACKUP GUIDE</a:t>
+            </a:r>
+            <a:endParaRPr lang="en-US" sz="950" dirty="0"/>
           </a:p>
         </p:txBody>
       </p:sp>
@@ -36815,13 +36653,6 @@
 <file path=ppt/slides/slide8.xml><?xml version="1.0" encoding="utf-8"?>
 <p:sld xmlns:a="http://schemas.openxmlformats.org/drawingml/2006/main" xmlns:r="http://schemas.openxmlformats.org/officeDocument/2006/relationships" xmlns:p="http://schemas.openxmlformats.org/presentationml/2006/main">
   <p:cSld name="Slide 8">
-    <p:bg>
-      <p:bgPr>
-        <a:solidFill>
-          <a:srgbClr val="FFFFFF"/>
-        </a:solidFill>
-      </p:bgPr>
-    </p:bg>
     <p:spTree>
       <p:nvGrpSpPr>
         <p:cNvPr id="1" name=""/>
@@ -38586,40 +38417,16 @@
           </a:p>
         </p:txBody>
       </p:sp>
-      <p:pic>
-        <p:nvPicPr>
-          <p:cNvPr id="21" name="Image 0" descr="nsf_ncar_logo_color.png">    </p:cNvPr>
-          <p:cNvPicPr>
-            <a:picLocks noChangeAspect="1"/>
-          </p:cNvPicPr>
-          <p:nvPr/>
-        </p:nvPicPr>
-        <p:blipFill>
-          <a:blip r:embed="rId2"/>
-          <a:stretch>
-            <a:fillRect/>
-          </a:stretch>
-        </p:blipFill>
-        <p:spPr>
-          <a:xfrm>
-            <a:off x="9951415" y="274320"/>
-            <a:ext cx="1874520" cy="512064"/>
-          </a:xfrm>
-          <a:prstGeom prst="rect">
-            <a:avLst/>
-          </a:prstGeom>
-        </p:spPr>
-      </p:pic>
-      <p:sp>
-        <p:nvSpPr>
-          <p:cNvPr id="22" name="Text 18"/>
-          <p:cNvSpPr/>
-          <p:nvPr/>
-        </p:nvSpPr>
-        <p:spPr>
-          <a:xfrm>
-            <a:off x="457200" y="6473952"/>
-            <a:ext cx="7315200" cy="274320"/>
+      <p:sp>
+        <p:nvSpPr>
+          <p:cNvPr id="21" name="Text 18"/>
+          <p:cNvSpPr/>
+          <p:nvPr/>
+        </p:nvSpPr>
+        <p:spPr>
+          <a:xfrm>
+            <a:off x="256032" y="6446520"/>
+            <a:ext cx="365760" cy="274320"/>
           </a:xfrm>
           <a:prstGeom prst="rect">
             <a:avLst/>
@@ -38631,34 +38438,34 @@
           <a:bodyPr wrap="square" lIns="0" tIns="0" rIns="0" bIns="0" rtlCol="0" anchor="ctr"/>
           <a:lstStyle/>
           <a:p>
-            <a:pPr algn="l" indent="0" marL="0">
-              <a:buNone/>
-            </a:pPr>
-            <a:r>
-              <a:rPr lang="en-US" sz="900" dirty="0">
-                <a:solidFill>
-                  <a:srgbClr val="53565A"/>
-                </a:solidFill>
-                <a:latin typeface="Poppins" pitchFamily="34" charset="0"/>
-                <a:ea typeface="Poppins" pitchFamily="34" charset="-122"/>
-                <a:cs typeface="Poppins" pitchFamily="34" charset="-120"/>
-              </a:rPr>
-              <a:t>dsquasar  •  Quasar Backup Guide</a:t>
-            </a:r>
-            <a:endParaRPr lang="en-US" sz="900" dirty="0"/>
-          </a:p>
-        </p:txBody>
-      </p:sp>
-      <p:sp>
-        <p:nvSpPr>
-          <p:cNvPr id="23" name="Text 19"/>
-          <p:cNvSpPr/>
-          <p:nvPr/>
-        </p:nvSpPr>
-        <p:spPr>
-          <a:xfrm>
-            <a:off x="11368735" y="6473952"/>
-            <a:ext cx="365760" cy="274320"/>
+            <a:pPr indent="0" marL="0">
+              <a:buNone/>
+            </a:pPr>
+            <a:r>
+              <a:rPr lang="en-US" sz="950" b="1" dirty="0">
+                <a:solidFill>
+                  <a:srgbClr val="00357A"/>
+                </a:solidFill>
+                <a:latin typeface="Poppins" pitchFamily="34" charset="0"/>
+                <a:ea typeface="Poppins" pitchFamily="34" charset="-122"/>
+                <a:cs typeface="Poppins" pitchFamily="34" charset="-120"/>
+              </a:rPr>
+              <a:t>7</a:t>
+            </a:r>
+            <a:endParaRPr lang="en-US" sz="950" dirty="0"/>
+          </a:p>
+        </p:txBody>
+      </p:sp>
+      <p:sp>
+        <p:nvSpPr>
+          <p:cNvPr id="22" name="Text 19"/>
+          <p:cNvSpPr/>
+          <p:nvPr/>
+        </p:nvSpPr>
+        <p:spPr>
+          <a:xfrm>
+            <a:off x="786384" y="6446520"/>
+            <a:ext cx="5486400" cy="274320"/>
           </a:xfrm>
           <a:prstGeom prst="rect">
             <a:avLst/>
@@ -38670,21 +38477,21 @@
           <a:bodyPr wrap="square" lIns="0" tIns="0" rIns="0" bIns="0" rtlCol="0" anchor="ctr"/>
           <a:lstStyle/>
           <a:p>
-            <a:pPr algn="r" indent="0" marL="0">
-              <a:buNone/>
-            </a:pPr>
-            <a:r>
-              <a:rPr lang="en-US" sz="900" dirty="0">
-                <a:solidFill>
-                  <a:srgbClr val="53565A"/>
-                </a:solidFill>
-                <a:latin typeface="Poppins" pitchFamily="34" charset="0"/>
-                <a:ea typeface="Poppins" pitchFamily="34" charset="-122"/>
-                <a:cs typeface="Poppins" pitchFamily="34" charset="-120"/>
-              </a:rPr>
-              <a:t>7</a:t>
-            </a:r>
-            <a:endParaRPr lang="en-US" sz="900" dirty="0"/>
+            <a:pPr indent="0" marL="0">
+              <a:buNone/>
+            </a:pPr>
+            <a:r>
+              <a:rPr lang="en-US" sz="950" b="1" dirty="0">
+                <a:solidFill>
+                  <a:srgbClr val="00357A"/>
+                </a:solidFill>
+                <a:latin typeface="Poppins" pitchFamily="34" charset="0"/>
+                <a:ea typeface="Poppins" pitchFamily="34" charset="-122"/>
+                <a:cs typeface="Poppins" pitchFamily="34" charset="-120"/>
+              </a:rPr>
+              <a:t>DSQUASAR  •  QUASAR BACKUP GUIDE</a:t>
+            </a:r>
+            <a:endParaRPr lang="en-US" sz="950" dirty="0"/>
           </a:p>
         </p:txBody>
       </p:sp>
@@ -38699,13 +38506,6 @@
 <file path=ppt/slides/slide9.xml><?xml version="1.0" encoding="utf-8"?>
 <p:sld xmlns:a="http://schemas.openxmlformats.org/drawingml/2006/main" xmlns:r="http://schemas.openxmlformats.org/officeDocument/2006/relationships" xmlns:p="http://schemas.openxmlformats.org/presentationml/2006/main">
   <p:cSld name="Slide 9">
-    <p:bg>
-      <p:bgPr>
-        <a:solidFill>
-          <a:srgbClr val="FFFFFF"/>
-        </a:solidFill>
-      </p:bgPr>
-    </p:bg>
     <p:spTree>
       <p:nvGrpSpPr>
         <p:cNvPr id="1" name=""/>
@@ -40388,40 +40188,16 @@
           </a:p>
         </p:txBody>
       </p:sp>
-      <p:pic>
-        <p:nvPicPr>
-          <p:cNvPr id="38" name="Image 0" descr="nsf_ncar_logo_color.png">    </p:cNvPr>
-          <p:cNvPicPr>
-            <a:picLocks noChangeAspect="1"/>
-          </p:cNvPicPr>
-          <p:nvPr/>
-        </p:nvPicPr>
-        <p:blipFill>
-          <a:blip r:embed="rId1"/>
-          <a:stretch>
-            <a:fillRect/>
-          </a:stretch>
-        </p:blipFill>
-        <p:spPr>
-          <a:xfrm>
-            <a:off x="9951415" y="274320"/>
-            <a:ext cx="1874520" cy="512064"/>
-          </a:xfrm>
-          <a:prstGeom prst="rect">
-            <a:avLst/>
-          </a:prstGeom>
-        </p:spPr>
-      </p:pic>
-      <p:sp>
-        <p:nvSpPr>
-          <p:cNvPr id="39" name="Text 36"/>
-          <p:cNvSpPr/>
-          <p:nvPr/>
-        </p:nvSpPr>
-        <p:spPr>
-          <a:xfrm>
-            <a:off x="457200" y="6473952"/>
-            <a:ext cx="7315200" cy="274320"/>
+      <p:sp>
+        <p:nvSpPr>
+          <p:cNvPr id="38" name="Text 36"/>
+          <p:cNvSpPr/>
+          <p:nvPr/>
+        </p:nvSpPr>
+        <p:spPr>
+          <a:xfrm>
+            <a:off x="256032" y="6446520"/>
+            <a:ext cx="365760" cy="274320"/>
           </a:xfrm>
           <a:prstGeom prst="rect">
             <a:avLst/>
@@ -40433,34 +40209,34 @@
           <a:bodyPr wrap="square" lIns="0" tIns="0" rIns="0" bIns="0" rtlCol="0" anchor="ctr"/>
           <a:lstStyle/>
           <a:p>
-            <a:pPr algn="l" indent="0" marL="0">
-              <a:buNone/>
-            </a:pPr>
-            <a:r>
-              <a:rPr lang="en-US" sz="900" dirty="0">
-                <a:solidFill>
-                  <a:srgbClr val="53565A"/>
-                </a:solidFill>
-                <a:latin typeface="Poppins" pitchFamily="34" charset="0"/>
-                <a:ea typeface="Poppins" pitchFamily="34" charset="-122"/>
-                <a:cs typeface="Poppins" pitchFamily="34" charset="-120"/>
-              </a:rPr>
-              <a:t>dsquasar  •  Quasar Backup Guide</a:t>
-            </a:r>
-            <a:endParaRPr lang="en-US" sz="900" dirty="0"/>
-          </a:p>
-        </p:txBody>
-      </p:sp>
-      <p:sp>
-        <p:nvSpPr>
-          <p:cNvPr id="40" name="Text 37"/>
-          <p:cNvSpPr/>
-          <p:nvPr/>
-        </p:nvSpPr>
-        <p:spPr>
-          <a:xfrm>
-            <a:off x="11368735" y="6473952"/>
-            <a:ext cx="365760" cy="274320"/>
+            <a:pPr indent="0" marL="0">
+              <a:buNone/>
+            </a:pPr>
+            <a:r>
+              <a:rPr lang="en-US" sz="950" b="1" dirty="0">
+                <a:solidFill>
+                  <a:srgbClr val="00357A"/>
+                </a:solidFill>
+                <a:latin typeface="Poppins" pitchFamily="34" charset="0"/>
+                <a:ea typeface="Poppins" pitchFamily="34" charset="-122"/>
+                <a:cs typeface="Poppins" pitchFamily="34" charset="-120"/>
+              </a:rPr>
+              <a:t>8</a:t>
+            </a:r>
+            <a:endParaRPr lang="en-US" sz="950" dirty="0"/>
+          </a:p>
+        </p:txBody>
+      </p:sp>
+      <p:sp>
+        <p:nvSpPr>
+          <p:cNvPr id="39" name="Text 37"/>
+          <p:cNvSpPr/>
+          <p:nvPr/>
+        </p:nvSpPr>
+        <p:spPr>
+          <a:xfrm>
+            <a:off x="786384" y="6446520"/>
+            <a:ext cx="5486400" cy="274320"/>
           </a:xfrm>
           <a:prstGeom prst="rect">
             <a:avLst/>
@@ -40472,21 +40248,21 @@
           <a:bodyPr wrap="square" lIns="0" tIns="0" rIns="0" bIns="0" rtlCol="0" anchor="ctr"/>
           <a:lstStyle/>
           <a:p>
-            <a:pPr algn="r" indent="0" marL="0">
-              <a:buNone/>
-            </a:pPr>
-            <a:r>
-              <a:rPr lang="en-US" sz="900" dirty="0">
-                <a:solidFill>
-                  <a:srgbClr val="53565A"/>
-                </a:solidFill>
-                <a:latin typeface="Poppins" pitchFamily="34" charset="0"/>
-                <a:ea typeface="Poppins" pitchFamily="34" charset="-122"/>
-                <a:cs typeface="Poppins" pitchFamily="34" charset="-120"/>
-              </a:rPr>
-              <a:t>8</a:t>
-            </a:r>
-            <a:endParaRPr lang="en-US" sz="900" dirty="0"/>
+            <a:pPr indent="0" marL="0">
+              <a:buNone/>
+            </a:pPr>
+            <a:r>
+              <a:rPr lang="en-US" sz="950" b="1" dirty="0">
+                <a:solidFill>
+                  <a:srgbClr val="00357A"/>
+                </a:solidFill>
+                <a:latin typeface="Poppins" pitchFamily="34" charset="0"/>
+                <a:ea typeface="Poppins" pitchFamily="34" charset="-122"/>
+                <a:cs typeface="Poppins" pitchFamily="34" charset="-120"/>
+              </a:rPr>
+              <a:t>DSQUASAR  •  QUASAR BACKUP GUIDE</a:t>
+            </a:r>
+            <a:endParaRPr lang="en-US" sz="950" dirty="0"/>
           </a:p>
         </p:txBody>
       </p:sp>

--- a/docs/slides/dsquasar_guide.pptx
+++ b/docs/slides/dsquasar_guide.pptx
@@ -32,9 +32,10 @@
     <p:sldId id="280" r:id="rId26"/>
     <p:sldId id="281" r:id="rId27"/>
     <p:sldId id="282" r:id="rId28"/>
+    <p:sldId id="283" r:id="rId29"/>
   </p:sldIdLst>
   <p:notesMasterIdLst>
-    <p:notesMasterId r:id="rId29"/>
+    <p:notesMasterId r:id="rId30"/>
   </p:notesMasterIdLst>
   <p:sldSz cx="12192000" cy="6858000"/>
   <p:notesSz cx="6858000" cy="12192000"/>
@@ -2224,6 +2225,94 @@
             <a:fld id="{F7021451-1387-4CA6-816F-3879F97B5CBC}" type="slidenum">
               <a:rPr lang="en-US"/>
               <a:t>27</a:t>
+            </a:fld>
+            <a:endParaRPr lang="en-US"/>
+          </a:p>
+        </p:txBody>
+      </p:sp>
+    </p:spTree>
+    <p:extLst>
+      <p:ext uri="{BB962C8B-B14F-4D97-AF65-F5344CB8AC3E}">
+        <p14:creationId xmlns:p14="http://schemas.microsoft.com/office/powerpoint/2010/main" val="1024086991"/>
+      </p:ext>
+    </p:extLst>
+  </p:cSld>
+  <p:clrMapOvr>
+    <a:masterClrMapping/>
+  </p:clrMapOvr>
+</p:notes>
+</file>
+
+<file path=ppt/notesSlides/notesSlide28.xml><?xml version="1.0" encoding="utf-8"?>
+<p:notes xmlns:a="http://schemas.openxmlformats.org/drawingml/2006/main" xmlns:r="http://schemas.openxmlformats.org/officeDocument/2006/relationships" xmlns:p="http://schemas.openxmlformats.org/presentationml/2006/main">
+  <p:cSld>
+    <p:spTree>
+      <p:nvGrpSpPr>
+        <p:cNvPr id="1" name=""/>
+        <p:cNvGrpSpPr/>
+        <p:nvPr/>
+      </p:nvGrpSpPr>
+      <p:grpSpPr>
+        <a:xfrm>
+          <a:off x="0" y="0"/>
+          <a:ext cx="0" cy="0"/>
+          <a:chOff x="0" y="0"/>
+          <a:chExt cx="0" cy="0"/>
+        </a:xfrm>
+      </p:grpSpPr>
+      <p:sp>
+        <p:nvSpPr>
+          <p:cNvPr id="2" name="Slide Image Placeholder 1"/>
+          <p:cNvSpPr>
+            <a:spLocks noGrp="1" noRot="1" noChangeAspect="1"/>
+          </p:cNvSpPr>
+          <p:nvPr>
+            <p:ph type="sldImg"/>
+          </p:nvPr>
+        </p:nvSpPr>
+        <p:spPr/>
+      </p:sp>
+      <p:sp>
+        <p:nvSpPr>
+          <p:cNvPr id="3" name="Notes Placeholder 2"/>
+          <p:cNvSpPr>
+            <a:spLocks noGrp="1"/>
+          </p:cNvSpPr>
+          <p:nvPr>
+            <p:ph type="body" idx="1"/>
+          </p:nvPr>
+        </p:nvSpPr>
+        <p:spPr/>
+        <p:txBody>
+          <a:bodyPr/>
+          <a:lstStyle/>
+          <a:p>
+            <a:r>
+              <a:rPr lang="en-US" dirty="0"/>
+              <a:t/>
+            </a:r>
+            <a:endParaRPr lang="en-US" dirty="0"/>
+          </a:p>
+        </p:txBody>
+      </p:sp>
+      <p:sp>
+        <p:nvSpPr>
+          <p:cNvPr id="4" name="Slide Number Placeholder 3"/>
+          <p:cNvSpPr>
+            <a:spLocks noGrp="1"/>
+          </p:cNvSpPr>
+          <p:nvPr>
+            <p:ph type="sldNum" sz="quarter" idx="10"/>
+          </p:nvPr>
+        </p:nvSpPr>
+        <p:spPr/>
+        <p:txBody>
+          <a:bodyPr/>
+          <a:lstStyle/>
+          <a:p>
+            <a:fld id="{F7021451-1387-4CA6-816F-3879F97B5CBC}" type="slidenum">
+              <a:rPr lang="en-US"/>
+              <a:t>28</a:t>
             </a:fld>
             <a:endParaRPr lang="en-US"/>
           </a:p>
@@ -13489,7 +13578,7 @@
                 <a:ea typeface="Poppins" pitchFamily="34" charset="-122"/>
                 <a:cs typeface="Poppins" pitchFamily="34" charset="-120"/>
               </a:rPr>
-              <a:t>The detail file count is turned into a cpu count, and PBS qoptions are written:</a:t>
+              <a:t>The pending tar count is turned into a cpu count, and PBS qoptions are written:</a:t>
             </a:r>
             <a:endParaRPr lang="en-US" sz="1050" dirty="0"/>
           </a:p>
@@ -14690,7 +14779,7 @@
                 <a:ea typeface="Courier New" pitchFamily="34" charset="-122"/>
                 <a:cs typeface="Courier New" pitchFamily="34" charset="-120"/>
               </a:rPr>
-              <a:t>MPBLIMIT = 900   tar files per process</a:t>
+              <a:t>MPBLIMIT = 5000  tar files per process</a:t>
             </a:r>
             <a:endParaRPr lang="en-US" sz="1150" dirty="0"/>
           </a:p>
@@ -14710,7 +14799,7 @@
                 <a:ea typeface="Courier New" pitchFamily="34" charset="-122"/>
                 <a:cs typeface="Courier New" pitchFamily="34" charset="-120"/>
               </a:rPr>
-              <a:t>MPBMAX   =   4   process ceiling</a:t>
+              <a:t>MPBMAX   =    4  process ceiling</a:t>
             </a:r>
             <a:endParaRPr lang="en-US" sz="1150" dirty="0"/>
           </a:p>
@@ -14910,7 +14999,7 @@
                 <a:ea typeface="Poppins" pitchFamily="34" charset="-122"/>
                 <a:cs typeface="Poppins" pitchFamily="34" charset="-120"/>
               </a:rPr>
-              <a:t>Interactively it is whatever you pass (default 1). In delay mode the count travels through the reserved PBS ncpus instead of the command line, so -m on a -d run is ignored.</a:t>
+              <a:t>With no -m, a delayed run sizes itself and reads the count back from the reserved PBS ncpus. An explicit -m always wins — including -m 1 to force a single process.</a:t>
             </a:r>
             <a:endParaRPr lang="en-US" sz="1150" dirty="0"/>
           </a:p>
@@ -27565,7 +27654,7 @@
                 <a:ea typeface="Poppins" pitchFamily="34" charset="-122"/>
                 <a:cs typeface="Poppins" pitchFamily="34" charset="-120"/>
               </a:rPr>
-              <a:t>Every tar goes to both end points by default. Drdata is written first, so an interrupted run still leaves the DR copy complete.</a:t>
+              <a:t>A dataset flagged D is written to both end points, Drdata first, so an interrupted run still leaves the DR copy complete.</a:t>
             </a:r>
             <a:endParaRPr lang="en-US" sz="1100" dirty="0"/>
           </a:p>
@@ -28265,13 +28354,6 @@
 <file path=ppt/slides/slide26.xml><?xml version="1.0" encoding="utf-8"?>
 <p:sld xmlns:a="http://schemas.openxmlformats.org/drawingml/2006/main" xmlns:r="http://schemas.openxmlformats.org/officeDocument/2006/relationships" xmlns:p="http://schemas.openxmlformats.org/presentationml/2006/main">
   <p:cSld name="Slide 26">
-    <p:bg>
-      <p:bgPr>
-        <a:solidFill>
-          <a:srgbClr val="0057C2"/>
-        </a:solidFill>
-      </p:bgPr>
-    </p:bg>
     <p:spTree>
       <p:nvGrpSpPr>
         <p:cNvPr id="1" name=""/>
@@ -28286,81 +28368,1098 @@
           <a:chExt cx="0" cy="0"/>
         </a:xfrm>
       </p:grpSpPr>
-      <p:pic>
-        <p:nvPicPr>
-          <p:cNvPr id="2" name="Image 0" descr="interior_bg.png">    </p:cNvPr>
-          <p:cNvPicPr>
-            <a:picLocks noChangeAspect="1"/>
-          </p:cNvPicPr>
-          <p:nvPr/>
-        </p:nvPicPr>
-        <p:blipFill>
-          <a:blip r:embed="rId1"/>
-          <a:stretch>
-            <a:fillRect/>
-          </a:stretch>
-        </p:blipFill>
-        <p:spPr>
-          <a:xfrm>
-            <a:off x="0" y="0"/>
-            <a:ext cx="12191695" cy="6858000"/>
-          </a:xfrm>
-          <a:prstGeom prst="rect">
-            <a:avLst/>
-          </a:prstGeom>
-        </p:spPr>
-      </p:pic>
-      <p:pic>
-        <p:nvPicPr>
-          <p:cNvPr id="3" name="Image 1" descr="gdex_lockup_white.png">    </p:cNvPr>
-          <p:cNvPicPr>
-            <a:picLocks noChangeAspect="1"/>
-          </p:cNvPicPr>
-          <p:nvPr/>
-        </p:nvPicPr>
-        <p:blipFill>
-          <a:blip r:embed="rId2"/>
-          <a:stretch>
-            <a:fillRect/>
-          </a:stretch>
-        </p:blipFill>
-        <p:spPr>
-          <a:xfrm>
-            <a:off x="612648" y="365760"/>
-            <a:ext cx="1024128" cy="521208"/>
-          </a:xfrm>
-          <a:prstGeom prst="rect">
-            <a:avLst/>
-          </a:prstGeom>
-        </p:spPr>
-      </p:pic>
-      <p:pic>
-        <p:nvPicPr>
-          <p:cNvPr id="4" name="Image 2" descr="nsf_ncar_logo_white.png">    </p:cNvPr>
-          <p:cNvPicPr>
-            <a:picLocks noChangeAspect="1"/>
-          </p:cNvPicPr>
-          <p:nvPr/>
-        </p:nvPicPr>
-        <p:blipFill>
-          <a:blip r:embed="rId3"/>
-          <a:stretch>
-            <a:fillRect/>
-          </a:stretch>
-        </p:blipFill>
-        <p:spPr>
-          <a:xfrm>
-            <a:off x="9683496" y="393192"/>
-            <a:ext cx="1892808" cy="521208"/>
-          </a:xfrm>
-          <a:prstGeom prst="rect">
-            <a:avLst/>
-          </a:prstGeom>
-        </p:spPr>
-      </p:pic>
-      <p:sp>
-        <p:nvSpPr>
-          <p:cNvPr id="5" name="Text 0"/>
+      <p:sp>
+        <p:nvSpPr>
+          <p:cNvPr id="2" name="Text 0"/>
+          <p:cNvSpPr/>
+          <p:nvPr/>
+        </p:nvSpPr>
+        <p:spPr>
+          <a:xfrm>
+            <a:off x="457200" y="384048"/>
+            <a:ext cx="8229600" cy="274320"/>
+          </a:xfrm>
+          <a:prstGeom prst="rect">
+            <a:avLst/>
+          </a:prstGeom>
+          <a:noFill/>
+          <a:ln/>
+        </p:spPr>
+        <p:txBody>
+          <a:bodyPr wrap="square" lIns="0" tIns="0" rIns="0" bIns="0" rtlCol="0" anchor="ctr"/>
+          <a:lstStyle/>
+          <a:p>
+            <a:pPr indent="0" marL="0">
+              <a:buNone/>
+            </a:pPr>
+            <a:r>
+              <a:rPr lang="en-US" sz="1200" b="1" spc="200" kern="0" dirty="0">
+                <a:solidFill>
+                  <a:srgbClr val="0097A7"/>
+                </a:solidFill>
+                <a:latin typeface="Poppins" pitchFamily="34" charset="0"/>
+                <a:ea typeface="Poppins" pitchFamily="34" charset="-122"/>
+                <a:cs typeface="Poppins" pitchFamily="34" charset="-120"/>
+              </a:rPr>
+              <a:t>RECOVERY</a:t>
+            </a:r>
+            <a:endParaRPr lang="en-US" sz="1200" dirty="0"/>
+          </a:p>
+        </p:txBody>
+      </p:sp>
+      <p:sp>
+        <p:nvSpPr>
+          <p:cNvPr id="3" name="Text 1"/>
+          <p:cNvSpPr/>
+          <p:nvPr/>
+        </p:nvSpPr>
+        <p:spPr>
+          <a:xfrm>
+            <a:off x="457200" y="658368"/>
+            <a:ext cx="9326880" cy="640080"/>
+          </a:xfrm>
+          <a:prstGeom prst="rect">
+            <a:avLst/>
+          </a:prstGeom>
+          <a:noFill/>
+          <a:ln/>
+        </p:spPr>
+        <p:txBody>
+          <a:bodyPr wrap="square" lIns="0" tIns="0" rIns="0" bIns="0" rtlCol="0" anchor="ctr"/>
+          <a:lstStyle/>
+          <a:p>
+            <a:pPr indent="0" marL="0">
+              <a:buNone/>
+            </a:pPr>
+            <a:r>
+              <a:rPr lang="en-US" sz="3200" b="1" dirty="0">
+                <a:solidFill>
+                  <a:srgbClr val="00357A"/>
+                </a:solidFill>
+                <a:latin typeface="Poppins" pitchFamily="34" charset="0"/>
+                <a:ea typeface="Poppins" pitchFamily="34" charset="-122"/>
+                <a:cs typeface="Poppins" pitchFamily="34" charset="-120"/>
+              </a:rPr>
+              <a:t>dsarch -RQ  —  How a File Comes Back</a:t>
+            </a:r>
+            <a:endParaRPr lang="en-US" sz="3200" dirty="0"/>
+          </a:p>
+        </p:txBody>
+      </p:sp>
+      <p:sp>
+        <p:nvSpPr>
+          <p:cNvPr id="4" name="Text 2"/>
+          <p:cNvSpPr/>
+          <p:nvPr/>
+        </p:nvSpPr>
+        <p:spPr>
+          <a:xfrm>
+            <a:off x="457200" y="1463040"/>
+            <a:ext cx="11292840" cy="457200"/>
+          </a:xfrm>
+          <a:prstGeom prst="rect">
+            <a:avLst/>
+          </a:prstGeom>
+          <a:noFill/>
+          <a:ln/>
+        </p:spPr>
+        <p:txBody>
+          <a:bodyPr wrap="square" lIns="0" tIns="0" rIns="0" bIns="0" rtlCol="0" anchor="t"/>
+          <a:lstStyle/>
+          <a:p>
+            <a:pPr indent="0" marL="0">
+              <a:lnSpc>
+                <a:spcPct val="110000"/>
+              </a:lnSpc>
+              <a:buNone/>
+            </a:pPr>
+            <a:r>
+              <a:rPr lang="en-US" sz="1450" dirty="0">
+                <a:solidFill>
+                  <a:srgbClr val="00357A"/>
+                </a:solidFill>
+                <a:latin typeface="Poppins" pitchFamily="34" charset="0"/>
+                <a:ea typeface="Poppins" pitchFamily="34" charset="-122"/>
+                <a:cs typeface="Poppins" pitchFamily="34" charset="-120"/>
+              </a:rPr>
+              <a:t>Name the files you want back and dsarch does the rest. The outline below is enough to run a restore; the dsarch guide covers the options in full.</a:t>
+            </a:r>
+            <a:endParaRPr lang="en-US" sz="1450" dirty="0"/>
+          </a:p>
+        </p:txBody>
+      </p:sp>
+      <p:sp>
+        <p:nvSpPr>
+          <p:cNvPr id="5" name="Shape 3"/>
+          <p:cNvSpPr/>
+          <p:nvPr/>
+        </p:nvSpPr>
+        <p:spPr>
+          <a:xfrm>
+            <a:off x="457200" y="2029968"/>
+            <a:ext cx="11292840" cy="566928"/>
+          </a:xfrm>
+          <a:prstGeom prst="roundRect">
+            <a:avLst>
+              <a:gd name="adj" fmla="val 8065"/>
+            </a:avLst>
+          </a:prstGeom>
+          <a:solidFill>
+            <a:srgbClr val="011837"/>
+          </a:solidFill>
+          <a:ln/>
+        </p:spPr>
+      </p:sp>
+      <p:sp>
+        <p:nvSpPr>
+          <p:cNvPr id="6" name="Text 4"/>
+          <p:cNvSpPr/>
+          <p:nvPr/>
+        </p:nvSpPr>
+        <p:spPr>
+          <a:xfrm>
+            <a:off x="585216" y="2029968"/>
+            <a:ext cx="11036808" cy="566928"/>
+          </a:xfrm>
+          <a:prstGeom prst="rect">
+            <a:avLst/>
+          </a:prstGeom>
+          <a:noFill/>
+          <a:ln/>
+        </p:spPr>
+        <p:txBody>
+          <a:bodyPr wrap="square" lIns="0" tIns="0" rIns="0" bIns="0" rtlCol="0" anchor="ctr"/>
+          <a:lstStyle/>
+          <a:p>
+            <a:pPr indent="0" marL="0">
+              <a:lnSpc>
+                <a:spcPct val="100000"/>
+              </a:lnSpc>
+              <a:buNone/>
+            </a:pPr>
+            <a:r>
+              <a:rPr lang="en-US" sz="1250" dirty="0">
+                <a:solidFill>
+                  <a:srgbClr val="0097A7"/>
+                </a:solidFill>
+                <a:latin typeface="Courier New" pitchFamily="34" charset="0"/>
+                <a:ea typeface="Courier New" pitchFamily="34" charset="-122"/>
+                <a:cs typeface="Courier New" pitchFamily="34" charset="-120"/>
+              </a:rPr>
+              <a:t>dsarch &lt;dsid&gt; -RQ -WF &lt;web files&gt;   [-WT &lt;types&gt;]</a:t>
+            </a:r>
+            <a:endParaRPr lang="en-US" sz="1250" dirty="0"/>
+          </a:p>
+          <a:p>
+            <a:pPr indent="0" marL="0">
+              <a:lnSpc>
+                <a:spcPct val="100000"/>
+              </a:lnSpc>
+              <a:buNone/>
+            </a:pPr>
+            <a:r>
+              <a:rPr lang="en-US" sz="1250" dirty="0">
+                <a:solidFill>
+                  <a:srgbClr val="0097A7"/>
+                </a:solidFill>
+                <a:latin typeface="Courier New" pitchFamily="34" charset="0"/>
+                <a:ea typeface="Courier New" pitchFamily="34" charset="-122"/>
+                <a:cs typeface="Courier New" pitchFamily="34" charset="-120"/>
+              </a:rPr>
+              <a:t>dsarch &lt;dsid&gt; -RQ -SF &lt;saved files&gt;  -ST &lt;types&gt;     # or -QF &lt;tar&gt; for a whole tar</a:t>
+            </a:r>
+            <a:endParaRPr lang="en-US" sz="1250" dirty="0"/>
+          </a:p>
+        </p:txBody>
+      </p:sp>
+      <p:sp>
+        <p:nvSpPr>
+          <p:cNvPr id="7" name="Shape 5"/>
+          <p:cNvSpPr/>
+          <p:nvPr/>
+        </p:nvSpPr>
+        <p:spPr>
+          <a:xfrm>
+            <a:off x="457200" y="2761488"/>
+            <a:ext cx="11292840" cy="548640"/>
+          </a:xfrm>
+          <a:prstGeom prst="roundRect">
+            <a:avLst>
+              <a:gd name="adj" fmla="val 11667"/>
+            </a:avLst>
+          </a:prstGeom>
+          <a:solidFill>
+            <a:srgbClr val="DCEBF7"/>
+          </a:solidFill>
+          <a:ln/>
+        </p:spPr>
+      </p:sp>
+      <p:sp>
+        <p:nvSpPr>
+          <p:cNvPr id="8" name="Shape 6"/>
+          <p:cNvSpPr/>
+          <p:nvPr/>
+        </p:nvSpPr>
+        <p:spPr>
+          <a:xfrm>
+            <a:off x="621792" y="2834640"/>
+            <a:ext cx="402336" cy="402336"/>
+          </a:xfrm>
+          <a:prstGeom prst="ellipse">
+            <a:avLst/>
+          </a:prstGeom>
+          <a:solidFill>
+            <a:srgbClr val="0057C2"/>
+          </a:solidFill>
+          <a:ln/>
+        </p:spPr>
+      </p:sp>
+      <p:sp>
+        <p:nvSpPr>
+          <p:cNvPr id="9" name="Text 7"/>
+          <p:cNvSpPr/>
+          <p:nvPr/>
+        </p:nvSpPr>
+        <p:spPr>
+          <a:xfrm>
+            <a:off x="621792" y="2834640"/>
+            <a:ext cx="402336" cy="402336"/>
+          </a:xfrm>
+          <a:prstGeom prst="rect">
+            <a:avLst/>
+          </a:prstGeom>
+          <a:noFill/>
+          <a:ln/>
+        </p:spPr>
+        <p:txBody>
+          <a:bodyPr wrap="square" lIns="0" tIns="0" rIns="0" bIns="0" rtlCol="0" anchor="ctr"/>
+          <a:lstStyle/>
+          <a:p>
+            <a:pPr algn="ctr" indent="0" marL="0">
+              <a:buNone/>
+            </a:pPr>
+            <a:r>
+              <a:rPr lang="en-US" sz="1300" b="1" dirty="0">
+                <a:solidFill>
+                  <a:srgbClr val="FFFFFF"/>
+                </a:solidFill>
+                <a:latin typeface="Poppins" pitchFamily="34" charset="0"/>
+                <a:ea typeface="Poppins" pitchFamily="34" charset="-122"/>
+                <a:cs typeface="Poppins" pitchFamily="34" charset="-120"/>
+              </a:rPr>
+              <a:t>1</a:t>
+            </a:r>
+            <a:endParaRPr lang="en-US" sz="1300" dirty="0"/>
+          </a:p>
+        </p:txBody>
+      </p:sp>
+      <p:sp>
+        <p:nvSpPr>
+          <p:cNvPr id="10" name="Text 8"/>
+          <p:cNvSpPr/>
+          <p:nvPr/>
+        </p:nvSpPr>
+        <p:spPr>
+          <a:xfrm>
+            <a:off x="1170432" y="2761488"/>
+            <a:ext cx="1874520" cy="548640"/>
+          </a:xfrm>
+          <a:prstGeom prst="rect">
+            <a:avLst/>
+          </a:prstGeom>
+          <a:noFill/>
+          <a:ln/>
+        </p:spPr>
+        <p:txBody>
+          <a:bodyPr wrap="square" lIns="0" tIns="0" rIns="0" bIns="0" rtlCol="0" anchor="ctr"/>
+          <a:lstStyle/>
+          <a:p>
+            <a:pPr indent="0" marL="0">
+              <a:buNone/>
+            </a:pPr>
+            <a:r>
+              <a:rPr lang="en-US" sz="1250" b="1" dirty="0">
+                <a:solidFill>
+                  <a:srgbClr val="00357A"/>
+                </a:solidFill>
+                <a:latin typeface="Poppins" pitchFamily="34" charset="0"/>
+                <a:ea typeface="Poppins" pitchFamily="34" charset="-122"/>
+                <a:cs typeface="Poppins" pitchFamily="34" charset="-120"/>
+              </a:rPr>
+              <a:t>Name the files</a:t>
+            </a:r>
+            <a:endParaRPr lang="en-US" sz="1250" dirty="0"/>
+          </a:p>
+        </p:txBody>
+      </p:sp>
+      <p:sp>
+        <p:nvSpPr>
+          <p:cNvPr id="11" name="Text 9"/>
+          <p:cNvSpPr/>
+          <p:nvPr/>
+        </p:nvSpPr>
+        <p:spPr>
+          <a:xfrm>
+            <a:off x="3063240" y="2761488"/>
+            <a:ext cx="8503920" cy="548640"/>
+          </a:xfrm>
+          <a:prstGeom prst="rect">
+            <a:avLst/>
+          </a:prstGeom>
+          <a:noFill/>
+          <a:ln/>
+        </p:spPr>
+        <p:txBody>
+          <a:bodyPr wrap="square" lIns="0" tIns="0" rIns="0" bIns="0" rtlCol="0" anchor="ctr"/>
+          <a:lstStyle/>
+          <a:p>
+            <a:pPr indent="0" marL="0">
+              <a:lnSpc>
+                <a:spcPct val="95000"/>
+              </a:lnSpc>
+              <a:buNone/>
+            </a:pPr>
+            <a:r>
+              <a:rPr lang="en-US" sz="1050" dirty="0">
+                <a:solidFill>
+                  <a:srgbClr val="53565A"/>
+                </a:solidFill>
+                <a:latin typeface="Poppins" pitchFamily="34" charset="0"/>
+                <a:ea typeface="Poppins" pitchFamily="34" charset="-122"/>
+                <a:cs typeface="Poppins" pitchFamily="34" charset="-120"/>
+              </a:rPr>
+              <a:t>-WF for web files, -SF plus -ST for saved files. -QF names a Quasar tar directly, and pulls it down without restoring anything.</a:t>
+            </a:r>
+            <a:endParaRPr lang="en-US" sz="1050" dirty="0"/>
+          </a:p>
+        </p:txBody>
+      </p:sp>
+      <p:sp>
+        <p:nvSpPr>
+          <p:cNvPr id="12" name="Shape 10"/>
+          <p:cNvSpPr/>
+          <p:nvPr/>
+        </p:nvSpPr>
+        <p:spPr>
+          <a:xfrm>
+            <a:off x="457200" y="3383280"/>
+            <a:ext cx="11292840" cy="548640"/>
+          </a:xfrm>
+          <a:prstGeom prst="roundRect">
+            <a:avLst>
+              <a:gd name="adj" fmla="val 11667"/>
+            </a:avLst>
+          </a:prstGeom>
+          <a:solidFill>
+            <a:srgbClr val="DCEBF7"/>
+          </a:solidFill>
+          <a:ln/>
+        </p:spPr>
+      </p:sp>
+      <p:sp>
+        <p:nvSpPr>
+          <p:cNvPr id="13" name="Shape 11"/>
+          <p:cNvSpPr/>
+          <p:nvPr/>
+        </p:nvSpPr>
+        <p:spPr>
+          <a:xfrm>
+            <a:off x="621792" y="3456432"/>
+            <a:ext cx="402336" cy="402336"/>
+          </a:xfrm>
+          <a:prstGeom prst="ellipse">
+            <a:avLst/>
+          </a:prstGeom>
+          <a:solidFill>
+            <a:srgbClr val="0092DB"/>
+          </a:solidFill>
+          <a:ln/>
+        </p:spPr>
+      </p:sp>
+      <p:sp>
+        <p:nvSpPr>
+          <p:cNvPr id="14" name="Text 12"/>
+          <p:cNvSpPr/>
+          <p:nvPr/>
+        </p:nvSpPr>
+        <p:spPr>
+          <a:xfrm>
+            <a:off x="621792" y="3456432"/>
+            <a:ext cx="402336" cy="402336"/>
+          </a:xfrm>
+          <a:prstGeom prst="rect">
+            <a:avLst/>
+          </a:prstGeom>
+          <a:noFill/>
+          <a:ln/>
+        </p:spPr>
+        <p:txBody>
+          <a:bodyPr wrap="square" lIns="0" tIns="0" rIns="0" bIns="0" rtlCol="0" anchor="ctr"/>
+          <a:lstStyle/>
+          <a:p>
+            <a:pPr algn="ctr" indent="0" marL="0">
+              <a:buNone/>
+            </a:pPr>
+            <a:r>
+              <a:rPr lang="en-US" sz="1300" b="1" dirty="0">
+                <a:solidFill>
+                  <a:srgbClr val="FFFFFF"/>
+                </a:solidFill>
+                <a:latin typeface="Poppins" pitchFamily="34" charset="0"/>
+                <a:ea typeface="Poppins" pitchFamily="34" charset="-122"/>
+                <a:cs typeface="Poppins" pitchFamily="34" charset="-120"/>
+              </a:rPr>
+              <a:t>2</a:t>
+            </a:r>
+            <a:endParaRPr lang="en-US" sz="1300" dirty="0"/>
+          </a:p>
+        </p:txBody>
+      </p:sp>
+      <p:sp>
+        <p:nvSpPr>
+          <p:cNvPr id="15" name="Text 13"/>
+          <p:cNvSpPr/>
+          <p:nvPr/>
+        </p:nvSpPr>
+        <p:spPr>
+          <a:xfrm>
+            <a:off x="1170432" y="3383280"/>
+            <a:ext cx="1874520" cy="548640"/>
+          </a:xfrm>
+          <a:prstGeom prst="rect">
+            <a:avLst/>
+          </a:prstGeom>
+          <a:noFill/>
+          <a:ln/>
+        </p:spPr>
+        <p:txBody>
+          <a:bodyPr wrap="square" lIns="0" tIns="0" rIns="0" bIns="0" rtlCol="0" anchor="ctr"/>
+          <a:lstStyle/>
+          <a:p>
+            <a:pPr indent="0" marL="0">
+              <a:buNone/>
+            </a:pPr>
+            <a:r>
+              <a:rPr lang="en-US" sz="1250" b="1" dirty="0">
+                <a:solidFill>
+                  <a:srgbClr val="00357A"/>
+                </a:solidFill>
+                <a:latin typeface="Poppins" pitchFamily="34" charset="0"/>
+                <a:ea typeface="Poppins" pitchFamily="34" charset="-122"/>
+                <a:cs typeface="Poppins" pitchFamily="34" charset="-120"/>
+              </a:rPr>
+              <a:t>Find the tar</a:t>
+            </a:r>
+            <a:endParaRPr lang="en-US" sz="1250" dirty="0"/>
+          </a:p>
+        </p:txBody>
+      </p:sp>
+      <p:sp>
+        <p:nvSpPr>
+          <p:cNvPr id="16" name="Text 14"/>
+          <p:cNvSpPr/>
+          <p:nvPr/>
+        </p:nvSpPr>
+        <p:spPr>
+          <a:xfrm>
+            <a:off x="3063240" y="3383280"/>
+            <a:ext cx="8503920" cy="548640"/>
+          </a:xfrm>
+          <a:prstGeom prst="rect">
+            <a:avLst/>
+          </a:prstGeom>
+          <a:noFill/>
+          <a:ln/>
+        </p:spPr>
+        <p:txBody>
+          <a:bodyPr wrap="square" lIns="0" tIns="0" rIns="0" bIns="0" rtlCol="0" anchor="ctr"/>
+          <a:lstStyle/>
+          <a:p>
+            <a:pPr indent="0" marL="0">
+              <a:lnSpc>
+                <a:spcPct val="95000"/>
+              </a:lnSpc>
+              <a:buNone/>
+            </a:pPr>
+            <a:r>
+              <a:rPr lang="en-US" sz="1050" dirty="0">
+                <a:solidFill>
+                  <a:srgbClr val="53565A"/>
+                </a:solidFill>
+                <a:latin typeface="Poppins" pitchFamily="34" charset="0"/>
+                <a:ea typeface="Poppins" pitchFamily="34" charset="-122"/>
+                <a:cs typeface="Poppins" pitchFamily="34" charset="-120"/>
+              </a:rPr>
+              <a:t>Each wfile and sfile record carries the bid of the backup it went into, so one lookup gives the tar name, its end point and its path.</a:t>
+            </a:r>
+            <a:endParaRPr lang="en-US" sz="1050" dirty="0"/>
+          </a:p>
+        </p:txBody>
+      </p:sp>
+      <p:sp>
+        <p:nvSpPr>
+          <p:cNvPr id="17" name="Shape 15"/>
+          <p:cNvSpPr/>
+          <p:nvPr/>
+        </p:nvSpPr>
+        <p:spPr>
+          <a:xfrm>
+            <a:off x="457200" y="4005072"/>
+            <a:ext cx="11292840" cy="548640"/>
+          </a:xfrm>
+          <a:prstGeom prst="roundRect">
+            <a:avLst>
+              <a:gd name="adj" fmla="val 11667"/>
+            </a:avLst>
+          </a:prstGeom>
+          <a:solidFill>
+            <a:srgbClr val="DCEBF7"/>
+          </a:solidFill>
+          <a:ln/>
+        </p:spPr>
+      </p:sp>
+      <p:sp>
+        <p:nvSpPr>
+          <p:cNvPr id="18" name="Shape 16"/>
+          <p:cNvSpPr/>
+          <p:nvPr/>
+        </p:nvSpPr>
+        <p:spPr>
+          <a:xfrm>
+            <a:off x="621792" y="4078224"/>
+            <a:ext cx="402336" cy="402336"/>
+          </a:xfrm>
+          <a:prstGeom prst="ellipse">
+            <a:avLst/>
+          </a:prstGeom>
+          <a:solidFill>
+            <a:srgbClr val="0097A7"/>
+          </a:solidFill>
+          <a:ln/>
+        </p:spPr>
+      </p:sp>
+      <p:sp>
+        <p:nvSpPr>
+          <p:cNvPr id="19" name="Text 17"/>
+          <p:cNvSpPr/>
+          <p:nvPr/>
+        </p:nvSpPr>
+        <p:spPr>
+          <a:xfrm>
+            <a:off x="621792" y="4078224"/>
+            <a:ext cx="402336" cy="402336"/>
+          </a:xfrm>
+          <a:prstGeom prst="rect">
+            <a:avLst/>
+          </a:prstGeom>
+          <a:noFill/>
+          <a:ln/>
+        </p:spPr>
+        <p:txBody>
+          <a:bodyPr wrap="square" lIns="0" tIns="0" rIns="0" bIns="0" rtlCol="0" anchor="ctr"/>
+          <a:lstStyle/>
+          <a:p>
+            <a:pPr algn="ctr" indent="0" marL="0">
+              <a:buNone/>
+            </a:pPr>
+            <a:r>
+              <a:rPr lang="en-US" sz="1300" b="1" dirty="0">
+                <a:solidFill>
+                  <a:srgbClr val="FFFFFF"/>
+                </a:solidFill>
+                <a:latin typeface="Poppins" pitchFamily="34" charset="0"/>
+                <a:ea typeface="Poppins" pitchFamily="34" charset="-122"/>
+                <a:cs typeface="Poppins" pitchFamily="34" charset="-120"/>
+              </a:rPr>
+              <a:t>3</a:t>
+            </a:r>
+            <a:endParaRPr lang="en-US" sz="1300" dirty="0"/>
+          </a:p>
+        </p:txBody>
+      </p:sp>
+      <p:sp>
+        <p:nvSpPr>
+          <p:cNvPr id="20" name="Text 18"/>
+          <p:cNvSpPr/>
+          <p:nvPr/>
+        </p:nvSpPr>
+        <p:spPr>
+          <a:xfrm>
+            <a:off x="1170432" y="4005072"/>
+            <a:ext cx="1874520" cy="548640"/>
+          </a:xfrm>
+          <a:prstGeom prst="rect">
+            <a:avLst/>
+          </a:prstGeom>
+          <a:noFill/>
+          <a:ln/>
+        </p:spPr>
+        <p:txBody>
+          <a:bodyPr wrap="square" lIns="0" tIns="0" rIns="0" bIns="0" rtlCol="0" anchor="ctr"/>
+          <a:lstStyle/>
+          <a:p>
+            <a:pPr indent="0" marL="0">
+              <a:buNone/>
+            </a:pPr>
+            <a:r>
+              <a:rPr lang="en-US" sz="1250" b="1" dirty="0">
+                <a:solidFill>
+                  <a:srgbClr val="00357A"/>
+                </a:solidFill>
+                <a:latin typeface="Poppins" pitchFamily="34" charset="0"/>
+                <a:ea typeface="Poppins" pitchFamily="34" charset="-122"/>
+                <a:cs typeface="Poppins" pitchFamily="34" charset="-120"/>
+              </a:rPr>
+              <a:t>Fetch it once</a:t>
+            </a:r>
+            <a:endParaRPr lang="en-US" sz="1250" dirty="0"/>
+          </a:p>
+        </p:txBody>
+      </p:sp>
+      <p:sp>
+        <p:nvSpPr>
+          <p:cNvPr id="21" name="Text 19"/>
+          <p:cNvSpPr/>
+          <p:nvPr/>
+        </p:nvSpPr>
+        <p:spPr>
+          <a:xfrm>
+            <a:off x="3063240" y="4005072"/>
+            <a:ext cx="8503920" cy="548640"/>
+          </a:xfrm>
+          <a:prstGeom prst="rect">
+            <a:avLst/>
+          </a:prstGeom>
+          <a:noFill/>
+          <a:ln/>
+        </p:spPr>
+        <p:txBody>
+          <a:bodyPr wrap="square" lIns="0" tIns="0" rIns="0" bIns="0" rtlCol="0" anchor="ctr"/>
+          <a:lstStyle/>
+          <a:p>
+            <a:pPr indent="0" marL="0">
+              <a:lnSpc>
+                <a:spcPct val="95000"/>
+              </a:lnSpc>
+              <a:buNone/>
+            </a:pPr>
+            <a:r>
+              <a:rPr lang="en-US" sz="1050" dirty="0">
+                <a:solidFill>
+                  <a:srgbClr val="53565A"/>
+                </a:solidFill>
+                <a:latin typeface="Poppins" pitchFamily="34" charset="0"/>
+                <a:ea typeface="Poppins" pitchFamily="34" charset="-122"/>
+                <a:cs typeface="Poppins" pitchFamily="34" charset="-120"/>
+              </a:rPr>
+              <a:t>The tar is transferred from gdex-quasar into the dataset work area. A tar already sitting there is reused, so several files out of one tar cost one transfer.</a:t>
+            </a:r>
+            <a:endParaRPr lang="en-US" sz="1050" dirty="0"/>
+          </a:p>
+        </p:txBody>
+      </p:sp>
+      <p:sp>
+        <p:nvSpPr>
+          <p:cNvPr id="22" name="Shape 20"/>
+          <p:cNvSpPr/>
+          <p:nvPr/>
+        </p:nvSpPr>
+        <p:spPr>
+          <a:xfrm>
+            <a:off x="457200" y="4626864"/>
+            <a:ext cx="11292840" cy="548640"/>
+          </a:xfrm>
+          <a:prstGeom prst="roundRect">
+            <a:avLst>
+              <a:gd name="adj" fmla="val 11667"/>
+            </a:avLst>
+          </a:prstGeom>
+          <a:solidFill>
+            <a:srgbClr val="DCEBF7"/>
+          </a:solidFill>
+          <a:ln/>
+        </p:spPr>
+      </p:sp>
+      <p:sp>
+        <p:nvSpPr>
+          <p:cNvPr id="23" name="Shape 21"/>
+          <p:cNvSpPr/>
+          <p:nvPr/>
+        </p:nvSpPr>
+        <p:spPr>
+          <a:xfrm>
+            <a:off x="621792" y="4700016"/>
+            <a:ext cx="402336" cy="402336"/>
+          </a:xfrm>
+          <a:prstGeom prst="ellipse">
+            <a:avLst/>
+          </a:prstGeom>
+          <a:solidFill>
+            <a:srgbClr val="C25E00"/>
+          </a:solidFill>
+          <a:ln/>
+        </p:spPr>
+      </p:sp>
+      <p:sp>
+        <p:nvSpPr>
+          <p:cNvPr id="24" name="Text 22"/>
+          <p:cNvSpPr/>
+          <p:nvPr/>
+        </p:nvSpPr>
+        <p:spPr>
+          <a:xfrm>
+            <a:off x="621792" y="4700016"/>
+            <a:ext cx="402336" cy="402336"/>
+          </a:xfrm>
+          <a:prstGeom prst="rect">
+            <a:avLst/>
+          </a:prstGeom>
+          <a:noFill/>
+          <a:ln/>
+        </p:spPr>
+        <p:txBody>
+          <a:bodyPr wrap="square" lIns="0" tIns="0" rIns="0" bIns="0" rtlCol="0" anchor="ctr"/>
+          <a:lstStyle/>
+          <a:p>
+            <a:pPr algn="ctr" indent="0" marL="0">
+              <a:buNone/>
+            </a:pPr>
+            <a:r>
+              <a:rPr lang="en-US" sz="1300" b="1" dirty="0">
+                <a:solidFill>
+                  <a:srgbClr val="FFFFFF"/>
+                </a:solidFill>
+                <a:latin typeface="Poppins" pitchFamily="34" charset="0"/>
+                <a:ea typeface="Poppins" pitchFamily="34" charset="-122"/>
+                <a:cs typeface="Poppins" pitchFamily="34" charset="-120"/>
+              </a:rPr>
+              <a:t>4</a:t>
+            </a:r>
+            <a:endParaRPr lang="en-US" sz="1300" dirty="0"/>
+          </a:p>
+        </p:txBody>
+      </p:sp>
+      <p:sp>
+        <p:nvSpPr>
+          <p:cNvPr id="25" name="Text 23"/>
+          <p:cNvSpPr/>
+          <p:nvPr/>
+        </p:nvSpPr>
+        <p:spPr>
+          <a:xfrm>
+            <a:off x="1170432" y="4626864"/>
+            <a:ext cx="1874520" cy="548640"/>
+          </a:xfrm>
+          <a:prstGeom prst="rect">
+            <a:avLst/>
+          </a:prstGeom>
+          <a:noFill/>
+          <a:ln/>
+        </p:spPr>
+        <p:txBody>
+          <a:bodyPr wrap="square" lIns="0" tIns="0" rIns="0" bIns="0" rtlCol="0" anchor="ctr"/>
+          <a:lstStyle/>
+          <a:p>
+            <a:pPr indent="0" marL="0">
+              <a:buNone/>
+            </a:pPr>
+            <a:r>
+              <a:rPr lang="en-US" sz="1250" b="1" dirty="0">
+                <a:solidFill>
+                  <a:srgbClr val="00357A"/>
+                </a:solidFill>
+                <a:latin typeface="Poppins" pitchFamily="34" charset="0"/>
+                <a:ea typeface="Poppins" pitchFamily="34" charset="-122"/>
+                <a:cs typeface="Poppins" pitchFamily="34" charset="-120"/>
+              </a:rPr>
+              <a:t>Unpack what was asked</a:t>
+            </a:r>
+            <a:endParaRPr lang="en-US" sz="1250" dirty="0"/>
+          </a:p>
+        </p:txBody>
+      </p:sp>
+      <p:sp>
+        <p:nvSpPr>
+          <p:cNvPr id="26" name="Text 24"/>
+          <p:cNvSpPr/>
+          <p:nvPr/>
+        </p:nvSpPr>
+        <p:spPr>
+          <a:xfrm>
+            <a:off x="3063240" y="4626864"/>
+            <a:ext cx="8503920" cy="548640"/>
+          </a:xfrm>
+          <a:prstGeom prst="rect">
+            <a:avLst/>
+          </a:prstGeom>
+          <a:noFill/>
+          <a:ln/>
+        </p:spPr>
+        <p:txBody>
+          <a:bodyPr wrap="square" lIns="0" tIns="0" rIns="0" bIns="0" rtlCol="0" anchor="ctr"/>
+          <a:lstStyle/>
+          <a:p>
+            <a:pPr indent="0" marL="0">
+              <a:lnSpc>
+                <a:spcPct val="95000"/>
+              </a:lnSpc>
+              <a:buNone/>
+            </a:pPr>
+            <a:r>
+              <a:rPr lang="en-US" sz="1050" dirty="0">
+                <a:solidFill>
+                  <a:srgbClr val="53565A"/>
+                </a:solidFill>
+                <a:latin typeface="Poppins" pitchFamily="34" charset="0"/>
+                <a:ea typeface="Poppins" pitchFamily="34" charset="-122"/>
+                <a:cs typeface="Poppins" pitchFamily="34" charset="-120"/>
+              </a:rPr>
+              <a:t>The member list in the bfile note locates each file inside the tar — including any later rename — and only those members are extracted.</a:t>
+            </a:r>
+            <a:endParaRPr lang="en-US" sz="1050" dirty="0"/>
+          </a:p>
+        </p:txBody>
+      </p:sp>
+      <p:sp>
+        <p:nvSpPr>
+          <p:cNvPr id="27" name="Shape 25"/>
+          <p:cNvSpPr/>
+          <p:nvPr/>
+        </p:nvSpPr>
+        <p:spPr>
+          <a:xfrm>
+            <a:off x="457200" y="5248656"/>
+            <a:ext cx="11292840" cy="548640"/>
+          </a:xfrm>
+          <a:prstGeom prst="roundRect">
+            <a:avLst>
+              <a:gd name="adj" fmla="val 11667"/>
+            </a:avLst>
+          </a:prstGeom>
+          <a:solidFill>
+            <a:srgbClr val="DCEBF7"/>
+          </a:solidFill>
+          <a:ln/>
+        </p:spPr>
+      </p:sp>
+      <p:sp>
+        <p:nvSpPr>
+          <p:cNvPr id="28" name="Shape 26"/>
+          <p:cNvSpPr/>
+          <p:nvPr/>
+        </p:nvSpPr>
+        <p:spPr>
+          <a:xfrm>
+            <a:off x="621792" y="5321808"/>
+            <a:ext cx="402336" cy="402336"/>
+          </a:xfrm>
+          <a:prstGeom prst="ellipse">
+            <a:avLst/>
+          </a:prstGeom>
+          <a:solidFill>
+            <a:srgbClr val="0057C2"/>
+          </a:solidFill>
+          <a:ln/>
+        </p:spPr>
+      </p:sp>
+      <p:sp>
+        <p:nvSpPr>
+          <p:cNvPr id="29" name="Text 27"/>
+          <p:cNvSpPr/>
+          <p:nvPr/>
+        </p:nvSpPr>
+        <p:spPr>
+          <a:xfrm>
+            <a:off x="621792" y="5321808"/>
+            <a:ext cx="402336" cy="402336"/>
+          </a:xfrm>
+          <a:prstGeom prst="rect">
+            <a:avLst/>
+          </a:prstGeom>
+          <a:noFill/>
+          <a:ln/>
+        </p:spPr>
+        <p:txBody>
+          <a:bodyPr wrap="square" lIns="0" tIns="0" rIns="0" bIns="0" rtlCol="0" anchor="ctr"/>
+          <a:lstStyle/>
+          <a:p>
+            <a:pPr algn="ctr" indent="0" marL="0">
+              <a:buNone/>
+            </a:pPr>
+            <a:r>
+              <a:rPr lang="en-US" sz="1300" b="1" dirty="0">
+                <a:solidFill>
+                  <a:srgbClr val="FFFFFF"/>
+                </a:solidFill>
+                <a:latin typeface="Poppins" pitchFamily="34" charset="0"/>
+                <a:ea typeface="Poppins" pitchFamily="34" charset="-122"/>
+                <a:cs typeface="Poppins" pitchFamily="34" charset="-120"/>
+              </a:rPr>
+              <a:t>5</a:t>
+            </a:r>
+            <a:endParaRPr lang="en-US" sz="1300" dirty="0"/>
+          </a:p>
+        </p:txBody>
+      </p:sp>
+      <p:sp>
+        <p:nvSpPr>
+          <p:cNvPr id="30" name="Text 28"/>
+          <p:cNvSpPr/>
+          <p:nvPr/>
+        </p:nvSpPr>
+        <p:spPr>
+          <a:xfrm>
+            <a:off x="1170432" y="5248656"/>
+            <a:ext cx="1874520" cy="548640"/>
+          </a:xfrm>
+          <a:prstGeom prst="rect">
+            <a:avLst/>
+          </a:prstGeom>
+          <a:noFill/>
+          <a:ln/>
+        </p:spPr>
+        <p:txBody>
+          <a:bodyPr wrap="square" lIns="0" tIns="0" rIns="0" bIns="0" rtlCol="0" anchor="ctr"/>
+          <a:lstStyle/>
+          <a:p>
+            <a:pPr indent="0" marL="0">
+              <a:buNone/>
+            </a:pPr>
+            <a:r>
+              <a:rPr lang="en-US" sz="1250" b="1" dirty="0">
+                <a:solidFill>
+                  <a:srgbClr val="00357A"/>
+                </a:solidFill>
+                <a:latin typeface="Poppins" pitchFamily="34" charset="0"/>
+                <a:ea typeface="Poppins" pitchFamily="34" charset="-122"/>
+                <a:cs typeface="Poppins" pitchFamily="34" charset="-120"/>
+              </a:rPr>
+              <a:t>Put it back</a:t>
+            </a:r>
+            <a:endParaRPr lang="en-US" sz="1250" dirty="0"/>
+          </a:p>
+        </p:txBody>
+      </p:sp>
+      <p:sp>
+        <p:nvSpPr>
+          <p:cNvPr id="31" name="Text 29"/>
+          <p:cNvSpPr/>
+          <p:nvPr/>
+        </p:nvSpPr>
+        <p:spPr>
+          <a:xfrm>
+            <a:off x="3063240" y="5248656"/>
+            <a:ext cx="8503920" cy="548640"/>
+          </a:xfrm>
+          <a:prstGeom prst="rect">
+            <a:avLst/>
+          </a:prstGeom>
+          <a:noFill/>
+          <a:ln/>
+        </p:spPr>
+        <p:txBody>
+          <a:bodyPr wrap="square" lIns="0" tIns="0" rIns="0" bIns="0" rtlCol="0" anchor="ctr"/>
+          <a:lstStyle/>
+          <a:p>
+            <a:pPr indent="0" marL="0">
+              <a:lnSpc>
+                <a:spcPct val="95000"/>
+              </a:lnSpc>
+              <a:buNone/>
+            </a:pPr>
+            <a:r>
+              <a:rPr lang="en-US" sz="1050" dirty="0">
+                <a:solidFill>
+                  <a:srgbClr val="53565A"/>
+                </a:solidFill>
+                <a:latin typeface="Poppins" pitchFamily="34" charset="0"/>
+                <a:ea typeface="Poppins" pitchFamily="34" charset="-122"/>
+                <a:cs typeface="Poppins" pitchFamily="34" charset="-120"/>
+              </a:rPr>
+              <a:t>Web files return to the dataset data tree or the object store, saved files to decsdata. Files still present on GDEX are left untouched.</a:t>
+            </a:r>
+            <a:endParaRPr lang="en-US" sz="1050" dirty="0"/>
+          </a:p>
+        </p:txBody>
+      </p:sp>
+      <p:sp>
+        <p:nvSpPr>
+          <p:cNvPr id="32" name="Shape 30"/>
+          <p:cNvSpPr/>
+          <p:nvPr/>
+        </p:nvSpPr>
+        <p:spPr>
+          <a:xfrm>
+            <a:off x="457200" y="5907024"/>
+            <a:ext cx="11292840" cy="502920"/>
+          </a:xfrm>
+          <a:prstGeom prst="roundRect">
+            <a:avLst>
+              <a:gd name="adj" fmla="val 14545"/>
+            </a:avLst>
+          </a:prstGeom>
+          <a:solidFill>
+            <a:srgbClr val="011837"/>
+          </a:solidFill>
+          <a:ln/>
+        </p:spPr>
+      </p:sp>
+      <p:sp>
+        <p:nvSpPr>
+          <p:cNvPr id="33" name="Text 31"/>
+          <p:cNvSpPr/>
+          <p:nvPr/>
+        </p:nvSpPr>
+        <p:spPr>
+          <a:xfrm>
+            <a:off x="658368" y="5907024"/>
+            <a:ext cx="10881360" cy="502920"/>
+          </a:xfrm>
+          <a:prstGeom prst="rect">
+            <a:avLst/>
+          </a:prstGeom>
+          <a:noFill/>
+          <a:ln/>
+        </p:spPr>
+        <p:txBody>
+          <a:bodyPr wrap="square" lIns="0" tIns="0" rIns="0" bIns="0" rtlCol="0" anchor="ctr"/>
+          <a:lstStyle/>
+          <a:p>
+            <a:pPr indent="0" marL="0">
+              <a:buNone/>
+            </a:pPr>
+            <a:r>
+              <a:rPr lang="en-US" sz="1150" b="1" dirty="0">
+                <a:solidFill>
+                  <a:srgbClr val="42C0FF"/>
+                </a:solidFill>
+                <a:latin typeface="Poppins" pitchFamily="34" charset="0"/>
+                <a:ea typeface="Poppins" pitchFamily="34" charset="-122"/>
+                <a:cs typeface="Poppins" pitchFamily="34" charset="-120"/>
+              </a:rPr>
+              <a:t>Restores are safe to repeat.  </a:t>
+            </a:r>
+            <a:pPr indent="0" marL="0">
+              <a:buNone/>
+            </a:pPr>
+            <a:r>
+              <a:rPr lang="en-US" sz="1150" dirty="0">
+                <a:solidFill>
+                  <a:srgbClr val="C3D7EE"/>
+                </a:solidFill>
+                <a:latin typeface="Poppins" pitchFamily="34" charset="0"/>
+                <a:ea typeface="Poppins" pitchFamily="34" charset="-122"/>
+                <a:cs typeface="Poppins" pitchFamily="34" charset="-120"/>
+              </a:rPr>
+              <a:t>Anything already on GDEX is skipped, and each restored file is size checked against its GDEXDB record.</a:t>
+            </a:r>
+            <a:endParaRPr lang="en-US" sz="1150" dirty="0"/>
+          </a:p>
+        </p:txBody>
+      </p:sp>
+      <p:sp>
+        <p:nvSpPr>
+          <p:cNvPr id="34" name="Text 32"/>
           <p:cNvSpPr/>
           <p:nvPr/>
         </p:nvSpPr>
@@ -28385,7 +29484,7 @@
             <a:r>
               <a:rPr lang="en-US" sz="950" b="1" dirty="0">
                 <a:solidFill>
-                  <a:srgbClr val="FFFFFF"/>
+                  <a:srgbClr val="00357A"/>
                 </a:solidFill>
                 <a:latin typeface="Poppins" pitchFamily="34" charset="0"/>
                 <a:ea typeface="Poppins" pitchFamily="34" charset="-122"/>
@@ -28399,30 +29498,7 @@
       </p:sp>
       <p:sp>
         <p:nvSpPr>
-          <p:cNvPr id="6" name="Shape 1"/>
-          <p:cNvSpPr/>
-          <p:nvPr/>
-        </p:nvSpPr>
-        <p:spPr>
-          <a:xfrm>
-            <a:off x="612648" y="6437376"/>
-            <a:ext cx="0" cy="201168"/>
-          </a:xfrm>
-          <a:prstGeom prst="line">
-            <a:avLst/>
-          </a:prstGeom>
-          <a:noFill/>
-          <a:ln w="9525">
-            <a:solidFill>
-              <a:srgbClr val="FFFFFF"/>
-            </a:solidFill>
-            <a:prstDash val="solid"/>
-          </a:ln>
-        </p:spPr>
-      </p:sp>
-      <p:sp>
-        <p:nvSpPr>
-          <p:cNvPr id="7" name="Text 2"/>
+          <p:cNvPr id="35" name="Text 33"/>
           <p:cNvSpPr/>
           <p:nvPr/>
         </p:nvSpPr>
@@ -28447,7 +29523,7 @@
             <a:r>
               <a:rPr lang="en-US" sz="950" b="1" dirty="0">
                 <a:solidFill>
-                  <a:srgbClr val="FFFFFF"/>
+                  <a:srgbClr val="00357A"/>
                 </a:solidFill>
                 <a:latin typeface="Poppins" pitchFamily="34" charset="0"/>
                 <a:ea typeface="Poppins" pitchFamily="34" charset="-122"/>
@@ -28456,1086 +29532,6 @@
               <a:t>DSQUASAR  •  QUASAR BACKUP GUIDE</a:t>
             </a:r>
             <a:endParaRPr lang="en-US" sz="950" dirty="0"/>
-          </a:p>
-        </p:txBody>
-      </p:sp>
-      <p:sp>
-        <p:nvSpPr>
-          <p:cNvPr id="8" name="Text 3"/>
-          <p:cNvSpPr/>
-          <p:nvPr/>
-        </p:nvSpPr>
-        <p:spPr>
-          <a:xfrm>
-            <a:off x="1527048" y="1060704"/>
-            <a:ext cx="7315200" cy="320040"/>
-          </a:xfrm>
-          <a:prstGeom prst="rect">
-            <a:avLst/>
-          </a:prstGeom>
-          <a:noFill/>
-          <a:ln/>
-        </p:spPr>
-        <p:txBody>
-          <a:bodyPr wrap="square" lIns="0" tIns="0" rIns="0" bIns="0" rtlCol="0" anchor="ctr"/>
-          <a:lstStyle/>
-          <a:p>
-            <a:pPr indent="0" marL="0">
-              <a:buNone/>
-            </a:pPr>
-            <a:r>
-              <a:rPr lang="en-US" sz="1300" b="1" spc="200" kern="0" dirty="0">
-                <a:solidFill>
-                  <a:srgbClr val="42C0FF"/>
-                </a:solidFill>
-                <a:latin typeface="Poppins" pitchFamily="34" charset="0"/>
-                <a:ea typeface="Poppins" pitchFamily="34" charset="-122"/>
-                <a:cs typeface="Poppins" pitchFamily="34" charset="-120"/>
-              </a:rPr>
-              <a:t>RECAP</a:t>
-            </a:r>
-            <a:endParaRPr lang="en-US" sz="1300" dirty="0"/>
-          </a:p>
-        </p:txBody>
-      </p:sp>
-      <p:sp>
-        <p:nvSpPr>
-          <p:cNvPr id="9" name="Text 4"/>
-          <p:cNvSpPr/>
-          <p:nvPr/>
-        </p:nvSpPr>
-        <p:spPr>
-          <a:xfrm>
-            <a:off x="1527048" y="1408176"/>
-            <a:ext cx="9144000" cy="731520"/>
-          </a:xfrm>
-          <a:prstGeom prst="rect">
-            <a:avLst/>
-          </a:prstGeom>
-          <a:noFill/>
-          <a:ln/>
-        </p:spPr>
-        <p:txBody>
-          <a:bodyPr wrap="square" lIns="0" tIns="0" rIns="0" bIns="0" rtlCol="0" anchor="ctr"/>
-          <a:lstStyle/>
-          <a:p>
-            <a:pPr indent="0" marL="0">
-              <a:buNone/>
-            </a:pPr>
-            <a:r>
-              <a:rPr lang="en-US" sz="4000" b="1" dirty="0">
-                <a:solidFill>
-                  <a:srgbClr val="FFFFFF"/>
-                </a:solidFill>
-                <a:latin typeface="Poppins" pitchFamily="34" charset="0"/>
-                <a:ea typeface="Poppins" pitchFamily="34" charset="-122"/>
-                <a:cs typeface="Poppins" pitchFamily="34" charset="-120"/>
-              </a:rPr>
-              <a:t>Six Things Worth Remembering</a:t>
-            </a:r>
-            <a:endParaRPr lang="en-US" sz="4000" dirty="0"/>
-          </a:p>
-        </p:txBody>
-      </p:sp>
-      <p:sp>
-        <p:nvSpPr>
-          <p:cNvPr id="10" name="Shape 5"/>
-          <p:cNvSpPr/>
-          <p:nvPr/>
-        </p:nvSpPr>
-        <p:spPr>
-          <a:xfrm>
-            <a:off x="822960" y="2450592"/>
-            <a:ext cx="5120640" cy="1170432"/>
-          </a:xfrm>
-          <a:prstGeom prst="roundRect">
-            <a:avLst>
-              <a:gd name="adj" fmla="val 7813"/>
-            </a:avLst>
-          </a:prstGeom>
-          <a:solidFill>
-            <a:srgbClr val="00357A"/>
-          </a:solidFill>
-          <a:ln w="12700">
-            <a:solidFill>
-              <a:srgbClr val="2C6FB8"/>
-            </a:solidFill>
-            <a:prstDash val="solid"/>
-          </a:ln>
-        </p:spPr>
-      </p:sp>
-      <p:sp>
-        <p:nvSpPr>
-          <p:cNvPr id="11" name="Shape 6"/>
-          <p:cNvSpPr/>
-          <p:nvPr/>
-        </p:nvSpPr>
-        <p:spPr>
-          <a:xfrm>
-            <a:off x="1024128" y="2633472"/>
-            <a:ext cx="402336" cy="402336"/>
-          </a:xfrm>
-          <a:prstGeom prst="ellipse">
-            <a:avLst/>
-          </a:prstGeom>
-          <a:solidFill>
-            <a:srgbClr val="42C0FF"/>
-          </a:solidFill>
-          <a:ln/>
-        </p:spPr>
-      </p:sp>
-      <p:sp>
-        <p:nvSpPr>
-          <p:cNvPr id="12" name="Text 7"/>
-          <p:cNvSpPr/>
-          <p:nvPr/>
-        </p:nvSpPr>
-        <p:spPr>
-          <a:xfrm>
-            <a:off x="1024128" y="2633472"/>
-            <a:ext cx="402336" cy="402336"/>
-          </a:xfrm>
-          <a:prstGeom prst="rect">
-            <a:avLst/>
-          </a:prstGeom>
-          <a:noFill/>
-          <a:ln/>
-        </p:spPr>
-        <p:txBody>
-          <a:bodyPr wrap="square" lIns="0" tIns="0" rIns="0" bIns="0" rtlCol="0" anchor="ctr"/>
-          <a:lstStyle/>
-          <a:p>
-            <a:pPr algn="ctr" indent="0" marL="0">
-              <a:buNone/>
-            </a:pPr>
-            <a:r>
-              <a:rPr lang="en-US" sz="1400" b="1" dirty="0">
-                <a:solidFill>
-                  <a:srgbClr val="00357A"/>
-                </a:solidFill>
-                <a:latin typeface="Poppins" pitchFamily="34" charset="0"/>
-                <a:ea typeface="Poppins" pitchFamily="34" charset="-122"/>
-                <a:cs typeface="Poppins" pitchFamily="34" charset="-120"/>
-              </a:rPr>
-              <a:t>1</a:t>
-            </a:r>
-            <a:endParaRPr lang="en-US" sz="1400" dirty="0"/>
-          </a:p>
-        </p:txBody>
-      </p:sp>
-      <p:sp>
-        <p:nvSpPr>
-          <p:cNvPr id="13" name="Text 8"/>
-          <p:cNvSpPr/>
-          <p:nvPr/>
-        </p:nvSpPr>
-        <p:spPr>
-          <a:xfrm>
-            <a:off x="1536192" y="2578608"/>
-            <a:ext cx="4206240" cy="347472"/>
-          </a:xfrm>
-          <a:prstGeom prst="rect">
-            <a:avLst/>
-          </a:prstGeom>
-          <a:noFill/>
-          <a:ln/>
-        </p:spPr>
-        <p:txBody>
-          <a:bodyPr wrap="square" lIns="0" tIns="0" rIns="0" bIns="0" rtlCol="0" anchor="ctr"/>
-          <a:lstStyle/>
-          <a:p>
-            <a:pPr indent="0" marL="0">
-              <a:buNone/>
-            </a:pPr>
-            <a:r>
-              <a:rPr lang="en-US" sz="1300" b="1" dirty="0">
-                <a:solidFill>
-                  <a:srgbClr val="42C0FF"/>
-                </a:solidFill>
-                <a:latin typeface="Poppins" pitchFamily="34" charset="0"/>
-                <a:ea typeface="Poppins" pitchFamily="34" charset="-122"/>
-                <a:cs typeface="Poppins" pitchFamily="34" charset="-120"/>
-              </a:rPr>
-              <a:t>dataset.backflag enrolls</a:t>
-            </a:r>
-            <a:endParaRPr lang="en-US" sz="1300" dirty="0"/>
-          </a:p>
-        </p:txBody>
-      </p:sp>
-      <p:sp>
-        <p:nvSpPr>
-          <p:cNvPr id="14" name="Text 9"/>
-          <p:cNvSpPr/>
-          <p:nvPr/>
-        </p:nvSpPr>
-        <p:spPr>
-          <a:xfrm>
-            <a:off x="1536192" y="2944368"/>
-            <a:ext cx="4206240" cy="585216"/>
-          </a:xfrm>
-          <a:prstGeom prst="rect">
-            <a:avLst/>
-          </a:prstGeom>
-          <a:noFill/>
-          <a:ln/>
-        </p:spPr>
-        <p:txBody>
-          <a:bodyPr wrap="square" lIns="0" tIns="0" rIns="0" bIns="0" rtlCol="0" anchor="t"/>
-          <a:lstStyle/>
-          <a:p>
-            <a:pPr indent="0" marL="0">
-              <a:lnSpc>
-                <a:spcPct val="105000"/>
-              </a:lnSpc>
-              <a:buNone/>
-            </a:pPr>
-            <a:r>
-              <a:rPr lang="en-US" sz="1050" dirty="0">
-                <a:solidFill>
-                  <a:srgbClr val="D5E8FA"/>
-                </a:solidFill>
-                <a:latin typeface="Poppins" pitchFamily="34" charset="0"/>
-                <a:ea typeface="Poppins" pitchFamily="34" charset="-122"/>
-                <a:cs typeface="Poppins" pitchFamily="34" charset="-120"/>
-              </a:rPr>
-              <a:t>Setting that one field puts a dataset under backup; dsgroup.backflag refines it. -t narrows a run, it does not override a flag.</a:t>
-            </a:r>
-            <a:endParaRPr lang="en-US" sz="1050" dirty="0"/>
-          </a:p>
-        </p:txBody>
-      </p:sp>
-      <p:sp>
-        <p:nvSpPr>
-          <p:cNvPr id="15" name="Shape 10"/>
-          <p:cNvSpPr/>
-          <p:nvPr/>
-        </p:nvSpPr>
-        <p:spPr>
-          <a:xfrm>
-            <a:off x="6263640" y="2450592"/>
-            <a:ext cx="5120640" cy="1170432"/>
-          </a:xfrm>
-          <a:prstGeom prst="roundRect">
-            <a:avLst>
-              <a:gd name="adj" fmla="val 7813"/>
-            </a:avLst>
-          </a:prstGeom>
-          <a:solidFill>
-            <a:srgbClr val="00357A"/>
-          </a:solidFill>
-          <a:ln w="12700">
-            <a:solidFill>
-              <a:srgbClr val="2C6FB8"/>
-            </a:solidFill>
-            <a:prstDash val="solid"/>
-          </a:ln>
-        </p:spPr>
-      </p:sp>
-      <p:sp>
-        <p:nvSpPr>
-          <p:cNvPr id="16" name="Shape 11"/>
-          <p:cNvSpPr/>
-          <p:nvPr/>
-        </p:nvSpPr>
-        <p:spPr>
-          <a:xfrm>
-            <a:off x="6464808" y="2633472"/>
-            <a:ext cx="402336" cy="402336"/>
-          </a:xfrm>
-          <a:prstGeom prst="ellipse">
-            <a:avLst/>
-          </a:prstGeom>
-          <a:solidFill>
-            <a:srgbClr val="42C0FF"/>
-          </a:solidFill>
-          <a:ln/>
-        </p:spPr>
-      </p:sp>
-      <p:sp>
-        <p:nvSpPr>
-          <p:cNvPr id="17" name="Text 12"/>
-          <p:cNvSpPr/>
-          <p:nvPr/>
-        </p:nvSpPr>
-        <p:spPr>
-          <a:xfrm>
-            <a:off x="6464808" y="2633472"/>
-            <a:ext cx="402336" cy="402336"/>
-          </a:xfrm>
-          <a:prstGeom prst="rect">
-            <a:avLst/>
-          </a:prstGeom>
-          <a:noFill/>
-          <a:ln/>
-        </p:spPr>
-        <p:txBody>
-          <a:bodyPr wrap="square" lIns="0" tIns="0" rIns="0" bIns="0" rtlCol="0" anchor="ctr"/>
-          <a:lstStyle/>
-          <a:p>
-            <a:pPr algn="ctr" indent="0" marL="0">
-              <a:buNone/>
-            </a:pPr>
-            <a:r>
-              <a:rPr lang="en-US" sz="1400" b="1" dirty="0">
-                <a:solidFill>
-                  <a:srgbClr val="00357A"/>
-                </a:solidFill>
-                <a:latin typeface="Poppins" pitchFamily="34" charset="0"/>
-                <a:ea typeface="Poppins" pitchFamily="34" charset="-122"/>
-                <a:cs typeface="Poppins" pitchFamily="34" charset="-120"/>
-              </a:rPr>
-              <a:t>2</a:t>
-            </a:r>
-            <a:endParaRPr lang="en-US" sz="1400" dirty="0"/>
-          </a:p>
-        </p:txBody>
-      </p:sp>
-      <p:sp>
-        <p:nvSpPr>
-          <p:cNvPr id="18" name="Text 13"/>
-          <p:cNvSpPr/>
-          <p:nvPr/>
-        </p:nvSpPr>
-        <p:spPr>
-          <a:xfrm>
-            <a:off x="6976872" y="2578608"/>
-            <a:ext cx="4206240" cy="347472"/>
-          </a:xfrm>
-          <a:prstGeom prst="rect">
-            <a:avLst/>
-          </a:prstGeom>
-          <a:noFill/>
-          <a:ln/>
-        </p:spPr>
-        <p:txBody>
-          <a:bodyPr wrap="square" lIns="0" tIns="0" rIns="0" bIns="0" rtlCol="0" anchor="ctr"/>
-          <a:lstStyle/>
-          <a:p>
-            <a:pPr indent="0" marL="0">
-              <a:buNone/>
-            </a:pPr>
-            <a:r>
-              <a:rPr lang="en-US" sz="1300" b="1" dirty="0">
-                <a:solidFill>
-                  <a:srgbClr val="42C0FF"/>
-                </a:solidFill>
-                <a:latin typeface="Poppins" pitchFamily="34" charset="0"/>
-                <a:ea typeface="Poppins" pitchFamily="34" charset="-122"/>
-                <a:cs typeface="Poppins" pitchFamily="34" charset="-120"/>
-              </a:rPr>
-              <a:t>-A 3 is the working default</a:t>
-            </a:r>
-            <a:endParaRPr lang="en-US" sz="1300" dirty="0"/>
-          </a:p>
-        </p:txBody>
-      </p:sp>
-      <p:sp>
-        <p:nvSpPr>
-          <p:cNvPr id="19" name="Text 14"/>
-          <p:cNvSpPr/>
-          <p:nvPr/>
-        </p:nvSpPr>
-        <p:spPr>
-          <a:xfrm>
-            <a:off x="6976872" y="2944368"/>
-            <a:ext cx="4206240" cy="585216"/>
-          </a:xfrm>
-          <a:prstGeom prst="rect">
-            <a:avLst/>
-          </a:prstGeom>
-          <a:noFill/>
-          <a:ln/>
-        </p:spPr>
-        <p:txBody>
-          <a:bodyPr wrap="square" lIns="0" tIns="0" rIns="0" bIns="0" rtlCol="0" anchor="t"/>
-          <a:lstStyle/>
-          <a:p>
-            <a:pPr indent="0" marL="0">
-              <a:lnSpc>
-                <a:spcPct val="105000"/>
-              </a:lnSpc>
-              <a:buNone/>
-            </a:pPr>
-            <a:r>
-              <a:rPr lang="en-US" sz="1050" dirty="0">
-                <a:solidFill>
-                  <a:srgbClr val="D5E8FA"/>
-                </a:solidFill>
-                <a:latin typeface="Poppins" pitchFamily="34" charset="0"/>
-                <a:ea typeface="Poppins" pitchFamily="34" charset="-122"/>
-                <a:cs typeface="Poppins" pitchFamily="34" charset="-120"/>
-              </a:rPr>
-              <a:t>Create the input lists and build the tars in one pass. -A 4 ships them. -A 7 does both.</a:t>
-            </a:r>
-            <a:endParaRPr lang="en-US" sz="1050" dirty="0"/>
-          </a:p>
-        </p:txBody>
-      </p:sp>
-      <p:sp>
-        <p:nvSpPr>
-          <p:cNvPr id="20" name="Shape 15"/>
-          <p:cNvSpPr/>
-          <p:nvPr/>
-        </p:nvSpPr>
-        <p:spPr>
-          <a:xfrm>
-            <a:off x="822960" y="3694176"/>
-            <a:ext cx="5120640" cy="1170432"/>
-          </a:xfrm>
-          <a:prstGeom prst="roundRect">
-            <a:avLst>
-              <a:gd name="adj" fmla="val 7813"/>
-            </a:avLst>
-          </a:prstGeom>
-          <a:solidFill>
-            <a:srgbClr val="00357A"/>
-          </a:solidFill>
-          <a:ln w="12700">
-            <a:solidFill>
-              <a:srgbClr val="2C6FB8"/>
-            </a:solidFill>
-            <a:prstDash val="solid"/>
-          </a:ln>
-        </p:spPr>
-      </p:sp>
-      <p:sp>
-        <p:nvSpPr>
-          <p:cNvPr id="21" name="Shape 16"/>
-          <p:cNvSpPr/>
-          <p:nvPr/>
-        </p:nvSpPr>
-        <p:spPr>
-          <a:xfrm>
-            <a:off x="1024128" y="3877056"/>
-            <a:ext cx="402336" cy="402336"/>
-          </a:xfrm>
-          <a:prstGeom prst="ellipse">
-            <a:avLst/>
-          </a:prstGeom>
-          <a:solidFill>
-            <a:srgbClr val="42C0FF"/>
-          </a:solidFill>
-          <a:ln/>
-        </p:spPr>
-      </p:sp>
-      <p:sp>
-        <p:nvSpPr>
-          <p:cNvPr id="22" name="Text 17"/>
-          <p:cNvSpPr/>
-          <p:nvPr/>
-        </p:nvSpPr>
-        <p:spPr>
-          <a:xfrm>
-            <a:off x="1024128" y="3877056"/>
-            <a:ext cx="402336" cy="402336"/>
-          </a:xfrm>
-          <a:prstGeom prst="rect">
-            <a:avLst/>
-          </a:prstGeom>
-          <a:noFill/>
-          <a:ln/>
-        </p:spPr>
-        <p:txBody>
-          <a:bodyPr wrap="square" lIns="0" tIns="0" rIns="0" bIns="0" rtlCol="0" anchor="ctr"/>
-          <a:lstStyle/>
-          <a:p>
-            <a:pPr algn="ctr" indent="0" marL="0">
-              <a:buNone/>
-            </a:pPr>
-            <a:r>
-              <a:rPr lang="en-US" sz="1400" b="1" dirty="0">
-                <a:solidFill>
-                  <a:srgbClr val="00357A"/>
-                </a:solidFill>
-                <a:latin typeface="Poppins" pitchFamily="34" charset="0"/>
-                <a:ea typeface="Poppins" pitchFamily="34" charset="-122"/>
-                <a:cs typeface="Poppins" pitchFamily="34" charset="-120"/>
-              </a:rPr>
-              <a:t>3</a:t>
-            </a:r>
-            <a:endParaRPr lang="en-US" sz="1400" dirty="0"/>
-          </a:p>
-        </p:txBody>
-      </p:sp>
-      <p:sp>
-        <p:nvSpPr>
-          <p:cNvPr id="23" name="Text 18"/>
-          <p:cNvSpPr/>
-          <p:nvPr/>
-        </p:nvSpPr>
-        <p:spPr>
-          <a:xfrm>
-            <a:off x="1536192" y="3822192"/>
-            <a:ext cx="4206240" cy="347472"/>
-          </a:xfrm>
-          <a:prstGeom prst="rect">
-            <a:avLst/>
-          </a:prstGeom>
-          <a:noFill/>
-          <a:ln/>
-        </p:spPr>
-        <p:txBody>
-          <a:bodyPr wrap="square" lIns="0" tIns="0" rIns="0" bIns="0" rtlCol="0" anchor="ctr"/>
-          <a:lstStyle/>
-          <a:p>
-            <a:pPr indent="0" marL="0">
-              <a:buNone/>
-            </a:pPr>
-            <a:r>
-              <a:rPr lang="en-US" sz="1300" b="1" dirty="0">
-                <a:solidFill>
-                  <a:srgbClr val="42C0FF"/>
-                </a:solidFill>
-                <a:latin typeface="Poppins" pitchFamily="34" charset="0"/>
-                <a:ea typeface="Poppins" pitchFamily="34" charset="-122"/>
-                <a:cs typeface="Poppins" pitchFamily="34" charset="-120"/>
-              </a:rPr>
-              <a:t>Status is the whole story</a:t>
-            </a:r>
-            <a:endParaRPr lang="en-US" sz="1300" dirty="0"/>
-          </a:p>
-        </p:txBody>
-      </p:sp>
-      <p:sp>
-        <p:nvSpPr>
-          <p:cNvPr id="24" name="Text 19"/>
-          <p:cNvSpPr/>
-          <p:nvPr/>
-        </p:nvSpPr>
-        <p:spPr>
-          <a:xfrm>
-            <a:off x="1536192" y="4187952"/>
-            <a:ext cx="4206240" cy="585216"/>
-          </a:xfrm>
-          <a:prstGeom prst="rect">
-            <a:avLst/>
-          </a:prstGeom>
-          <a:noFill/>
-          <a:ln/>
-        </p:spPr>
-        <p:txBody>
-          <a:bodyPr wrap="square" lIns="0" tIns="0" rIns="0" bIns="0" rtlCol="0" anchor="t"/>
-          <a:lstStyle/>
-          <a:p>
-            <a:pPr indent="0" marL="0">
-              <a:lnSpc>
-                <a:spcPct val="105000"/>
-              </a:lnSpc>
-              <a:buNone/>
-            </a:pPr>
-            <a:r>
-              <a:rPr lang="en-US" sz="1050" dirty="0">
-                <a:solidFill>
-                  <a:srgbClr val="D5E8FA"/>
-                </a:solidFill>
-                <a:latin typeface="Poppins" pitchFamily="34" charset="0"/>
-                <a:ea typeface="Poppins" pitchFamily="34" charset="-122"/>
-                <a:cs typeface="Poppins" pitchFamily="34" charset="-120"/>
-              </a:rPr>
-              <a:t>N listed, T tarred, A archived. Backwards moves are deliberate and simply requeue the work.</a:t>
-            </a:r>
-            <a:endParaRPr lang="en-US" sz="1050" dirty="0"/>
-          </a:p>
-        </p:txBody>
-      </p:sp>
-      <p:sp>
-        <p:nvSpPr>
-          <p:cNvPr id="25" name="Shape 20"/>
-          <p:cNvSpPr/>
-          <p:nvPr/>
-        </p:nvSpPr>
-        <p:spPr>
-          <a:xfrm>
-            <a:off x="6263640" y="3694176"/>
-            <a:ext cx="5120640" cy="1170432"/>
-          </a:xfrm>
-          <a:prstGeom prst="roundRect">
-            <a:avLst>
-              <a:gd name="adj" fmla="val 7813"/>
-            </a:avLst>
-          </a:prstGeom>
-          <a:solidFill>
-            <a:srgbClr val="00357A"/>
-          </a:solidFill>
-          <a:ln w="12700">
-            <a:solidFill>
-              <a:srgbClr val="2C6FB8"/>
-            </a:solidFill>
-            <a:prstDash val="solid"/>
-          </a:ln>
-        </p:spPr>
-      </p:sp>
-      <p:sp>
-        <p:nvSpPr>
-          <p:cNvPr id="26" name="Shape 21"/>
-          <p:cNvSpPr/>
-          <p:nvPr/>
-        </p:nvSpPr>
-        <p:spPr>
-          <a:xfrm>
-            <a:off x="6464808" y="3877056"/>
-            <a:ext cx="402336" cy="402336"/>
-          </a:xfrm>
-          <a:prstGeom prst="ellipse">
-            <a:avLst/>
-          </a:prstGeom>
-          <a:solidFill>
-            <a:srgbClr val="42C0FF"/>
-          </a:solidFill>
-          <a:ln/>
-        </p:spPr>
-      </p:sp>
-      <p:sp>
-        <p:nvSpPr>
-          <p:cNvPr id="27" name="Text 22"/>
-          <p:cNvSpPr/>
-          <p:nvPr/>
-        </p:nvSpPr>
-        <p:spPr>
-          <a:xfrm>
-            <a:off x="6464808" y="3877056"/>
-            <a:ext cx="402336" cy="402336"/>
-          </a:xfrm>
-          <a:prstGeom prst="rect">
-            <a:avLst/>
-          </a:prstGeom>
-          <a:noFill/>
-          <a:ln/>
-        </p:spPr>
-        <p:txBody>
-          <a:bodyPr wrap="square" lIns="0" tIns="0" rIns="0" bIns="0" rtlCol="0" anchor="ctr"/>
-          <a:lstStyle/>
-          <a:p>
-            <a:pPr algn="ctr" indent="0" marL="0">
-              <a:buNone/>
-            </a:pPr>
-            <a:r>
-              <a:rPr lang="en-US" sz="1400" b="1" dirty="0">
-                <a:solidFill>
-                  <a:srgbClr val="00357A"/>
-                </a:solidFill>
-                <a:latin typeface="Poppins" pitchFamily="34" charset="0"/>
-                <a:ea typeface="Poppins" pitchFamily="34" charset="-122"/>
-                <a:cs typeface="Poppins" pitchFamily="34" charset="-120"/>
-              </a:rPr>
-              <a:t>4</a:t>
-            </a:r>
-            <a:endParaRPr lang="en-US" sz="1400" dirty="0"/>
-          </a:p>
-        </p:txBody>
-      </p:sp>
-      <p:sp>
-        <p:nvSpPr>
-          <p:cNvPr id="28" name="Text 23"/>
-          <p:cNvSpPr/>
-          <p:nvPr/>
-        </p:nvSpPr>
-        <p:spPr>
-          <a:xfrm>
-            <a:off x="6976872" y="3822192"/>
-            <a:ext cx="4206240" cy="347472"/>
-          </a:xfrm>
-          <a:prstGeom prst="rect">
-            <a:avLst/>
-          </a:prstGeom>
-          <a:noFill/>
-          <a:ln/>
-        </p:spPr>
-        <p:txBody>
-          <a:bodyPr wrap="square" lIns="0" tIns="0" rIns="0" bIns="0" rtlCol="0" anchor="ctr"/>
-          <a:lstStyle/>
-          <a:p>
-            <a:pPr indent="0" marL="0">
-              <a:buNone/>
-            </a:pPr>
-            <a:r>
-              <a:rPr lang="en-US" sz="1300" b="1" dirty="0">
-                <a:solidFill>
-                  <a:srgbClr val="42C0FF"/>
-                </a:solidFill>
-                <a:latin typeface="Poppins" pitchFamily="34" charset="0"/>
-                <a:ea typeface="Poppins" pitchFamily="34" charset="-122"/>
-                <a:cs typeface="Poppins" pitchFamily="34" charset="-120"/>
-              </a:rPr>
-              <a:t>Tar size is the economics</a:t>
-            </a:r>
-            <a:endParaRPr lang="en-US" sz="1300" dirty="0"/>
-          </a:p>
-        </p:txBody>
-      </p:sp>
-      <p:sp>
-        <p:nvSpPr>
-          <p:cNvPr id="29" name="Text 24"/>
-          <p:cNvSpPr/>
-          <p:nvPr/>
-        </p:nvSpPr>
-        <p:spPr>
-          <a:xfrm>
-            <a:off x="6976872" y="4187952"/>
-            <a:ext cx="4206240" cy="585216"/>
-          </a:xfrm>
-          <a:prstGeom prst="rect">
-            <a:avLst/>
-          </a:prstGeom>
-          <a:noFill/>
-          <a:ln/>
-        </p:spPr>
-        <p:txBody>
-          <a:bodyPr wrap="square" lIns="0" tIns="0" rIns="0" bIns="0" rtlCol="0" anchor="t"/>
-          <a:lstStyle/>
-          <a:p>
-            <a:pPr indent="0" marL="0">
-              <a:lnSpc>
-                <a:spcPct val="105000"/>
-              </a:lnSpc>
-              <a:buNone/>
-            </a:pPr>
-            <a:r>
-              <a:rPr lang="en-US" sz="1050" dirty="0">
-                <a:solidFill>
-                  <a:srgbClr val="D5E8FA"/>
-                </a:solidFill>
-                <a:latin typeface="Poppins" pitchFamily="34" charset="0"/>
-                <a:ea typeface="Poppins" pitchFamily="34" charset="-122"/>
-                <a:cs typeface="Poppins" pitchFamily="34" charset="-120"/>
-              </a:rPr>
-              <a:t>5 GB target tars batched into 90 GB transfers is what makes tape and Globus efficient.</a:t>
-            </a:r>
-            <a:endParaRPr lang="en-US" sz="1050" dirty="0"/>
-          </a:p>
-        </p:txBody>
-      </p:sp>
-      <p:sp>
-        <p:nvSpPr>
-          <p:cNvPr id="30" name="Shape 25"/>
-          <p:cNvSpPr/>
-          <p:nvPr/>
-        </p:nvSpPr>
-        <p:spPr>
-          <a:xfrm>
-            <a:off x="822960" y="4937760"/>
-            <a:ext cx="5120640" cy="1170432"/>
-          </a:xfrm>
-          <a:prstGeom prst="roundRect">
-            <a:avLst>
-              <a:gd name="adj" fmla="val 7813"/>
-            </a:avLst>
-          </a:prstGeom>
-          <a:solidFill>
-            <a:srgbClr val="00357A"/>
-          </a:solidFill>
-          <a:ln w="12700">
-            <a:solidFill>
-              <a:srgbClr val="2C6FB8"/>
-            </a:solidFill>
-            <a:prstDash val="solid"/>
-          </a:ln>
-        </p:spPr>
-      </p:sp>
-      <p:sp>
-        <p:nvSpPr>
-          <p:cNvPr id="31" name="Shape 26"/>
-          <p:cNvSpPr/>
-          <p:nvPr/>
-        </p:nvSpPr>
-        <p:spPr>
-          <a:xfrm>
-            <a:off x="1024128" y="5120640"/>
-            <a:ext cx="402336" cy="402336"/>
-          </a:xfrm>
-          <a:prstGeom prst="ellipse">
-            <a:avLst/>
-          </a:prstGeom>
-          <a:solidFill>
-            <a:srgbClr val="42C0FF"/>
-          </a:solidFill>
-          <a:ln/>
-        </p:spPr>
-      </p:sp>
-      <p:sp>
-        <p:nvSpPr>
-          <p:cNvPr id="32" name="Text 27"/>
-          <p:cNvSpPr/>
-          <p:nvPr/>
-        </p:nvSpPr>
-        <p:spPr>
-          <a:xfrm>
-            <a:off x="1024128" y="5120640"/>
-            <a:ext cx="402336" cy="402336"/>
-          </a:xfrm>
-          <a:prstGeom prst="rect">
-            <a:avLst/>
-          </a:prstGeom>
-          <a:noFill/>
-          <a:ln/>
-        </p:spPr>
-        <p:txBody>
-          <a:bodyPr wrap="square" lIns="0" tIns="0" rIns="0" bIns="0" rtlCol="0" anchor="ctr"/>
-          <a:lstStyle/>
-          <a:p>
-            <a:pPr algn="ctr" indent="0" marL="0">
-              <a:buNone/>
-            </a:pPr>
-            <a:r>
-              <a:rPr lang="en-US" sz="1400" b="1" dirty="0">
-                <a:solidFill>
-                  <a:srgbClr val="00357A"/>
-                </a:solidFill>
-                <a:latin typeface="Poppins" pitchFamily="34" charset="0"/>
-                <a:ea typeface="Poppins" pitchFamily="34" charset="-122"/>
-                <a:cs typeface="Poppins" pitchFamily="34" charset="-120"/>
-              </a:rPr>
-              <a:t>5</a:t>
-            </a:r>
-            <a:endParaRPr lang="en-US" sz="1400" dirty="0"/>
-          </a:p>
-        </p:txBody>
-      </p:sp>
-      <p:sp>
-        <p:nvSpPr>
-          <p:cNvPr id="33" name="Text 28"/>
-          <p:cNvSpPr/>
-          <p:nvPr/>
-        </p:nvSpPr>
-        <p:spPr>
-          <a:xfrm>
-            <a:off x="1536192" y="5065776"/>
-            <a:ext cx="4206240" cy="347472"/>
-          </a:xfrm>
-          <a:prstGeom prst="rect">
-            <a:avLst/>
-          </a:prstGeom>
-          <a:noFill/>
-          <a:ln/>
-        </p:spPr>
-        <p:txBody>
-          <a:bodyPr wrap="square" lIns="0" tIns="0" rIns="0" bIns="0" rtlCol="0" anchor="ctr"/>
-          <a:lstStyle/>
-          <a:p>
-            <a:pPr indent="0" marL="0">
-              <a:buNone/>
-            </a:pPr>
-            <a:r>
-              <a:rPr lang="en-US" sz="1300" b="1" dirty="0">
-                <a:solidFill>
-                  <a:srgbClr val="42C0FF"/>
-                </a:solidFill>
-                <a:latin typeface="Poppins" pitchFamily="34" charset="0"/>
-                <a:ea typeface="Poppins" pitchFamily="34" charset="-122"/>
-                <a:cs typeface="Poppins" pitchFamily="34" charset="-120"/>
-              </a:rPr>
-              <a:t>The dataset lock is the only lock</a:t>
-            </a:r>
-            <a:endParaRPr lang="en-US" sz="1300" dirty="0"/>
-          </a:p>
-        </p:txBody>
-      </p:sp>
-      <p:sp>
-        <p:nvSpPr>
-          <p:cNvPr id="34" name="Text 29"/>
-          <p:cNvSpPr/>
-          <p:nvPr/>
-        </p:nvSpPr>
-        <p:spPr>
-          <a:xfrm>
-            <a:off x="1536192" y="5431536"/>
-            <a:ext cx="4206240" cy="585216"/>
-          </a:xfrm>
-          <a:prstGeom prst="rect">
-            <a:avLst/>
-          </a:prstGeom>
-          <a:noFill/>
-          <a:ln/>
-        </p:spPr>
-        <p:txBody>
-          <a:bodyPr wrap="square" lIns="0" tIns="0" rIns="0" bIns="0" rtlCol="0" anchor="t"/>
-          <a:lstStyle/>
-          <a:p>
-            <a:pPr indent="0" marL="0">
-              <a:lnSpc>
-                <a:spcPct val="105000"/>
-              </a:lnSpc>
-              <a:buNone/>
-            </a:pPr>
-            <a:r>
-              <a:rPr lang="en-US" sz="1050" dirty="0">
-                <a:solidFill>
-                  <a:srgbClr val="D5E8FA"/>
-                </a:solidFill>
-                <a:latin typeface="Poppins" pitchFamily="34" charset="0"/>
-                <a:ea typeface="Poppins" pitchFamily="34" charset="-122"/>
-                <a:cs typeface="Poppins" pitchFamily="34" charset="-120"/>
-              </a:rPr>
-              <a:t>Everything about concurrency — workers, re-checks, multi-dataset tars — is built on it.</a:t>
-            </a:r>
-            <a:endParaRPr lang="en-US" sz="1050" dirty="0"/>
-          </a:p>
-        </p:txBody>
-      </p:sp>
-      <p:sp>
-        <p:nvSpPr>
-          <p:cNvPr id="35" name="Shape 30"/>
-          <p:cNvSpPr/>
-          <p:nvPr/>
-        </p:nvSpPr>
-        <p:spPr>
-          <a:xfrm>
-            <a:off x="6263640" y="4937760"/>
-            <a:ext cx="5120640" cy="1170432"/>
-          </a:xfrm>
-          <a:prstGeom prst="roundRect">
-            <a:avLst>
-              <a:gd name="adj" fmla="val 7813"/>
-            </a:avLst>
-          </a:prstGeom>
-          <a:solidFill>
-            <a:srgbClr val="00357A"/>
-          </a:solidFill>
-          <a:ln w="12700">
-            <a:solidFill>
-              <a:srgbClr val="2C6FB8"/>
-            </a:solidFill>
-            <a:prstDash val="solid"/>
-          </a:ln>
-        </p:spPr>
-      </p:sp>
-      <p:sp>
-        <p:nvSpPr>
-          <p:cNvPr id="36" name="Shape 31"/>
-          <p:cNvSpPr/>
-          <p:nvPr/>
-        </p:nvSpPr>
-        <p:spPr>
-          <a:xfrm>
-            <a:off x="6464808" y="5120640"/>
-            <a:ext cx="402336" cy="402336"/>
-          </a:xfrm>
-          <a:prstGeom prst="ellipse">
-            <a:avLst/>
-          </a:prstGeom>
-          <a:solidFill>
-            <a:srgbClr val="42C0FF"/>
-          </a:solidFill>
-          <a:ln/>
-        </p:spPr>
-      </p:sp>
-      <p:sp>
-        <p:nvSpPr>
-          <p:cNvPr id="37" name="Text 32"/>
-          <p:cNvSpPr/>
-          <p:nvPr/>
-        </p:nvSpPr>
-        <p:spPr>
-          <a:xfrm>
-            <a:off x="6464808" y="5120640"/>
-            <a:ext cx="402336" cy="402336"/>
-          </a:xfrm>
-          <a:prstGeom prst="rect">
-            <a:avLst/>
-          </a:prstGeom>
-          <a:noFill/>
-          <a:ln/>
-        </p:spPr>
-        <p:txBody>
-          <a:bodyPr wrap="square" lIns="0" tIns="0" rIns="0" bIns="0" rtlCol="0" anchor="ctr"/>
-          <a:lstStyle/>
-          <a:p>
-            <a:pPr algn="ctr" indent="0" marL="0">
-              <a:buNone/>
-            </a:pPr>
-            <a:r>
-              <a:rPr lang="en-US" sz="1400" b="1" dirty="0">
-                <a:solidFill>
-                  <a:srgbClr val="00357A"/>
-                </a:solidFill>
-                <a:latin typeface="Poppins" pitchFamily="34" charset="0"/>
-                <a:ea typeface="Poppins" pitchFamily="34" charset="-122"/>
-                <a:cs typeface="Poppins" pitchFamily="34" charset="-120"/>
-              </a:rPr>
-              <a:t>6</a:t>
-            </a:r>
-            <a:endParaRPr lang="en-US" sz="1400" dirty="0"/>
-          </a:p>
-        </p:txBody>
-      </p:sp>
-      <p:sp>
-        <p:nvSpPr>
-          <p:cNvPr id="38" name="Text 33"/>
-          <p:cNvSpPr/>
-          <p:nvPr/>
-        </p:nvSpPr>
-        <p:spPr>
-          <a:xfrm>
-            <a:off x="6976872" y="5065776"/>
-            <a:ext cx="4206240" cy="347472"/>
-          </a:xfrm>
-          <a:prstGeom prst="rect">
-            <a:avLst/>
-          </a:prstGeom>
-          <a:noFill/>
-          <a:ln/>
-        </p:spPr>
-        <p:txBody>
-          <a:bodyPr wrap="square" lIns="0" tIns="0" rIns="0" bIns="0" rtlCol="0" anchor="ctr"/>
-          <a:lstStyle/>
-          <a:p>
-            <a:pPr indent="0" marL="0">
-              <a:buNone/>
-            </a:pPr>
-            <a:r>
-              <a:rPr lang="en-US" sz="1300" b="1" dirty="0">
-                <a:solidFill>
-                  <a:srgbClr val="42C0FF"/>
-                </a:solidFill>
-                <a:latin typeface="Poppins" pitchFamily="34" charset="0"/>
-                <a:ea typeface="Poppins" pitchFamily="34" charset="-122"/>
-                <a:cs typeface="Poppins" pitchFamily="34" charset="-120"/>
-              </a:rPr>
-              <a:t>Nothing is lost by stopping</a:t>
-            </a:r>
-            <a:endParaRPr lang="en-US" sz="1300" dirty="0"/>
-          </a:p>
-        </p:txBody>
-      </p:sp>
-      <p:sp>
-        <p:nvSpPr>
-          <p:cNvPr id="39" name="Text 34"/>
-          <p:cNvSpPr/>
-          <p:nvPr/>
-        </p:nvSpPr>
-        <p:spPr>
-          <a:xfrm>
-            <a:off x="6976872" y="5431536"/>
-            <a:ext cx="4206240" cy="585216"/>
-          </a:xfrm>
-          <a:prstGeom prst="rect">
-            <a:avLst/>
-          </a:prstGeom>
-          <a:noFill/>
-          <a:ln/>
-        </p:spPr>
-        <p:txBody>
-          <a:bodyPr wrap="square" lIns="0" tIns="0" rIns="0" bIns="0" rtlCol="0" anchor="t"/>
-          <a:lstStyle/>
-          <a:p>
-            <a:pPr indent="0" marL="0">
-              <a:lnSpc>
-                <a:spcPct val="105000"/>
-              </a:lnSpc>
-              <a:buNone/>
-            </a:pPr>
-            <a:r>
-              <a:rPr lang="en-US" sz="1050" dirty="0">
-                <a:solidFill>
-                  <a:srgbClr val="D5E8FA"/>
-                </a:solidFill>
-                <a:latin typeface="Poppins" pitchFamily="34" charset="0"/>
-                <a:ea typeface="Poppins" pitchFamily="34" charset="-122"/>
-                <a:cs typeface="Poppins" pitchFamily="34" charset="-120"/>
-              </a:rPr>
-              <a:t>The 23-hour guard, the retry limit and the resumable statuses mean an interrupted run just continues later.</a:t>
-            </a:r>
-            <a:endParaRPr lang="en-US" sz="1050" dirty="0"/>
           </a:p>
         </p:txBody>
       </p:sp>
@@ -29752,6 +29748,1291 @@
         </p:nvSpPr>
         <p:spPr>
           <a:xfrm>
+            <a:off x="1527048" y="1060704"/>
+            <a:ext cx="7315200" cy="320040"/>
+          </a:xfrm>
+          <a:prstGeom prst="rect">
+            <a:avLst/>
+          </a:prstGeom>
+          <a:noFill/>
+          <a:ln/>
+        </p:spPr>
+        <p:txBody>
+          <a:bodyPr wrap="square" lIns="0" tIns="0" rIns="0" bIns="0" rtlCol="0" anchor="ctr"/>
+          <a:lstStyle/>
+          <a:p>
+            <a:pPr indent="0" marL="0">
+              <a:buNone/>
+            </a:pPr>
+            <a:r>
+              <a:rPr lang="en-US" sz="1300" b="1" spc="200" kern="0" dirty="0">
+                <a:solidFill>
+                  <a:srgbClr val="42C0FF"/>
+                </a:solidFill>
+                <a:latin typeface="Poppins" pitchFamily="34" charset="0"/>
+                <a:ea typeface="Poppins" pitchFamily="34" charset="-122"/>
+                <a:cs typeface="Poppins" pitchFamily="34" charset="-120"/>
+              </a:rPr>
+              <a:t>RECAP</a:t>
+            </a:r>
+            <a:endParaRPr lang="en-US" sz="1300" dirty="0"/>
+          </a:p>
+        </p:txBody>
+      </p:sp>
+      <p:sp>
+        <p:nvSpPr>
+          <p:cNvPr id="9" name="Text 4"/>
+          <p:cNvSpPr/>
+          <p:nvPr/>
+        </p:nvSpPr>
+        <p:spPr>
+          <a:xfrm>
+            <a:off x="1527048" y="1408176"/>
+            <a:ext cx="9144000" cy="731520"/>
+          </a:xfrm>
+          <a:prstGeom prst="rect">
+            <a:avLst/>
+          </a:prstGeom>
+          <a:noFill/>
+          <a:ln/>
+        </p:spPr>
+        <p:txBody>
+          <a:bodyPr wrap="square" lIns="0" tIns="0" rIns="0" bIns="0" rtlCol="0" anchor="ctr"/>
+          <a:lstStyle/>
+          <a:p>
+            <a:pPr indent="0" marL="0">
+              <a:buNone/>
+            </a:pPr>
+            <a:r>
+              <a:rPr lang="en-US" sz="4000" b="1" dirty="0">
+                <a:solidFill>
+                  <a:srgbClr val="FFFFFF"/>
+                </a:solidFill>
+                <a:latin typeface="Poppins" pitchFamily="34" charset="0"/>
+                <a:ea typeface="Poppins" pitchFamily="34" charset="-122"/>
+                <a:cs typeface="Poppins" pitchFamily="34" charset="-120"/>
+              </a:rPr>
+              <a:t>Six Things Worth Remembering</a:t>
+            </a:r>
+            <a:endParaRPr lang="en-US" sz="4000" dirty="0"/>
+          </a:p>
+        </p:txBody>
+      </p:sp>
+      <p:sp>
+        <p:nvSpPr>
+          <p:cNvPr id="10" name="Shape 5"/>
+          <p:cNvSpPr/>
+          <p:nvPr/>
+        </p:nvSpPr>
+        <p:spPr>
+          <a:xfrm>
+            <a:off x="822960" y="2450592"/>
+            <a:ext cx="5120640" cy="1170432"/>
+          </a:xfrm>
+          <a:prstGeom prst="roundRect">
+            <a:avLst>
+              <a:gd name="adj" fmla="val 7813"/>
+            </a:avLst>
+          </a:prstGeom>
+          <a:solidFill>
+            <a:srgbClr val="00357A"/>
+          </a:solidFill>
+          <a:ln w="12700">
+            <a:solidFill>
+              <a:srgbClr val="2C6FB8"/>
+            </a:solidFill>
+            <a:prstDash val="solid"/>
+          </a:ln>
+        </p:spPr>
+      </p:sp>
+      <p:sp>
+        <p:nvSpPr>
+          <p:cNvPr id="11" name="Shape 6"/>
+          <p:cNvSpPr/>
+          <p:nvPr/>
+        </p:nvSpPr>
+        <p:spPr>
+          <a:xfrm>
+            <a:off x="1024128" y="2633472"/>
+            <a:ext cx="402336" cy="402336"/>
+          </a:xfrm>
+          <a:prstGeom prst="ellipse">
+            <a:avLst/>
+          </a:prstGeom>
+          <a:solidFill>
+            <a:srgbClr val="42C0FF"/>
+          </a:solidFill>
+          <a:ln/>
+        </p:spPr>
+      </p:sp>
+      <p:sp>
+        <p:nvSpPr>
+          <p:cNvPr id="12" name="Text 7"/>
+          <p:cNvSpPr/>
+          <p:nvPr/>
+        </p:nvSpPr>
+        <p:spPr>
+          <a:xfrm>
+            <a:off x="1024128" y="2633472"/>
+            <a:ext cx="402336" cy="402336"/>
+          </a:xfrm>
+          <a:prstGeom prst="rect">
+            <a:avLst/>
+          </a:prstGeom>
+          <a:noFill/>
+          <a:ln/>
+        </p:spPr>
+        <p:txBody>
+          <a:bodyPr wrap="square" lIns="0" tIns="0" rIns="0" bIns="0" rtlCol="0" anchor="ctr"/>
+          <a:lstStyle/>
+          <a:p>
+            <a:pPr algn="ctr" indent="0" marL="0">
+              <a:buNone/>
+            </a:pPr>
+            <a:r>
+              <a:rPr lang="en-US" sz="1400" b="1" dirty="0">
+                <a:solidFill>
+                  <a:srgbClr val="00357A"/>
+                </a:solidFill>
+                <a:latin typeface="Poppins" pitchFamily="34" charset="0"/>
+                <a:ea typeface="Poppins" pitchFamily="34" charset="-122"/>
+                <a:cs typeface="Poppins" pitchFamily="34" charset="-120"/>
+              </a:rPr>
+              <a:t>1</a:t>
+            </a:r>
+            <a:endParaRPr lang="en-US" sz="1400" dirty="0"/>
+          </a:p>
+        </p:txBody>
+      </p:sp>
+      <p:sp>
+        <p:nvSpPr>
+          <p:cNvPr id="13" name="Text 8"/>
+          <p:cNvSpPr/>
+          <p:nvPr/>
+        </p:nvSpPr>
+        <p:spPr>
+          <a:xfrm>
+            <a:off x="1536192" y="2578608"/>
+            <a:ext cx="4206240" cy="347472"/>
+          </a:xfrm>
+          <a:prstGeom prst="rect">
+            <a:avLst/>
+          </a:prstGeom>
+          <a:noFill/>
+          <a:ln/>
+        </p:spPr>
+        <p:txBody>
+          <a:bodyPr wrap="square" lIns="0" tIns="0" rIns="0" bIns="0" rtlCol="0" anchor="ctr"/>
+          <a:lstStyle/>
+          <a:p>
+            <a:pPr indent="0" marL="0">
+              <a:buNone/>
+            </a:pPr>
+            <a:r>
+              <a:rPr lang="en-US" sz="1300" b="1" dirty="0">
+                <a:solidFill>
+                  <a:srgbClr val="42C0FF"/>
+                </a:solidFill>
+                <a:latin typeface="Poppins" pitchFamily="34" charset="0"/>
+                <a:ea typeface="Poppins" pitchFamily="34" charset="-122"/>
+                <a:cs typeface="Poppins" pitchFamily="34" charset="-120"/>
+              </a:rPr>
+              <a:t>dataset.backflag enrolls</a:t>
+            </a:r>
+            <a:endParaRPr lang="en-US" sz="1300" dirty="0"/>
+          </a:p>
+        </p:txBody>
+      </p:sp>
+      <p:sp>
+        <p:nvSpPr>
+          <p:cNvPr id="14" name="Text 9"/>
+          <p:cNvSpPr/>
+          <p:nvPr/>
+        </p:nvSpPr>
+        <p:spPr>
+          <a:xfrm>
+            <a:off x="1536192" y="2944368"/>
+            <a:ext cx="4206240" cy="585216"/>
+          </a:xfrm>
+          <a:prstGeom prst="rect">
+            <a:avLst/>
+          </a:prstGeom>
+          <a:noFill/>
+          <a:ln/>
+        </p:spPr>
+        <p:txBody>
+          <a:bodyPr wrap="square" lIns="0" tIns="0" rIns="0" bIns="0" rtlCol="0" anchor="t"/>
+          <a:lstStyle/>
+          <a:p>
+            <a:pPr indent="0" marL="0">
+              <a:lnSpc>
+                <a:spcPct val="105000"/>
+              </a:lnSpc>
+              <a:buNone/>
+            </a:pPr>
+            <a:r>
+              <a:rPr lang="en-US" sz="1050" dirty="0">
+                <a:solidFill>
+                  <a:srgbClr val="D5E8FA"/>
+                </a:solidFill>
+                <a:latin typeface="Poppins" pitchFamily="34" charset="0"/>
+                <a:ea typeface="Poppins" pitchFamily="34" charset="-122"/>
+                <a:cs typeface="Poppins" pitchFamily="34" charset="-120"/>
+              </a:rPr>
+              <a:t>Setting that one field puts a dataset under backup; dsgroup.backflag refines it. -t narrows a run, it does not override a flag.</a:t>
+            </a:r>
+            <a:endParaRPr lang="en-US" sz="1050" dirty="0"/>
+          </a:p>
+        </p:txBody>
+      </p:sp>
+      <p:sp>
+        <p:nvSpPr>
+          <p:cNvPr id="15" name="Shape 10"/>
+          <p:cNvSpPr/>
+          <p:nvPr/>
+        </p:nvSpPr>
+        <p:spPr>
+          <a:xfrm>
+            <a:off x="6263640" y="2450592"/>
+            <a:ext cx="5120640" cy="1170432"/>
+          </a:xfrm>
+          <a:prstGeom prst="roundRect">
+            <a:avLst>
+              <a:gd name="adj" fmla="val 7813"/>
+            </a:avLst>
+          </a:prstGeom>
+          <a:solidFill>
+            <a:srgbClr val="00357A"/>
+          </a:solidFill>
+          <a:ln w="12700">
+            <a:solidFill>
+              <a:srgbClr val="2C6FB8"/>
+            </a:solidFill>
+            <a:prstDash val="solid"/>
+          </a:ln>
+        </p:spPr>
+      </p:sp>
+      <p:sp>
+        <p:nvSpPr>
+          <p:cNvPr id="16" name="Shape 11"/>
+          <p:cNvSpPr/>
+          <p:nvPr/>
+        </p:nvSpPr>
+        <p:spPr>
+          <a:xfrm>
+            <a:off x="6464808" y="2633472"/>
+            <a:ext cx="402336" cy="402336"/>
+          </a:xfrm>
+          <a:prstGeom prst="ellipse">
+            <a:avLst/>
+          </a:prstGeom>
+          <a:solidFill>
+            <a:srgbClr val="42C0FF"/>
+          </a:solidFill>
+          <a:ln/>
+        </p:spPr>
+      </p:sp>
+      <p:sp>
+        <p:nvSpPr>
+          <p:cNvPr id="17" name="Text 12"/>
+          <p:cNvSpPr/>
+          <p:nvPr/>
+        </p:nvSpPr>
+        <p:spPr>
+          <a:xfrm>
+            <a:off x="6464808" y="2633472"/>
+            <a:ext cx="402336" cy="402336"/>
+          </a:xfrm>
+          <a:prstGeom prst="rect">
+            <a:avLst/>
+          </a:prstGeom>
+          <a:noFill/>
+          <a:ln/>
+        </p:spPr>
+        <p:txBody>
+          <a:bodyPr wrap="square" lIns="0" tIns="0" rIns="0" bIns="0" rtlCol="0" anchor="ctr"/>
+          <a:lstStyle/>
+          <a:p>
+            <a:pPr algn="ctr" indent="0" marL="0">
+              <a:buNone/>
+            </a:pPr>
+            <a:r>
+              <a:rPr lang="en-US" sz="1400" b="1" dirty="0">
+                <a:solidFill>
+                  <a:srgbClr val="00357A"/>
+                </a:solidFill>
+                <a:latin typeface="Poppins" pitchFamily="34" charset="0"/>
+                <a:ea typeface="Poppins" pitchFamily="34" charset="-122"/>
+                <a:cs typeface="Poppins" pitchFamily="34" charset="-120"/>
+              </a:rPr>
+              <a:t>2</a:t>
+            </a:r>
+            <a:endParaRPr lang="en-US" sz="1400" dirty="0"/>
+          </a:p>
+        </p:txBody>
+      </p:sp>
+      <p:sp>
+        <p:nvSpPr>
+          <p:cNvPr id="18" name="Text 13"/>
+          <p:cNvSpPr/>
+          <p:nvPr/>
+        </p:nvSpPr>
+        <p:spPr>
+          <a:xfrm>
+            <a:off x="6976872" y="2578608"/>
+            <a:ext cx="4206240" cy="347472"/>
+          </a:xfrm>
+          <a:prstGeom prst="rect">
+            <a:avLst/>
+          </a:prstGeom>
+          <a:noFill/>
+          <a:ln/>
+        </p:spPr>
+        <p:txBody>
+          <a:bodyPr wrap="square" lIns="0" tIns="0" rIns="0" bIns="0" rtlCol="0" anchor="ctr"/>
+          <a:lstStyle/>
+          <a:p>
+            <a:pPr indent="0" marL="0">
+              <a:buNone/>
+            </a:pPr>
+            <a:r>
+              <a:rPr lang="en-US" sz="1300" b="1" dirty="0">
+                <a:solidFill>
+                  <a:srgbClr val="42C0FF"/>
+                </a:solidFill>
+                <a:latin typeface="Poppins" pitchFamily="34" charset="0"/>
+                <a:ea typeface="Poppins" pitchFamily="34" charset="-122"/>
+                <a:cs typeface="Poppins" pitchFamily="34" charset="-120"/>
+              </a:rPr>
+              <a:t>-A 3 is the working default</a:t>
+            </a:r>
+            <a:endParaRPr lang="en-US" sz="1300" dirty="0"/>
+          </a:p>
+        </p:txBody>
+      </p:sp>
+      <p:sp>
+        <p:nvSpPr>
+          <p:cNvPr id="19" name="Text 14"/>
+          <p:cNvSpPr/>
+          <p:nvPr/>
+        </p:nvSpPr>
+        <p:spPr>
+          <a:xfrm>
+            <a:off x="6976872" y="2944368"/>
+            <a:ext cx="4206240" cy="585216"/>
+          </a:xfrm>
+          <a:prstGeom prst="rect">
+            <a:avLst/>
+          </a:prstGeom>
+          <a:noFill/>
+          <a:ln/>
+        </p:spPr>
+        <p:txBody>
+          <a:bodyPr wrap="square" lIns="0" tIns="0" rIns="0" bIns="0" rtlCol="0" anchor="t"/>
+          <a:lstStyle/>
+          <a:p>
+            <a:pPr indent="0" marL="0">
+              <a:lnSpc>
+                <a:spcPct val="105000"/>
+              </a:lnSpc>
+              <a:buNone/>
+            </a:pPr>
+            <a:r>
+              <a:rPr lang="en-US" sz="1050" dirty="0">
+                <a:solidFill>
+                  <a:srgbClr val="D5E8FA"/>
+                </a:solidFill>
+                <a:latin typeface="Poppins" pitchFamily="34" charset="0"/>
+                <a:ea typeface="Poppins" pitchFamily="34" charset="-122"/>
+                <a:cs typeface="Poppins" pitchFamily="34" charset="-120"/>
+              </a:rPr>
+              <a:t>Create the input lists and build the tars in one pass. -A 4 ships them. -A 7 does both.</a:t>
+            </a:r>
+            <a:endParaRPr lang="en-US" sz="1050" dirty="0"/>
+          </a:p>
+        </p:txBody>
+      </p:sp>
+      <p:sp>
+        <p:nvSpPr>
+          <p:cNvPr id="20" name="Shape 15"/>
+          <p:cNvSpPr/>
+          <p:nvPr/>
+        </p:nvSpPr>
+        <p:spPr>
+          <a:xfrm>
+            <a:off x="822960" y="3694176"/>
+            <a:ext cx="5120640" cy="1170432"/>
+          </a:xfrm>
+          <a:prstGeom prst="roundRect">
+            <a:avLst>
+              <a:gd name="adj" fmla="val 7813"/>
+            </a:avLst>
+          </a:prstGeom>
+          <a:solidFill>
+            <a:srgbClr val="00357A"/>
+          </a:solidFill>
+          <a:ln w="12700">
+            <a:solidFill>
+              <a:srgbClr val="2C6FB8"/>
+            </a:solidFill>
+            <a:prstDash val="solid"/>
+          </a:ln>
+        </p:spPr>
+      </p:sp>
+      <p:sp>
+        <p:nvSpPr>
+          <p:cNvPr id="21" name="Shape 16"/>
+          <p:cNvSpPr/>
+          <p:nvPr/>
+        </p:nvSpPr>
+        <p:spPr>
+          <a:xfrm>
+            <a:off x="1024128" y="3877056"/>
+            <a:ext cx="402336" cy="402336"/>
+          </a:xfrm>
+          <a:prstGeom prst="ellipse">
+            <a:avLst/>
+          </a:prstGeom>
+          <a:solidFill>
+            <a:srgbClr val="42C0FF"/>
+          </a:solidFill>
+          <a:ln/>
+        </p:spPr>
+      </p:sp>
+      <p:sp>
+        <p:nvSpPr>
+          <p:cNvPr id="22" name="Text 17"/>
+          <p:cNvSpPr/>
+          <p:nvPr/>
+        </p:nvSpPr>
+        <p:spPr>
+          <a:xfrm>
+            <a:off x="1024128" y="3877056"/>
+            <a:ext cx="402336" cy="402336"/>
+          </a:xfrm>
+          <a:prstGeom prst="rect">
+            <a:avLst/>
+          </a:prstGeom>
+          <a:noFill/>
+          <a:ln/>
+        </p:spPr>
+        <p:txBody>
+          <a:bodyPr wrap="square" lIns="0" tIns="0" rIns="0" bIns="0" rtlCol="0" anchor="ctr"/>
+          <a:lstStyle/>
+          <a:p>
+            <a:pPr algn="ctr" indent="0" marL="0">
+              <a:buNone/>
+            </a:pPr>
+            <a:r>
+              <a:rPr lang="en-US" sz="1400" b="1" dirty="0">
+                <a:solidFill>
+                  <a:srgbClr val="00357A"/>
+                </a:solidFill>
+                <a:latin typeface="Poppins" pitchFamily="34" charset="0"/>
+                <a:ea typeface="Poppins" pitchFamily="34" charset="-122"/>
+                <a:cs typeface="Poppins" pitchFamily="34" charset="-120"/>
+              </a:rPr>
+              <a:t>3</a:t>
+            </a:r>
+            <a:endParaRPr lang="en-US" sz="1400" dirty="0"/>
+          </a:p>
+        </p:txBody>
+      </p:sp>
+      <p:sp>
+        <p:nvSpPr>
+          <p:cNvPr id="23" name="Text 18"/>
+          <p:cNvSpPr/>
+          <p:nvPr/>
+        </p:nvSpPr>
+        <p:spPr>
+          <a:xfrm>
+            <a:off x="1536192" y="3822192"/>
+            <a:ext cx="4206240" cy="347472"/>
+          </a:xfrm>
+          <a:prstGeom prst="rect">
+            <a:avLst/>
+          </a:prstGeom>
+          <a:noFill/>
+          <a:ln/>
+        </p:spPr>
+        <p:txBody>
+          <a:bodyPr wrap="square" lIns="0" tIns="0" rIns="0" bIns="0" rtlCol="0" anchor="ctr"/>
+          <a:lstStyle/>
+          <a:p>
+            <a:pPr indent="0" marL="0">
+              <a:buNone/>
+            </a:pPr>
+            <a:r>
+              <a:rPr lang="en-US" sz="1300" b="1" dirty="0">
+                <a:solidFill>
+                  <a:srgbClr val="42C0FF"/>
+                </a:solidFill>
+                <a:latin typeface="Poppins" pitchFamily="34" charset="0"/>
+                <a:ea typeface="Poppins" pitchFamily="34" charset="-122"/>
+                <a:cs typeface="Poppins" pitchFamily="34" charset="-120"/>
+              </a:rPr>
+              <a:t>Status is the whole story</a:t>
+            </a:r>
+            <a:endParaRPr lang="en-US" sz="1300" dirty="0"/>
+          </a:p>
+        </p:txBody>
+      </p:sp>
+      <p:sp>
+        <p:nvSpPr>
+          <p:cNvPr id="24" name="Text 19"/>
+          <p:cNvSpPr/>
+          <p:nvPr/>
+        </p:nvSpPr>
+        <p:spPr>
+          <a:xfrm>
+            <a:off x="1536192" y="4187952"/>
+            <a:ext cx="4206240" cy="585216"/>
+          </a:xfrm>
+          <a:prstGeom prst="rect">
+            <a:avLst/>
+          </a:prstGeom>
+          <a:noFill/>
+          <a:ln/>
+        </p:spPr>
+        <p:txBody>
+          <a:bodyPr wrap="square" lIns="0" tIns="0" rIns="0" bIns="0" rtlCol="0" anchor="t"/>
+          <a:lstStyle/>
+          <a:p>
+            <a:pPr indent="0" marL="0">
+              <a:lnSpc>
+                <a:spcPct val="105000"/>
+              </a:lnSpc>
+              <a:buNone/>
+            </a:pPr>
+            <a:r>
+              <a:rPr lang="en-US" sz="1050" dirty="0">
+                <a:solidFill>
+                  <a:srgbClr val="D5E8FA"/>
+                </a:solidFill>
+                <a:latin typeface="Poppins" pitchFamily="34" charset="0"/>
+                <a:ea typeface="Poppins" pitchFamily="34" charset="-122"/>
+                <a:cs typeface="Poppins" pitchFamily="34" charset="-120"/>
+              </a:rPr>
+              <a:t>N listed, T tarred, A archived. Backwards moves are deliberate and simply requeue the work.</a:t>
+            </a:r>
+            <a:endParaRPr lang="en-US" sz="1050" dirty="0"/>
+          </a:p>
+        </p:txBody>
+      </p:sp>
+      <p:sp>
+        <p:nvSpPr>
+          <p:cNvPr id="25" name="Shape 20"/>
+          <p:cNvSpPr/>
+          <p:nvPr/>
+        </p:nvSpPr>
+        <p:spPr>
+          <a:xfrm>
+            <a:off x="6263640" y="3694176"/>
+            <a:ext cx="5120640" cy="1170432"/>
+          </a:xfrm>
+          <a:prstGeom prst="roundRect">
+            <a:avLst>
+              <a:gd name="adj" fmla="val 7813"/>
+            </a:avLst>
+          </a:prstGeom>
+          <a:solidFill>
+            <a:srgbClr val="00357A"/>
+          </a:solidFill>
+          <a:ln w="12700">
+            <a:solidFill>
+              <a:srgbClr val="2C6FB8"/>
+            </a:solidFill>
+            <a:prstDash val="solid"/>
+          </a:ln>
+        </p:spPr>
+      </p:sp>
+      <p:sp>
+        <p:nvSpPr>
+          <p:cNvPr id="26" name="Shape 21"/>
+          <p:cNvSpPr/>
+          <p:nvPr/>
+        </p:nvSpPr>
+        <p:spPr>
+          <a:xfrm>
+            <a:off x="6464808" y="3877056"/>
+            <a:ext cx="402336" cy="402336"/>
+          </a:xfrm>
+          <a:prstGeom prst="ellipse">
+            <a:avLst/>
+          </a:prstGeom>
+          <a:solidFill>
+            <a:srgbClr val="42C0FF"/>
+          </a:solidFill>
+          <a:ln/>
+        </p:spPr>
+      </p:sp>
+      <p:sp>
+        <p:nvSpPr>
+          <p:cNvPr id="27" name="Text 22"/>
+          <p:cNvSpPr/>
+          <p:nvPr/>
+        </p:nvSpPr>
+        <p:spPr>
+          <a:xfrm>
+            <a:off x="6464808" y="3877056"/>
+            <a:ext cx="402336" cy="402336"/>
+          </a:xfrm>
+          <a:prstGeom prst="rect">
+            <a:avLst/>
+          </a:prstGeom>
+          <a:noFill/>
+          <a:ln/>
+        </p:spPr>
+        <p:txBody>
+          <a:bodyPr wrap="square" lIns="0" tIns="0" rIns="0" bIns="0" rtlCol="0" anchor="ctr"/>
+          <a:lstStyle/>
+          <a:p>
+            <a:pPr algn="ctr" indent="0" marL="0">
+              <a:buNone/>
+            </a:pPr>
+            <a:r>
+              <a:rPr lang="en-US" sz="1400" b="1" dirty="0">
+                <a:solidFill>
+                  <a:srgbClr val="00357A"/>
+                </a:solidFill>
+                <a:latin typeface="Poppins" pitchFamily="34" charset="0"/>
+                <a:ea typeface="Poppins" pitchFamily="34" charset="-122"/>
+                <a:cs typeface="Poppins" pitchFamily="34" charset="-120"/>
+              </a:rPr>
+              <a:t>4</a:t>
+            </a:r>
+            <a:endParaRPr lang="en-US" sz="1400" dirty="0"/>
+          </a:p>
+        </p:txBody>
+      </p:sp>
+      <p:sp>
+        <p:nvSpPr>
+          <p:cNvPr id="28" name="Text 23"/>
+          <p:cNvSpPr/>
+          <p:nvPr/>
+        </p:nvSpPr>
+        <p:spPr>
+          <a:xfrm>
+            <a:off x="6976872" y="3822192"/>
+            <a:ext cx="4206240" cy="347472"/>
+          </a:xfrm>
+          <a:prstGeom prst="rect">
+            <a:avLst/>
+          </a:prstGeom>
+          <a:noFill/>
+          <a:ln/>
+        </p:spPr>
+        <p:txBody>
+          <a:bodyPr wrap="square" lIns="0" tIns="0" rIns="0" bIns="0" rtlCol="0" anchor="ctr"/>
+          <a:lstStyle/>
+          <a:p>
+            <a:pPr indent="0" marL="0">
+              <a:buNone/>
+            </a:pPr>
+            <a:r>
+              <a:rPr lang="en-US" sz="1300" b="1" dirty="0">
+                <a:solidFill>
+                  <a:srgbClr val="42C0FF"/>
+                </a:solidFill>
+                <a:latin typeface="Poppins" pitchFamily="34" charset="0"/>
+                <a:ea typeface="Poppins" pitchFamily="34" charset="-122"/>
+                <a:cs typeface="Poppins" pitchFamily="34" charset="-120"/>
+              </a:rPr>
+              <a:t>Tar size is the economics</a:t>
+            </a:r>
+            <a:endParaRPr lang="en-US" sz="1300" dirty="0"/>
+          </a:p>
+        </p:txBody>
+      </p:sp>
+      <p:sp>
+        <p:nvSpPr>
+          <p:cNvPr id="29" name="Text 24"/>
+          <p:cNvSpPr/>
+          <p:nvPr/>
+        </p:nvSpPr>
+        <p:spPr>
+          <a:xfrm>
+            <a:off x="6976872" y="4187952"/>
+            <a:ext cx="4206240" cy="585216"/>
+          </a:xfrm>
+          <a:prstGeom prst="rect">
+            <a:avLst/>
+          </a:prstGeom>
+          <a:noFill/>
+          <a:ln/>
+        </p:spPr>
+        <p:txBody>
+          <a:bodyPr wrap="square" lIns="0" tIns="0" rIns="0" bIns="0" rtlCol="0" anchor="t"/>
+          <a:lstStyle/>
+          <a:p>
+            <a:pPr indent="0" marL="0">
+              <a:lnSpc>
+                <a:spcPct val="105000"/>
+              </a:lnSpc>
+              <a:buNone/>
+            </a:pPr>
+            <a:r>
+              <a:rPr lang="en-US" sz="1050" dirty="0">
+                <a:solidFill>
+                  <a:srgbClr val="D5E8FA"/>
+                </a:solidFill>
+                <a:latin typeface="Poppins" pitchFamily="34" charset="0"/>
+                <a:ea typeface="Poppins" pitchFamily="34" charset="-122"/>
+                <a:cs typeface="Poppins" pitchFamily="34" charset="-120"/>
+              </a:rPr>
+              <a:t>5 GB target tars batched into 90 GB transfers is what makes tape and Globus efficient.</a:t>
+            </a:r>
+            <a:endParaRPr lang="en-US" sz="1050" dirty="0"/>
+          </a:p>
+        </p:txBody>
+      </p:sp>
+      <p:sp>
+        <p:nvSpPr>
+          <p:cNvPr id="30" name="Shape 25"/>
+          <p:cNvSpPr/>
+          <p:nvPr/>
+        </p:nvSpPr>
+        <p:spPr>
+          <a:xfrm>
+            <a:off x="822960" y="4937760"/>
+            <a:ext cx="5120640" cy="1170432"/>
+          </a:xfrm>
+          <a:prstGeom prst="roundRect">
+            <a:avLst>
+              <a:gd name="adj" fmla="val 7813"/>
+            </a:avLst>
+          </a:prstGeom>
+          <a:solidFill>
+            <a:srgbClr val="00357A"/>
+          </a:solidFill>
+          <a:ln w="12700">
+            <a:solidFill>
+              <a:srgbClr val="2C6FB8"/>
+            </a:solidFill>
+            <a:prstDash val="solid"/>
+          </a:ln>
+        </p:spPr>
+      </p:sp>
+      <p:sp>
+        <p:nvSpPr>
+          <p:cNvPr id="31" name="Shape 26"/>
+          <p:cNvSpPr/>
+          <p:nvPr/>
+        </p:nvSpPr>
+        <p:spPr>
+          <a:xfrm>
+            <a:off x="1024128" y="5120640"/>
+            <a:ext cx="402336" cy="402336"/>
+          </a:xfrm>
+          <a:prstGeom prst="ellipse">
+            <a:avLst/>
+          </a:prstGeom>
+          <a:solidFill>
+            <a:srgbClr val="42C0FF"/>
+          </a:solidFill>
+          <a:ln/>
+        </p:spPr>
+      </p:sp>
+      <p:sp>
+        <p:nvSpPr>
+          <p:cNvPr id="32" name="Text 27"/>
+          <p:cNvSpPr/>
+          <p:nvPr/>
+        </p:nvSpPr>
+        <p:spPr>
+          <a:xfrm>
+            <a:off x="1024128" y="5120640"/>
+            <a:ext cx="402336" cy="402336"/>
+          </a:xfrm>
+          <a:prstGeom prst="rect">
+            <a:avLst/>
+          </a:prstGeom>
+          <a:noFill/>
+          <a:ln/>
+        </p:spPr>
+        <p:txBody>
+          <a:bodyPr wrap="square" lIns="0" tIns="0" rIns="0" bIns="0" rtlCol="0" anchor="ctr"/>
+          <a:lstStyle/>
+          <a:p>
+            <a:pPr algn="ctr" indent="0" marL="0">
+              <a:buNone/>
+            </a:pPr>
+            <a:r>
+              <a:rPr lang="en-US" sz="1400" b="1" dirty="0">
+                <a:solidFill>
+                  <a:srgbClr val="00357A"/>
+                </a:solidFill>
+                <a:latin typeface="Poppins" pitchFamily="34" charset="0"/>
+                <a:ea typeface="Poppins" pitchFamily="34" charset="-122"/>
+                <a:cs typeface="Poppins" pitchFamily="34" charset="-120"/>
+              </a:rPr>
+              <a:t>5</a:t>
+            </a:r>
+            <a:endParaRPr lang="en-US" sz="1400" dirty="0"/>
+          </a:p>
+        </p:txBody>
+      </p:sp>
+      <p:sp>
+        <p:nvSpPr>
+          <p:cNvPr id="33" name="Text 28"/>
+          <p:cNvSpPr/>
+          <p:nvPr/>
+        </p:nvSpPr>
+        <p:spPr>
+          <a:xfrm>
+            <a:off x="1536192" y="5065776"/>
+            <a:ext cx="4206240" cy="347472"/>
+          </a:xfrm>
+          <a:prstGeom prst="rect">
+            <a:avLst/>
+          </a:prstGeom>
+          <a:noFill/>
+          <a:ln/>
+        </p:spPr>
+        <p:txBody>
+          <a:bodyPr wrap="square" lIns="0" tIns="0" rIns="0" bIns="0" rtlCol="0" anchor="ctr"/>
+          <a:lstStyle/>
+          <a:p>
+            <a:pPr indent="0" marL="0">
+              <a:buNone/>
+            </a:pPr>
+            <a:r>
+              <a:rPr lang="en-US" sz="1300" b="1" dirty="0">
+                <a:solidFill>
+                  <a:srgbClr val="42C0FF"/>
+                </a:solidFill>
+                <a:latin typeface="Poppins" pitchFamily="34" charset="0"/>
+                <a:ea typeface="Poppins" pitchFamily="34" charset="-122"/>
+                <a:cs typeface="Poppins" pitchFamily="34" charset="-120"/>
+              </a:rPr>
+              <a:t>The dataset lock is the only lock</a:t>
+            </a:r>
+            <a:endParaRPr lang="en-US" sz="1300" dirty="0"/>
+          </a:p>
+        </p:txBody>
+      </p:sp>
+      <p:sp>
+        <p:nvSpPr>
+          <p:cNvPr id="34" name="Text 29"/>
+          <p:cNvSpPr/>
+          <p:nvPr/>
+        </p:nvSpPr>
+        <p:spPr>
+          <a:xfrm>
+            <a:off x="1536192" y="5431536"/>
+            <a:ext cx="4206240" cy="585216"/>
+          </a:xfrm>
+          <a:prstGeom prst="rect">
+            <a:avLst/>
+          </a:prstGeom>
+          <a:noFill/>
+          <a:ln/>
+        </p:spPr>
+        <p:txBody>
+          <a:bodyPr wrap="square" lIns="0" tIns="0" rIns="0" bIns="0" rtlCol="0" anchor="t"/>
+          <a:lstStyle/>
+          <a:p>
+            <a:pPr indent="0" marL="0">
+              <a:lnSpc>
+                <a:spcPct val="105000"/>
+              </a:lnSpc>
+              <a:buNone/>
+            </a:pPr>
+            <a:r>
+              <a:rPr lang="en-US" sz="1050" dirty="0">
+                <a:solidFill>
+                  <a:srgbClr val="D5E8FA"/>
+                </a:solidFill>
+                <a:latin typeface="Poppins" pitchFamily="34" charset="0"/>
+                <a:ea typeface="Poppins" pitchFamily="34" charset="-122"/>
+                <a:cs typeface="Poppins" pitchFamily="34" charset="-120"/>
+              </a:rPr>
+              <a:t>Everything about concurrency — workers, re-checks, multi-dataset tars — is built on it.</a:t>
+            </a:r>
+            <a:endParaRPr lang="en-US" sz="1050" dirty="0"/>
+          </a:p>
+        </p:txBody>
+      </p:sp>
+      <p:sp>
+        <p:nvSpPr>
+          <p:cNvPr id="35" name="Shape 30"/>
+          <p:cNvSpPr/>
+          <p:nvPr/>
+        </p:nvSpPr>
+        <p:spPr>
+          <a:xfrm>
+            <a:off x="6263640" y="4937760"/>
+            <a:ext cx="5120640" cy="1170432"/>
+          </a:xfrm>
+          <a:prstGeom prst="roundRect">
+            <a:avLst>
+              <a:gd name="adj" fmla="val 7813"/>
+            </a:avLst>
+          </a:prstGeom>
+          <a:solidFill>
+            <a:srgbClr val="00357A"/>
+          </a:solidFill>
+          <a:ln w="12700">
+            <a:solidFill>
+              <a:srgbClr val="2C6FB8"/>
+            </a:solidFill>
+            <a:prstDash val="solid"/>
+          </a:ln>
+        </p:spPr>
+      </p:sp>
+      <p:sp>
+        <p:nvSpPr>
+          <p:cNvPr id="36" name="Shape 31"/>
+          <p:cNvSpPr/>
+          <p:nvPr/>
+        </p:nvSpPr>
+        <p:spPr>
+          <a:xfrm>
+            <a:off x="6464808" y="5120640"/>
+            <a:ext cx="402336" cy="402336"/>
+          </a:xfrm>
+          <a:prstGeom prst="ellipse">
+            <a:avLst/>
+          </a:prstGeom>
+          <a:solidFill>
+            <a:srgbClr val="42C0FF"/>
+          </a:solidFill>
+          <a:ln/>
+        </p:spPr>
+      </p:sp>
+      <p:sp>
+        <p:nvSpPr>
+          <p:cNvPr id="37" name="Text 32"/>
+          <p:cNvSpPr/>
+          <p:nvPr/>
+        </p:nvSpPr>
+        <p:spPr>
+          <a:xfrm>
+            <a:off x="6464808" y="5120640"/>
+            <a:ext cx="402336" cy="402336"/>
+          </a:xfrm>
+          <a:prstGeom prst="rect">
+            <a:avLst/>
+          </a:prstGeom>
+          <a:noFill/>
+          <a:ln/>
+        </p:spPr>
+        <p:txBody>
+          <a:bodyPr wrap="square" lIns="0" tIns="0" rIns="0" bIns="0" rtlCol="0" anchor="ctr"/>
+          <a:lstStyle/>
+          <a:p>
+            <a:pPr algn="ctr" indent="0" marL="0">
+              <a:buNone/>
+            </a:pPr>
+            <a:r>
+              <a:rPr lang="en-US" sz="1400" b="1" dirty="0">
+                <a:solidFill>
+                  <a:srgbClr val="00357A"/>
+                </a:solidFill>
+                <a:latin typeface="Poppins" pitchFamily="34" charset="0"/>
+                <a:ea typeface="Poppins" pitchFamily="34" charset="-122"/>
+                <a:cs typeface="Poppins" pitchFamily="34" charset="-120"/>
+              </a:rPr>
+              <a:t>6</a:t>
+            </a:r>
+            <a:endParaRPr lang="en-US" sz="1400" dirty="0"/>
+          </a:p>
+        </p:txBody>
+      </p:sp>
+      <p:sp>
+        <p:nvSpPr>
+          <p:cNvPr id="38" name="Text 33"/>
+          <p:cNvSpPr/>
+          <p:nvPr/>
+        </p:nvSpPr>
+        <p:spPr>
+          <a:xfrm>
+            <a:off x="6976872" y="5065776"/>
+            <a:ext cx="4206240" cy="347472"/>
+          </a:xfrm>
+          <a:prstGeom prst="rect">
+            <a:avLst/>
+          </a:prstGeom>
+          <a:noFill/>
+          <a:ln/>
+        </p:spPr>
+        <p:txBody>
+          <a:bodyPr wrap="square" lIns="0" tIns="0" rIns="0" bIns="0" rtlCol="0" anchor="ctr"/>
+          <a:lstStyle/>
+          <a:p>
+            <a:pPr indent="0" marL="0">
+              <a:buNone/>
+            </a:pPr>
+            <a:r>
+              <a:rPr lang="en-US" sz="1300" b="1" dirty="0">
+                <a:solidFill>
+                  <a:srgbClr val="42C0FF"/>
+                </a:solidFill>
+                <a:latin typeface="Poppins" pitchFamily="34" charset="0"/>
+                <a:ea typeface="Poppins" pitchFamily="34" charset="-122"/>
+                <a:cs typeface="Poppins" pitchFamily="34" charset="-120"/>
+              </a:rPr>
+              <a:t>Nothing is lost by stopping</a:t>
+            </a:r>
+            <a:endParaRPr lang="en-US" sz="1300" dirty="0"/>
+          </a:p>
+        </p:txBody>
+      </p:sp>
+      <p:sp>
+        <p:nvSpPr>
+          <p:cNvPr id="39" name="Text 34"/>
+          <p:cNvSpPr/>
+          <p:nvPr/>
+        </p:nvSpPr>
+        <p:spPr>
+          <a:xfrm>
+            <a:off x="6976872" y="5431536"/>
+            <a:ext cx="4206240" cy="585216"/>
+          </a:xfrm>
+          <a:prstGeom prst="rect">
+            <a:avLst/>
+          </a:prstGeom>
+          <a:noFill/>
+          <a:ln/>
+        </p:spPr>
+        <p:txBody>
+          <a:bodyPr wrap="square" lIns="0" tIns="0" rIns="0" bIns="0" rtlCol="0" anchor="t"/>
+          <a:lstStyle/>
+          <a:p>
+            <a:pPr indent="0" marL="0">
+              <a:lnSpc>
+                <a:spcPct val="105000"/>
+              </a:lnSpc>
+              <a:buNone/>
+            </a:pPr>
+            <a:r>
+              <a:rPr lang="en-US" sz="1050" dirty="0">
+                <a:solidFill>
+                  <a:srgbClr val="D5E8FA"/>
+                </a:solidFill>
+                <a:latin typeface="Poppins" pitchFamily="34" charset="0"/>
+                <a:ea typeface="Poppins" pitchFamily="34" charset="-122"/>
+                <a:cs typeface="Poppins" pitchFamily="34" charset="-120"/>
+              </a:rPr>
+              <a:t>The 23-hour guard, the retry limit and the resumable statuses mean an interrupted run just continues later.</a:t>
+            </a:r>
+            <a:endParaRPr lang="en-US" sz="1050" dirty="0"/>
+          </a:p>
+        </p:txBody>
+      </p:sp>
+    </p:spTree>
+  </p:cSld>
+  <p:clrMapOvr>
+    <a:masterClrMapping/>
+  </p:clrMapOvr>
+</p:sld>
+</file>
+
+<file path=ppt/slides/slide28.xml><?xml version="1.0" encoding="utf-8"?>
+<p:sld xmlns:a="http://schemas.openxmlformats.org/drawingml/2006/main" xmlns:r="http://schemas.openxmlformats.org/officeDocument/2006/relationships" xmlns:p="http://schemas.openxmlformats.org/presentationml/2006/main">
+  <p:cSld name="Slide 28">
+    <p:bg>
+      <p:bgPr>
+        <a:solidFill>
+          <a:srgbClr val="0057C2"/>
+        </a:solidFill>
+      </p:bgPr>
+    </p:bg>
+    <p:spTree>
+      <p:nvGrpSpPr>
+        <p:cNvPr id="1" name=""/>
+        <p:cNvGrpSpPr/>
+        <p:nvPr/>
+      </p:nvGrpSpPr>
+      <p:grpSpPr>
+        <a:xfrm>
+          <a:off x="0" y="0"/>
+          <a:ext cx="0" cy="0"/>
+          <a:chOff x="0" y="0"/>
+          <a:chExt cx="0" cy="0"/>
+        </a:xfrm>
+      </p:grpSpPr>
+      <p:pic>
+        <p:nvPicPr>
+          <p:cNvPr id="2" name="Image 0" descr="interior_bg.png">    </p:cNvPr>
+          <p:cNvPicPr>
+            <a:picLocks noChangeAspect="1"/>
+          </p:cNvPicPr>
+          <p:nvPr/>
+        </p:nvPicPr>
+        <p:blipFill>
+          <a:blip r:embed="rId1"/>
+          <a:stretch>
+            <a:fillRect/>
+          </a:stretch>
+        </p:blipFill>
+        <p:spPr>
+          <a:xfrm>
+            <a:off x="0" y="0"/>
+            <a:ext cx="12191695" cy="6858000"/>
+          </a:xfrm>
+          <a:prstGeom prst="rect">
+            <a:avLst/>
+          </a:prstGeom>
+        </p:spPr>
+      </p:pic>
+      <p:pic>
+        <p:nvPicPr>
+          <p:cNvPr id="3" name="Image 1" descr="gdex_lockup_white.png">    </p:cNvPr>
+          <p:cNvPicPr>
+            <a:picLocks noChangeAspect="1"/>
+          </p:cNvPicPr>
+          <p:nvPr/>
+        </p:nvPicPr>
+        <p:blipFill>
+          <a:blip r:embed="rId2"/>
+          <a:stretch>
+            <a:fillRect/>
+          </a:stretch>
+        </p:blipFill>
+        <p:spPr>
+          <a:xfrm>
+            <a:off x="612648" y="365760"/>
+            <a:ext cx="1024128" cy="521208"/>
+          </a:xfrm>
+          <a:prstGeom prst="rect">
+            <a:avLst/>
+          </a:prstGeom>
+        </p:spPr>
+      </p:pic>
+      <p:pic>
+        <p:nvPicPr>
+          <p:cNvPr id="4" name="Image 2" descr="nsf_ncar_logo_white.png">    </p:cNvPr>
+          <p:cNvPicPr>
+            <a:picLocks noChangeAspect="1"/>
+          </p:cNvPicPr>
+          <p:nvPr/>
+        </p:nvPicPr>
+        <p:blipFill>
+          <a:blip r:embed="rId3"/>
+          <a:stretch>
+            <a:fillRect/>
+          </a:stretch>
+        </p:blipFill>
+        <p:spPr>
+          <a:xfrm>
+            <a:off x="9683496" y="393192"/>
+            <a:ext cx="1892808" cy="521208"/>
+          </a:xfrm>
+          <a:prstGeom prst="rect">
+            <a:avLst/>
+          </a:prstGeom>
+        </p:spPr>
+      </p:pic>
+      <p:sp>
+        <p:nvSpPr>
+          <p:cNvPr id="5" name="Text 0"/>
+          <p:cNvSpPr/>
+          <p:nvPr/>
+        </p:nvSpPr>
+        <p:spPr>
+          <a:xfrm>
+            <a:off x="256032" y="6446520"/>
+            <a:ext cx="365760" cy="274320"/>
+          </a:xfrm>
+          <a:prstGeom prst="rect">
+            <a:avLst/>
+          </a:prstGeom>
+          <a:noFill/>
+          <a:ln/>
+        </p:spPr>
+        <p:txBody>
+          <a:bodyPr wrap="square" lIns="0" tIns="0" rIns="0" bIns="0" rtlCol="0" anchor="ctr"/>
+          <a:lstStyle/>
+          <a:p>
+            <a:pPr indent="0" marL="0">
+              <a:buNone/>
+            </a:pPr>
+            <a:r>
+              <a:rPr lang="en-US" sz="950" b="1" dirty="0">
+                <a:solidFill>
+                  <a:srgbClr val="FFFFFF"/>
+                </a:solidFill>
+                <a:latin typeface="Poppins" pitchFamily="34" charset="0"/>
+                <a:ea typeface="Poppins" pitchFamily="34" charset="-122"/>
+                <a:cs typeface="Poppins" pitchFamily="34" charset="-120"/>
+              </a:rPr>
+              <a:t>27</a:t>
+            </a:r>
+            <a:endParaRPr lang="en-US" sz="950" dirty="0"/>
+          </a:p>
+        </p:txBody>
+      </p:sp>
+      <p:sp>
+        <p:nvSpPr>
+          <p:cNvPr id="6" name="Shape 1"/>
+          <p:cNvSpPr/>
+          <p:nvPr/>
+        </p:nvSpPr>
+        <p:spPr>
+          <a:xfrm>
+            <a:off x="612648" y="6437376"/>
+            <a:ext cx="0" cy="201168"/>
+          </a:xfrm>
+          <a:prstGeom prst="line">
+            <a:avLst/>
+          </a:prstGeom>
+          <a:noFill/>
+          <a:ln w="9525">
+            <a:solidFill>
+              <a:srgbClr val="FFFFFF"/>
+            </a:solidFill>
+            <a:prstDash val="solid"/>
+          </a:ln>
+        </p:spPr>
+      </p:sp>
+      <p:sp>
+        <p:nvSpPr>
+          <p:cNvPr id="7" name="Text 2"/>
+          <p:cNvSpPr/>
+          <p:nvPr/>
+        </p:nvSpPr>
+        <p:spPr>
+          <a:xfrm>
+            <a:off x="786384" y="6446520"/>
+            <a:ext cx="5486400" cy="274320"/>
+          </a:xfrm>
+          <a:prstGeom prst="rect">
+            <a:avLst/>
+          </a:prstGeom>
+          <a:noFill/>
+          <a:ln/>
+        </p:spPr>
+        <p:txBody>
+          <a:bodyPr wrap="square" lIns="0" tIns="0" rIns="0" bIns="0" rtlCol="0" anchor="ctr"/>
+          <a:lstStyle/>
+          <a:p>
+            <a:pPr indent="0" marL="0">
+              <a:buNone/>
+            </a:pPr>
+            <a:r>
+              <a:rPr lang="en-US" sz="950" b="1" dirty="0">
+                <a:solidFill>
+                  <a:srgbClr val="FFFFFF"/>
+                </a:solidFill>
+                <a:latin typeface="Poppins" pitchFamily="34" charset="0"/>
+                <a:ea typeface="Poppins" pitchFamily="34" charset="-122"/>
+                <a:cs typeface="Poppins" pitchFamily="34" charset="-120"/>
+              </a:rPr>
+              <a:t>DSQUASAR  •  QUASAR BACKUP GUIDE</a:t>
+            </a:r>
+            <a:endParaRPr lang="en-US" sz="950" dirty="0"/>
+          </a:p>
+        </p:txBody>
+      </p:sp>
+      <p:sp>
+        <p:nvSpPr>
+          <p:cNvPr id="8" name="Text 3"/>
+          <p:cNvSpPr/>
+          <p:nvPr/>
+        </p:nvSpPr>
+        <p:spPr>
+          <a:xfrm>
             <a:off x="1527048" y="1078992"/>
             <a:ext cx="9144000" cy="2743200"/>
           </a:xfrm>
@@ -34443,7 +35724,7 @@
                 <a:ea typeface="Poppins" pitchFamily="34" charset="-122"/>
                 <a:cs typeface="Poppins" pitchFamily="34" charset="-120"/>
               </a:rPr>
-              <a:t>Which end points. -B Backup only, -D Backup + Drdata. Default: both.</a:t>
+              <a:t>A filter, not an override. -B keeps single copy datasets, -D keeps two copy ones. Default: each dataset follows its own flag.</a:t>
             </a:r>
             <a:endParaRPr lang="en-US" sz="1200" dirty="0"/>
           </a:p>
